--- a/docs/RUDP_Presentation_with_notes.pptx
+++ b/docs/RUDP_Presentation_with_notes.pptx
@@ -37,9 +37,10 @@
     <p:sldId id="285" r:id="rId31"/>
     <p:sldId id="286" r:id="rId32"/>
     <p:sldId id="287" r:id="rId33"/>
+    <p:sldId id="288" r:id="rId34"/>
   </p:sldIdLst>
   <p:notesMasterIdLst>
-    <p:notesMasterId r:id="rId34"/>
+    <p:notesMasterId r:id="rId35"/>
   </p:notesMasterIdLst>
   <p:sldSz cx="12192000" cy="6858000"/>
   <p:notesSz cx="6858000" cy="12192000"/>
@@ -833,24 +834,19 @@
           <a:lstStyle/>
           <a:p>
             <a:r>
-              <a:t>Time: 0:20</a:t>
+              <a:t>[0:20] Good morning ma'am. We are Harshavardhan, Rohit and Shloak.</a:t>
             </a:r>
           </a:p>
           <a:p/>
           <a:p>
             <a:r>
-              <a:t>- Good morning ma'am. We are Harshavardhan, Rohit and Shloak.</a:t>
-            </a:r>
-          </a:p>
-          <a:p>
-            <a:r>
-              <a:t>- Our project is Smart-RUDP: a reliable transport protocol we built in C on top of UDP, plus a controller that learns how fast to send.</a:t>
+              <a:t>Our project is Smart-RUDP: a reliable transport protocol we built in C on top of UDP, plus a controller that learns how fast to send.</a:t>
             </a:r>
           </a:p>
           <a:p/>
           <a:p>
             <a:r>
-              <a:t>IF ASKED: Say the three names and the GitHub link once, then move on.</a:t>
+              <a:t>Likely question: Say the three names and the GitHub link once, then move on.</a:t>
             </a:r>
           </a:p>
         </p:txBody>
@@ -936,24 +932,19 @@
           <a:lstStyle/>
           <a:p>
             <a:r>
-              <a:t>Time: 0:40</a:t>
+              <a:t>[0:40] 62 of 62 packets were delivered at every loss level from 0 to 40 percent.</a:t>
             </a:r>
           </a:p>
           <a:p/>
           <a:p>
             <a:r>
-              <a:t>- 62 of 62 packets were delivered at every loss level from 0 to 40 percent.</a:t>
-            </a:r>
-          </a:p>
-          <a:p>
-            <a:r>
-              <a:t>- Higher loss costs time and retransmissions, never correctness.</a:t>
+              <a:t>Higher loss costs time and retransmissions, never correctness.</a:t>
             </a:r>
           </a:p>
           <a:p/>
           <a:p>
             <a:r>
-              <a:t>IF ASKED: Q: Single runs? A: Yes, the original benchmark ran each level once. Smart-RUDP evaluation uses 6 runs per scenario.</a:t>
+              <a:t>Likely question: Q: Single runs? A: Yes, the original benchmark ran each level once. Smart-RUDP evaluation uses 6 runs per scenario.</a:t>
             </a:r>
           </a:p>
         </p:txBody>
@@ -1039,34 +1030,31 @@
           <a:lstStyle/>
           <a:p>
             <a:r>
-              <a:t>Time: 0:40</a:t>
+              <a:t>[0:40] Server stuck after a killed client: it hung 15.5 s; fix was to accept SYN in any state.</a:t>
             </a:r>
           </a:p>
           <a:p/>
           <a:p>
             <a:r>
-              <a:t>- Server stuck after a killed client: it hung 15.5 s; fix was to accept SYN in any state.</a:t>
-            </a:r>
-          </a:p>
-          <a:p>
-            <a:r>
-              <a:t>- A leftover netem rule distorted results; we now check tc qdisc before each test.</a:t>
-            </a:r>
-          </a:p>
-          <a:p>
-            <a:r>
-              <a:t>- Windows Wireshark saw nothing: capture inside WSL.</a:t>
-            </a:r>
-          </a:p>
-          <a:p>
-            <a:r>
-              <a:t>- Benchmark script portability: replaced date and grep tricks with awk and sed.</a:t>
+              <a:t>A leftover netem rule distorted results; we now check tc qdisc before each test.</a:t>
             </a:r>
           </a:p>
           <a:p/>
           <a:p>
             <a:r>
-              <a:t>IF ASKED: Say these quickly: it shows real debugging, which is what separates a project from a lab.</a:t>
+              <a:t>Windows Wireshark saw nothing: capture inside WSL.</a:t>
+            </a:r>
+          </a:p>
+          <a:p/>
+          <a:p>
+            <a:r>
+              <a:t>Benchmark script portability: replaced date and grep tricks with awk and sed.</a:t>
+            </a:r>
+          </a:p>
+          <a:p/>
+          <a:p>
+            <a:r>
+              <a:t>Likely question: Say these quickly: it shows real debugging, which is what separates a project from a lab.</a:t>
             </a:r>
           </a:p>
         </p:txBody>
@@ -1152,34 +1140,31 @@
           <a:lstStyle/>
           <a:p>
             <a:r>
-              <a:t>Time: 0:30</a:t>
+              <a:t>[0:30] Jacobson and Karels 1988 is the origin of AIMD; Chiu and Jain 1989 explains why it converges fairly.</a:t>
             </a:r>
           </a:p>
           <a:p/>
           <a:p>
             <a:r>
-              <a:t>- Jacobson and Karels 1988 is the origin of AIMD; Chiu and Jain 1989 explains why it converges fairly.</a:t>
-            </a:r>
-          </a:p>
-          <a:p>
-            <a:r>
-              <a:t>- RFC 5681 is the standard; CUBIC is future work; QUIC and RFC 9000 are reliable transport over UDP in production.</a:t>
-            </a:r>
-          </a:p>
-          <a:p>
-            <a:r>
-              <a:t>- The AI part comes from Midhula and Arun Raj Kumar (2024) and Cao et al. (2023, DRLFcc): deep reinforcement learning for congestion control. Smart-RUDP applies the same idea with a smaller tabular Q-learning agent.</a:t>
-            </a:r>
-          </a:p>
-          <a:p>
-            <a:r>
-              <a:t>- Key researcher: Van Jacobson.</a:t>
+              <a:t>RFC 5681 is the standard; CUBIC is future work; QUIC and RFC 9000 are reliable transport over UDP in production.</a:t>
             </a:r>
           </a:p>
           <a:p/>
           <a:p>
             <a:r>
-              <a:t>IF ASKED: Q: Why AIMD? A: Chiu and Jain show it converges to a fair share. Q: Are those papers deep RL and yours is not? A: Yes; we used a lookup table, which is simpler and inspectable.</a:t>
+              <a:t>The AI part comes from Midhula and Arun Raj Kumar (2024) and Cao et al. (2023, DRLFcc): deep reinforcement learning for congestion control. Smart-RUDP applies the same idea with a smaller tabular Q-learning agent.</a:t>
+            </a:r>
+          </a:p>
+          <a:p/>
+          <a:p>
+            <a:r>
+              <a:t>Key researcher: Van Jacobson.</a:t>
+            </a:r>
+          </a:p>
+          <a:p/>
+          <a:p>
+            <a:r>
+              <a:t>Likely question: Q: Why AIMD? A: Chiu and Jain show it converges to a fair share. Q: Are those papers deep RL and yours is not? A: Yes; we used a lookup table, which is simpler and inspectable.</a:t>
             </a:r>
           </a:p>
         </p:txBody>
@@ -1265,29 +1250,25 @@
           <a:lstStyle/>
           <a:p>
             <a:r>
-              <a:t>Time: 0:50</a:t>
+              <a:t>[0:50] Four routers, OSPF area 0: R1, R2, R3 form a triangle and R4 is a branch.</a:t>
             </a:r>
           </a:p>
           <a:p/>
           <a:p>
             <a:r>
-              <a:t>- Four routers, OSPF area 0: R1, R2, R3 form a triangle and R4 is a branch.</a:t>
-            </a:r>
-          </a:p>
-          <a:p>
-            <a:r>
-              <a:t>- Two VLANs with router-on-a-stick, DHCP on R1 and R4, and an access list blocking student to staff.</a:t>
-            </a:r>
-          </a:p>
-          <a:p>
-            <a:r>
-              <a:t>- Server LAN is metric 2 via R3; branch is metric 3 via R2. Failover: shutting R1 Gi0/2 still gave 70 of 71 pings, rerouted via R2.</a:t>
+              <a:t>Two VLANs with router-on-a-stick, DHCP on R1 and R4, and an access list blocking student to staff.</a:t>
             </a:r>
           </a:p>
           <a:p/>
           <a:p>
             <a:r>
-              <a:t>IF ASKED: Q: Does RUDP run inside Packet Tracer? A: No, it cannot run C. Packet Tracer validates the network design; protocol is validated on one machine plus Wireshark.</a:t>
+              <a:t>Server LAN is metric 2 via R3; branch is metric 3 via R2. Failover: shutting R1 Gi0/2 still gave 70 of 71 pings, rerouted via R2.</a:t>
+            </a:r>
+          </a:p>
+          <a:p/>
+          <a:p>
+            <a:r>
+              <a:t>Likely question: Q: Does RUDP run inside Packet Tracer? A: No, it cannot run C. Packet Tracer validates the network design; protocol is validated on one machine plus Wireshark.</a:t>
             </a:r>
           </a:p>
         </p:txBody>
@@ -1373,19 +1354,13 @@
           <a:lstStyle/>
           <a:p>
             <a:r>
-              <a:t>Time: 0:40</a:t>
+              <a:t>[0:40] Left: OSPF routes on R1 with the metrics. Middle: the link-failure test, 70 of 71 pings. Right: the ACL, where the student gets destination unreachable to staff but the server is still reachable (TTL 126).</a:t>
             </a:r>
           </a:p>
           <a:p/>
           <a:p>
             <a:r>
-              <a:t>- Left: OSPF routes on R1 with the metrics. Middle: the link-failure test, 70 of 71 pings. Right: the ACL, where the student gets destination unreachable to staff but the server is still reachable (TTL 126).</a:t>
-            </a:r>
-          </a:p>
-          <a:p/>
-          <a:p>
-            <a:r>
-              <a:t>IF ASKED: If asked to show it live: have the .pkt file open and follow Demo_Steps.txt.</a:t>
+              <a:t>Likely question: If asked to show it live: have the .pkt file open and follow Demo_Steps.txt.</a:t>
             </a:r>
           </a:p>
         </p:txBody>
@@ -1471,29 +1446,25 @@
           <a:lstStyle/>
           <a:p>
             <a:r>
-              <a:t>Time: 0:50</a:t>
+              <a:t>[0:50] Q-learning with 80 states (RTT ratio, loss fraction, window size), sampled once per RTT.</a:t>
             </a:r>
           </a:p>
           <a:p/>
           <a:p>
             <a:r>
-              <a:t>- Q-learning with 80 states (RTT ratio, loss fraction, window size), sampled once per RTT.</a:t>
-            </a:r>
-          </a:p>
-          <a:p>
-            <a:r>
-              <a:t>- Five actions: multiply the window by 0.5, 0.85, 1.0, 1.15 or 1.5.</a:t>
-            </a:r>
-          </a:p>
-          <a:p>
-            <a:r>
-              <a:t>- Reward: throughput gained, minus delay growth, minus retransmissions. Same Go-Back-N reliability; only the window policy changes. Paths are emulated in the program: 5G-like, lossy wireless, satellite-like.</a:t>
+              <a:t>Five actions: multiply the window by 0.5, 0.85, 1.0, 1.15 or 1.5.</a:t>
             </a:r>
           </a:p>
           <a:p/>
           <a:p>
             <a:r>
-              <a:t>IF ASKED: Q: Is it really learning? A: Yes, 40 training episodes; the learning-curve figure shows it. It is small and tabular with limited training.</a:t>
+              <a:t>Reward: throughput gained, minus delay growth, minus retransmissions. Same Go-Back-N reliability; only the window policy changes. Paths are emulated in the program: 5G-like, lossy wireless, satellite-like.</a:t>
+            </a:r>
+          </a:p>
+          <a:p/>
+          <a:p>
+            <a:r>
+              <a:t>Likely question: Q: Is it really learning? A: Yes, 40 training episodes; the learning-curve figure shows it. It is small and tabular with limited training.</a:t>
             </a:r>
           </a:p>
         </p:txBody>
@@ -1579,44 +1550,43 @@
           <a:lstStyle/>
           <a:p>
             <a:r>
-              <a:t>Time: 1:00</a:t>
+              <a:t>[1:00] This is the agent itself. Left: rl_cc.h, 73 lines of C. The state is 80 buckets of RTT ratio, loss and window size.</a:t>
             </a:r>
           </a:p>
           <a:p/>
           <a:p>
             <a:r>
-              <a:t>- This is the agent itself. Left: rl_cc.h, 73 lines of C. The state is 80 buckets of RTT ratio, loss and window size.</a:t>
-            </a:r>
-          </a:p>
-          <a:p>
-            <a:r>
-              <a:t>- choose picks one of five window multipliers, usually the best, sometimes random so it keeps exploring.</a:t>
-            </a:r>
-          </a:p>
-          <a:p>
-            <a:r>
-              <a:t>- update is the Q-learning rule: move the value of the action we took toward the reward plus the best value of the next state.</a:t>
-            </a:r>
-          </a:p>
-          <a:p>
-            <a:r>
-              <a:t>- Right: the loop in smart_client.c. Once per RTT it computes the reward, throughput minus delay growth minus loss, updates the table, picks the next action and scales the window.</a:t>
-            </a:r>
-          </a:p>
-          <a:p>
-            <a:r>
-              <a:t>- The code on the slide is simplified; the real files are in the repo.</a:t>
-            </a:r>
-          </a:p>
-          <a:p>
-            <a:r>
-              <a:t>- We also built a deep version: web/dqn.py is a small neural network, two hidden layers of 32, trained with DQN in the same simulator. It reads continuous inputs instead of buckets.</a:t>
+              <a:t>choose picks one of five window multipliers, usually the best, sometimes random so it keeps exploring.</a:t>
             </a:r>
           </a:p>
           <a:p/>
           <a:p>
             <a:r>
-              <a:t>IF ASKED: Q: Is this deep RL? A: The C agent is tabular. The chat also has a deep agent, a small DQN in numpy (5-32-32-5). Q: Does deep beat the table? A: Modestly: 3.20 s vs 3.73 s mean on 48 unseen paths, faster on 19, slower on 6. Q: Any problem? A: Training is seed-sensitive: 1 of 4 seeds failed, so we select on validation paths. It is simulated and not in the C code. Q: Where is it trained? A: web/train.py for the chat, the smart client trains online for the main experiments; table in results/q_chat.txt.</a:t>
+              <a:t>update is the Q-learning rule: move the value of the action we took toward the reward plus the best value of the next state.</a:t>
+            </a:r>
+          </a:p>
+          <a:p/>
+          <a:p>
+            <a:r>
+              <a:t>Right: the loop in smart_client.c. Once per RTT it computes the reward, throughput minus delay growth minus loss, updates the table, picks the next action and scales the window.</a:t>
+            </a:r>
+          </a:p>
+          <a:p/>
+          <a:p>
+            <a:r>
+              <a:t>The code on the slide is simplified; the real files are in the repo.</a:t>
+            </a:r>
+          </a:p>
+          <a:p/>
+          <a:p>
+            <a:r>
+              <a:t>We also built a deep version: web/dqn.py is a small neural network, two hidden layers of 32, trained with DQN in the same simulator. It reads continuous inputs instead of buckets.</a:t>
+            </a:r>
+          </a:p>
+          <a:p/>
+          <a:p>
+            <a:r>
+              <a:t>Likely question: Q: Is this deep RL? A: The C agent is tabular. The chat also has a deep agent, a small DQN in numpy (5-32-32-5). Q: Does deep beat the table? A: Modestly: 3.20 s vs 3.73 s mean on 48 unseen paths, faster on 19, slower on 6. Q: Any problem? A: Training is seed-sensitive: 1 of 4 seeds failed, so we select on validation paths. It is simulated and not in the C code. Q: Where is it trained? A: web/train.py for the chat, the smart client trains online for the main experiments; table in results/q_chat.txt.</a:t>
             </a:r>
           </a:p>
         </p:txBody>
@@ -1702,34 +1672,31 @@
           <a:lstStyle/>
           <a:p>
             <a:r>
-              <a:t>Time: 0:50</a:t>
+              <a:t>[0:50] Be honest: it did not beat AIMD. Plus 63 percent time on 5G-like, plus 10 percent on satellite, a tie on the lossy path.</a:t>
             </a:r>
           </a:p>
           <a:p/>
           <a:p>
             <a:r>
-              <a:t>- Be honest: it did not beat AIMD. Plus 63 percent time on 5G-like, plus 10 percent on satellite, a tie on the lossy path.</a:t>
-            </a:r>
-          </a:p>
-          <a:p>
-            <a:r>
-              <a:t>- It used somewhat fewer retransmissions on two paths, within run-to-run noise.</a:t>
-            </a:r>
-          </a:p>
-          <a:p>
-            <a:r>
-              <a:t>- Earlier training rounds were much worse; this is the final configuration. The finding is that a simple learner does not beat a tuned rule.</a:t>
-            </a:r>
-          </a:p>
-          <a:p>
-            <a:r>
-              <a:t>- In the chat, retrained for bursty random-loss traffic, it does beat AIMD on most simulated paths; mention that on slide 19.</a:t>
+              <a:t>It used somewhat fewer retransmissions on two paths, within run-to-run noise.</a:t>
             </a:r>
           </a:p>
           <a:p/>
           <a:p>
             <a:r>
-              <a:t>IF ASKED: Q: Then what was the point? A: The experiment. We tested whether a learned window helps and report the answer, including the negative result.</a:t>
+              <a:t>Earlier training rounds were much worse; this is the final configuration. The finding is that a simple learner does not beat a tuned rule.</a:t>
+            </a:r>
+          </a:p>
+          <a:p/>
+          <a:p>
+            <a:r>
+              <a:t>In the chat, retrained for bursty random-loss traffic, it does beat AIMD on most simulated paths; mention that on slide 19.</a:t>
+            </a:r>
+          </a:p>
+          <a:p/>
+          <a:p>
+            <a:r>
+              <a:t>Likely question: Q: Then what was the point? A: The experiment. We tested whether a learned window helps and report the answer, including the negative result.</a:t>
             </a:r>
           </a:p>
         </p:txBody>
@@ -1815,34 +1782,31 @@
           <a:lstStyle/>
           <a:p>
             <a:r>
-              <a:t>Time: 0:40</a:t>
+              <a:t>[0:40] We wrote a Lua dissector, named smartrudp, that decodes sequence, ack, flags, checksum and length.</a:t>
             </a:r>
           </a:p>
           <a:p/>
           <a:p>
             <a:r>
-              <a:t>- We wrote a Lua dissector, named smartrudp, that decodes sequence, ack, flags, checksum and length.</a:t>
-            </a:r>
-          </a:p>
-          <a:p>
-            <a:r>
-              <a:t>- Useful filters: smartrudp.flags.data == 1 and smartrudp.seq == N.</a:t>
-            </a:r>
-          </a:p>
-          <a:p>
-            <a:r>
-              <a:t>- In a 400-packet lossy run the receiver saw 87 (AIMD) and 95 (Smart) repeated data segments.</a:t>
-            </a:r>
-          </a:p>
-          <a:p>
-            <a:r>
-              <a:t>- The program's exported trace uses topology addresses and has no handshake.</a:t>
+              <a:t>Useful filters: smartrudp.flags.data == 1 and smartrudp.seq == N.</a:t>
             </a:r>
           </a:p>
           <a:p/>
           <a:p>
             <a:r>
-              <a:t>IF ASKED: Q: Why no handshake in the export? A: The export builds synthetic packets. The real tshark capture on the next slide shows the handshake.</a:t>
+              <a:t>In a 400-packet lossy run the receiver saw 87 (AIMD) and 95 (Smart) repeated data segments.</a:t>
+            </a:r>
+          </a:p>
+          <a:p/>
+          <a:p>
+            <a:r>
+              <a:t>The program's exported trace uses topology addresses and has no handshake.</a:t>
+            </a:r>
+          </a:p>
+          <a:p/>
+          <a:p>
+            <a:r>
+              <a:t>Likely question: Q: Why no handshake in the export? A: The export builds synthetic packets. The real tshark capture on the next slide shows the handshake.</a:t>
             </a:r>
           </a:p>
         </p:txBody>
@@ -1928,24 +1892,19 @@
           <a:lstStyle/>
           <a:p>
             <a:r>
-              <a:t>Time: 0:50</a:t>
+              <a:t>[0:50] Left: the first three packets, SYN, SYN-ACK and ACK, decoded by our dissector (filter frame.number &lt;= 3).</a:t>
             </a:r>
           </a:p>
           <a:p/>
           <a:p>
             <a:r>
-              <a:t>- Left: the first three packets, SYN, SYN-ACK and ACK, decoded by our dissector (filter frame.number &lt;= 3).</a:t>
-            </a:r>
-          </a:p>
-          <a:p>
-            <a:r>
-              <a:t>- Right: filter smartrudp.seq == N shows the same segment twice, a retransmission.</a:t>
+              <a:t>Right: filter smartrudp.seq == N shows the same segment twice, a retransmission.</a:t>
             </a:r>
           </a:p>
           <a:p/>
           <a:p>
             <a:r>
-              <a:t>IF ASKED: If Wireshark is open live: Analyze, Decode As, UDP 8888 = RUDP, then use these two filters.</a:t>
+              <a:t>Likely question: If Wireshark is open live: Analyze, Decode As, UDP 8888 = RUDP, then use these two filters.</a:t>
             </a:r>
           </a:p>
         </p:txBody>
@@ -2031,34 +1990,31 @@
           <a:lstStyle/>
           <a:p>
             <a:r>
-              <a:t>Time: 0:40</a:t>
+              <a:t>[0:40] UDP is fast but gives no guarantees: packets can be lost, duplicated or reordered.</a:t>
             </a:r>
           </a:p>
           <a:p/>
           <a:p>
             <a:r>
-              <a:t>- UDP is fast but gives no guarantees: packets can be lost, duplicated or reordered.</a:t>
-            </a:r>
-          </a:p>
-          <a:p>
-            <a:r>
-              <a:t>- TCP is reliable but sits inside the operating system, so you cannot see or change it.</a:t>
-            </a:r>
-          </a:p>
-          <a:p>
-            <a:r>
-              <a:t>- In 1986 the early Internet had congestion collapse: throughput fell from 32 Kbps to 40 bps. TCP's congestion control was invented to fix that.</a:t>
-            </a:r>
-          </a:p>
-          <a:p>
-            <a:r>
-              <a:t>- Our question: can we rebuild TCP's core ideas ourselves, on UDP?</a:t>
+              <a:t>TCP is reliable but sits inside the operating system, so you cannot see or change it.</a:t>
             </a:r>
           </a:p>
           <a:p/>
           <a:p>
             <a:r>
-              <a:t>IF ASKED: Q: Why not just use TCP? A: TCP cannot be changed or inspected; building our own makes every mechanism visible. QUIC and HTTP/3 do the same in practice.</a:t>
+              <a:t>In 1986 the early Internet had congestion collapse: throughput fell from 32 Kbps to 40 bps. TCP's congestion control was invented to fix that.</a:t>
+            </a:r>
+          </a:p>
+          <a:p/>
+          <a:p>
+            <a:r>
+              <a:t>Our question: can we rebuild TCP's core ideas ourselves, on UDP?</a:t>
+            </a:r>
+          </a:p>
+          <a:p/>
+          <a:p>
+            <a:r>
+              <a:t>Likely question: Q: Why not just use TCP? A: TCP cannot be changed or inspected; building our own makes every mechanism visible. QUIC and HTTP/3 do the same in practice.</a:t>
             </a:r>
           </a:p>
         </p:txBody>
@@ -2144,34 +2100,31 @@
           <a:lstStyle/>
           <a:p>
             <a:r>
-              <a:t>Time: 1:00</a:t>
+              <a:t>[1:00] The protocol in use: each message is one numbered, checksummed RUDP segment, ACKed in order.</a:t>
             </a:r>
           </a:p>
           <a:p/>
           <a:p>
             <a:r>
-              <a:t>- The protocol in use: each message is one numbered, checksummed RUDP segment, ACKed in order.</a:t>
-            </a:r>
-          </a:p>
-          <a:p>
-            <a:r>
-              <a:t>- There is a terminal version and a browser version; two devices were linked over Tailscale, laptop and phone.</a:t>
-            </a:r>
-          </a:p>
-          <a:p>
-            <a:r>
-              <a:t>- Drag the loss slider: lost messages are resent and still arrive in order. The right panel shows sent, lost and resent counts and the log.</a:t>
-            </a:r>
-          </a:p>
-          <a:p>
-            <a:r>
-              <a:t>- There is a controller switch: fixed window, AIMD, or Smart-RUDP. For the chat we retrained Smart-RUDP on simulated paths: it was faster than AIMD on 5 of 6 held-out paths and equal on 1, because AIMD resets to one packet on random loss. Say it is simulated, and that the agent may not shrink the window without a congestion signal. Stress test: 48 random paths the agent never trained on, 3 seeds each. Mean delivery time was 3.73 seconds for Smart-RUDP against 7.16 for AIMD. Smart-RUDP was faster on 27 paths, slower on 5, within 5 percent on 16. So on our data, in simulation, it beats AIMD in the chat setting. There is also a deep neural-network option in the controller dropdown; it gave 3.20 seconds mean on the stress paths against 3.73 for the table.</a:t>
+              <a:t>There is a terminal version and a browser version; two devices were linked over Tailscale, laptop and phone.</a:t>
             </a:r>
           </a:p>
           <a:p/>
           <a:p>
             <a:r>
-              <a:t>IF ASKED: Q: Is that a fair win? A: Both start from the same window of 10; held-out paths and seeds; honest limits: simulated, and without the no-shrink rule the agent lost. Q: Did it win in Section 8? A: No, that result stands. Q: Where does it lose? A: Tight bottleneck queues and very high loss; the fixed window of 8 is hard to beat there. A broader-trained agent did worse, so we kept the first.</a:t>
+              <a:t>Drag the loss slider: lost messages are resent and still arrive in order. The right panel shows sent, lost and resent counts and the log.</a:t>
+            </a:r>
+          </a:p>
+          <a:p/>
+          <a:p>
+            <a:r>
+              <a:t>There is a controller switch: fixed window, AIMD, or Smart-RUDP. For the chat we retrained Smart-RUDP on simulated paths: it was faster than AIMD on 5 of 6 held-out paths and equal on 1, because AIMD resets to one packet on random loss. Say it is simulated, and that the agent may not shrink the window without a congestion signal. Stress test: 48 random paths the agent never trained on, 3 seeds each. Mean delivery time was 3.73 seconds for Smart-RUDP against 7.16 for AIMD. Smart-RUDP was faster on 27 paths, slower on 5, within 5 percent on 16. So on our data, in simulation, it beats AIMD in the chat setting. There is also a deep neural-network option in the controller dropdown; it gave 3.20 seconds mean on the stress paths against 3.73 for the table.</a:t>
+            </a:r>
+          </a:p>
+          <a:p/>
+          <a:p>
+            <a:r>
+              <a:t>Likely question: Q: Is that a fair win? A: Both start from the same window of 10; held-out paths and seeds; honest limits: simulated, and without the no-shrink rule the agent lost. Q: Did it win in Section 8? A: No, that result stands. Q: Where does it lose? A: Tight bottleneck queues and very high loss; the fixed window of 8 is hard to beat there. A broader-trained agent did worse, so we kept the first.</a:t>
             </a:r>
           </a:p>
         </p:txBody>
@@ -2257,49 +2210,49 @@
           <a:lstStyle/>
           <a:p>
             <a:r>
-              <a:t>Time: 1:00</a:t>
+              <a:t>[1:00] The abstract also promised TCP and plain UDP baselines, so we ran them on the same 48 unseen simulated paths.</a:t>
             </a:r>
           </a:p>
           <a:p/>
           <a:p>
             <a:r>
-              <a:t>- The abstract also promised TCP and plain UDP baselines, so we ran them on the same 48 unseen simulated paths.</a:t>
-            </a:r>
-          </a:p>
-          <a:p>
-            <a:r>
-              <a:t>- Plain UDP delivered only 68 percent of the messages, so reliability is needed. Our TCP model, with selective acknowledgments, has the lowest median at 1.48 seconds.</a:t>
-            </a:r>
-          </a:p>
-          <a:p>
-            <a:r>
-              <a:t>- Smart-RUDP deep is at 3.20 seconds mean and is about even with the TCP model path by path: faster on 22, slower on 23.</a:t>
-            </a:r>
-          </a:p>
-          <a:p>
-            <a:r>
-              <a:t>- The gap to TCP is mostly Go-Back-N. A selective-ack version of our transport cut AIMD from 7.16 to 4.90 seconds in simulation.</a:t>
-            </a:r>
-          </a:p>
-          <a:p>
-            <a:r>
-              <a:t>- Reordering hurts Go-Back-N badly: AIMD goes from 0.82 to 6.79 seconds at 20 milliseconds of jitter. The learned agents cope better and selective ack removes most of the damage.</a:t>
-            </a:r>
-          </a:p>
-          <a:p>
-            <a:r>
-              <a:t>- For the C experiments we repeated 20 runs per mode: Smart-RUDP is still slower on 5G and satellite and ties on lossy.</a:t>
-            </a:r>
-          </a:p>
-          <a:p>
-            <a:r>
-              <a:t>- Be upfront: our simulator originally allowed a duplicate-ACK retransmission storm that flatters aggressive controllers. With the realistic rule the neural agent is about level with AIMD in simulation (7.27 s against 7.75 s). The C results are the evidence we rely on.</a:t>
+              <a:t>Plain UDP delivered only 68 percent of the messages, so reliability is needed. Our TCP model, with selective acknowledgments, has the lowest median at 1.48 seconds.</a:t>
             </a:r>
           </a:p>
           <a:p/>
           <a:p>
             <a:r>
-              <a:t>IF ASKED: Q: Is the TCP row real TCP? A: No, it is a model with the same window cap; real kernel TCP needs netem on Linux, and we provide the script. Q: Why did you not implement SACK in C? A: Time; the simulation shows it is the biggest win and it is the first item of future work. Q: Is 20 runs enough? A: The intervals exclude zero for 5G and satellite and include zero for lossy. Did you check it is not a simulator artefact? Yes: with the realistic rule the simulated gain mostly disappears, so we lean on the C results, which use that rule and equal window caps.</a:t>
+              <a:t>Smart-RUDP deep is at 3.20 seconds mean and is about even with the TCP model path by path: faster on 22, slower on 23.</a:t>
+            </a:r>
+          </a:p>
+          <a:p/>
+          <a:p>
+            <a:r>
+              <a:t>The gap to TCP is mostly Go-Back-N. A selective-ack version of our transport cut AIMD from 7.16 to 4.90 seconds in simulation.</a:t>
+            </a:r>
+          </a:p>
+          <a:p/>
+          <a:p>
+            <a:r>
+              <a:t>Reordering hurts Go-Back-N badly: AIMD goes from 0.82 to 6.79 seconds at 20 milliseconds of jitter. The learned agents cope better and selective ack removes most of the damage.</a:t>
+            </a:r>
+          </a:p>
+          <a:p/>
+          <a:p>
+            <a:r>
+              <a:t>For the C experiments we repeated 20 runs per mode: Smart-RUDP is still slower on 5G and satellite and ties on lossy.</a:t>
+            </a:r>
+          </a:p>
+          <a:p/>
+          <a:p>
+            <a:r>
+              <a:t>Be upfront: our simulator originally allowed a duplicate-ACK retransmission storm that flatters aggressive controllers. With the realistic rule the neural agent is about level with AIMD in simulation (7.27 s against 7.75 s). The C results are the evidence we rely on.</a:t>
+            </a:r>
+          </a:p>
+          <a:p/>
+          <a:p>
+            <a:r>
+              <a:t>Likely question: Q: Is the TCP row real TCP? A: No, it is a model with the same window cap; real kernel TCP needs netem on Linux, and we provide the script. Q: Why did you not implement SACK in C? A: Time; the simulation shows it is the biggest win and it is the first item of future work. Q: Is 20 runs enough? A: The intervals exclude zero for 5G and satellite and include zero for lossy. Did you check it is not a simulator artefact? Yes: with the realistic rule the simulated gain mostly disappears, so we lean on the C results, which use that rule and equal window caps.</a:t>
             </a:r>
           </a:p>
         </p:txBody>
@@ -2385,39 +2338,37 @@
           <a:lstStyle/>
           <a:p>
             <a:r>
-              <a:t>Time: 1:00</a:t>
+              <a:t>[1:00] We then put the neural agent into the C transport, the same code as Section 8, and tested it on the same three emulated paths with 15 runs each.</a:t>
             </a:r>
           </a:p>
           <a:p/>
           <a:p>
             <a:r>
-              <a:t>- We then put the neural agent into the C transport, the same code as Section 8, and tested it on the same three emulated paths with 15 runs each.</a:t>
-            </a:r>
-          </a:p>
-          <a:p>
-            <a:r>
-              <a:t>- AIMD and the agents all start from a window of 10. The neural agent was faster than AIMD on all three: 15 percent on 5G-like, 27 percent on lossy, 24 percent on satellite-like. The intervals exclude zero.</a:t>
-            </a:r>
-          </a:p>
-          <a:p>
-            <a:r>
-              <a:t>- The retrained table did not carry over: it was slower on 5G and satellite. A network generalises to unseen paths where a table does not.</a:t>
-            </a:r>
-          </a:p>
-          <a:p>
-            <a:r>
-              <a:t>- We also added selective acknowledgments to the C code: about ten times fewer retransmissions, but no significant change in completion time on these emulated paths.</a:t>
-            </a:r>
-          </a:p>
-          <a:p>
-            <a:r>
-              <a:t>- We also reran it with AIMD capped at 32 like the agent: the neural agent still wins by 19, 29 and 28 percent, all significant.</a:t>
+              <a:t>AIMD and the agents all start from a window of 10. The neural agent was faster than AIMD on all three: 15 percent on 5G-like, 27 percent on lossy, 24 percent on satellite-like. The intervals exclude zero.</a:t>
             </a:r>
           </a:p>
           <a:p/>
           <a:p>
             <a:r>
-              <a:t>IF ASKED: Q: So Smart-RUDP now beats AIMD? A: The neural version does, in the C transport on emulated paths, trained in a simulator; the original table agent in Section 8 did not. Q: Is it fair? A: Same start window; AIMD keeps a cap of 128 while the agents are capped at 32; the agent retransmits more on random loss. Q: Why no gain from SACK? A: Those paths are limited by the bottleneck rate, so extra retransmissions cost little; the simulator, with different paths, showed a large gain.</a:t>
+              <a:t>The retrained table did not carry over: it was slower on 5G and satellite. A network generalises to unseen paths where a table does not.</a:t>
+            </a:r>
+          </a:p>
+          <a:p/>
+          <a:p>
+            <a:r>
+              <a:t>We also added selective acknowledgments to the C code: about ten times fewer retransmissions, but no significant change in completion time on these emulated paths.</a:t>
+            </a:r>
+          </a:p>
+          <a:p/>
+          <a:p>
+            <a:r>
+              <a:t>We also reran it with AIMD capped at 32 like the agent: the neural agent still wins by 19, 29 and 28 percent, all significant.</a:t>
+            </a:r>
+          </a:p>
+          <a:p/>
+          <a:p>
+            <a:r>
+              <a:t>Likely question: Q: So Smart-RUDP now beats AIMD? A: The neural version does, in the C transport on emulated paths, trained in a simulator; the original table agent in Section 8 did not. Q: Is it fair? A: Same start window; AIMD keeps a cap of 128 while the agents are capped at 32; the agent retransmits more on random loss. Q: Why no gain from SACK? A: Those paths are limited by the bottleneck rate, so extra retransmissions cost little; the simulator, with different paths, showed a large gain.</a:t>
             </a:r>
           </a:p>
         </p:txBody>
@@ -2503,34 +2454,31 @@
           <a:lstStyle/>
           <a:p>
             <a:r>
-              <a:t>Time: 0:50</a:t>
+              <a:t>[0:50] We also tested two things people ask about. Fairness: two flows through one bottleneck. The neural agent is fair against itself and on short paths, but takes 74 percent against AIMD on the long 120 ms path, about like a fixed window.</a:t>
             </a:r>
           </a:p>
           <a:p/>
           <a:p>
             <a:r>
-              <a:t>- We also tested two things people ask about. Fairness: two flows through one bottleneck. The neural agent is fair against itself and on short paths, but takes 74 percent against AIMD on the long 120 ms path, about like a fixed window.</a:t>
-            </a:r>
-          </a:p>
-          <a:p>
-            <a:r>
-              <a:t>- Ablation: we retrained the agent with one piece removed. Only the no-shrink mask matters; without it the agent is no better than AIMD. The other pieces showed no measurable value.</a:t>
-            </a:r>
-          </a:p>
-          <a:p>
-            <a:r>
-              <a:t>- The same recipe also gave very different results by seed, between 3.2 and 7.4 seconds, so we pick the seed on validation paths.</a:t>
-            </a:r>
-          </a:p>
-          <a:p>
-            <a:r>
-              <a:t>- While building the dashboard we found a retransmission storm in the web gateway and fixed it; there is also an adaptive timeout option now.</a:t>
+              <a:t>Ablation: we retrained the agent with one piece removed. Only the no-shrink mask matters; without it the agent is no better than AIMD. The other pieces showed no measurable value.</a:t>
             </a:r>
           </a:p>
           <a:p/>
           <a:p>
             <a:r>
-              <a:t>IF ASKED: Is the agent fair? Mostly, but not on the long path against AIMD (74% share, Jain 0.82). Fairness was only tested in the simulator, not in C.</a:t>
+              <a:t>The same recipe also gave very different results by seed, between 3.2 and 7.4 seconds, so we pick the seed on validation paths.</a:t>
+            </a:r>
+          </a:p>
+          <a:p/>
+          <a:p>
+            <a:r>
+              <a:t>While building the dashboard we found a retransmission storm in the web gateway and fixed it; there is also an adaptive timeout option now.</a:t>
+            </a:r>
+          </a:p>
+          <a:p/>
+          <a:p>
+            <a:r>
+              <a:t>Likely question: Is the agent fair? Mostly, but not on the long path against AIMD (74% share, Jain 0.82). Fairness was only tested in the simulator, not in C.</a:t>
             </a:r>
           </a:p>
         </p:txBody>
@@ -2616,34 +2564,31 @@
           <a:lstStyle/>
           <a:p>
             <a:r>
-              <a:t>Time: 0:50</a:t>
+              <a:t>[0:50] While checking our own result we found where the neural agent fails: on a hostile path with 10 percent loss it needed about 85 seconds where AIMD needed 11.</a:t>
             </a:r>
           </a:p>
           <a:p/>
           <a:p>
             <a:r>
-              <a:t>- While checking our own result we found where the neural agent fails: on a hostile path with 10 percent loss it needed about 85 seconds where AIMD needed 11.</a:t>
-            </a:r>
-          </a:p>
-          <a:p>
-            <a:r>
-              <a:t>- The fix is a hand-over: when a decision interval loses 10 percent or more of its packets, plain AIMD controls the window; after three clean intervals the agent takes over again.</a:t>
-            </a:r>
-          </a:p>
-          <a:p>
-            <a:r>
-              <a:t>- With that, the three benign paths keep the agent's advantage and the hostile path is back near AIMD at about 14 seconds.</a:t>
-            </a:r>
-          </a:p>
-          <a:p>
-            <a:r>
-              <a:t>- We also tried cutting the window on every timeout; it fixed the hostile case but made the 2 percent path much worse, so we dropped it. So the learned agent is useful on clean to moderate paths and needs a classical safety net elsewhere.</a:t>
+              <a:t>The fix is a hand-over: when a decision interval loses 10 percent or more of its packets, plain AIMD controls the window; after three clean intervals the agent takes over again.</a:t>
             </a:r>
           </a:p>
           <a:p/>
           <a:p>
             <a:r>
-              <a:t>IF ASKED: Is the hybrid still 'AI'? Yes on clean and moderate paths, where the neural network decides; on heavy loss it deliberately defers to AIMD. It is a rule we added, not something the network learned.</a:t>
+              <a:t>With that, the three benign paths keep the agent's advantage and the hostile path is back near AIMD at about 14 seconds.</a:t>
+            </a:r>
+          </a:p>
+          <a:p/>
+          <a:p>
+            <a:r>
+              <a:t>We also tried cutting the window on every timeout; it fixed the hostile case but made the 2 percent path much worse, so we dropped it. So the learned agent is useful on clean to moderate paths and needs a classical safety net elsewhere.</a:t>
+            </a:r>
+          </a:p>
+          <a:p/>
+          <a:p>
+            <a:r>
+              <a:t>Likely question: Is the hybrid still 'AI'? Yes on clean and moderate paths, where the neural network decides; on heavy loss it deliberately defers to AIMD. It is a rule we added, not something the network learned.</a:t>
             </a:r>
           </a:p>
         </p:txBody>
@@ -2729,34 +2674,31 @@
           <a:lstStyle/>
           <a:p>
             <a:r>
-              <a:t>Time: 0:50</a:t>
+              <a:t>[0:50] We swapped Go-Back-N for Selective Repeat as the default. The receiver now keeps out-of-order packets and tells the sender exactly which ones it holds in a bitmap inside every ACK; the sender has one timer per packet and resends only what is missing.</a:t>
             </a:r>
           </a:p>
           <a:p/>
           <a:p>
             <a:r>
-              <a:t>- We swapped Go-Back-N for Selective Repeat as the default. The receiver now keeps out-of-order packets and tells the sender exactly which ones it holds in a bitmap inside every ACK; the sender has one timer per packet and resends only what is missing.</a:t>
-            </a:r>
-          </a:p>
-          <a:p>
-            <a:r>
-              <a:t>- The result: about ten times fewer retransmissions, and the neural agent's lead over AIMD grows to 46 percent on the lossy path and 50 percent on the satellite path.</a:t>
-            </a:r>
-          </a:p>
-          <a:p>
-            <a:r>
-              <a:t>- The 10 percent loss failure we found earlier was mostly a Go-Back-N effect: with Selective Repeat the agent ties AIMD there.</a:t>
-            </a:r>
-          </a:p>
-          <a:p>
-            <a:r>
-              <a:t>- Go-Back-N is still in the code behind a flag, and the earlier tables in the report were measured with it and are labelled that way.</a:t>
+              <a:t>The result: about ten times fewer retransmissions, and the neural agent's lead over AIMD grows to 46 percent on the lossy path and 50 percent on the satellite path.</a:t>
             </a:r>
           </a:p>
           <a:p/>
           <a:p>
             <a:r>
-              <a:t>IF ASKED: Is it textbook Selective Repeat? Nearly: per-packet timers and a buffering receiver, but we use a cumulative ACK plus a 64-bit bitmap instead of one ACK per packet, and the window is capped at 60.</a:t>
+              <a:t>The 10 percent loss failure we found earlier was mostly a Go-Back-N effect: with Selective Repeat the agent ties AIMD there.</a:t>
+            </a:r>
+          </a:p>
+          <a:p/>
+          <a:p>
+            <a:r>
+              <a:t>Go-Back-N is still in the code behind a flag, and the earlier tables in the report were measured with it and are labelled that way.</a:t>
+            </a:r>
+          </a:p>
+          <a:p/>
+          <a:p>
+            <a:r>
+              <a:t>Likely question: Is it textbook Selective Repeat? Nearly: per-packet timers and a buffering receiver, but we use a cumulative ACK plus a 64-bit bitmap instead of one ACK per packet, and the window is capped at 60.</a:t>
             </a:r>
           </a:p>
         </p:txBody>
@@ -2842,29 +2784,25 @@
           <a:lstStyle/>
           <a:p>
             <a:r>
-              <a:t>Time: 1:00</a:t>
+              <a:t>[1:00] This is the final comparison. Everything runs in the C transport with Selective Repeat, a real clock and a real server process. We compare four policies: the original AIMD with a window cap of 32, AIMD tuned with a cap of 128, tuned CUBIC, and the neural agent with its final settings.</a:t>
             </a:r>
           </a:p>
           <a:p/>
           <a:p>
             <a:r>
-              <a:t>- This is the final comparison. Everything runs in the C transport with Selective Repeat, a real clock and a real server process. We compare four policies: the original AIMD with a window cap of 32, AIMD tuned with a cap of 128, tuned CUBIC, and the neural agent with its final settings.</a:t>
-            </a:r>
-          </a:p>
-          <a:p>
-            <a:r>
-              <a:t>- The neural agent is fastest on four of the five paths and significantly faster than tuned AIMD on all four: 15 percent on the 5G-like path, 49 percent on lossy, and 52 percent on the satellite-like and fast paths. It beats CUBIC significantly on lossy and satellite. On the hostile 10 percent loss path nothing is significantly different.</a:t>
-            </a:r>
-          </a:p>
-          <a:p>
-            <a:r>
-              <a:t>- One correction we want to be upfront about: earlier we reported bigger margins and 262 retransmissions on the fast path. That came from a timer that fired too early. Fixing it helped AIMD even more than the agent, so these numbers are the honest ones.</a:t>
+              <a:t>The neural agent is fastest on four of the five paths and significantly faster than tuned AIMD on all four: 15 percent on the 5G-like path, 49 percent on lossy, and 52 percent on the satellite-like and fast paths. It beats CUBIC significantly on lossy and satellite. On the hostile 10 percent loss path nothing is significantly different.</a:t>
             </a:r>
           </a:p>
           <a:p/>
           <a:p>
             <a:r>
-              <a:t>IF ASKED: Why did the margin shrink? A retransmission timer defect was hurting AIMD more than the agent. We found it by tracing the retransmissions, fixed it for every policy, and re-ran everything. Without the fix AIMD is 41 percent slower on random paths.</a:t>
+              <a:t>One correction we want to be upfront about: earlier we reported bigger margins and 262 retransmissions on the fast path. That came from a timer that fired too early. Fixing it helped AIMD even more than the agent, so these numbers are the honest ones.</a:t>
+            </a:r>
+          </a:p>
+          <a:p/>
+          <a:p>
+            <a:r>
+              <a:t>Likely question: Why did the margin shrink? A retransmission timer defect was hurting AIMD more than the agent. We found it by tracing the retransmissions, fixed it for every policy, and re-ran everything. Without the fix AIMD is 41 percent slower on random paths.</a:t>
             </a:r>
           </a:p>
         </p:txBody>
@@ -2950,29 +2888,25 @@
           <a:lstStyle/>
           <a:p>
             <a:r>
-              <a:t>Time: 0:50</a:t>
+              <a:t>[0:50] The emulator is inside our client, so we also tested through a separate impairment process on real UDP sockets. That found three real defects.</a:t>
             </a:r>
           </a:p>
           <a:p/>
           <a:p>
             <a:r>
-              <a:t>- The emulator is inside our client, so we also tested through a separate impairment process on real UDP sockets. That found three real defects.</a:t>
-            </a:r>
-          </a:p>
-          <a:p>
-            <a:r>
-              <a:t>- First, if the client's last handshake ACK is lost, the server ignored all following data and the transfer hung. We fixed it the way TCP does and added a regression test. Second, the spurious timeouts I just mentioned. Third, a fuzzer showed our byte-sum checksum let about 2 percent of corrupted packets through, so it is now CRC-16 and the fuzzer accepts none.</a:t>
-            </a:r>
-          </a:p>
-          <a:p>
-            <a:r>
-              <a:t>- On real sockets the neural agent is again fastest on every path: 17, 53, 45 and 39 percent faster than tuned AIMD on 5G, lossy, satellite and fast, and a tie on the hostile path.</a:t>
+              <a:t>First, if the client's last handshake ACK is lost, the server ignored all following data and the transfer hung. We fixed it the way TCP does and added a regression test. Second, the spurious timeouts I just mentioned. Third, a fuzzer showed our byte-sum checksum let about 2 percent of corrupted packets through, so it is now CRC-16 and the fuzzer accepts none.</a:t>
             </a:r>
           </a:p>
           <a:p/>
           <a:p>
             <a:r>
-              <a:t>IF ASKED: Is this a real network? It is real UDP sockets on one machine, with the impairment applied by a separate process. It is not a kernel netem or a multi-machine path; we provide the script for that but had no root access.</a:t>
+              <a:t>On real sockets the neural agent is again fastest on every path: 17, 53, 45 and 39 percent faster than tuned AIMD on 5G, lossy, satellite and fast, and a tie on the hostile path.</a:t>
+            </a:r>
+          </a:p>
+          <a:p/>
+          <a:p>
+            <a:r>
+              <a:t>Likely question: Is this a real network? It is real UDP sockets on one machine, with the impairment applied by a separate process. It is not a kernel netem or a multi-machine path; we provide the script for that but had no root access.</a:t>
             </a:r>
           </a:p>
         </p:txBody>
@@ -3058,29 +2992,25 @@
           <a:lstStyle/>
           <a:p>
             <a:r>
-              <a:t>Time: 1:00</a:t>
+              <a:t>[1:00] Our old simulator was in Python and never matched the C code exactly. So we added a virtual-time mode to the C sender itself: same code, simulated receiver and clock, about a thousand times faster. It reproduces the real-clock results in all 15 calibration cells.</a:t>
             </a:r>
           </a:p>
           <a:p/>
           <a:p>
             <a:r>
-              <a:t>- Our old simulator was in Python and never matched the C code exactly. So we added a virtual-time mode to the C sender itself: same code, simulated receiver and clock, about a thousand times faster. It reproduces the real-clock results in all 15 calibration cells.</a:t>
-            </a:r>
-          </a:p>
-          <a:p>
-            <a:r>
-              <a:t>- That let us test on 100 random paths that we never tuned on. The neural agent needs 0.53 times the time of tuned AIMD, is faster on 89 paths and never more than 20 percent slower. Tuned CUBIC is slower by more than 20 percent on 27 paths.</a:t>
-            </a:r>
-          </a:p>
-          <a:p>
-            <a:r>
-              <a:t>- The ablation shows which parts matter: the window cap of 128 most, then pacing, the timer floor and slow start. We also tried evolution-strategy retraining directly in the C sender and it only gave 2 percent, so we did not adopt it.</a:t>
+              <a:t>That let us test on 100 random paths that we never tuned on. The neural agent needs 0.53 times the time of tuned AIMD, is faster on 89 paths and never more than 20 percent slower. Tuned CUBIC is slower by more than 20 percent on 27 paths.</a:t>
             </a:r>
           </a:p>
           <a:p/>
           <a:p>
             <a:r>
-              <a:t>IF ASKED: Is the test set separate from tuning? Yes. Slow-start and hand-over settings were chosen on a different set of random paths; the 100 test paths were used only for the reported numbers.</a:t>
+              <a:t>The ablation shows which parts matter: the window cap of 128 most, then pacing, the timer floor and slow start. We also tried evolution-strategy retraining directly in the C sender and it only gave 2 percent, so we did not adopt it.</a:t>
+            </a:r>
+          </a:p>
+          <a:p/>
+          <a:p>
+            <a:r>
+              <a:t>Likely question: Is the test set separate from tuning? Yes. Slow-start and hand-over settings were chosen on a different set of random paths; the 100 test paths were used only for the reported numbers.</a:t>
             </a:r>
           </a:p>
         </p:txBody>
@@ -3166,29 +3096,25 @@
           <a:lstStyle/>
           <a:p>
             <a:r>
-              <a:t>Time: 0:50</a:t>
+              <a:t>[0:50] Fairness on real sockets: two neural flows split the link evenly, and so do two AIMD flows. But against tuned AIMD the neural agent takes 68 percent of the link, and 76 percent against the original AIMD. CUBIC takes 61 percent. So the agent is a more aggressive neighbour. Nothing starves, but it is not polite, and we did not test coexistence with TCP. That is our main limitation.</a:t>
             </a:r>
           </a:p>
           <a:p/>
           <a:p>
             <a:r>
-              <a:t>- Fairness on real sockets: two neural flows split the link evenly, and so do two AIMD flows. But against tuned AIMD the neural agent takes 68 percent of the link, and 76 percent against the original AIMD. CUBIC takes 61 percent. So the agent is a more aggressive neighbour. Nothing starves, but it is not polite, and we did not test coexistence with TCP. That is our main limitation.</a:t>
-            </a:r>
-          </a:p>
-          <a:p>
-            <a:r>
-              <a:t>- We also added file transfer: the sender sends a real file and the received file is byte-identical in every run. A 4 megabyte file over the fast path takes 8.9 seconds with the agent against 21 seconds with tuned AIMD.</a:t>
-            </a:r>
-          </a:p>
-          <a:p>
-            <a:r>
-              <a:t>- The chat and web gateway now use the same window and bitmap as the C transport, and there is CI, fuzzing and an architecture document.</a:t>
+              <a:t>We also added file transfer: the sender sends a real file and the received file is byte-identical in every run. A 4 megabyte file over the fast path takes 8.9 seconds with the agent against 21 seconds with tuned AIMD.</a:t>
             </a:r>
           </a:p>
           <a:p/>
           <a:p>
             <a:r>
-              <a:t>IF ASKED: Would this be safe to deploy? Not on a shared link yet: it needs fairness-aware training and TCP coexistence tests. For a dedicated path it is a clear win.</a:t>
+              <a:t>The chat and web gateway now use the same window and bitmap as the C transport, and there is CI, fuzzing and an architecture document.</a:t>
+            </a:r>
+          </a:p>
+          <a:p/>
+          <a:p>
+            <a:r>
+              <a:t>Likely question: Would this be safe to deploy? Not on a shared link yet: it needs fairness-aware training and TCP coexistence tests. For a dedicated path it is a clear win.</a:t>
             </a:r>
           </a:p>
         </p:txBody>
@@ -3274,29 +3200,25 @@
           <a:lstStyle/>
           <a:p>
             <a:r>
-              <a:t>Time: 0:50</a:t>
+              <a:t>[0:50] The need: campus users send data to a server across a routed network. TCP is fixed in the kernel; UDP gives no guarantees.</a:t>
             </a:r>
           </a:p>
           <a:p/>
           <a:p>
             <a:r>
-              <a:t>- The need: campus users send data to a server across a routed network. TCP is fixed in the kernel; UDP gives no guarantees.</a:t>
-            </a:r>
-          </a:p>
-          <a:p>
-            <a:r>
-              <a:t>- Our answer: RUDP, a readable and tunable transport, and Smart-RUDP, which learns the window from RTT and loss.</a:t>
-            </a:r>
-          </a:p>
-          <a:p>
-            <a:r>
-              <a:t>- Scenario: a student on VLAN 10 uploads to the server LAN. The ACL keeps students out of staff VLAN 20. If a core link fails, OSPF reroutes through R2: longer path, higher RTT, and the transport must adapt.</a:t>
+              <a:t>Our answer: RUDP, a readable and tunable transport, and Smart-RUDP, which learns the window from RTT and loss.</a:t>
             </a:r>
           </a:p>
           <a:p/>
           <a:p>
             <a:r>
-              <a:t>IF ASKED: Q: Is this just a lab exercise? A: A lab sends datagrams. We built reliability and congestion control on top, measured them, and used them in an application.</a:t>
+              <a:t>Scenario: a student on VLAN 10 uploads to the server LAN. The ACL keeps students out of staff VLAN 20. If a core link fails, OSPF reroutes through R2: longer path, higher RTT, and the transport must adapt.</a:t>
+            </a:r>
+          </a:p>
+          <a:p/>
+          <a:p>
+            <a:r>
+              <a:t>Likely question: Q: Is this just a lab exercise? A: A lab sends datagrams. We built reliability and congestion control on top, measured them, and used them in an application.</a:t>
             </a:r>
           </a:p>
         </p:txBody>
@@ -3382,29 +3304,19 @@
           <a:lstStyle/>
           <a:p>
             <a:r>
-              <a:t>Time: 0:50</a:t>
+              <a:t>[0:50] We worked on the weaknesses we had listed. For fairness we added an optional polite mode: when a standing queue builds, the agent backs off. Over 8 runs against tuned AIMD it takes 52 percent of the link instead of 70, and the Jain index rises from 0.86 to 0.94. The price is speed: on 100 random paths the average time goes from 0.53 to 0.58 times AIMD's, and the worst path is 2.95 times slower, so it stays off by default.</a:t>
             </a:r>
           </a:p>
           <a:p/>
           <a:p>
             <a:r>
-              <a:t>- What we learned: reliability is a set of simple rules working together, congestion control matters as much as retransmission, and tests tell you things about your own results that you do not want to hear.</a:t>
-            </a:r>
-          </a:p>
-          <a:p>
-            <a:r>
-              <a:t>- Our limits: no kernel netem or multi-machine test, the agent is not a polite neighbour, there is no gain at 10 percent random loss, and the tabular agent did not beat AIMD.</a:t>
-            </a:r>
-          </a:p>
-          <a:p>
-            <a:r>
-              <a:t>- Next: fairness-aware training with TCP coexistence, training on real traces, and kernel and multi-machine tests.</a:t>
+              <a:t>We also added bursty cross traffic to the test proxy. Here the result is less flattering: the agent is 15 percent faster than tuned AIMD, but level with CUBIC, and it retransmits about three times as often as AIMD. Three tweaks did not fix that, so we report it as a limit. Finally the server now handles up to 16 clients, checked by sending two files at once.</a:t>
             </a:r>
           </a:p>
           <a:p/>
           <a:p>
             <a:r>
-              <a:t>IF ASKED: What would you do first? Run the netem script on a Linux machine for kernel TCP and RUDP on the same path, then add a competing flow to the training.</a:t>
+              <a:t>Likely question: Is polite mode learned? No. It is a hand-made rule on the delay signal. A learned version needs a two-flow training environment, which is future work.</a:t>
             </a:r>
           </a:p>
         </p:txBody>
@@ -3490,19 +3402,25 @@
           <a:lstStyle/>
           <a:p>
             <a:r>
-              <a:t>Time: 0:15</a:t>
+              <a:t>[0:50] What we learned: reliability is a set of simple rules working together, congestion control matters as much as retransmission, and tests tell you things about your own results that you do not want to hear.</a:t>
             </a:r>
           </a:p>
           <a:p/>
           <a:p>
             <a:r>
-              <a:t>- Thank you. The code, report and captures are at github.com/Capsturrrr/rudp. Happy to take questions.</a:t>
+              <a:t>Our limits: no kernel netem or multi-machine test, the agent is not a polite neighbour, there is no gain at 10 percent random loss, and the tabular agent did not beat AIMD.</a:t>
             </a:r>
           </a:p>
           <a:p/>
           <a:p>
             <a:r>
-              <a:t>IF ASKED: Pause and smile; hand over to questions.</a:t>
+              <a:t>Next: fairness-aware training with TCP coexistence, training on real traces, and kernel and multi-machine tests.</a:t>
+            </a:r>
+          </a:p>
+          <a:p/>
+          <a:p>
+            <a:r>
+              <a:t>Likely question: What would you do first? Run the netem script on a Linux machine for kernel TCP and RUDP on the same path, then add a competing flow to the training.</a:t>
             </a:r>
           </a:p>
         </p:txBody>
@@ -3588,19 +3506,13 @@
           <a:lstStyle/>
           <a:p>
             <a:r>
-              <a:t>Time: -</a:t>
+              <a:t>[0:15] Thank you. The code, report and captures are at github.com/Capsturrrr/rudp. Happy to take questions.</a:t>
             </a:r>
           </a:p>
           <a:p/>
           <a:p>
             <a:r>
-              <a:t>- Only if asked: the window starts at 1, adds 1 per ACK until the threshold 16, then 1/window per ACK. In the 62-packet run the final window was 18.71.</a:t>
-            </a:r>
-          </a:p>
-          <a:p/>
-          <a:p>
-            <a:r>
-              <a:t>IF ASKED: Use this slide to answer 'show me congestion avoidance'.</a:t>
+              <a:t>Likely question: Pause and smile; hand over to questions.</a:t>
             </a:r>
           </a:p>
         </p:txBody>
@@ -3623,6 +3535,98 @@
             <a:fld id="{F7021451-1387-4CA6-816F-3879F97B5CBC}" type="slidenum">
               <a:rPr lang="en-US"/>
               <a:t>32</a:t>
+            </a:fld>
+            <a:endParaRPr lang="en-US"/>
+          </a:p>
+        </p:txBody>
+      </p:sp>
+    </p:spTree>
+    <p:extLst>
+      <p:ext uri="{BB962C8B-B14F-4D97-AF65-F5344CB8AC3E}">
+        <p14:creationId xmlns:p14="http://schemas.microsoft.com/office/powerpoint/2010/main" val="1024086991"/>
+      </p:ext>
+    </p:extLst>
+  </p:cSld>
+  <p:clrMapOvr>
+    <a:masterClrMapping/>
+  </p:clrMapOvr>
+</p:notes>
+</file>
+
+<file path=ppt/notesSlides/notesSlide33.xml><?xml version="1.0" encoding="utf-8"?>
+<p:notes xmlns:a="http://schemas.openxmlformats.org/drawingml/2006/main" xmlns:r="http://schemas.openxmlformats.org/officeDocument/2006/relationships" xmlns:p="http://schemas.openxmlformats.org/presentationml/2006/main">
+  <p:cSld>
+    <p:spTree>
+      <p:nvGrpSpPr>
+        <p:cNvPr id="1" name=""/>
+        <p:cNvGrpSpPr/>
+        <p:nvPr/>
+      </p:nvGrpSpPr>
+      <p:grpSpPr>
+        <a:xfrm>
+          <a:off x="0" y="0"/>
+          <a:ext cx="0" cy="0"/>
+          <a:chOff x="0" y="0"/>
+          <a:chExt cx="0" cy="0"/>
+        </a:xfrm>
+      </p:grpSpPr>
+      <p:sp>
+        <p:nvSpPr>
+          <p:cNvPr id="2" name="Slide Image Placeholder 1"/>
+          <p:cNvSpPr>
+            <a:spLocks noGrp="1" noRot="1" noChangeAspect="1"/>
+          </p:cNvSpPr>
+          <p:nvPr>
+            <p:ph type="sldImg"/>
+          </p:nvPr>
+        </p:nvSpPr>
+        <p:spPr/>
+      </p:sp>
+      <p:sp>
+        <p:nvSpPr>
+          <p:cNvPr id="3" name="Notes Placeholder 2"/>
+          <p:cNvSpPr>
+            <a:spLocks noGrp="1"/>
+          </p:cNvSpPr>
+          <p:nvPr>
+            <p:ph type="body" idx="1"/>
+          </p:nvPr>
+        </p:nvSpPr>
+        <p:spPr/>
+        <p:txBody>
+          <a:bodyPr/>
+          <a:lstStyle/>
+          <a:p>
+            <a:r>
+              <a:t>[-] Only if asked: the window starts at 1, adds 1 per ACK until the threshold 16, then 1/window per ACK. In the 62-packet run the final window was 18.71.</a:t>
+            </a:r>
+          </a:p>
+          <a:p/>
+          <a:p>
+            <a:r>
+              <a:t>Likely question: Use this slide to answer 'show me congestion avoidance'.</a:t>
+            </a:r>
+          </a:p>
+        </p:txBody>
+      </p:sp>
+      <p:sp>
+        <p:nvSpPr>
+          <p:cNvPr id="4" name="Slide Number Placeholder 3"/>
+          <p:cNvSpPr>
+            <a:spLocks noGrp="1"/>
+          </p:cNvSpPr>
+          <p:nvPr>
+            <p:ph type="sldNum" sz="quarter" idx="10"/>
+          </p:nvPr>
+        </p:nvSpPr>
+        <p:spPr/>
+        <p:txBody>
+          <a:bodyPr/>
+          <a:lstStyle/>
+          <a:p>
+            <a:fld id="{F7021451-1387-4CA6-816F-3879F97B5CBC}" type="slidenum">
+              <a:rPr lang="en-US"/>
+              <a:t>33</a:t>
             </a:fld>
             <a:endParaRPr lang="en-US"/>
           </a:p>
@@ -3686,24 +3690,19 @@
           <a:lstStyle/>
           <a:p>
             <a:r>
-              <a:t>Time: 0:40</a:t>
+              <a:t>[0:40] Four pieces: handshake, reliability, flow control and congestion control.</a:t>
             </a:r>
           </a:p>
           <a:p/>
           <a:p>
             <a:r>
-              <a:t>- Four pieces: handshake, reliability, flow control and congestion control.</a:t>
-            </a:r>
-          </a:p>
-          <a:p>
-            <a:r>
-              <a:t>- About 670 lines of C across four source files, built in eight phases, on GitHub at Capsturrrr/rudp.</a:t>
+              <a:t>About 670 lines of C across four source files, built in eight phases, on GitHub at Capsturrrr/rudp.</a:t>
             </a:r>
           </a:p>
           <a:p/>
           <a:p>
             <a:r>
-              <a:t>IF ASKED: Q: Who did what? A: Agree one answer as a team before you go in.</a:t>
+              <a:t>Likely question: Q: Who did what? A: Agree one answer as a team before you go in.</a:t>
             </a:r>
           </a:p>
         </p:txBody>
@@ -3789,29 +3788,25 @@
           <a:lstStyle/>
           <a:p>
             <a:r>
-              <a:t>Time: 0:40</a:t>
+              <a:t>[0:40] 13-byte header: sequence 4, ack 4, flags 1, checksum 2, payload length 2.</a:t>
             </a:r>
           </a:p>
           <a:p/>
           <a:p>
             <a:r>
-              <a:t>- 13-byte header: sequence 4, ack 4, flags 1, checksum 2, payload length 2.</a:t>
-            </a:r>
-          </a:p>
-          <a:p>
-            <a:r>
-              <a:t>- Fields are packed byte by byte so compiler padding never changes the wire format.</a:t>
-            </a:r>
-          </a:p>
-          <a:p>
-            <a:r>
-              <a:t>- A data packet is 53 bytes on the wire; ACKs and handshake packets are 13.</a:t>
+              <a:t>Fields are packed byte by byte so compiler padding never changes the wire format.</a:t>
             </a:r>
           </a:p>
           <a:p/>
           <a:p>
             <a:r>
-              <a:t>IF ASKED: Q: How does the checksum work? A: 16-bit one's-complement sum over header and payload, like UDP/TCP. A corrupted packet fails and is recovered by retransmission.</a:t>
+              <a:t>A data packet is 53 bytes on the wire; ACKs and handshake packets are 13.</a:t>
+            </a:r>
+          </a:p>
+          <a:p/>
+          <a:p>
+            <a:r>
+              <a:t>Likely question: Q: How does the checksum work? A: 16-bit one's-complement sum over header and payload, like UDP/TCP. A corrupted packet fails and is recovered by retransmission.</a:t>
             </a:r>
           </a:p>
         </p:txBody>
@@ -3897,29 +3892,25 @@
           <a:lstStyle/>
           <a:p>
             <a:r>
-              <a:t>Time: 0:50</a:t>
+              <a:t>[0:50] Three-way handshake: SYN, SYN-ACK, ACK. Then data, up to a window of packets in flight.</a:t>
             </a:r>
           </a:p>
           <a:p/>
           <a:p>
             <a:r>
-              <a:t>- Three-way handshake: SYN, SYN-ACK, ACK. Then data, up to a window of packets in flight.</a:t>
-            </a:r>
-          </a:p>
-          <a:p>
-            <a:r>
-              <a:t>- ACKs are cumulative: ACK N confirms everything before N. FIN closes the connection.</a:t>
-            </a:r>
-          </a:p>
-          <a:p>
-            <a:r>
-              <a:t>- The server accepts a new SYN in any state, so a killed client can never leave it stuck. That was a real bug we fixed.</a:t>
+              <a:t>ACKs are cumulative: ACK N confirms everything before N. FIN closes the connection.</a:t>
             </a:r>
           </a:p>
           <a:p/>
           <a:p>
             <a:r>
-              <a:t>IF ASKED: Q: What if the peer disappears? A: Sender keeps retransmitting on timeout. An abort after repeated timeouts is not implemented; it is the fix we would add.</a:t>
+              <a:t>The server accepts a new SYN in any state, so a killed client can never leave it stuck. That was a real bug we fixed.</a:t>
+            </a:r>
+          </a:p>
+          <a:p/>
+          <a:p>
+            <a:r>
+              <a:t>Likely question: Q: What if the peer disappears? A: Sender keeps retransmitting on timeout. An abort after repeated timeouts is not implemented; it is the fix we would add.</a:t>
             </a:r>
           </a:p>
         </p:txBody>
@@ -4005,29 +3996,25 @@
           <a:lstStyle/>
           <a:p>
             <a:r>
-              <a:t>Time: 0:50</a:t>
+              <a:t>[0:50] The window is the number of packets in flight; it started fixed at 4 and is now driven by the congestion window.</a:t>
             </a:r>
           </a:p>
           <a:p/>
           <a:p>
             <a:r>
-              <a:t>- The window is the number of packets in flight; it started fixed at 4 and is now driven by the congestion window.</a:t>
-            </a:r>
-          </a:p>
-          <a:p>
-            <a:r>
-              <a:t>- Timeout is 500 ms; fast retransmit triggers after 3 duplicate ACKs, no waiting for the timer.</a:t>
-            </a:r>
-          </a:p>
-          <a:p>
-            <a:r>
-              <a:t>- Proof: in a 20% loss netem capture we saw 12 timeouts about 500 ms apart. Result: the 2,442-byte message reassembled correctly.</a:t>
+              <a:t>Timeout is 500 ms; fast retransmit triggers after 3 duplicate ACKs, no waiting for the timer.</a:t>
             </a:r>
           </a:p>
           <a:p/>
           <a:p>
             <a:r>
-              <a:t>IF ASKED: Q: Why Go-Back-N? A: Simpler to build and explain. It wastes bandwidth under loss; Selective Repeat with SACK is our stated future work.</a:t>
+              <a:t>Proof: in a 20% loss netem capture we saw 12 timeouts about 500 ms apart. Result: the 2,442-byte message reassembled correctly.</a:t>
+            </a:r>
+          </a:p>
+          <a:p/>
+          <a:p>
+            <a:r>
+              <a:t>Likely question: Q: Why Go-Back-N? A: Simpler to build and explain. It wastes bandwidth under loss; Selective Repeat with SACK is our stated future work.</a:t>
             </a:r>
           </a:p>
         </p:txBody>
@@ -4113,29 +4100,25 @@
           <a:lstStyle/>
           <a:p>
             <a:r>
-              <a:t>Time: 0:50</a:t>
+              <a:t>[0:50] Slow start: window grows by one per ACK until the threshold of 16. Then avoidance: plus 1/window per ACK.</a:t>
             </a:r>
           </a:p>
           <a:p/>
           <a:p>
             <a:r>
-              <a:t>- Slow start: window grows by one per ACK until the threshold of 16. Then avoidance: plus 1/window per ACK.</a:t>
-            </a:r>
-          </a:p>
-          <a:p>
-            <a:r>
-              <a:t>- Three duplicate ACKs: window halves. A timeout: window resets to 1 and the threshold halves. Cap is 32.</a:t>
-            </a:r>
-          </a:p>
-          <a:p>
-            <a:r>
-              <a:t>- The graph shows fresh runs at 0, 10, 20 and 40 percent loss. Red marks are timeouts, green are fast retransmits.</a:t>
+              <a:t>Three duplicate ACKs: window halves. A timeout: window resets to 1 and the threshold halves. Cap is 32.</a:t>
             </a:r>
           </a:p>
           <a:p/>
           <a:p>
             <a:r>
-              <a:t>IF ASKED: Q: Why cap 32 and ssthresh 16? A: The cap stops a lossless run growing without bound; 16 is where doubling switches to linear growth.</a:t>
+              <a:t>The graph shows fresh runs at 0, 10, 20 and 40 percent loss. Red marks are timeouts, green are fast retransmits.</a:t>
+            </a:r>
+          </a:p>
+          <a:p/>
+          <a:p>
+            <a:r>
+              <a:t>Likely question: Q: Why cap 32 and ssthresh 16? A: The cap stops a lossless run growing without bound; 16 is where doubling switches to linear growth.</a:t>
             </a:r>
           </a:p>
         </p:txBody>
@@ -4221,24 +4204,19 @@
           <a:lstStyle/>
           <a:p>
             <a:r>
-              <a:t>Time: 0:40</a:t>
+              <a:t>[0:40] Three tools: a loss simulator inside the code (used for the benchmark), Linux tc/netem injecting real loss on loopback, and Wireshark/tshark.</a:t>
             </a:r>
           </a:p>
           <a:p/>
           <a:p>
             <a:r>
-              <a:t>- Three tools: a loss simulator inside the code (used for the benchmark), Linux tc/netem injecting real loss on loopback, and Wireshark/tshark.</a:t>
-            </a:r>
-          </a:p>
-          <a:p>
-            <a:r>
-              <a:t>- Windows Wireshark could not see WSL loopback, so we captured with tshark inside WSL and copied the file across.</a:t>
+              <a:t>Windows Wireshark could not see WSL loopback, so we captured with tshark inside WSL and copied the file across.</a:t>
             </a:r>
           </a:p>
           <a:p/>
           <a:p>
             <a:r>
-              <a:t>IF ASKED: Q: Is the loss real? A: Benchmark and chat loss is simulated in the program. We also captured a real loopback run with tshark and netem loss.</a:t>
+              <a:t>Likely question: Q: Is the loss real? A: Benchmark and chat loss is simulated in the program. We also captured a real loopback run with tshark and netem loss.</a:t>
             </a:r>
           </a:p>
         </p:txBody>
@@ -4870,7 +4848,7 @@
                 <a:ea typeface="Courier New" pitchFamily="34" charset="-122"/>
                 <a:cs typeface="Courier New" pitchFamily="34" charset="-120"/>
               </a:rPr>
-              <a:t>10 / 32   Smart-RUDP</a:t>
+              <a:t>10 / 33   Smart-RUDP</a:t>
             </a:r>
             <a:endParaRPr lang="en-US" sz="1000" dirty="0"/>
           </a:p>
@@ -5067,7 +5045,7 @@
                 <a:ea typeface="Courier New" pitchFamily="34" charset="-122"/>
                 <a:cs typeface="Courier New" pitchFamily="34" charset="-120"/>
               </a:rPr>
-              <a:t>11 / 32   Smart-RUDP</a:t>
+              <a:t>11 / 33   Smart-RUDP</a:t>
             </a:r>
             <a:endParaRPr lang="en-US" sz="1000" dirty="0"/>
           </a:p>
@@ -5897,7 +5875,7 @@
                 <a:ea typeface="Courier New" pitchFamily="34" charset="-122"/>
                 <a:cs typeface="Courier New" pitchFamily="34" charset="-120"/>
               </a:rPr>
-              <a:t>12 / 32   Smart-RUDP</a:t>
+              <a:t>12 / 33   Smart-RUDP</a:t>
             </a:r>
             <a:endParaRPr lang="en-US" sz="1000" dirty="0"/>
           </a:p>
@@ -6194,7 +6172,7 @@
                 <a:ea typeface="Courier New" pitchFamily="34" charset="-122"/>
                 <a:cs typeface="Courier New" pitchFamily="34" charset="-120"/>
               </a:rPr>
-              <a:t>13 / 32   Smart-RUDP</a:t>
+              <a:t>13 / 33   Smart-RUDP</a:t>
             </a:r>
             <a:endParaRPr lang="en-US" sz="1000" dirty="0"/>
           </a:p>
@@ -6494,7 +6472,7 @@
                 <a:ea typeface="Courier New" pitchFamily="34" charset="-122"/>
                 <a:cs typeface="Courier New" pitchFamily="34" charset="-120"/>
               </a:rPr>
-              <a:t>14 / 32   Smart-RUDP</a:t>
+              <a:t>14 / 33   Smart-RUDP</a:t>
             </a:r>
             <a:endParaRPr lang="en-US" sz="1000" dirty="0"/>
           </a:p>
@@ -6878,7 +6856,7 @@
                 <a:ea typeface="Courier New" pitchFamily="34" charset="-122"/>
                 <a:cs typeface="Courier New" pitchFamily="34" charset="-120"/>
               </a:rPr>
-              <a:t>15 / 32   Smart-RUDP</a:t>
+              <a:t>15 / 33   Smart-RUDP</a:t>
             </a:r>
             <a:endParaRPr lang="en-US" sz="1000" dirty="0"/>
           </a:p>
@@ -7336,7 +7314,7 @@
                 <a:ea typeface="Courier New" pitchFamily="34" charset="-122"/>
                 <a:cs typeface="Courier New" pitchFamily="34" charset="-120"/>
               </a:rPr>
-              <a:t>16 / 32   Smart-RUDP</a:t>
+              <a:t>16 / 33   Smart-RUDP</a:t>
             </a:r>
             <a:endParaRPr lang="en-US" sz="1000" dirty="0"/>
           </a:p>
@@ -8021,7 +7999,7 @@
                 <a:ea typeface="Courier New" pitchFamily="34" charset="-122"/>
                 <a:cs typeface="Courier New" pitchFamily="34" charset="-120"/>
               </a:rPr>
-              <a:t>17 / 32   Smart-RUDP</a:t>
+              <a:t>17 / 33   Smart-RUDP</a:t>
             </a:r>
             <a:endParaRPr lang="en-US" sz="1000" dirty="0"/>
           </a:p>
@@ -8261,7 +8239,7 @@
                 <a:ea typeface="Courier New" pitchFamily="34" charset="-122"/>
                 <a:cs typeface="Courier New" pitchFamily="34" charset="-120"/>
               </a:rPr>
-              <a:t>18 / 32   Smart-RUDP</a:t>
+              <a:t>18 / 33   Smart-RUDP</a:t>
             </a:r>
             <a:endParaRPr lang="en-US" sz="1000" dirty="0"/>
           </a:p>
@@ -8501,7 +8479,7 @@
                 <a:ea typeface="Courier New" pitchFamily="34" charset="-122"/>
                 <a:cs typeface="Courier New" pitchFamily="34" charset="-120"/>
               </a:rPr>
-              <a:t>19 / 32   Smart-RUDP</a:t>
+              <a:t>19 / 33   Smart-RUDP</a:t>
             </a:r>
             <a:endParaRPr lang="en-US" sz="1000" dirty="0"/>
           </a:p>
@@ -8723,7 +8701,7 @@
                 <a:ea typeface="Courier New" pitchFamily="34" charset="-122"/>
                 <a:cs typeface="Courier New" pitchFamily="34" charset="-120"/>
               </a:rPr>
-              <a:t>2 / 32   Smart-RUDP</a:t>
+              <a:t>2 / 33   Smart-RUDP</a:t>
             </a:r>
             <a:endParaRPr lang="en-US" sz="1000" dirty="0"/>
           </a:p>
@@ -9117,7 +9095,7 @@
                 <a:ea typeface="Courier New" pitchFamily="34" charset="-122"/>
                 <a:cs typeface="Courier New" pitchFamily="34" charset="-120"/>
               </a:rPr>
-              <a:t>20 / 32   Smart-RUDP</a:t>
+              <a:t>20 / 33   Smart-RUDP</a:t>
             </a:r>
             <a:endParaRPr lang="en-US" sz="1000" dirty="0"/>
           </a:p>
@@ -9441,7 +9419,7 @@
                 <a:ea typeface="Courier New" pitchFamily="34" charset="-122"/>
                 <a:cs typeface="Courier New" pitchFamily="34" charset="-120"/>
               </a:rPr>
-              <a:t>21 / 32   Smart-RUDP</a:t>
+              <a:t>21 / 33   Smart-RUDP</a:t>
             </a:r>
             <a:endParaRPr lang="en-US" sz="1000" dirty="0"/>
           </a:p>
@@ -11148,7 +11126,7 @@
                 <a:ea typeface="Courier New" pitchFamily="34" charset="-122"/>
                 <a:cs typeface="Courier New" pitchFamily="34" charset="-120"/>
               </a:rPr>
-              <a:t>22 / 32   Smart-RUDP</a:t>
+              <a:t>22 / 33   Smart-RUDP</a:t>
             </a:r>
             <a:endParaRPr lang="en-US" sz="1000" dirty="0"/>
           </a:p>
@@ -12531,7 +12509,7 @@
                 <a:ea typeface="Courier New" pitchFamily="34" charset="-122"/>
                 <a:cs typeface="Courier New" pitchFamily="34" charset="-120"/>
               </a:rPr>
-              <a:t>23 / 32   Smart-RUDP</a:t>
+              <a:t>23 / 33   Smart-RUDP</a:t>
             </a:r>
             <a:endParaRPr lang="en-US" sz="1000" dirty="0"/>
           </a:p>
@@ -14074,7 +14052,7 @@
                 <a:ea typeface="Courier New" pitchFamily="34" charset="-122"/>
                 <a:cs typeface="Courier New" pitchFamily="34" charset="-120"/>
               </a:rPr>
-              <a:t>24 / 32   Smart-RUDP</a:t>
+              <a:t>24 / 33   Smart-RUDP</a:t>
             </a:r>
             <a:endParaRPr lang="en-US" sz="1000" dirty="0"/>
           </a:p>
@@ -15752,7 +15730,7 @@
                 <a:ea typeface="Courier New" pitchFamily="34" charset="-122"/>
                 <a:cs typeface="Courier New" pitchFamily="34" charset="-120"/>
               </a:rPr>
-              <a:t>25 / 32   Smart-RUDP</a:t>
+              <a:t>25 / 33   Smart-RUDP</a:t>
             </a:r>
             <a:endParaRPr lang="en-US" sz="1000" dirty="0"/>
           </a:p>
@@ -17430,7 +17408,7 @@
                 <a:ea typeface="Courier New" pitchFamily="34" charset="-122"/>
                 <a:cs typeface="Courier New" pitchFamily="34" charset="-120"/>
               </a:rPr>
-              <a:t>26 / 32   Smart-RUDP</a:t>
+              <a:t>26 / 33   Smart-RUDP</a:t>
             </a:r>
             <a:endParaRPr lang="en-US" sz="1000" dirty="0"/>
           </a:p>
@@ -19770,7 +19748,7 @@
                 <a:ea typeface="Courier New" pitchFamily="34" charset="-122"/>
                 <a:cs typeface="Courier New" pitchFamily="34" charset="-120"/>
               </a:rPr>
-              <a:t>27 / 32   Smart-RUDP</a:t>
+              <a:t>27 / 33   Smart-RUDP</a:t>
             </a:r>
             <a:endParaRPr lang="en-US" sz="1000" dirty="0"/>
           </a:p>
@@ -20228,7 +20206,7 @@
                 <a:ea typeface="Courier New" pitchFamily="34" charset="-122"/>
                 <a:cs typeface="Courier New" pitchFamily="34" charset="-120"/>
               </a:rPr>
-              <a:t>28 / 32   Smart-RUDP</a:t>
+              <a:t>28 / 33   Smart-RUDP</a:t>
             </a:r>
             <a:endParaRPr lang="en-US" sz="1000" dirty="0"/>
           </a:p>
@@ -20460,7 +20438,7 @@
                 <a:ea typeface="Courier New" pitchFamily="34" charset="-122"/>
                 <a:cs typeface="Courier New" pitchFamily="34" charset="-120"/>
               </a:rPr>
-              <a:t>29 / 32   Smart-RUDP</a:t>
+              <a:t>29 / 33   Smart-RUDP</a:t>
             </a:r>
             <a:endParaRPr lang="en-US" sz="1000" dirty="0"/>
           </a:p>
@@ -23206,7 +23184,7 @@
                 <a:ea typeface="Courier New" pitchFamily="34" charset="-122"/>
                 <a:cs typeface="Courier New" pitchFamily="34" charset="-120"/>
               </a:rPr>
-              <a:t>3 / 32   Smart-RUDP</a:t>
+              <a:t>3 / 33   Smart-RUDP</a:t>
             </a:r>
             <a:endParaRPr lang="en-US" sz="1000" dirty="0"/>
           </a:p>
@@ -23561,7 +23539,7 @@
                 <a:ea typeface="Courier New" pitchFamily="34" charset="-122"/>
                 <a:cs typeface="Courier New" pitchFamily="34" charset="-120"/>
               </a:rPr>
-              <a:t>Learnings and future work</a:t>
+              <a:t>Closing gaps: fairness and cross traffic</a:t>
             </a:r>
             <a:endParaRPr lang="en-US" sz="3000" dirty="0"/>
           </a:p>
@@ -23600,86 +23578,2144 @@
                 <a:ea typeface="Courier New" pitchFamily="34" charset="-122"/>
                 <a:cs typeface="Courier New" pitchFamily="34" charset="-120"/>
               </a:rPr>
-              <a:t>30 / 32   Smart-RUDP</a:t>
+              <a:t>30 / 33   Smart-RUDP</a:t>
             </a:r>
             <a:endParaRPr lang="en-US" sz="1000" dirty="0"/>
           </a:p>
         </p:txBody>
       </p:sp>
-      <p:sp>
-        <p:nvSpPr>
-          <p:cNvPr id="4" name="Shape 2"/>
+      <p:graphicFrame>
+        <p:nvGraphicFramePr>
+          <p:cNvPr id="31" name="Table 0"/>
+          <p:cNvGraphicFramePr>
+            <a:graphicFrameLocks noGrp="1"/>
+          </p:cNvGraphicFramePr>
+          <p:nvPr>
+            <p:extLst>
+              <p:ext uri="{D42A27DB-BD31-4B8C-83A1-F6EECF244321}">
+                <p14:modId xmlns:p14="http://schemas.microsoft.com/office/powerpoint/2010/main" val="1579011935"/>
+              </p:ext>
+            </p:extLst>
+          </p:nvPr>
+        </p:nvGraphicFramePr>
+        <p:xfrm>
+          <a:off x="548640" y="1188720"/>
+          <a:ext cx="5394960" cy="914400"/>
+        </p:xfrm>
+        <a:graphic>
+          <a:graphicData uri="http://schemas.openxmlformats.org/drawingml/2006/table">
+            <a:tbl>
+              <a:tblPr/>
+              <a:tblGrid>
+                <a:gridCol w="2651760"/>
+                <a:gridCol w="1463040"/>
+                <a:gridCol w="1280160"/>
+              </a:tblGrid>
+              <a:tr h="384048">
+                <a:tc>
+                  <a:txBody>
+                    <a:bodyPr/>
+                    <a:lstStyle/>
+                    <a:p>
+                      <a:pPr indent="0" marL="0">
+                        <a:buNone/>
+                      </a:pPr>
+                      <a:r>
+                        <a:rPr lang="en-US" sz="1300" b="1" dirty="0">
+                          <a:solidFill>
+                            <a:srgbClr val="0B0F14"/>
+                          </a:solidFill>
+                          <a:latin typeface="Courier New" pitchFamily="34" charset="0"/>
+                          <a:ea typeface="Courier New" pitchFamily="34" charset="-122"/>
+                          <a:cs typeface="Courier New" pitchFamily="34" charset="-120"/>
+                        </a:rPr>
+                        <a:t>Neural vs tuned AIMD</a:t>
+                      </a:r>
+                      <a:endParaRPr lang="en-US" sz="1300" dirty="0">
+                        <a:latin typeface="Courier New" charset="0"/>
+                        <a:ea typeface="Courier New" charset="0"/>
+                        <a:cs typeface="Courier New" charset="0"/>
+                      </a:endParaRPr>
+                    </a:p>
+                  </a:txBody>
+                  <a:tcPr marL="91440" marR="91440" marT="45720" marB="45720">
+                    <a:lnL w="12700" cap="flat" cmpd="sng" algn="ctr">
+                      <a:solidFill>
+                        <a:srgbClr val="2A3441"/>
+                      </a:solidFill>
+                      <a:prstDash val="solid"/>
+                      <a:round/>
+                      <a:headEnd type="none" w="med" len="med"/>
+                      <a:tailEnd type="none" w="med" len="med"/>
+                    </a:lnL>
+                    <a:lnR w="12700" cap="flat" cmpd="sng" algn="ctr">
+                      <a:solidFill>
+                        <a:srgbClr val="2A3441"/>
+                      </a:solidFill>
+                      <a:prstDash val="solid"/>
+                      <a:round/>
+                      <a:headEnd type="none" w="med" len="med"/>
+                      <a:tailEnd type="none" w="med" len="med"/>
+                    </a:lnR>
+                    <a:lnT w="12700" cap="flat" cmpd="sng" algn="ctr">
+                      <a:solidFill>
+                        <a:srgbClr val="2A3441"/>
+                      </a:solidFill>
+                      <a:prstDash val="solid"/>
+                      <a:round/>
+                      <a:headEnd type="none" w="med" len="med"/>
+                      <a:tailEnd type="none" w="med" len="med"/>
+                    </a:lnT>
+                    <a:lnB w="12700" cap="flat" cmpd="sng" algn="ctr">
+                      <a:solidFill>
+                        <a:srgbClr val="2A3441"/>
+                      </a:solidFill>
+                      <a:prstDash val="solid"/>
+                      <a:round/>
+                      <a:headEnd type="none" w="med" len="med"/>
+                      <a:tailEnd type="none" w="med" len="med"/>
+                    </a:lnB>
+                    <a:solidFill>
+                      <a:srgbClr val="39FF88"/>
+                    </a:solidFill>
+                  </a:tcPr>
+                </a:tc>
+                <a:tc>
+                  <a:txBody>
+                    <a:bodyPr/>
+                    <a:lstStyle/>
+                    <a:p>
+                      <a:pPr indent="0" marL="0">
+                        <a:buNone/>
+                      </a:pPr>
+                      <a:r>
+                        <a:rPr lang="en-US" sz="1300" b="1" dirty="0">
+                          <a:solidFill>
+                            <a:srgbClr val="0B0F14"/>
+                          </a:solidFill>
+                          <a:latin typeface="Courier New" pitchFamily="34" charset="0"/>
+                          <a:ea typeface="Courier New" pitchFamily="34" charset="-122"/>
+                          <a:cs typeface="Courier New" pitchFamily="34" charset="-120"/>
+                        </a:rPr>
+                        <a:t>Agent share</a:t>
+                      </a:r>
+                      <a:endParaRPr lang="en-US" sz="1300" dirty="0">
+                        <a:latin typeface="Courier New" charset="0"/>
+                        <a:ea typeface="Courier New" charset="0"/>
+                        <a:cs typeface="Courier New" charset="0"/>
+                      </a:endParaRPr>
+                    </a:p>
+                  </a:txBody>
+                  <a:tcPr marL="91440" marR="91440" marT="45720" marB="45720">
+                    <a:lnL w="12700" cap="flat" cmpd="sng" algn="ctr">
+                      <a:solidFill>
+                        <a:srgbClr val="2A3441"/>
+                      </a:solidFill>
+                      <a:prstDash val="solid"/>
+                      <a:round/>
+                      <a:headEnd type="none" w="med" len="med"/>
+                      <a:tailEnd type="none" w="med" len="med"/>
+                    </a:lnL>
+                    <a:lnR w="12700" cap="flat" cmpd="sng" algn="ctr">
+                      <a:solidFill>
+                        <a:srgbClr val="2A3441"/>
+                      </a:solidFill>
+                      <a:prstDash val="solid"/>
+                      <a:round/>
+                      <a:headEnd type="none" w="med" len="med"/>
+                      <a:tailEnd type="none" w="med" len="med"/>
+                    </a:lnR>
+                    <a:lnT w="12700" cap="flat" cmpd="sng" algn="ctr">
+                      <a:solidFill>
+                        <a:srgbClr val="2A3441"/>
+                      </a:solidFill>
+                      <a:prstDash val="solid"/>
+                      <a:round/>
+                      <a:headEnd type="none" w="med" len="med"/>
+                      <a:tailEnd type="none" w="med" len="med"/>
+                    </a:lnT>
+                    <a:lnB w="12700" cap="flat" cmpd="sng" algn="ctr">
+                      <a:solidFill>
+                        <a:srgbClr val="2A3441"/>
+                      </a:solidFill>
+                      <a:prstDash val="solid"/>
+                      <a:round/>
+                      <a:headEnd type="none" w="med" len="med"/>
+                      <a:tailEnd type="none" w="med" len="med"/>
+                    </a:lnB>
+                    <a:solidFill>
+                      <a:srgbClr val="39FF88"/>
+                    </a:solidFill>
+                  </a:tcPr>
+                </a:tc>
+                <a:tc>
+                  <a:txBody>
+                    <a:bodyPr/>
+                    <a:lstStyle/>
+                    <a:p>
+                      <a:pPr indent="0" marL="0">
+                        <a:buNone/>
+                      </a:pPr>
+                      <a:r>
+                        <a:rPr lang="en-US" sz="1300" b="1" dirty="0">
+                          <a:solidFill>
+                            <a:srgbClr val="0B0F14"/>
+                          </a:solidFill>
+                          <a:latin typeface="Courier New" pitchFamily="34" charset="0"/>
+                          <a:ea typeface="Courier New" pitchFamily="34" charset="-122"/>
+                          <a:cs typeface="Courier New" pitchFamily="34" charset="-120"/>
+                        </a:rPr>
+                        <a:t>Jain</a:t>
+                      </a:r>
+                      <a:endParaRPr lang="en-US" sz="1300" dirty="0">
+                        <a:latin typeface="Courier New" charset="0"/>
+                        <a:ea typeface="Courier New" charset="0"/>
+                        <a:cs typeface="Courier New" charset="0"/>
+                      </a:endParaRPr>
+                    </a:p>
+                  </a:txBody>
+                  <a:tcPr marL="91440" marR="91440" marT="45720" marB="45720">
+                    <a:lnL w="12700" cap="flat" cmpd="sng" algn="ctr">
+                      <a:solidFill>
+                        <a:srgbClr val="2A3441"/>
+                      </a:solidFill>
+                      <a:prstDash val="solid"/>
+                      <a:round/>
+                      <a:headEnd type="none" w="med" len="med"/>
+                      <a:tailEnd type="none" w="med" len="med"/>
+                    </a:lnL>
+                    <a:lnR w="12700" cap="flat" cmpd="sng" algn="ctr">
+                      <a:solidFill>
+                        <a:srgbClr val="2A3441"/>
+                      </a:solidFill>
+                      <a:prstDash val="solid"/>
+                      <a:round/>
+                      <a:headEnd type="none" w="med" len="med"/>
+                      <a:tailEnd type="none" w="med" len="med"/>
+                    </a:lnR>
+                    <a:lnT w="12700" cap="flat" cmpd="sng" algn="ctr">
+                      <a:solidFill>
+                        <a:srgbClr val="2A3441"/>
+                      </a:solidFill>
+                      <a:prstDash val="solid"/>
+                      <a:round/>
+                      <a:headEnd type="none" w="med" len="med"/>
+                      <a:tailEnd type="none" w="med" len="med"/>
+                    </a:lnT>
+                    <a:lnB w="12700" cap="flat" cmpd="sng" algn="ctr">
+                      <a:solidFill>
+                        <a:srgbClr val="2A3441"/>
+                      </a:solidFill>
+                      <a:prstDash val="solid"/>
+                      <a:round/>
+                      <a:headEnd type="none" w="med" len="med"/>
+                      <a:tailEnd type="none" w="med" len="med"/>
+                    </a:lnB>
+                    <a:solidFill>
+                      <a:srgbClr val="39FF88"/>
+                    </a:solidFill>
+                  </a:tcPr>
+                </a:tc>
+              </a:tr>
+              <a:tr h="384048">
+                <a:tc>
+                  <a:txBody>
+                    <a:bodyPr/>
+                    <a:lstStyle/>
+                    <a:p>
+                      <a:pPr indent="0" marL="0">
+                        <a:buNone/>
+                      </a:pPr>
+                      <a:r>
+                        <a:rPr lang="en-US" sz="1300" dirty="0">
+                          <a:solidFill>
+                            <a:srgbClr val="E6EDF3"/>
+                          </a:solidFill>
+                          <a:latin typeface="Calibri" pitchFamily="34" charset="0"/>
+                          <a:ea typeface="Calibri" pitchFamily="34" charset="-122"/>
+                          <a:cs typeface="Calibri" pitchFamily="34" charset="-120"/>
+                        </a:rPr>
+                        <a:t>Default</a:t>
+                      </a:r>
+                      <a:endParaRPr lang="en-US" sz="1300" dirty="0">
+                        <a:latin typeface="Calibri" charset="0"/>
+                        <a:ea typeface="Calibri" charset="0"/>
+                        <a:cs typeface="Calibri" charset="0"/>
+                      </a:endParaRPr>
+                    </a:p>
+                  </a:txBody>
+                  <a:tcPr marL="91440" marR="91440" marT="45720" marB="45720">
+                    <a:lnL w="12700" cap="flat" cmpd="sng" algn="ctr">
+                      <a:solidFill>
+                        <a:srgbClr val="2A3441"/>
+                      </a:solidFill>
+                      <a:prstDash val="solid"/>
+                      <a:round/>
+                      <a:headEnd type="none" w="med" len="med"/>
+                      <a:tailEnd type="none" w="med" len="med"/>
+                    </a:lnL>
+                    <a:lnR w="12700" cap="flat" cmpd="sng" algn="ctr">
+                      <a:solidFill>
+                        <a:srgbClr val="2A3441"/>
+                      </a:solidFill>
+                      <a:prstDash val="solid"/>
+                      <a:round/>
+                      <a:headEnd type="none" w="med" len="med"/>
+                      <a:tailEnd type="none" w="med" len="med"/>
+                    </a:lnR>
+                    <a:lnT w="12700" cap="flat" cmpd="sng" algn="ctr">
+                      <a:solidFill>
+                        <a:srgbClr val="2A3441"/>
+                      </a:solidFill>
+                      <a:prstDash val="solid"/>
+                      <a:round/>
+                      <a:headEnd type="none" w="med" len="med"/>
+                      <a:tailEnd type="none" w="med" len="med"/>
+                    </a:lnT>
+                    <a:lnB w="12700" cap="flat" cmpd="sng" algn="ctr">
+                      <a:solidFill>
+                        <a:srgbClr val="2A3441"/>
+                      </a:solidFill>
+                      <a:prstDash val="solid"/>
+                      <a:round/>
+                      <a:headEnd type="none" w="med" len="med"/>
+                      <a:tailEnd type="none" w="med" len="med"/>
+                    </a:lnB>
+                    <a:solidFill>
+                      <a:srgbClr val="141B24"/>
+                    </a:solidFill>
+                  </a:tcPr>
+                </a:tc>
+                <a:tc>
+                  <a:txBody>
+                    <a:bodyPr/>
+                    <a:lstStyle/>
+                    <a:p>
+                      <a:pPr indent="0" marL="0">
+                        <a:buNone/>
+                      </a:pPr>
+                      <a:r>
+                        <a:rPr lang="en-US" sz="1300" dirty="0">
+                          <a:solidFill>
+                            <a:srgbClr val="E6EDF3"/>
+                          </a:solidFill>
+                          <a:latin typeface="Calibri" pitchFamily="34" charset="0"/>
+                          <a:ea typeface="Calibri" pitchFamily="34" charset="-122"/>
+                          <a:cs typeface="Calibri" pitchFamily="34" charset="-120"/>
+                        </a:rPr>
+                        <a:t>70%</a:t>
+                      </a:r>
+                      <a:endParaRPr lang="en-US" sz="1300" dirty="0">
+                        <a:latin typeface="Calibri" charset="0"/>
+                        <a:ea typeface="Calibri" charset="0"/>
+                        <a:cs typeface="Calibri" charset="0"/>
+                      </a:endParaRPr>
+                    </a:p>
+                  </a:txBody>
+                  <a:tcPr marL="91440" marR="91440" marT="45720" marB="45720">
+                    <a:lnL w="12700" cap="flat" cmpd="sng" algn="ctr">
+                      <a:solidFill>
+                        <a:srgbClr val="2A3441"/>
+                      </a:solidFill>
+                      <a:prstDash val="solid"/>
+                      <a:round/>
+                      <a:headEnd type="none" w="med" len="med"/>
+                      <a:tailEnd type="none" w="med" len="med"/>
+                    </a:lnL>
+                    <a:lnR w="12700" cap="flat" cmpd="sng" algn="ctr">
+                      <a:solidFill>
+                        <a:srgbClr val="2A3441"/>
+                      </a:solidFill>
+                      <a:prstDash val="solid"/>
+                      <a:round/>
+                      <a:headEnd type="none" w="med" len="med"/>
+                      <a:tailEnd type="none" w="med" len="med"/>
+                    </a:lnR>
+                    <a:lnT w="12700" cap="flat" cmpd="sng" algn="ctr">
+                      <a:solidFill>
+                        <a:srgbClr val="2A3441"/>
+                      </a:solidFill>
+                      <a:prstDash val="solid"/>
+                      <a:round/>
+                      <a:headEnd type="none" w="med" len="med"/>
+                      <a:tailEnd type="none" w="med" len="med"/>
+                    </a:lnT>
+                    <a:lnB w="12700" cap="flat" cmpd="sng" algn="ctr">
+                      <a:solidFill>
+                        <a:srgbClr val="2A3441"/>
+                      </a:solidFill>
+                      <a:prstDash val="solid"/>
+                      <a:round/>
+                      <a:headEnd type="none" w="med" len="med"/>
+                      <a:tailEnd type="none" w="med" len="med"/>
+                    </a:lnB>
+                    <a:solidFill>
+                      <a:srgbClr val="141B24"/>
+                    </a:solidFill>
+                  </a:tcPr>
+                </a:tc>
+                <a:tc>
+                  <a:txBody>
+                    <a:bodyPr/>
+                    <a:lstStyle/>
+                    <a:p>
+                      <a:pPr indent="0" marL="0">
+                        <a:buNone/>
+                      </a:pPr>
+                      <a:r>
+                        <a:rPr lang="en-US" sz="1300" dirty="0">
+                          <a:solidFill>
+                            <a:srgbClr val="E6EDF3"/>
+                          </a:solidFill>
+                          <a:latin typeface="Calibri" pitchFamily="34" charset="0"/>
+                          <a:ea typeface="Calibri" pitchFamily="34" charset="-122"/>
+                          <a:cs typeface="Calibri" pitchFamily="34" charset="-120"/>
+                        </a:rPr>
+                        <a:t>0.86</a:t>
+                      </a:r>
+                      <a:endParaRPr lang="en-US" sz="1300" dirty="0">
+                        <a:latin typeface="Calibri" charset="0"/>
+                        <a:ea typeface="Calibri" charset="0"/>
+                        <a:cs typeface="Calibri" charset="0"/>
+                      </a:endParaRPr>
+                    </a:p>
+                  </a:txBody>
+                  <a:tcPr marL="91440" marR="91440" marT="45720" marB="45720">
+                    <a:lnL w="12700" cap="flat" cmpd="sng" algn="ctr">
+                      <a:solidFill>
+                        <a:srgbClr val="2A3441"/>
+                      </a:solidFill>
+                      <a:prstDash val="solid"/>
+                      <a:round/>
+                      <a:headEnd type="none" w="med" len="med"/>
+                      <a:tailEnd type="none" w="med" len="med"/>
+                    </a:lnL>
+                    <a:lnR w="12700" cap="flat" cmpd="sng" algn="ctr">
+                      <a:solidFill>
+                        <a:srgbClr val="2A3441"/>
+                      </a:solidFill>
+                      <a:prstDash val="solid"/>
+                      <a:round/>
+                      <a:headEnd type="none" w="med" len="med"/>
+                      <a:tailEnd type="none" w="med" len="med"/>
+                    </a:lnR>
+                    <a:lnT w="12700" cap="flat" cmpd="sng" algn="ctr">
+                      <a:solidFill>
+                        <a:srgbClr val="2A3441"/>
+                      </a:solidFill>
+                      <a:prstDash val="solid"/>
+                      <a:round/>
+                      <a:headEnd type="none" w="med" len="med"/>
+                      <a:tailEnd type="none" w="med" len="med"/>
+                    </a:lnT>
+                    <a:lnB w="12700" cap="flat" cmpd="sng" algn="ctr">
+                      <a:solidFill>
+                        <a:srgbClr val="2A3441"/>
+                      </a:solidFill>
+                      <a:prstDash val="solid"/>
+                      <a:round/>
+                      <a:headEnd type="none" w="med" len="med"/>
+                      <a:tailEnd type="none" w="med" len="med"/>
+                    </a:lnB>
+                    <a:solidFill>
+                      <a:srgbClr val="141B24"/>
+                    </a:solidFill>
+                  </a:tcPr>
+                </a:tc>
+              </a:tr>
+              <a:tr h="384048">
+                <a:tc>
+                  <a:txBody>
+                    <a:bodyPr/>
+                    <a:lstStyle/>
+                    <a:p>
+                      <a:pPr indent="0" marL="0">
+                        <a:buNone/>
+                      </a:pPr>
+                      <a:r>
+                        <a:rPr lang="en-US" sz="1300" dirty="0">
+                          <a:solidFill>
+                            <a:srgbClr val="E6EDF3"/>
+                          </a:solidFill>
+                          <a:latin typeface="Calibri" pitchFamily="34" charset="0"/>
+                          <a:ea typeface="Calibri" pitchFamily="34" charset="-122"/>
+                          <a:cs typeface="Calibri" pitchFamily="34" charset="-120"/>
+                        </a:rPr>
+                        <a:t>--polite 1.2</a:t>
+                      </a:r>
+                      <a:endParaRPr lang="en-US" sz="1300" dirty="0">
+                        <a:latin typeface="Calibri" charset="0"/>
+                        <a:ea typeface="Calibri" charset="0"/>
+                        <a:cs typeface="Calibri" charset="0"/>
+                      </a:endParaRPr>
+                    </a:p>
+                  </a:txBody>
+                  <a:tcPr marL="91440" marR="91440" marT="45720" marB="45720">
+                    <a:lnL w="12700" cap="flat" cmpd="sng" algn="ctr">
+                      <a:solidFill>
+                        <a:srgbClr val="2A3441"/>
+                      </a:solidFill>
+                      <a:prstDash val="solid"/>
+                      <a:round/>
+                      <a:headEnd type="none" w="med" len="med"/>
+                      <a:tailEnd type="none" w="med" len="med"/>
+                    </a:lnL>
+                    <a:lnR w="12700" cap="flat" cmpd="sng" algn="ctr">
+                      <a:solidFill>
+                        <a:srgbClr val="2A3441"/>
+                      </a:solidFill>
+                      <a:prstDash val="solid"/>
+                      <a:round/>
+                      <a:headEnd type="none" w="med" len="med"/>
+                      <a:tailEnd type="none" w="med" len="med"/>
+                    </a:lnR>
+                    <a:lnT w="12700" cap="flat" cmpd="sng" algn="ctr">
+                      <a:solidFill>
+                        <a:srgbClr val="2A3441"/>
+                      </a:solidFill>
+                      <a:prstDash val="solid"/>
+                      <a:round/>
+                      <a:headEnd type="none" w="med" len="med"/>
+                      <a:tailEnd type="none" w="med" len="med"/>
+                    </a:lnT>
+                    <a:lnB w="12700" cap="flat" cmpd="sng" algn="ctr">
+                      <a:solidFill>
+                        <a:srgbClr val="2A3441"/>
+                      </a:solidFill>
+                      <a:prstDash val="solid"/>
+                      <a:round/>
+                      <a:headEnd type="none" w="med" len="med"/>
+                      <a:tailEnd type="none" w="med" len="med"/>
+                    </a:lnB>
+                    <a:solidFill>
+                      <a:srgbClr val="141B24"/>
+                    </a:solidFill>
+                  </a:tcPr>
+                </a:tc>
+                <a:tc>
+                  <a:txBody>
+                    <a:bodyPr/>
+                    <a:lstStyle/>
+                    <a:p>
+                      <a:pPr indent="0" marL="0">
+                        <a:buNone/>
+                      </a:pPr>
+                      <a:r>
+                        <a:rPr lang="en-US" sz="1300" dirty="0">
+                          <a:solidFill>
+                            <a:srgbClr val="E6EDF3"/>
+                          </a:solidFill>
+                          <a:latin typeface="Calibri" pitchFamily="34" charset="0"/>
+                          <a:ea typeface="Calibri" pitchFamily="34" charset="-122"/>
+                          <a:cs typeface="Calibri" pitchFamily="34" charset="-120"/>
+                        </a:rPr>
+                        <a:t>49%</a:t>
+                      </a:r>
+                      <a:endParaRPr lang="en-US" sz="1300" dirty="0">
+                        <a:latin typeface="Calibri" charset="0"/>
+                        <a:ea typeface="Calibri" charset="0"/>
+                        <a:cs typeface="Calibri" charset="0"/>
+                      </a:endParaRPr>
+                    </a:p>
+                  </a:txBody>
+                  <a:tcPr marL="91440" marR="91440" marT="45720" marB="45720">
+                    <a:lnL w="12700" cap="flat" cmpd="sng" algn="ctr">
+                      <a:solidFill>
+                        <a:srgbClr val="2A3441"/>
+                      </a:solidFill>
+                      <a:prstDash val="solid"/>
+                      <a:round/>
+                      <a:headEnd type="none" w="med" len="med"/>
+                      <a:tailEnd type="none" w="med" len="med"/>
+                    </a:lnL>
+                    <a:lnR w="12700" cap="flat" cmpd="sng" algn="ctr">
+                      <a:solidFill>
+                        <a:srgbClr val="2A3441"/>
+                      </a:solidFill>
+                      <a:prstDash val="solid"/>
+                      <a:round/>
+                      <a:headEnd type="none" w="med" len="med"/>
+                      <a:tailEnd type="none" w="med" len="med"/>
+                    </a:lnR>
+                    <a:lnT w="12700" cap="flat" cmpd="sng" algn="ctr">
+                      <a:solidFill>
+                        <a:srgbClr val="2A3441"/>
+                      </a:solidFill>
+                      <a:prstDash val="solid"/>
+                      <a:round/>
+                      <a:headEnd type="none" w="med" len="med"/>
+                      <a:tailEnd type="none" w="med" len="med"/>
+                    </a:lnT>
+                    <a:lnB w="12700" cap="flat" cmpd="sng" algn="ctr">
+                      <a:solidFill>
+                        <a:srgbClr val="2A3441"/>
+                      </a:solidFill>
+                      <a:prstDash val="solid"/>
+                      <a:round/>
+                      <a:headEnd type="none" w="med" len="med"/>
+                      <a:tailEnd type="none" w="med" len="med"/>
+                    </a:lnB>
+                    <a:solidFill>
+                      <a:srgbClr val="141B24"/>
+                    </a:solidFill>
+                  </a:tcPr>
+                </a:tc>
+                <a:tc>
+                  <a:txBody>
+                    <a:bodyPr/>
+                    <a:lstStyle/>
+                    <a:p>
+                      <a:pPr indent="0" marL="0">
+                        <a:buNone/>
+                      </a:pPr>
+                      <a:r>
+                        <a:rPr lang="en-US" sz="1300" dirty="0">
+                          <a:solidFill>
+                            <a:srgbClr val="E6EDF3"/>
+                          </a:solidFill>
+                          <a:latin typeface="Calibri" pitchFamily="34" charset="0"/>
+                          <a:ea typeface="Calibri" pitchFamily="34" charset="-122"/>
+                          <a:cs typeface="Calibri" pitchFamily="34" charset="-120"/>
+                        </a:rPr>
+                        <a:t>0.95</a:t>
+                      </a:r>
+                      <a:endParaRPr lang="en-US" sz="1300" dirty="0">
+                        <a:latin typeface="Calibri" charset="0"/>
+                        <a:ea typeface="Calibri" charset="0"/>
+                        <a:cs typeface="Calibri" charset="0"/>
+                      </a:endParaRPr>
+                    </a:p>
+                  </a:txBody>
+                  <a:tcPr marL="91440" marR="91440" marT="45720" marB="45720">
+                    <a:lnL w="12700" cap="flat" cmpd="sng" algn="ctr">
+                      <a:solidFill>
+                        <a:srgbClr val="2A3441"/>
+                      </a:solidFill>
+                      <a:prstDash val="solid"/>
+                      <a:round/>
+                      <a:headEnd type="none" w="med" len="med"/>
+                      <a:tailEnd type="none" w="med" len="med"/>
+                    </a:lnL>
+                    <a:lnR w="12700" cap="flat" cmpd="sng" algn="ctr">
+                      <a:solidFill>
+                        <a:srgbClr val="2A3441"/>
+                      </a:solidFill>
+                      <a:prstDash val="solid"/>
+                      <a:round/>
+                      <a:headEnd type="none" w="med" len="med"/>
+                      <a:tailEnd type="none" w="med" len="med"/>
+                    </a:lnR>
+                    <a:lnT w="12700" cap="flat" cmpd="sng" algn="ctr">
+                      <a:solidFill>
+                        <a:srgbClr val="2A3441"/>
+                      </a:solidFill>
+                      <a:prstDash val="solid"/>
+                      <a:round/>
+                      <a:headEnd type="none" w="med" len="med"/>
+                      <a:tailEnd type="none" w="med" len="med"/>
+                    </a:lnT>
+                    <a:lnB w="12700" cap="flat" cmpd="sng" algn="ctr">
+                      <a:solidFill>
+                        <a:srgbClr val="2A3441"/>
+                      </a:solidFill>
+                      <a:prstDash val="solid"/>
+                      <a:round/>
+                      <a:headEnd type="none" w="med" len="med"/>
+                      <a:tailEnd type="none" w="med" len="med"/>
+                    </a:lnB>
+                    <a:solidFill>
+                      <a:srgbClr val="141B24"/>
+                    </a:solidFill>
+                  </a:tcPr>
+                </a:tc>
+              </a:tr>
+              <a:tr h="384048">
+                <a:tc>
+                  <a:txBody>
+                    <a:bodyPr/>
+                    <a:lstStyle/>
+                    <a:p>
+                      <a:pPr indent="0" marL="0">
+                        <a:buNone/>
+                      </a:pPr>
+                      <a:r>
+                        <a:rPr lang="en-US" sz="1300" dirty="0">
+                          <a:solidFill>
+                            <a:srgbClr val="E6EDF3"/>
+                          </a:solidFill>
+                          <a:latin typeface="Calibri" pitchFamily="34" charset="0"/>
+                          <a:ea typeface="Calibri" pitchFamily="34" charset="-122"/>
+                          <a:cs typeface="Calibri" pitchFamily="34" charset="-120"/>
+                        </a:rPr>
+                        <a:t>--polite 1.3</a:t>
+                      </a:r>
+                      <a:endParaRPr lang="en-US" sz="1300" dirty="0">
+                        <a:latin typeface="Calibri" charset="0"/>
+                        <a:ea typeface="Calibri" charset="0"/>
+                        <a:cs typeface="Calibri" charset="0"/>
+                      </a:endParaRPr>
+                    </a:p>
+                  </a:txBody>
+                  <a:tcPr marL="91440" marR="91440" marT="45720" marB="45720">
+                    <a:lnL w="12700" cap="flat" cmpd="sng" algn="ctr">
+                      <a:solidFill>
+                        <a:srgbClr val="2A3441"/>
+                      </a:solidFill>
+                      <a:prstDash val="solid"/>
+                      <a:round/>
+                      <a:headEnd type="none" w="med" len="med"/>
+                      <a:tailEnd type="none" w="med" len="med"/>
+                    </a:lnL>
+                    <a:lnR w="12700" cap="flat" cmpd="sng" algn="ctr">
+                      <a:solidFill>
+                        <a:srgbClr val="2A3441"/>
+                      </a:solidFill>
+                      <a:prstDash val="solid"/>
+                      <a:round/>
+                      <a:headEnd type="none" w="med" len="med"/>
+                      <a:tailEnd type="none" w="med" len="med"/>
+                    </a:lnR>
+                    <a:lnT w="12700" cap="flat" cmpd="sng" algn="ctr">
+                      <a:solidFill>
+                        <a:srgbClr val="2A3441"/>
+                      </a:solidFill>
+                      <a:prstDash val="solid"/>
+                      <a:round/>
+                      <a:headEnd type="none" w="med" len="med"/>
+                      <a:tailEnd type="none" w="med" len="med"/>
+                    </a:lnT>
+                    <a:lnB w="12700" cap="flat" cmpd="sng" algn="ctr">
+                      <a:solidFill>
+                        <a:srgbClr val="2A3441"/>
+                      </a:solidFill>
+                      <a:prstDash val="solid"/>
+                      <a:round/>
+                      <a:headEnd type="none" w="med" len="med"/>
+                      <a:tailEnd type="none" w="med" len="med"/>
+                    </a:lnB>
+                    <a:solidFill>
+                      <a:srgbClr val="141B24"/>
+                    </a:solidFill>
+                  </a:tcPr>
+                </a:tc>
+                <a:tc>
+                  <a:txBody>
+                    <a:bodyPr/>
+                    <a:lstStyle/>
+                    <a:p>
+                      <a:pPr indent="0" marL="0">
+                        <a:buNone/>
+                      </a:pPr>
+                      <a:r>
+                        <a:rPr lang="en-US" sz="1300" dirty="0">
+                          <a:solidFill>
+                            <a:srgbClr val="E6EDF3"/>
+                          </a:solidFill>
+                          <a:latin typeface="Calibri" pitchFamily="34" charset="0"/>
+                          <a:ea typeface="Calibri" pitchFamily="34" charset="-122"/>
+                          <a:cs typeface="Calibri" pitchFamily="34" charset="-120"/>
+                        </a:rPr>
+                        <a:t>52%</a:t>
+                      </a:r>
+                      <a:endParaRPr lang="en-US" sz="1300" dirty="0">
+                        <a:latin typeface="Calibri" charset="0"/>
+                        <a:ea typeface="Calibri" charset="0"/>
+                        <a:cs typeface="Calibri" charset="0"/>
+                      </a:endParaRPr>
+                    </a:p>
+                  </a:txBody>
+                  <a:tcPr marL="91440" marR="91440" marT="45720" marB="45720">
+                    <a:lnL w="12700" cap="flat" cmpd="sng" algn="ctr">
+                      <a:solidFill>
+                        <a:srgbClr val="2A3441"/>
+                      </a:solidFill>
+                      <a:prstDash val="solid"/>
+                      <a:round/>
+                      <a:headEnd type="none" w="med" len="med"/>
+                      <a:tailEnd type="none" w="med" len="med"/>
+                    </a:lnL>
+                    <a:lnR w="12700" cap="flat" cmpd="sng" algn="ctr">
+                      <a:solidFill>
+                        <a:srgbClr val="2A3441"/>
+                      </a:solidFill>
+                      <a:prstDash val="solid"/>
+                      <a:round/>
+                      <a:headEnd type="none" w="med" len="med"/>
+                      <a:tailEnd type="none" w="med" len="med"/>
+                    </a:lnR>
+                    <a:lnT w="12700" cap="flat" cmpd="sng" algn="ctr">
+                      <a:solidFill>
+                        <a:srgbClr val="2A3441"/>
+                      </a:solidFill>
+                      <a:prstDash val="solid"/>
+                      <a:round/>
+                      <a:headEnd type="none" w="med" len="med"/>
+                      <a:tailEnd type="none" w="med" len="med"/>
+                    </a:lnT>
+                    <a:lnB w="12700" cap="flat" cmpd="sng" algn="ctr">
+                      <a:solidFill>
+                        <a:srgbClr val="2A3441"/>
+                      </a:solidFill>
+                      <a:prstDash val="solid"/>
+                      <a:round/>
+                      <a:headEnd type="none" w="med" len="med"/>
+                      <a:tailEnd type="none" w="med" len="med"/>
+                    </a:lnB>
+                    <a:solidFill>
+                      <a:srgbClr val="141B24"/>
+                    </a:solidFill>
+                  </a:tcPr>
+                </a:tc>
+                <a:tc>
+                  <a:txBody>
+                    <a:bodyPr/>
+                    <a:lstStyle/>
+                    <a:p>
+                      <a:pPr indent="0" marL="0">
+                        <a:buNone/>
+                      </a:pPr>
+                      <a:r>
+                        <a:rPr lang="en-US" sz="1300" dirty="0">
+                          <a:solidFill>
+                            <a:srgbClr val="E6EDF3"/>
+                          </a:solidFill>
+                          <a:latin typeface="Calibri" pitchFamily="34" charset="0"/>
+                          <a:ea typeface="Calibri" pitchFamily="34" charset="-122"/>
+                          <a:cs typeface="Calibri" pitchFamily="34" charset="-120"/>
+                        </a:rPr>
+                        <a:t>0.94</a:t>
+                      </a:r>
+                      <a:endParaRPr lang="en-US" sz="1300" dirty="0">
+                        <a:latin typeface="Calibri" charset="0"/>
+                        <a:ea typeface="Calibri" charset="0"/>
+                        <a:cs typeface="Calibri" charset="0"/>
+                      </a:endParaRPr>
+                    </a:p>
+                  </a:txBody>
+                  <a:tcPr marL="91440" marR="91440" marT="45720" marB="45720">
+                    <a:lnL w="12700" cap="flat" cmpd="sng" algn="ctr">
+                      <a:solidFill>
+                        <a:srgbClr val="2A3441"/>
+                      </a:solidFill>
+                      <a:prstDash val="solid"/>
+                      <a:round/>
+                      <a:headEnd type="none" w="med" len="med"/>
+                      <a:tailEnd type="none" w="med" len="med"/>
+                    </a:lnL>
+                    <a:lnR w="12700" cap="flat" cmpd="sng" algn="ctr">
+                      <a:solidFill>
+                        <a:srgbClr val="2A3441"/>
+                      </a:solidFill>
+                      <a:prstDash val="solid"/>
+                      <a:round/>
+                      <a:headEnd type="none" w="med" len="med"/>
+                      <a:tailEnd type="none" w="med" len="med"/>
+                    </a:lnR>
+                    <a:lnT w="12700" cap="flat" cmpd="sng" algn="ctr">
+                      <a:solidFill>
+                        <a:srgbClr val="2A3441"/>
+                      </a:solidFill>
+                      <a:prstDash val="solid"/>
+                      <a:round/>
+                      <a:headEnd type="none" w="med" len="med"/>
+                      <a:tailEnd type="none" w="med" len="med"/>
+                    </a:lnT>
+                    <a:lnB w="12700" cap="flat" cmpd="sng" algn="ctr">
+                      <a:solidFill>
+                        <a:srgbClr val="2A3441"/>
+                      </a:solidFill>
+                      <a:prstDash val="solid"/>
+                      <a:round/>
+                      <a:headEnd type="none" w="med" len="med"/>
+                      <a:tailEnd type="none" w="med" len="med"/>
+                    </a:lnB>
+                    <a:solidFill>
+                      <a:srgbClr val="141B24"/>
+                    </a:solidFill>
+                  </a:tcPr>
+                </a:tc>
+              </a:tr>
+              <a:tr h="384048">
+                <a:tc>
+                  <a:txBody>
+                    <a:bodyPr/>
+                    <a:lstStyle/>
+                    <a:p>
+                      <a:pPr indent="0" marL="0">
+                        <a:buNone/>
+                      </a:pPr>
+                      <a:r>
+                        <a:rPr lang="en-US" sz="1300" dirty="0">
+                          <a:solidFill>
+                            <a:srgbClr val="E6EDF3"/>
+                          </a:solidFill>
+                          <a:latin typeface="Calibri" pitchFamily="34" charset="0"/>
+                          <a:ea typeface="Calibri" pitchFamily="34" charset="-122"/>
+                          <a:cs typeface="Calibri" pitchFamily="34" charset="-120"/>
+                        </a:rPr>
+                        <a:t>--polite 1.5</a:t>
+                      </a:r>
+                      <a:endParaRPr lang="en-US" sz="1300" dirty="0">
+                        <a:latin typeface="Calibri" charset="0"/>
+                        <a:ea typeface="Calibri" charset="0"/>
+                        <a:cs typeface="Calibri" charset="0"/>
+                      </a:endParaRPr>
+                    </a:p>
+                  </a:txBody>
+                  <a:tcPr marL="91440" marR="91440" marT="45720" marB="45720">
+                    <a:lnL w="12700" cap="flat" cmpd="sng" algn="ctr">
+                      <a:solidFill>
+                        <a:srgbClr val="2A3441"/>
+                      </a:solidFill>
+                      <a:prstDash val="solid"/>
+                      <a:round/>
+                      <a:headEnd type="none" w="med" len="med"/>
+                      <a:tailEnd type="none" w="med" len="med"/>
+                    </a:lnL>
+                    <a:lnR w="12700" cap="flat" cmpd="sng" algn="ctr">
+                      <a:solidFill>
+                        <a:srgbClr val="2A3441"/>
+                      </a:solidFill>
+                      <a:prstDash val="solid"/>
+                      <a:round/>
+                      <a:headEnd type="none" w="med" len="med"/>
+                      <a:tailEnd type="none" w="med" len="med"/>
+                    </a:lnR>
+                    <a:lnT w="12700" cap="flat" cmpd="sng" algn="ctr">
+                      <a:solidFill>
+                        <a:srgbClr val="2A3441"/>
+                      </a:solidFill>
+                      <a:prstDash val="solid"/>
+                      <a:round/>
+                      <a:headEnd type="none" w="med" len="med"/>
+                      <a:tailEnd type="none" w="med" len="med"/>
+                    </a:lnT>
+                    <a:lnB w="12700" cap="flat" cmpd="sng" algn="ctr">
+                      <a:solidFill>
+                        <a:srgbClr val="2A3441"/>
+                      </a:solidFill>
+                      <a:prstDash val="solid"/>
+                      <a:round/>
+                      <a:headEnd type="none" w="med" len="med"/>
+                      <a:tailEnd type="none" w="med" len="med"/>
+                    </a:lnB>
+                    <a:solidFill>
+                      <a:srgbClr val="141B24"/>
+                    </a:solidFill>
+                  </a:tcPr>
+                </a:tc>
+                <a:tc>
+                  <a:txBody>
+                    <a:bodyPr/>
+                    <a:lstStyle/>
+                    <a:p>
+                      <a:pPr indent="0" marL="0">
+                        <a:buNone/>
+                      </a:pPr>
+                      <a:r>
+                        <a:rPr lang="en-US" sz="1300" dirty="0">
+                          <a:solidFill>
+                            <a:srgbClr val="E6EDF3"/>
+                          </a:solidFill>
+                          <a:latin typeface="Calibri" pitchFamily="34" charset="0"/>
+                          <a:ea typeface="Calibri" pitchFamily="34" charset="-122"/>
+                          <a:cs typeface="Calibri" pitchFamily="34" charset="-120"/>
+                        </a:rPr>
+                        <a:t>59%</a:t>
+                      </a:r>
+                      <a:endParaRPr lang="en-US" sz="1300" dirty="0">
+                        <a:latin typeface="Calibri" charset="0"/>
+                        <a:ea typeface="Calibri" charset="0"/>
+                        <a:cs typeface="Calibri" charset="0"/>
+                      </a:endParaRPr>
+                    </a:p>
+                  </a:txBody>
+                  <a:tcPr marL="91440" marR="91440" marT="45720" marB="45720">
+                    <a:lnL w="12700" cap="flat" cmpd="sng" algn="ctr">
+                      <a:solidFill>
+                        <a:srgbClr val="2A3441"/>
+                      </a:solidFill>
+                      <a:prstDash val="solid"/>
+                      <a:round/>
+                      <a:headEnd type="none" w="med" len="med"/>
+                      <a:tailEnd type="none" w="med" len="med"/>
+                    </a:lnL>
+                    <a:lnR w="12700" cap="flat" cmpd="sng" algn="ctr">
+                      <a:solidFill>
+                        <a:srgbClr val="2A3441"/>
+                      </a:solidFill>
+                      <a:prstDash val="solid"/>
+                      <a:round/>
+                      <a:headEnd type="none" w="med" len="med"/>
+                      <a:tailEnd type="none" w="med" len="med"/>
+                    </a:lnR>
+                    <a:lnT w="12700" cap="flat" cmpd="sng" algn="ctr">
+                      <a:solidFill>
+                        <a:srgbClr val="2A3441"/>
+                      </a:solidFill>
+                      <a:prstDash val="solid"/>
+                      <a:round/>
+                      <a:headEnd type="none" w="med" len="med"/>
+                      <a:tailEnd type="none" w="med" len="med"/>
+                    </a:lnT>
+                    <a:lnB w="12700" cap="flat" cmpd="sng" algn="ctr">
+                      <a:solidFill>
+                        <a:srgbClr val="2A3441"/>
+                      </a:solidFill>
+                      <a:prstDash val="solid"/>
+                      <a:round/>
+                      <a:headEnd type="none" w="med" len="med"/>
+                      <a:tailEnd type="none" w="med" len="med"/>
+                    </a:lnB>
+                    <a:solidFill>
+                      <a:srgbClr val="141B24"/>
+                    </a:solidFill>
+                  </a:tcPr>
+                </a:tc>
+                <a:tc>
+                  <a:txBody>
+                    <a:bodyPr/>
+                    <a:lstStyle/>
+                    <a:p>
+                      <a:pPr indent="0" marL="0">
+                        <a:buNone/>
+                      </a:pPr>
+                      <a:r>
+                        <a:rPr lang="en-US" sz="1300" dirty="0">
+                          <a:solidFill>
+                            <a:srgbClr val="E6EDF3"/>
+                          </a:solidFill>
+                          <a:latin typeface="Calibri" pitchFamily="34" charset="0"/>
+                          <a:ea typeface="Calibri" pitchFamily="34" charset="-122"/>
+                          <a:cs typeface="Calibri" pitchFamily="34" charset="-120"/>
+                        </a:rPr>
+                        <a:t>0.90</a:t>
+                      </a:r>
+                      <a:endParaRPr lang="en-US" sz="1300" dirty="0">
+                        <a:latin typeface="Calibri" charset="0"/>
+                        <a:ea typeface="Calibri" charset="0"/>
+                        <a:cs typeface="Calibri" charset="0"/>
+                      </a:endParaRPr>
+                    </a:p>
+                  </a:txBody>
+                  <a:tcPr marL="91440" marR="91440" marT="45720" marB="45720">
+                    <a:lnL w="12700" cap="flat" cmpd="sng" algn="ctr">
+                      <a:solidFill>
+                        <a:srgbClr val="2A3441"/>
+                      </a:solidFill>
+                      <a:prstDash val="solid"/>
+                      <a:round/>
+                      <a:headEnd type="none" w="med" len="med"/>
+                      <a:tailEnd type="none" w="med" len="med"/>
+                    </a:lnL>
+                    <a:lnR w="12700" cap="flat" cmpd="sng" algn="ctr">
+                      <a:solidFill>
+                        <a:srgbClr val="2A3441"/>
+                      </a:solidFill>
+                      <a:prstDash val="solid"/>
+                      <a:round/>
+                      <a:headEnd type="none" w="med" len="med"/>
+                      <a:tailEnd type="none" w="med" len="med"/>
+                    </a:lnR>
+                    <a:lnT w="12700" cap="flat" cmpd="sng" algn="ctr">
+                      <a:solidFill>
+                        <a:srgbClr val="2A3441"/>
+                      </a:solidFill>
+                      <a:prstDash val="solid"/>
+                      <a:round/>
+                      <a:headEnd type="none" w="med" len="med"/>
+                      <a:tailEnd type="none" w="med" len="med"/>
+                    </a:lnT>
+                    <a:lnB w="12700" cap="flat" cmpd="sng" algn="ctr">
+                      <a:solidFill>
+                        <a:srgbClr val="2A3441"/>
+                      </a:solidFill>
+                      <a:prstDash val="solid"/>
+                      <a:round/>
+                      <a:headEnd type="none" w="med" len="med"/>
+                      <a:tailEnd type="none" w="med" len="med"/>
+                    </a:lnB>
+                    <a:solidFill>
+                      <a:srgbClr val="141B24"/>
+                    </a:solidFill>
+                  </a:tcPr>
+                </a:tc>
+              </a:tr>
+            </a:tbl>
+          </a:graphicData>
+        </a:graphic>
+      </p:graphicFrame>
+      <p:graphicFrame>
+        <p:nvGraphicFramePr>
+          <p:cNvPr id="61" name="Table 1"/>
+          <p:cNvGraphicFramePr>
+            <a:graphicFrameLocks noGrp="1"/>
+          </p:cNvGraphicFramePr>
+          <p:nvPr>
+            <p:extLst>
+              <p:ext uri="{D42A27DB-BD31-4B8C-83A1-F6EECF244321}">
+                <p14:modId xmlns:p14="http://schemas.microsoft.com/office/powerpoint/2010/main" val="1579011935"/>
+              </p:ext>
+            </p:extLst>
+          </p:nvPr>
+        </p:nvGraphicFramePr>
+        <p:xfrm>
+          <a:off x="6309360" y="1188720"/>
+          <a:ext cx="5394960" cy="914400"/>
+        </p:xfrm>
+        <a:graphic>
+          <a:graphicData uri="http://schemas.openxmlformats.org/drawingml/2006/table">
+            <a:tbl>
+              <a:tblPr/>
+              <a:tblGrid>
+                <a:gridCol w="2651760"/>
+                <a:gridCol w="1371600"/>
+                <a:gridCol w="1371600"/>
+              </a:tblGrid>
+              <a:tr h="384048">
+                <a:tc>
+                  <a:txBody>
+                    <a:bodyPr/>
+                    <a:lstStyle/>
+                    <a:p>
+                      <a:pPr indent="0" marL="0">
+                        <a:buNone/>
+                      </a:pPr>
+                      <a:r>
+                        <a:rPr lang="en-US" sz="1300" b="1" dirty="0">
+                          <a:solidFill>
+                            <a:srgbClr val="0B0F14"/>
+                          </a:solidFill>
+                          <a:latin typeface="Courier New" pitchFamily="34" charset="0"/>
+                          <a:ea typeface="Courier New" pitchFamily="34" charset="-122"/>
+                          <a:cs typeface="Courier New" pitchFamily="34" charset="-120"/>
+                        </a:rPr>
+                        <a:t>Bursty cross traffic</a:t>
+                      </a:r>
+                      <a:endParaRPr lang="en-US" sz="1300" dirty="0">
+                        <a:latin typeface="Courier New" charset="0"/>
+                        <a:ea typeface="Courier New" charset="0"/>
+                        <a:cs typeface="Courier New" charset="0"/>
+                      </a:endParaRPr>
+                    </a:p>
+                  </a:txBody>
+                  <a:tcPr marL="91440" marR="91440" marT="45720" marB="45720">
+                    <a:lnL w="12700" cap="flat" cmpd="sng" algn="ctr">
+                      <a:solidFill>
+                        <a:srgbClr val="2A3441"/>
+                      </a:solidFill>
+                      <a:prstDash val="solid"/>
+                      <a:round/>
+                      <a:headEnd type="none" w="med" len="med"/>
+                      <a:tailEnd type="none" w="med" len="med"/>
+                    </a:lnL>
+                    <a:lnR w="12700" cap="flat" cmpd="sng" algn="ctr">
+                      <a:solidFill>
+                        <a:srgbClr val="2A3441"/>
+                      </a:solidFill>
+                      <a:prstDash val="solid"/>
+                      <a:round/>
+                      <a:headEnd type="none" w="med" len="med"/>
+                      <a:tailEnd type="none" w="med" len="med"/>
+                    </a:lnR>
+                    <a:lnT w="12700" cap="flat" cmpd="sng" algn="ctr">
+                      <a:solidFill>
+                        <a:srgbClr val="2A3441"/>
+                      </a:solidFill>
+                      <a:prstDash val="solid"/>
+                      <a:round/>
+                      <a:headEnd type="none" w="med" len="med"/>
+                      <a:tailEnd type="none" w="med" len="med"/>
+                    </a:lnT>
+                    <a:lnB w="12700" cap="flat" cmpd="sng" algn="ctr">
+                      <a:solidFill>
+                        <a:srgbClr val="2A3441"/>
+                      </a:solidFill>
+                      <a:prstDash val="solid"/>
+                      <a:round/>
+                      <a:headEnd type="none" w="med" len="med"/>
+                      <a:tailEnd type="none" w="med" len="med"/>
+                    </a:lnB>
+                    <a:solidFill>
+                      <a:srgbClr val="39FF88"/>
+                    </a:solidFill>
+                  </a:tcPr>
+                </a:tc>
+                <a:tc>
+                  <a:txBody>
+                    <a:bodyPr/>
+                    <a:lstStyle/>
+                    <a:p>
+                      <a:pPr indent="0" marL="0">
+                        <a:buNone/>
+                      </a:pPr>
+                      <a:r>
+                        <a:rPr lang="en-US" sz="1300" b="1" dirty="0">
+                          <a:solidFill>
+                            <a:srgbClr val="0B0F14"/>
+                          </a:solidFill>
+                          <a:latin typeface="Courier New" pitchFamily="34" charset="0"/>
+                          <a:ea typeface="Courier New" pitchFamily="34" charset="-122"/>
+                          <a:cs typeface="Courier New" pitchFamily="34" charset="-120"/>
+                        </a:rPr>
+                        <a:t>Time</a:t>
+                      </a:r>
+                      <a:endParaRPr lang="en-US" sz="1300" dirty="0">
+                        <a:latin typeface="Courier New" charset="0"/>
+                        <a:ea typeface="Courier New" charset="0"/>
+                        <a:cs typeface="Courier New" charset="0"/>
+                      </a:endParaRPr>
+                    </a:p>
+                  </a:txBody>
+                  <a:tcPr marL="91440" marR="91440" marT="45720" marB="45720">
+                    <a:lnL w="12700" cap="flat" cmpd="sng" algn="ctr">
+                      <a:solidFill>
+                        <a:srgbClr val="2A3441"/>
+                      </a:solidFill>
+                      <a:prstDash val="solid"/>
+                      <a:round/>
+                      <a:headEnd type="none" w="med" len="med"/>
+                      <a:tailEnd type="none" w="med" len="med"/>
+                    </a:lnL>
+                    <a:lnR w="12700" cap="flat" cmpd="sng" algn="ctr">
+                      <a:solidFill>
+                        <a:srgbClr val="2A3441"/>
+                      </a:solidFill>
+                      <a:prstDash val="solid"/>
+                      <a:round/>
+                      <a:headEnd type="none" w="med" len="med"/>
+                      <a:tailEnd type="none" w="med" len="med"/>
+                    </a:lnR>
+                    <a:lnT w="12700" cap="flat" cmpd="sng" algn="ctr">
+                      <a:solidFill>
+                        <a:srgbClr val="2A3441"/>
+                      </a:solidFill>
+                      <a:prstDash val="solid"/>
+                      <a:round/>
+                      <a:headEnd type="none" w="med" len="med"/>
+                      <a:tailEnd type="none" w="med" len="med"/>
+                    </a:lnT>
+                    <a:lnB w="12700" cap="flat" cmpd="sng" algn="ctr">
+                      <a:solidFill>
+                        <a:srgbClr val="2A3441"/>
+                      </a:solidFill>
+                      <a:prstDash val="solid"/>
+                      <a:round/>
+                      <a:headEnd type="none" w="med" len="med"/>
+                      <a:tailEnd type="none" w="med" len="med"/>
+                    </a:lnB>
+                    <a:solidFill>
+                      <a:srgbClr val="39FF88"/>
+                    </a:solidFill>
+                  </a:tcPr>
+                </a:tc>
+                <a:tc>
+                  <a:txBody>
+                    <a:bodyPr/>
+                    <a:lstStyle/>
+                    <a:p>
+                      <a:pPr indent="0" marL="0">
+                        <a:buNone/>
+                      </a:pPr>
+                      <a:r>
+                        <a:rPr lang="en-US" sz="1300" b="1" dirty="0">
+                          <a:solidFill>
+                            <a:srgbClr val="0B0F14"/>
+                          </a:solidFill>
+                          <a:latin typeface="Courier New" pitchFamily="34" charset="0"/>
+                          <a:ea typeface="Courier New" pitchFamily="34" charset="-122"/>
+                          <a:cs typeface="Courier New" pitchFamily="34" charset="-120"/>
+                        </a:rPr>
+                        <a:t>vs AIMD</a:t>
+                      </a:r>
+                      <a:endParaRPr lang="en-US" sz="1300" dirty="0">
+                        <a:latin typeface="Courier New" charset="0"/>
+                        <a:ea typeface="Courier New" charset="0"/>
+                        <a:cs typeface="Courier New" charset="0"/>
+                      </a:endParaRPr>
+                    </a:p>
+                  </a:txBody>
+                  <a:tcPr marL="91440" marR="91440" marT="45720" marB="45720">
+                    <a:lnL w="12700" cap="flat" cmpd="sng" algn="ctr">
+                      <a:solidFill>
+                        <a:srgbClr val="2A3441"/>
+                      </a:solidFill>
+                      <a:prstDash val="solid"/>
+                      <a:round/>
+                      <a:headEnd type="none" w="med" len="med"/>
+                      <a:tailEnd type="none" w="med" len="med"/>
+                    </a:lnL>
+                    <a:lnR w="12700" cap="flat" cmpd="sng" algn="ctr">
+                      <a:solidFill>
+                        <a:srgbClr val="2A3441"/>
+                      </a:solidFill>
+                      <a:prstDash val="solid"/>
+                      <a:round/>
+                      <a:headEnd type="none" w="med" len="med"/>
+                      <a:tailEnd type="none" w="med" len="med"/>
+                    </a:lnR>
+                    <a:lnT w="12700" cap="flat" cmpd="sng" algn="ctr">
+                      <a:solidFill>
+                        <a:srgbClr val="2A3441"/>
+                      </a:solidFill>
+                      <a:prstDash val="solid"/>
+                      <a:round/>
+                      <a:headEnd type="none" w="med" len="med"/>
+                      <a:tailEnd type="none" w="med" len="med"/>
+                    </a:lnT>
+                    <a:lnB w="12700" cap="flat" cmpd="sng" algn="ctr">
+                      <a:solidFill>
+                        <a:srgbClr val="2A3441"/>
+                      </a:solidFill>
+                      <a:prstDash val="solid"/>
+                      <a:round/>
+                      <a:headEnd type="none" w="med" len="med"/>
+                      <a:tailEnd type="none" w="med" len="med"/>
+                    </a:lnB>
+                    <a:solidFill>
+                      <a:srgbClr val="39FF88"/>
+                    </a:solidFill>
+                  </a:tcPr>
+                </a:tc>
+              </a:tr>
+              <a:tr h="384048">
+                <a:tc>
+                  <a:txBody>
+                    <a:bodyPr/>
+                    <a:lstStyle/>
+                    <a:p>
+                      <a:pPr indent="0" marL="0">
+                        <a:buNone/>
+                      </a:pPr>
+                      <a:r>
+                        <a:rPr lang="en-US" sz="1300" dirty="0">
+                          <a:solidFill>
+                            <a:srgbClr val="E6EDF3"/>
+                          </a:solidFill>
+                          <a:latin typeface="Calibri" pitchFamily="34" charset="0"/>
+                          <a:ea typeface="Calibri" pitchFamily="34" charset="-122"/>
+                          <a:cs typeface="Calibri" pitchFamily="34" charset="-120"/>
+                        </a:rPr>
+                        <a:t>AIMD tuned</a:t>
+                      </a:r>
+                      <a:endParaRPr lang="en-US" sz="1300" dirty="0">
+                        <a:latin typeface="Calibri" charset="0"/>
+                        <a:ea typeface="Calibri" charset="0"/>
+                        <a:cs typeface="Calibri" charset="0"/>
+                      </a:endParaRPr>
+                    </a:p>
+                  </a:txBody>
+                  <a:tcPr marL="91440" marR="91440" marT="45720" marB="45720">
+                    <a:lnL w="12700" cap="flat" cmpd="sng" algn="ctr">
+                      <a:solidFill>
+                        <a:srgbClr val="2A3441"/>
+                      </a:solidFill>
+                      <a:prstDash val="solid"/>
+                      <a:round/>
+                      <a:headEnd type="none" w="med" len="med"/>
+                      <a:tailEnd type="none" w="med" len="med"/>
+                    </a:lnL>
+                    <a:lnR w="12700" cap="flat" cmpd="sng" algn="ctr">
+                      <a:solidFill>
+                        <a:srgbClr val="2A3441"/>
+                      </a:solidFill>
+                      <a:prstDash val="solid"/>
+                      <a:round/>
+                      <a:headEnd type="none" w="med" len="med"/>
+                      <a:tailEnd type="none" w="med" len="med"/>
+                    </a:lnR>
+                    <a:lnT w="12700" cap="flat" cmpd="sng" algn="ctr">
+                      <a:solidFill>
+                        <a:srgbClr val="2A3441"/>
+                      </a:solidFill>
+                      <a:prstDash val="solid"/>
+                      <a:round/>
+                      <a:headEnd type="none" w="med" len="med"/>
+                      <a:tailEnd type="none" w="med" len="med"/>
+                    </a:lnT>
+                    <a:lnB w="12700" cap="flat" cmpd="sng" algn="ctr">
+                      <a:solidFill>
+                        <a:srgbClr val="2A3441"/>
+                      </a:solidFill>
+                      <a:prstDash val="solid"/>
+                      <a:round/>
+                      <a:headEnd type="none" w="med" len="med"/>
+                      <a:tailEnd type="none" w="med" len="med"/>
+                    </a:lnB>
+                    <a:solidFill>
+                      <a:srgbClr val="141B24"/>
+                    </a:solidFill>
+                  </a:tcPr>
+                </a:tc>
+                <a:tc>
+                  <a:txBody>
+                    <a:bodyPr/>
+                    <a:lstStyle/>
+                    <a:p>
+                      <a:pPr indent="0" marL="0">
+                        <a:buNone/>
+                      </a:pPr>
+                      <a:r>
+                        <a:rPr lang="en-US" sz="1300" dirty="0">
+                          <a:solidFill>
+                            <a:srgbClr val="E6EDF3"/>
+                          </a:solidFill>
+                          <a:latin typeface="Calibri" pitchFamily="34" charset="0"/>
+                          <a:ea typeface="Calibri" pitchFamily="34" charset="-122"/>
+                          <a:cs typeface="Calibri" pitchFamily="34" charset="-120"/>
+                        </a:rPr>
+                        <a:t>5.73 s</a:t>
+                      </a:r>
+                      <a:endParaRPr lang="en-US" sz="1300" dirty="0">
+                        <a:latin typeface="Calibri" charset="0"/>
+                        <a:ea typeface="Calibri" charset="0"/>
+                        <a:cs typeface="Calibri" charset="0"/>
+                      </a:endParaRPr>
+                    </a:p>
+                  </a:txBody>
+                  <a:tcPr marL="91440" marR="91440" marT="45720" marB="45720">
+                    <a:lnL w="12700" cap="flat" cmpd="sng" algn="ctr">
+                      <a:solidFill>
+                        <a:srgbClr val="2A3441"/>
+                      </a:solidFill>
+                      <a:prstDash val="solid"/>
+                      <a:round/>
+                      <a:headEnd type="none" w="med" len="med"/>
+                      <a:tailEnd type="none" w="med" len="med"/>
+                    </a:lnL>
+                    <a:lnR w="12700" cap="flat" cmpd="sng" algn="ctr">
+                      <a:solidFill>
+                        <a:srgbClr val="2A3441"/>
+                      </a:solidFill>
+                      <a:prstDash val="solid"/>
+                      <a:round/>
+                      <a:headEnd type="none" w="med" len="med"/>
+                      <a:tailEnd type="none" w="med" len="med"/>
+                    </a:lnR>
+                    <a:lnT w="12700" cap="flat" cmpd="sng" algn="ctr">
+                      <a:solidFill>
+                        <a:srgbClr val="2A3441"/>
+                      </a:solidFill>
+                      <a:prstDash val="solid"/>
+                      <a:round/>
+                      <a:headEnd type="none" w="med" len="med"/>
+                      <a:tailEnd type="none" w="med" len="med"/>
+                    </a:lnT>
+                    <a:lnB w="12700" cap="flat" cmpd="sng" algn="ctr">
+                      <a:solidFill>
+                        <a:srgbClr val="2A3441"/>
+                      </a:solidFill>
+                      <a:prstDash val="solid"/>
+                      <a:round/>
+                      <a:headEnd type="none" w="med" len="med"/>
+                      <a:tailEnd type="none" w="med" len="med"/>
+                    </a:lnB>
+                    <a:solidFill>
+                      <a:srgbClr val="141B24"/>
+                    </a:solidFill>
+                  </a:tcPr>
+                </a:tc>
+                <a:tc>
+                  <a:txBody>
+                    <a:bodyPr/>
+                    <a:lstStyle/>
+                    <a:p>
+                      <a:pPr indent="0" marL="0">
+                        <a:buNone/>
+                      </a:pPr>
+                      <a:r>
+                        <a:rPr lang="en-US" sz="1300" dirty="0">
+                          <a:solidFill>
+                            <a:srgbClr val="E6EDF3"/>
+                          </a:solidFill>
+                          <a:latin typeface="Calibri" pitchFamily="34" charset="0"/>
+                          <a:ea typeface="Calibri" pitchFamily="34" charset="-122"/>
+                          <a:cs typeface="Calibri" pitchFamily="34" charset="-120"/>
+                        </a:rPr>
+                        <a:t>1.00</a:t>
+                      </a:r>
+                      <a:endParaRPr lang="en-US" sz="1300" dirty="0">
+                        <a:latin typeface="Calibri" charset="0"/>
+                        <a:ea typeface="Calibri" charset="0"/>
+                        <a:cs typeface="Calibri" charset="0"/>
+                      </a:endParaRPr>
+                    </a:p>
+                  </a:txBody>
+                  <a:tcPr marL="91440" marR="91440" marT="45720" marB="45720">
+                    <a:lnL w="12700" cap="flat" cmpd="sng" algn="ctr">
+                      <a:solidFill>
+                        <a:srgbClr val="2A3441"/>
+                      </a:solidFill>
+                      <a:prstDash val="solid"/>
+                      <a:round/>
+                      <a:headEnd type="none" w="med" len="med"/>
+                      <a:tailEnd type="none" w="med" len="med"/>
+                    </a:lnL>
+                    <a:lnR w="12700" cap="flat" cmpd="sng" algn="ctr">
+                      <a:solidFill>
+                        <a:srgbClr val="2A3441"/>
+                      </a:solidFill>
+                      <a:prstDash val="solid"/>
+                      <a:round/>
+                      <a:headEnd type="none" w="med" len="med"/>
+                      <a:tailEnd type="none" w="med" len="med"/>
+                    </a:lnR>
+                    <a:lnT w="12700" cap="flat" cmpd="sng" algn="ctr">
+                      <a:solidFill>
+                        <a:srgbClr val="2A3441"/>
+                      </a:solidFill>
+                      <a:prstDash val="solid"/>
+                      <a:round/>
+                      <a:headEnd type="none" w="med" len="med"/>
+                      <a:tailEnd type="none" w="med" len="med"/>
+                    </a:lnT>
+                    <a:lnB w="12700" cap="flat" cmpd="sng" algn="ctr">
+                      <a:solidFill>
+                        <a:srgbClr val="2A3441"/>
+                      </a:solidFill>
+                      <a:prstDash val="solid"/>
+                      <a:round/>
+                      <a:headEnd type="none" w="med" len="med"/>
+                      <a:tailEnd type="none" w="med" len="med"/>
+                    </a:lnB>
+                    <a:solidFill>
+                      <a:srgbClr val="141B24"/>
+                    </a:solidFill>
+                  </a:tcPr>
+                </a:tc>
+              </a:tr>
+              <a:tr h="384048">
+                <a:tc>
+                  <a:txBody>
+                    <a:bodyPr/>
+                    <a:lstStyle/>
+                    <a:p>
+                      <a:pPr indent="0" marL="0">
+                        <a:buNone/>
+                      </a:pPr>
+                      <a:r>
+                        <a:rPr lang="en-US" sz="1300" dirty="0">
+                          <a:solidFill>
+                            <a:srgbClr val="E6EDF3"/>
+                          </a:solidFill>
+                          <a:latin typeface="Calibri" pitchFamily="34" charset="0"/>
+                          <a:ea typeface="Calibri" pitchFamily="34" charset="-122"/>
+                          <a:cs typeface="Calibri" pitchFamily="34" charset="-120"/>
+                        </a:rPr>
+                        <a:t>CUBIC tuned</a:t>
+                      </a:r>
+                      <a:endParaRPr lang="en-US" sz="1300" dirty="0">
+                        <a:latin typeface="Calibri" charset="0"/>
+                        <a:ea typeface="Calibri" charset="0"/>
+                        <a:cs typeface="Calibri" charset="0"/>
+                      </a:endParaRPr>
+                    </a:p>
+                  </a:txBody>
+                  <a:tcPr marL="91440" marR="91440" marT="45720" marB="45720">
+                    <a:lnL w="12700" cap="flat" cmpd="sng" algn="ctr">
+                      <a:solidFill>
+                        <a:srgbClr val="2A3441"/>
+                      </a:solidFill>
+                      <a:prstDash val="solid"/>
+                      <a:round/>
+                      <a:headEnd type="none" w="med" len="med"/>
+                      <a:tailEnd type="none" w="med" len="med"/>
+                    </a:lnL>
+                    <a:lnR w="12700" cap="flat" cmpd="sng" algn="ctr">
+                      <a:solidFill>
+                        <a:srgbClr val="2A3441"/>
+                      </a:solidFill>
+                      <a:prstDash val="solid"/>
+                      <a:round/>
+                      <a:headEnd type="none" w="med" len="med"/>
+                      <a:tailEnd type="none" w="med" len="med"/>
+                    </a:lnR>
+                    <a:lnT w="12700" cap="flat" cmpd="sng" algn="ctr">
+                      <a:solidFill>
+                        <a:srgbClr val="2A3441"/>
+                      </a:solidFill>
+                      <a:prstDash val="solid"/>
+                      <a:round/>
+                      <a:headEnd type="none" w="med" len="med"/>
+                      <a:tailEnd type="none" w="med" len="med"/>
+                    </a:lnT>
+                    <a:lnB w="12700" cap="flat" cmpd="sng" algn="ctr">
+                      <a:solidFill>
+                        <a:srgbClr val="2A3441"/>
+                      </a:solidFill>
+                      <a:prstDash val="solid"/>
+                      <a:round/>
+                      <a:headEnd type="none" w="med" len="med"/>
+                      <a:tailEnd type="none" w="med" len="med"/>
+                    </a:lnB>
+                    <a:solidFill>
+                      <a:srgbClr val="141B24"/>
+                    </a:solidFill>
+                  </a:tcPr>
+                </a:tc>
+                <a:tc>
+                  <a:txBody>
+                    <a:bodyPr/>
+                    <a:lstStyle/>
+                    <a:p>
+                      <a:pPr indent="0" marL="0">
+                        <a:buNone/>
+                      </a:pPr>
+                      <a:r>
+                        <a:rPr lang="en-US" sz="1300" dirty="0">
+                          <a:solidFill>
+                            <a:srgbClr val="E6EDF3"/>
+                          </a:solidFill>
+                          <a:latin typeface="Calibri" pitchFamily="34" charset="0"/>
+                          <a:ea typeface="Calibri" pitchFamily="34" charset="-122"/>
+                          <a:cs typeface="Calibri" pitchFamily="34" charset="-120"/>
+                        </a:rPr>
+                        <a:t>4.55 s</a:t>
+                      </a:r>
+                      <a:endParaRPr lang="en-US" sz="1300" dirty="0">
+                        <a:latin typeface="Calibri" charset="0"/>
+                        <a:ea typeface="Calibri" charset="0"/>
+                        <a:cs typeface="Calibri" charset="0"/>
+                      </a:endParaRPr>
+                    </a:p>
+                  </a:txBody>
+                  <a:tcPr marL="91440" marR="91440" marT="45720" marB="45720">
+                    <a:lnL w="12700" cap="flat" cmpd="sng" algn="ctr">
+                      <a:solidFill>
+                        <a:srgbClr val="2A3441"/>
+                      </a:solidFill>
+                      <a:prstDash val="solid"/>
+                      <a:round/>
+                      <a:headEnd type="none" w="med" len="med"/>
+                      <a:tailEnd type="none" w="med" len="med"/>
+                    </a:lnL>
+                    <a:lnR w="12700" cap="flat" cmpd="sng" algn="ctr">
+                      <a:solidFill>
+                        <a:srgbClr val="2A3441"/>
+                      </a:solidFill>
+                      <a:prstDash val="solid"/>
+                      <a:round/>
+                      <a:headEnd type="none" w="med" len="med"/>
+                      <a:tailEnd type="none" w="med" len="med"/>
+                    </a:lnR>
+                    <a:lnT w="12700" cap="flat" cmpd="sng" algn="ctr">
+                      <a:solidFill>
+                        <a:srgbClr val="2A3441"/>
+                      </a:solidFill>
+                      <a:prstDash val="solid"/>
+                      <a:round/>
+                      <a:headEnd type="none" w="med" len="med"/>
+                      <a:tailEnd type="none" w="med" len="med"/>
+                    </a:lnT>
+                    <a:lnB w="12700" cap="flat" cmpd="sng" algn="ctr">
+                      <a:solidFill>
+                        <a:srgbClr val="2A3441"/>
+                      </a:solidFill>
+                      <a:prstDash val="solid"/>
+                      <a:round/>
+                      <a:headEnd type="none" w="med" len="med"/>
+                      <a:tailEnd type="none" w="med" len="med"/>
+                    </a:lnB>
+                    <a:solidFill>
+                      <a:srgbClr val="141B24"/>
+                    </a:solidFill>
+                  </a:tcPr>
+                </a:tc>
+                <a:tc>
+                  <a:txBody>
+                    <a:bodyPr/>
+                    <a:lstStyle/>
+                    <a:p>
+                      <a:pPr indent="0" marL="0">
+                        <a:buNone/>
+                      </a:pPr>
+                      <a:r>
+                        <a:rPr lang="en-US" sz="1300" dirty="0">
+                          <a:solidFill>
+                            <a:srgbClr val="E6EDF3"/>
+                          </a:solidFill>
+                          <a:latin typeface="Calibri" pitchFamily="34" charset="0"/>
+                          <a:ea typeface="Calibri" pitchFamily="34" charset="-122"/>
+                          <a:cs typeface="Calibri" pitchFamily="34" charset="-120"/>
+                        </a:rPr>
+                        <a:t>0.79</a:t>
+                      </a:r>
+                      <a:endParaRPr lang="en-US" sz="1300" dirty="0">
+                        <a:latin typeface="Calibri" charset="0"/>
+                        <a:ea typeface="Calibri" charset="0"/>
+                        <a:cs typeface="Calibri" charset="0"/>
+                      </a:endParaRPr>
+                    </a:p>
+                  </a:txBody>
+                  <a:tcPr marL="91440" marR="91440" marT="45720" marB="45720">
+                    <a:lnL w="12700" cap="flat" cmpd="sng" algn="ctr">
+                      <a:solidFill>
+                        <a:srgbClr val="2A3441"/>
+                      </a:solidFill>
+                      <a:prstDash val="solid"/>
+                      <a:round/>
+                      <a:headEnd type="none" w="med" len="med"/>
+                      <a:tailEnd type="none" w="med" len="med"/>
+                    </a:lnL>
+                    <a:lnR w="12700" cap="flat" cmpd="sng" algn="ctr">
+                      <a:solidFill>
+                        <a:srgbClr val="2A3441"/>
+                      </a:solidFill>
+                      <a:prstDash val="solid"/>
+                      <a:round/>
+                      <a:headEnd type="none" w="med" len="med"/>
+                      <a:tailEnd type="none" w="med" len="med"/>
+                    </a:lnR>
+                    <a:lnT w="12700" cap="flat" cmpd="sng" algn="ctr">
+                      <a:solidFill>
+                        <a:srgbClr val="2A3441"/>
+                      </a:solidFill>
+                      <a:prstDash val="solid"/>
+                      <a:round/>
+                      <a:headEnd type="none" w="med" len="med"/>
+                      <a:tailEnd type="none" w="med" len="med"/>
+                    </a:lnT>
+                    <a:lnB w="12700" cap="flat" cmpd="sng" algn="ctr">
+                      <a:solidFill>
+                        <a:srgbClr val="2A3441"/>
+                      </a:solidFill>
+                      <a:prstDash val="solid"/>
+                      <a:round/>
+                      <a:headEnd type="none" w="med" len="med"/>
+                      <a:tailEnd type="none" w="med" len="med"/>
+                    </a:lnB>
+                    <a:solidFill>
+                      <a:srgbClr val="141B24"/>
+                    </a:solidFill>
+                  </a:tcPr>
+                </a:tc>
+              </a:tr>
+              <a:tr h="384048">
+                <a:tc>
+                  <a:txBody>
+                    <a:bodyPr/>
+                    <a:lstStyle/>
+                    <a:p>
+                      <a:pPr indent="0" marL="0">
+                        <a:buNone/>
+                      </a:pPr>
+                      <a:r>
+                        <a:rPr lang="en-US" sz="1300" dirty="0">
+                          <a:solidFill>
+                            <a:srgbClr val="E6EDF3"/>
+                          </a:solidFill>
+                          <a:latin typeface="Calibri" pitchFamily="34" charset="0"/>
+                          <a:ea typeface="Calibri" pitchFamily="34" charset="-122"/>
+                          <a:cs typeface="Calibri" pitchFamily="34" charset="-120"/>
+                        </a:rPr>
+                        <a:t>Neural agent</a:t>
+                      </a:r>
+                      <a:endParaRPr lang="en-US" sz="1300" dirty="0">
+                        <a:latin typeface="Calibri" charset="0"/>
+                        <a:ea typeface="Calibri" charset="0"/>
+                        <a:cs typeface="Calibri" charset="0"/>
+                      </a:endParaRPr>
+                    </a:p>
+                  </a:txBody>
+                  <a:tcPr marL="91440" marR="91440" marT="45720" marB="45720">
+                    <a:lnL w="12700" cap="flat" cmpd="sng" algn="ctr">
+                      <a:solidFill>
+                        <a:srgbClr val="2A3441"/>
+                      </a:solidFill>
+                      <a:prstDash val="solid"/>
+                      <a:round/>
+                      <a:headEnd type="none" w="med" len="med"/>
+                      <a:tailEnd type="none" w="med" len="med"/>
+                    </a:lnL>
+                    <a:lnR w="12700" cap="flat" cmpd="sng" algn="ctr">
+                      <a:solidFill>
+                        <a:srgbClr val="2A3441"/>
+                      </a:solidFill>
+                      <a:prstDash val="solid"/>
+                      <a:round/>
+                      <a:headEnd type="none" w="med" len="med"/>
+                      <a:tailEnd type="none" w="med" len="med"/>
+                    </a:lnR>
+                    <a:lnT w="12700" cap="flat" cmpd="sng" algn="ctr">
+                      <a:solidFill>
+                        <a:srgbClr val="2A3441"/>
+                      </a:solidFill>
+                      <a:prstDash val="solid"/>
+                      <a:round/>
+                      <a:headEnd type="none" w="med" len="med"/>
+                      <a:tailEnd type="none" w="med" len="med"/>
+                    </a:lnT>
+                    <a:lnB w="12700" cap="flat" cmpd="sng" algn="ctr">
+                      <a:solidFill>
+                        <a:srgbClr val="2A3441"/>
+                      </a:solidFill>
+                      <a:prstDash val="solid"/>
+                      <a:round/>
+                      <a:headEnd type="none" w="med" len="med"/>
+                      <a:tailEnd type="none" w="med" len="med"/>
+                    </a:lnB>
+                    <a:solidFill>
+                      <a:srgbClr val="141B24"/>
+                    </a:solidFill>
+                  </a:tcPr>
+                </a:tc>
+                <a:tc>
+                  <a:txBody>
+                    <a:bodyPr/>
+                    <a:lstStyle/>
+                    <a:p>
+                      <a:pPr indent="0" marL="0">
+                        <a:buNone/>
+                      </a:pPr>
+                      <a:r>
+                        <a:rPr lang="en-US" sz="1300" dirty="0">
+                          <a:solidFill>
+                            <a:srgbClr val="E6EDF3"/>
+                          </a:solidFill>
+                          <a:latin typeface="Calibri" pitchFamily="34" charset="0"/>
+                          <a:ea typeface="Calibri" pitchFamily="34" charset="-122"/>
+                          <a:cs typeface="Calibri" pitchFamily="34" charset="-120"/>
+                        </a:rPr>
+                        <a:t>4.87 s</a:t>
+                      </a:r>
+                      <a:endParaRPr lang="en-US" sz="1300" dirty="0">
+                        <a:latin typeface="Calibri" charset="0"/>
+                        <a:ea typeface="Calibri" charset="0"/>
+                        <a:cs typeface="Calibri" charset="0"/>
+                      </a:endParaRPr>
+                    </a:p>
+                  </a:txBody>
+                  <a:tcPr marL="91440" marR="91440" marT="45720" marB="45720">
+                    <a:lnL w="12700" cap="flat" cmpd="sng" algn="ctr">
+                      <a:solidFill>
+                        <a:srgbClr val="2A3441"/>
+                      </a:solidFill>
+                      <a:prstDash val="solid"/>
+                      <a:round/>
+                      <a:headEnd type="none" w="med" len="med"/>
+                      <a:tailEnd type="none" w="med" len="med"/>
+                    </a:lnL>
+                    <a:lnR w="12700" cap="flat" cmpd="sng" algn="ctr">
+                      <a:solidFill>
+                        <a:srgbClr val="2A3441"/>
+                      </a:solidFill>
+                      <a:prstDash val="solid"/>
+                      <a:round/>
+                      <a:headEnd type="none" w="med" len="med"/>
+                      <a:tailEnd type="none" w="med" len="med"/>
+                    </a:lnR>
+                    <a:lnT w="12700" cap="flat" cmpd="sng" algn="ctr">
+                      <a:solidFill>
+                        <a:srgbClr val="2A3441"/>
+                      </a:solidFill>
+                      <a:prstDash val="solid"/>
+                      <a:round/>
+                      <a:headEnd type="none" w="med" len="med"/>
+                      <a:tailEnd type="none" w="med" len="med"/>
+                    </a:lnT>
+                    <a:lnB w="12700" cap="flat" cmpd="sng" algn="ctr">
+                      <a:solidFill>
+                        <a:srgbClr val="2A3441"/>
+                      </a:solidFill>
+                      <a:prstDash val="solid"/>
+                      <a:round/>
+                      <a:headEnd type="none" w="med" len="med"/>
+                      <a:tailEnd type="none" w="med" len="med"/>
+                    </a:lnB>
+                    <a:solidFill>
+                      <a:srgbClr val="141B24"/>
+                    </a:solidFill>
+                  </a:tcPr>
+                </a:tc>
+                <a:tc>
+                  <a:txBody>
+                    <a:bodyPr/>
+                    <a:lstStyle/>
+                    <a:p>
+                      <a:pPr indent="0" marL="0">
+                        <a:buNone/>
+                      </a:pPr>
+                      <a:r>
+                        <a:rPr lang="en-US" sz="1300" dirty="0">
+                          <a:solidFill>
+                            <a:srgbClr val="E6EDF3"/>
+                          </a:solidFill>
+                          <a:latin typeface="Calibri" pitchFamily="34" charset="0"/>
+                          <a:ea typeface="Calibri" pitchFamily="34" charset="-122"/>
+                          <a:cs typeface="Calibri" pitchFamily="34" charset="-120"/>
+                        </a:rPr>
+                        <a:t>0.85</a:t>
+                      </a:r>
+                      <a:endParaRPr lang="en-US" sz="1300" dirty="0">
+                        <a:latin typeface="Calibri" charset="0"/>
+                        <a:ea typeface="Calibri" charset="0"/>
+                        <a:cs typeface="Calibri" charset="0"/>
+                      </a:endParaRPr>
+                    </a:p>
+                  </a:txBody>
+                  <a:tcPr marL="91440" marR="91440" marT="45720" marB="45720">
+                    <a:lnL w="12700" cap="flat" cmpd="sng" algn="ctr">
+                      <a:solidFill>
+                        <a:srgbClr val="2A3441"/>
+                      </a:solidFill>
+                      <a:prstDash val="solid"/>
+                      <a:round/>
+                      <a:headEnd type="none" w="med" len="med"/>
+                      <a:tailEnd type="none" w="med" len="med"/>
+                    </a:lnL>
+                    <a:lnR w="12700" cap="flat" cmpd="sng" algn="ctr">
+                      <a:solidFill>
+                        <a:srgbClr val="2A3441"/>
+                      </a:solidFill>
+                      <a:prstDash val="solid"/>
+                      <a:round/>
+                      <a:headEnd type="none" w="med" len="med"/>
+                      <a:tailEnd type="none" w="med" len="med"/>
+                    </a:lnR>
+                    <a:lnT w="12700" cap="flat" cmpd="sng" algn="ctr">
+                      <a:solidFill>
+                        <a:srgbClr val="2A3441"/>
+                      </a:solidFill>
+                      <a:prstDash val="solid"/>
+                      <a:round/>
+                      <a:headEnd type="none" w="med" len="med"/>
+                      <a:tailEnd type="none" w="med" len="med"/>
+                    </a:lnT>
+                    <a:lnB w="12700" cap="flat" cmpd="sng" algn="ctr">
+                      <a:solidFill>
+                        <a:srgbClr val="2A3441"/>
+                      </a:solidFill>
+                      <a:prstDash val="solid"/>
+                      <a:round/>
+                      <a:headEnd type="none" w="med" len="med"/>
+                      <a:tailEnd type="none" w="med" len="med"/>
+                    </a:lnB>
+                    <a:solidFill>
+                      <a:srgbClr val="141B24"/>
+                    </a:solidFill>
+                  </a:tcPr>
+                </a:tc>
+              </a:tr>
+              <a:tr h="384048">
+                <a:tc>
+                  <a:txBody>
+                    <a:bodyPr/>
+                    <a:lstStyle/>
+                    <a:p>
+                      <a:pPr indent="0" marL="0">
+                        <a:buNone/>
+                      </a:pPr>
+                      <a:r>
+                        <a:rPr lang="en-US" sz="1300" dirty="0">
+                          <a:solidFill>
+                            <a:srgbClr val="E6EDF3"/>
+                          </a:solidFill>
+                          <a:latin typeface="Calibri" pitchFamily="34" charset="0"/>
+                          <a:ea typeface="Calibri" pitchFamily="34" charset="-122"/>
+                          <a:cs typeface="Calibri" pitchFamily="34" charset="-120"/>
+                        </a:rPr>
+                        <a:t>Neural, polite 1.3</a:t>
+                      </a:r>
+                      <a:endParaRPr lang="en-US" sz="1300" dirty="0">
+                        <a:latin typeface="Calibri" charset="0"/>
+                        <a:ea typeface="Calibri" charset="0"/>
+                        <a:cs typeface="Calibri" charset="0"/>
+                      </a:endParaRPr>
+                    </a:p>
+                  </a:txBody>
+                  <a:tcPr marL="91440" marR="91440" marT="45720" marB="45720">
+                    <a:lnL w="12700" cap="flat" cmpd="sng" algn="ctr">
+                      <a:solidFill>
+                        <a:srgbClr val="2A3441"/>
+                      </a:solidFill>
+                      <a:prstDash val="solid"/>
+                      <a:round/>
+                      <a:headEnd type="none" w="med" len="med"/>
+                      <a:tailEnd type="none" w="med" len="med"/>
+                    </a:lnL>
+                    <a:lnR w="12700" cap="flat" cmpd="sng" algn="ctr">
+                      <a:solidFill>
+                        <a:srgbClr val="2A3441"/>
+                      </a:solidFill>
+                      <a:prstDash val="solid"/>
+                      <a:round/>
+                      <a:headEnd type="none" w="med" len="med"/>
+                      <a:tailEnd type="none" w="med" len="med"/>
+                    </a:lnR>
+                    <a:lnT w="12700" cap="flat" cmpd="sng" algn="ctr">
+                      <a:solidFill>
+                        <a:srgbClr val="2A3441"/>
+                      </a:solidFill>
+                      <a:prstDash val="solid"/>
+                      <a:round/>
+                      <a:headEnd type="none" w="med" len="med"/>
+                      <a:tailEnd type="none" w="med" len="med"/>
+                    </a:lnT>
+                    <a:lnB w="12700" cap="flat" cmpd="sng" algn="ctr">
+                      <a:solidFill>
+                        <a:srgbClr val="2A3441"/>
+                      </a:solidFill>
+                      <a:prstDash val="solid"/>
+                      <a:round/>
+                      <a:headEnd type="none" w="med" len="med"/>
+                      <a:tailEnd type="none" w="med" len="med"/>
+                    </a:lnB>
+                    <a:solidFill>
+                      <a:srgbClr val="141B24"/>
+                    </a:solidFill>
+                  </a:tcPr>
+                </a:tc>
+                <a:tc>
+                  <a:txBody>
+                    <a:bodyPr/>
+                    <a:lstStyle/>
+                    <a:p>
+                      <a:pPr indent="0" marL="0">
+                        <a:buNone/>
+                      </a:pPr>
+                      <a:r>
+                        <a:rPr lang="en-US" sz="1300" dirty="0">
+                          <a:solidFill>
+                            <a:srgbClr val="E6EDF3"/>
+                          </a:solidFill>
+                          <a:latin typeface="Calibri" pitchFamily="34" charset="0"/>
+                          <a:ea typeface="Calibri" pitchFamily="34" charset="-122"/>
+                          <a:cs typeface="Calibri" pitchFamily="34" charset="-120"/>
+                        </a:rPr>
+                        <a:t>4.92 s</a:t>
+                      </a:r>
+                      <a:endParaRPr lang="en-US" sz="1300" dirty="0">
+                        <a:latin typeface="Calibri" charset="0"/>
+                        <a:ea typeface="Calibri" charset="0"/>
+                        <a:cs typeface="Calibri" charset="0"/>
+                      </a:endParaRPr>
+                    </a:p>
+                  </a:txBody>
+                  <a:tcPr marL="91440" marR="91440" marT="45720" marB="45720">
+                    <a:lnL w="12700" cap="flat" cmpd="sng" algn="ctr">
+                      <a:solidFill>
+                        <a:srgbClr val="2A3441"/>
+                      </a:solidFill>
+                      <a:prstDash val="solid"/>
+                      <a:round/>
+                      <a:headEnd type="none" w="med" len="med"/>
+                      <a:tailEnd type="none" w="med" len="med"/>
+                    </a:lnL>
+                    <a:lnR w="12700" cap="flat" cmpd="sng" algn="ctr">
+                      <a:solidFill>
+                        <a:srgbClr val="2A3441"/>
+                      </a:solidFill>
+                      <a:prstDash val="solid"/>
+                      <a:round/>
+                      <a:headEnd type="none" w="med" len="med"/>
+                      <a:tailEnd type="none" w="med" len="med"/>
+                    </a:lnR>
+                    <a:lnT w="12700" cap="flat" cmpd="sng" algn="ctr">
+                      <a:solidFill>
+                        <a:srgbClr val="2A3441"/>
+                      </a:solidFill>
+                      <a:prstDash val="solid"/>
+                      <a:round/>
+                      <a:headEnd type="none" w="med" len="med"/>
+                      <a:tailEnd type="none" w="med" len="med"/>
+                    </a:lnT>
+                    <a:lnB w="12700" cap="flat" cmpd="sng" algn="ctr">
+                      <a:solidFill>
+                        <a:srgbClr val="2A3441"/>
+                      </a:solidFill>
+                      <a:prstDash val="solid"/>
+                      <a:round/>
+                      <a:headEnd type="none" w="med" len="med"/>
+                      <a:tailEnd type="none" w="med" len="med"/>
+                    </a:lnB>
+                    <a:solidFill>
+                      <a:srgbClr val="141B24"/>
+                    </a:solidFill>
+                  </a:tcPr>
+                </a:tc>
+                <a:tc>
+                  <a:txBody>
+                    <a:bodyPr/>
+                    <a:lstStyle/>
+                    <a:p>
+                      <a:pPr indent="0" marL="0">
+                        <a:buNone/>
+                      </a:pPr>
+                      <a:r>
+                        <a:rPr lang="en-US" sz="1300" dirty="0">
+                          <a:solidFill>
+                            <a:srgbClr val="E6EDF3"/>
+                          </a:solidFill>
+                          <a:latin typeface="Calibri" pitchFamily="34" charset="0"/>
+                          <a:ea typeface="Calibri" pitchFamily="34" charset="-122"/>
+                          <a:cs typeface="Calibri" pitchFamily="34" charset="-120"/>
+                        </a:rPr>
+                        <a:t>0.86</a:t>
+                      </a:r>
+                      <a:endParaRPr lang="en-US" sz="1300" dirty="0">
+                        <a:latin typeface="Calibri" charset="0"/>
+                        <a:ea typeface="Calibri" charset="0"/>
+                        <a:cs typeface="Calibri" charset="0"/>
+                      </a:endParaRPr>
+                    </a:p>
+                  </a:txBody>
+                  <a:tcPr marL="91440" marR="91440" marT="45720" marB="45720">
+                    <a:lnL w="12700" cap="flat" cmpd="sng" algn="ctr">
+                      <a:solidFill>
+                        <a:srgbClr val="2A3441"/>
+                      </a:solidFill>
+                      <a:prstDash val="solid"/>
+                      <a:round/>
+                      <a:headEnd type="none" w="med" len="med"/>
+                      <a:tailEnd type="none" w="med" len="med"/>
+                    </a:lnL>
+                    <a:lnR w="12700" cap="flat" cmpd="sng" algn="ctr">
+                      <a:solidFill>
+                        <a:srgbClr val="2A3441"/>
+                      </a:solidFill>
+                      <a:prstDash val="solid"/>
+                      <a:round/>
+                      <a:headEnd type="none" w="med" len="med"/>
+                      <a:tailEnd type="none" w="med" len="med"/>
+                    </a:lnR>
+                    <a:lnT w="12700" cap="flat" cmpd="sng" algn="ctr">
+                      <a:solidFill>
+                        <a:srgbClr val="2A3441"/>
+                      </a:solidFill>
+                      <a:prstDash val="solid"/>
+                      <a:round/>
+                      <a:headEnd type="none" w="med" len="med"/>
+                      <a:tailEnd type="none" w="med" len="med"/>
+                    </a:lnT>
+                    <a:lnB w="12700" cap="flat" cmpd="sng" algn="ctr">
+                      <a:solidFill>
+                        <a:srgbClr val="2A3441"/>
+                      </a:solidFill>
+                      <a:prstDash val="solid"/>
+                      <a:round/>
+                      <a:headEnd type="none" w="med" len="med"/>
+                      <a:tailEnd type="none" w="med" len="med"/>
+                    </a:lnB>
+                    <a:solidFill>
+                      <a:srgbClr val="141B24"/>
+                    </a:solidFill>
+                  </a:tcPr>
+                </a:tc>
+              </a:tr>
+            </a:tbl>
+          </a:graphicData>
+        </a:graphic>
+      </p:graphicFrame>
+      <p:sp>
+        <p:nvSpPr>
+          <p:cNvPr id="6" name="Text 2"/>
           <p:cNvSpPr/>
           <p:nvPr/>
         </p:nvSpPr>
         <p:spPr>
           <a:xfrm>
-            <a:off x="548640" y="1371600"/>
-            <a:ext cx="5394960" cy="4206240"/>
-          </a:xfrm>
-          <a:prstGeom prst="rect">
-            <a:avLst/>
-          </a:prstGeom>
-          <a:solidFill>
-            <a:srgbClr val="141B24"/>
-          </a:solidFill>
-          <a:ln w="12700">
-            <a:solidFill>
-              <a:srgbClr val="39FF88"/>
-            </a:solidFill>
-            <a:prstDash val="solid"/>
-          </a:ln>
-        </p:spPr>
-      </p:sp>
-      <p:sp>
-        <p:nvSpPr>
-          <p:cNvPr id="5" name="Text 3"/>
-          <p:cNvSpPr/>
-          <p:nvPr/>
-        </p:nvSpPr>
-        <p:spPr>
-          <a:xfrm>
-            <a:off x="731520" y="1508760"/>
-            <a:ext cx="5029200" cy="457200"/>
-          </a:xfrm>
-          <a:prstGeom prst="rect">
-            <a:avLst/>
-          </a:prstGeom>
-          <a:noFill/>
-          <a:ln/>
-        </p:spPr>
-        <p:txBody>
-          <a:bodyPr wrap="square" lIns="0" tIns="0" rIns="0" bIns="0" rtlCol="0" anchor="ctr"/>
-          <a:lstStyle/>
-          <a:p>
-            <a:pPr indent="0" marL="0">
-              <a:buNone/>
-            </a:pPr>
-            <a:r>
-              <a:rPr lang="en-US" sz="2000" b="1" dirty="0">
-                <a:solidFill>
-                  <a:srgbClr val="39FF88"/>
-                </a:solidFill>
-                <a:latin typeface="Courier New" pitchFamily="34" charset="0"/>
-                <a:ea typeface="Courier New" pitchFamily="34" charset="-122"/>
-                <a:cs typeface="Courier New" pitchFamily="34" charset="-120"/>
-              </a:rPr>
-              <a:t>Learned</a:t>
-            </a:r>
-            <a:endParaRPr lang="en-US" sz="2000" dirty="0"/>
-          </a:p>
-        </p:txBody>
-      </p:sp>
-      <p:sp>
-        <p:nvSpPr>
-          <p:cNvPr id="6" name="Text 4"/>
-          <p:cNvSpPr/>
-          <p:nvPr/>
-        </p:nvSpPr>
-        <p:spPr>
-          <a:xfrm>
-            <a:off x="731520" y="2011680"/>
-            <a:ext cx="5029200" cy="3429000"/>
+            <a:off x="548640" y="3474720"/>
+            <a:ext cx="11064240" cy="2743200"/>
           </a:xfrm>
           <a:prstGeom prst="rect">
             <a:avLst/>
@@ -23691,11 +25727,15 @@
           <a:bodyPr wrap="square" lIns="0" tIns="0" rIns="0" bIns="0" rtlCol="0" anchor="t"/>
           <a:lstStyle/>
           <a:p>
-            <a:pPr indent="0" marL="0">
-              <a:buNone/>
+            <a:pPr marL="342900" indent="-342900">
+              <a:spcAft>
+                <a:spcPts val="800"/>
+              </a:spcAft>
+              <a:buSzPct val="100000"/>
+              <a:buChar char="•"/>
             </a:pPr>
             <a:r>
-              <a:rPr lang="en-US" sz="2000" dirty="0">
+              <a:rPr lang="en-US" sz="1600" dirty="0">
                 <a:solidFill>
                   <a:srgbClr val="E6EDF3"/>
                 </a:solidFill>
@@ -23703,16 +25743,20 @@
                 <a:ea typeface="Calibri" pitchFamily="34" charset="-122"/>
                 <a:cs typeface="Calibri" pitchFamily="34" charset="-120"/>
               </a:rPr>
-              <a:t>Reliability is a set of simple rules working together.</a:t>
-            </a:r>
-            <a:endParaRPr lang="en-US" sz="2000" dirty="0"/>
-          </a:p>
-          <a:p>
-            <a:pPr indent="0" marL="0">
-              <a:buNone/>
+              <a:t>Polite mode: back off when a standing queue builds (jitter-aware). Share 70% to 52%; costs speed (0.53x to 0.58x of AIMD time on 100 paths, worst path 2.95x slower), so it is off by default</a:t>
+            </a:r>
+            <a:endParaRPr lang="en-US" sz="1600" dirty="0"/>
+          </a:p>
+          <a:p>
+            <a:pPr marL="342900" indent="-342900">
+              <a:spcAft>
+                <a:spcPts val="800"/>
+              </a:spcAft>
+              <a:buSzPct val="100000"/>
+              <a:buChar char="•"/>
             </a:pPr>
             <a:r>
-              <a:rPr lang="en-US" sz="2000" dirty="0">
+              <a:rPr lang="en-US" sz="1600" dirty="0">
                 <a:solidFill>
                   <a:srgbClr val="E6EDF3"/>
                 </a:solidFill>
@@ -23720,16 +25764,20 @@
                 <a:ea typeface="Calibri" pitchFamily="34" charset="-122"/>
                 <a:cs typeface="Calibri" pitchFamily="34" charset="-120"/>
               </a:rPr>
-              <a:t>Congestion control matters as much as retransmission.</a:t>
-            </a:r>
-            <a:endParaRPr lang="en-US" sz="2000" dirty="0"/>
-          </a:p>
-          <a:p>
-            <a:pPr indent="0" marL="0">
-              <a:buNone/>
+              <a:t>Bursty cross traffic (new proxy option, 8 runs): neural is 15% faster than tuned AIMD but level with CUBIC; three tweaks to fix its extra retransmissions did not help</a:t>
+            </a:r>
+            <a:endParaRPr lang="en-US" sz="1600" dirty="0"/>
+          </a:p>
+          <a:p>
+            <a:pPr marL="342900" indent="-342900">
+              <a:spcAft>
+                <a:spcPts val="800"/>
+              </a:spcAft>
+              <a:buSzPct val="100000"/>
+              <a:buChar char="•"/>
             </a:pPr>
             <a:r>
-              <a:rPr lang="en-US" sz="2000" dirty="0">
+              <a:rPr lang="en-US" sz="1600" dirty="0">
                 <a:solidFill>
                   <a:srgbClr val="E6EDF3"/>
                 </a:solidFill>
@@ -23737,185 +25785,9 @@
                 <a:ea typeface="Calibri" pitchFamily="34" charset="-122"/>
                 <a:cs typeface="Calibri" pitchFamily="34" charset="-120"/>
               </a:rPr>
-              <a:t>Testing tools fail in surprising ways.</a:t>
-            </a:r>
-            <a:endParaRPr lang="en-US" sz="2000" dirty="0"/>
-          </a:p>
-        </p:txBody>
-      </p:sp>
-      <p:sp>
-        <p:nvSpPr>
-          <p:cNvPr id="7" name="Shape 5"/>
-          <p:cNvSpPr/>
-          <p:nvPr/>
-        </p:nvSpPr>
-        <p:spPr>
-          <a:xfrm>
-            <a:off x="6217920" y="1371600"/>
-            <a:ext cx="5394960" cy="4206240"/>
-          </a:xfrm>
-          <a:prstGeom prst="rect">
-            <a:avLst/>
-          </a:prstGeom>
-          <a:solidFill>
-            <a:srgbClr val="141B24"/>
-          </a:solidFill>
-          <a:ln w="12700">
-            <a:solidFill>
-              <a:srgbClr val="FFB000"/>
-            </a:solidFill>
-            <a:prstDash val="solid"/>
-          </a:ln>
-        </p:spPr>
-      </p:sp>
-      <p:sp>
-        <p:nvSpPr>
-          <p:cNvPr id="8" name="Text 6"/>
-          <p:cNvSpPr/>
-          <p:nvPr/>
-        </p:nvSpPr>
-        <p:spPr>
-          <a:xfrm>
-            <a:off x="6400800" y="1508760"/>
-            <a:ext cx="5029200" cy="457200"/>
-          </a:xfrm>
-          <a:prstGeom prst="rect">
-            <a:avLst/>
-          </a:prstGeom>
-          <a:noFill/>
-          <a:ln/>
-        </p:spPr>
-        <p:txBody>
-          <a:bodyPr wrap="square" lIns="0" tIns="0" rIns="0" bIns="0" rtlCol="0" anchor="ctr"/>
-          <a:lstStyle/>
-          <a:p>
-            <a:pPr indent="0" marL="0">
-              <a:buNone/>
-            </a:pPr>
-            <a:r>
-              <a:rPr lang="en-US" sz="2000" b="1" dirty="0">
-                <a:solidFill>
-                  <a:srgbClr val="FFB000"/>
-                </a:solidFill>
-                <a:latin typeface="Courier New" pitchFamily="34" charset="0"/>
-                <a:ea typeface="Courier New" pitchFamily="34" charset="-122"/>
-                <a:cs typeface="Courier New" pitchFamily="34" charset="-120"/>
-              </a:rPr>
-              <a:t>Next</a:t>
-            </a:r>
-            <a:endParaRPr lang="en-US" sz="2000" dirty="0"/>
-          </a:p>
-        </p:txBody>
-      </p:sp>
-      <p:sp>
-        <p:nvSpPr>
-          <p:cNvPr id="9" name="Text 7"/>
-          <p:cNvSpPr/>
-          <p:nvPr/>
-        </p:nvSpPr>
-        <p:spPr>
-          <a:xfrm>
-            <a:off x="6400800" y="2011680"/>
-            <a:ext cx="5029200" cy="3429000"/>
-          </a:xfrm>
-          <a:prstGeom prst="rect">
-            <a:avLst/>
-          </a:prstGeom>
-          <a:noFill/>
-          <a:ln/>
-        </p:spPr>
-        <p:txBody>
-          <a:bodyPr wrap="square" lIns="0" tIns="0" rIns="0" bIns="0" rtlCol="0" anchor="t"/>
-          <a:lstStyle/>
-          <a:p>
-            <a:pPr indent="0" marL="0">
-              <a:buNone/>
-            </a:pPr>
-            <a:r>
-              <a:rPr lang="en-US" sz="2000" dirty="0">
-                <a:solidFill>
-                  <a:srgbClr val="E6EDF3"/>
-                </a:solidFill>
-                <a:latin typeface="Calibri" pitchFamily="34" charset="0"/>
-                <a:ea typeface="Calibri" pitchFamily="34" charset="-122"/>
-                <a:cs typeface="Calibri" pitchFamily="34" charset="-120"/>
-              </a:rPr>
-              <a:t>Fairness-aware training, TCP coexistence</a:t>
-            </a:r>
-            <a:endParaRPr lang="en-US" sz="2000" dirty="0"/>
-          </a:p>
-          <a:p>
-            <a:pPr indent="0" marL="0">
-              <a:buNone/>
-            </a:pPr>
-            <a:r>
-              <a:rPr lang="en-US" sz="2000" dirty="0">
-                <a:solidFill>
-                  <a:srgbClr val="E6EDF3"/>
-                </a:solidFill>
-                <a:latin typeface="Calibri" pitchFamily="34" charset="0"/>
-                <a:ea typeface="Calibri" pitchFamily="34" charset="-122"/>
-                <a:cs typeface="Calibri" pitchFamily="34" charset="-120"/>
-              </a:rPr>
-              <a:t>Train on real traces with cross traffic</a:t>
-            </a:r>
-            <a:endParaRPr lang="en-US" sz="2000" dirty="0"/>
-          </a:p>
-          <a:p>
-            <a:pPr indent="0" marL="0">
-              <a:buNone/>
-            </a:pPr>
-            <a:r>
-              <a:rPr lang="en-US" sz="2000" dirty="0">
-                <a:solidFill>
-                  <a:srgbClr val="E6EDF3"/>
-                </a:solidFill>
-                <a:latin typeface="Calibri" pitchFamily="34" charset="0"/>
-                <a:ea typeface="Calibri" pitchFamily="34" charset="-122"/>
-                <a:cs typeface="Calibri" pitchFamily="34" charset="-120"/>
-              </a:rPr>
-              <a:t>Kernel netem and real multi-machine tests</a:t>
-            </a:r>
-            <a:endParaRPr lang="en-US" sz="2000" dirty="0"/>
-          </a:p>
-        </p:txBody>
-      </p:sp>
-      <p:sp>
-        <p:nvSpPr>
-          <p:cNvPr id="10" name="Text 8"/>
-          <p:cNvSpPr/>
-          <p:nvPr/>
-        </p:nvSpPr>
-        <p:spPr>
-          <a:xfrm>
-            <a:off x="548640" y="5852160"/>
-            <a:ext cx="10972800" cy="365760"/>
-          </a:xfrm>
-          <a:prstGeom prst="rect">
-            <a:avLst/>
-          </a:prstGeom>
-          <a:noFill/>
-          <a:ln/>
-        </p:spPr>
-        <p:txBody>
-          <a:bodyPr wrap="square" lIns="0" tIns="0" rIns="0" bIns="0" rtlCol="0" anchor="ctr"/>
-          <a:lstStyle/>
-          <a:p>
-            <a:pPr indent="0" marL="0">
-              <a:buNone/>
-            </a:pPr>
-            <a:r>
-              <a:rPr lang="en-US" sz="1400" dirty="0">
-                <a:solidFill>
-                  <a:srgbClr val="8B98A5"/>
-                </a:solidFill>
-                <a:latin typeface="Calibri" pitchFamily="34" charset="0"/>
-                <a:ea typeface="Calibri" pitchFamily="34" charset="-122"/>
-                <a:cs typeface="Calibri" pitchFamily="34" charset="-120"/>
-              </a:rPr>
-              <a:t>Limits: no kernel netem or multi-machine test; the agent is not a polite neighbour; no gain at 10% random loss; the tabular agent did not beat AIMD.</a:t>
-            </a:r>
-            <a:endParaRPr lang="en-US" sz="1400" dirty="0"/>
+              <a:t>Server now handles up to 16 clients at once; a test sends two files simultaneously and checks both byte-for-byte</a:t>
+            </a:r>
+            <a:endParaRPr lang="en-US" sz="1600" dirty="0"/>
           </a:p>
         </p:txBody>
       </p:sp>
@@ -23959,8 +25831,8 @@
         </p:nvSpPr>
         <p:spPr>
           <a:xfrm>
-            <a:off x="731520" y="2103120"/>
-            <a:ext cx="10058400" cy="1097280"/>
+            <a:off x="548640" y="320040"/>
+            <a:ext cx="11064240" cy="731520"/>
           </a:xfrm>
           <a:prstGeom prst="rect">
             <a:avLst/>
@@ -23976,7 +25848,7 @@
               <a:buNone/>
             </a:pPr>
             <a:r>
-              <a:rPr lang="en-US" sz="6400" b="1" dirty="0">
+              <a:rPr lang="en-US" sz="3000" b="1" dirty="0">
                 <a:solidFill>
                   <a:srgbClr val="39FF88"/>
                 </a:solidFill>
@@ -23984,9 +25856,9 @@
                 <a:ea typeface="Courier New" pitchFamily="34" charset="-122"/>
                 <a:cs typeface="Courier New" pitchFamily="34" charset="-120"/>
               </a:rPr>
-              <a:t>Thank you</a:t>
-            </a:r>
-            <a:endParaRPr lang="en-US" sz="6400" dirty="0"/>
+              <a:t>Learnings and future work</a:t>
+            </a:r>
+            <a:endParaRPr lang="en-US" sz="3000" dirty="0"/>
           </a:p>
         </p:txBody>
       </p:sp>
@@ -23998,8 +25870,8 @@
         </p:nvSpPr>
         <p:spPr>
           <a:xfrm>
-            <a:off x="731520" y="3474720"/>
-            <a:ext cx="10058400" cy="548640"/>
+            <a:off x="9418320" y="6446520"/>
+            <a:ext cx="2377440" cy="274320"/>
           </a:xfrm>
           <a:prstGeom prst="rect">
             <a:avLst/>
@@ -24011,34 +25883,59 @@
           <a:bodyPr wrap="square" lIns="0" tIns="0" rIns="0" bIns="0" rtlCol="0" anchor="ctr"/>
           <a:lstStyle/>
           <a:p>
-            <a:pPr indent="0" marL="0">
+            <a:pPr algn="r" indent="0" marL="0">
               <a:buNone/>
             </a:pPr>
             <a:r>
-              <a:rPr lang="en-US" sz="2600" dirty="0">
+              <a:rPr lang="en-US" sz="1000" dirty="0">
                 <a:solidFill>
-                  <a:srgbClr val="E6EDF3"/>
+                  <a:srgbClr val="8B98A5"/>
                 </a:solidFill>
                 <a:latin typeface="Courier New" pitchFamily="34" charset="0"/>
                 <a:ea typeface="Courier New" pitchFamily="34" charset="-122"/>
                 <a:cs typeface="Courier New" pitchFamily="34" charset="-120"/>
               </a:rPr>
-              <a:t>github.com/Capsturrrr/rudp</a:t>
-            </a:r>
-            <a:endParaRPr lang="en-US" sz="2600" dirty="0"/>
+              <a:t>31 / 33   Smart-RUDP</a:t>
+            </a:r>
+            <a:endParaRPr lang="en-US" sz="1000" dirty="0"/>
           </a:p>
         </p:txBody>
       </p:sp>
       <p:sp>
         <p:nvSpPr>
-          <p:cNvPr id="4" name="Text 2"/>
+          <p:cNvPr id="4" name="Shape 2"/>
           <p:cNvSpPr/>
           <p:nvPr/>
         </p:nvSpPr>
         <p:spPr>
           <a:xfrm>
-            <a:off x="731520" y="4206240"/>
-            <a:ext cx="10058400" cy="457200"/>
+            <a:off x="548640" y="1371600"/>
+            <a:ext cx="5394960" cy="4206240"/>
+          </a:xfrm>
+          <a:prstGeom prst="rect">
+            <a:avLst/>
+          </a:prstGeom>
+          <a:solidFill>
+            <a:srgbClr val="141B24"/>
+          </a:solidFill>
+          <a:ln w="12700">
+            <a:solidFill>
+              <a:srgbClr val="39FF88"/>
+            </a:solidFill>
+            <a:prstDash val="solid"/>
+          </a:ln>
+        </p:spPr>
+      </p:sp>
+      <p:sp>
+        <p:nvSpPr>
+          <p:cNvPr id="5" name="Text 3"/>
+          <p:cNvSpPr/>
+          <p:nvPr/>
+        </p:nvSpPr>
+        <p:spPr>
+          <a:xfrm>
+            <a:off x="731520" y="1508760"/>
+            <a:ext cx="5029200" cy="457200"/>
           </a:xfrm>
           <a:prstGeom prst="rect">
             <a:avLst/>
@@ -24054,7 +25951,256 @@
               <a:buNone/>
             </a:pPr>
             <a:r>
-              <a:rPr lang="en-US" sz="1800" dirty="0">
+              <a:rPr lang="en-US" sz="2000" b="1" dirty="0">
+                <a:solidFill>
+                  <a:srgbClr val="39FF88"/>
+                </a:solidFill>
+                <a:latin typeface="Courier New" pitchFamily="34" charset="0"/>
+                <a:ea typeface="Courier New" pitchFamily="34" charset="-122"/>
+                <a:cs typeface="Courier New" pitchFamily="34" charset="-120"/>
+              </a:rPr>
+              <a:t>Learned</a:t>
+            </a:r>
+            <a:endParaRPr lang="en-US" sz="2000" dirty="0"/>
+          </a:p>
+        </p:txBody>
+      </p:sp>
+      <p:sp>
+        <p:nvSpPr>
+          <p:cNvPr id="6" name="Text 4"/>
+          <p:cNvSpPr/>
+          <p:nvPr/>
+        </p:nvSpPr>
+        <p:spPr>
+          <a:xfrm>
+            <a:off x="731520" y="2011680"/>
+            <a:ext cx="5029200" cy="3429000"/>
+          </a:xfrm>
+          <a:prstGeom prst="rect">
+            <a:avLst/>
+          </a:prstGeom>
+          <a:noFill/>
+          <a:ln/>
+        </p:spPr>
+        <p:txBody>
+          <a:bodyPr wrap="square" lIns="0" tIns="0" rIns="0" bIns="0" rtlCol="0" anchor="t"/>
+          <a:lstStyle/>
+          <a:p>
+            <a:pPr indent="0" marL="0">
+              <a:buNone/>
+            </a:pPr>
+            <a:r>
+              <a:rPr lang="en-US" sz="2000" dirty="0">
+                <a:solidFill>
+                  <a:srgbClr val="E6EDF3"/>
+                </a:solidFill>
+                <a:latin typeface="Calibri" pitchFamily="34" charset="0"/>
+                <a:ea typeface="Calibri" pitchFamily="34" charset="-122"/>
+                <a:cs typeface="Calibri" pitchFamily="34" charset="-120"/>
+              </a:rPr>
+              <a:t>Reliability is a set of simple rules working together.</a:t>
+            </a:r>
+            <a:endParaRPr lang="en-US" sz="2000" dirty="0"/>
+          </a:p>
+          <a:p>
+            <a:pPr indent="0" marL="0">
+              <a:buNone/>
+            </a:pPr>
+            <a:r>
+              <a:rPr lang="en-US" sz="2000" dirty="0">
+                <a:solidFill>
+                  <a:srgbClr val="E6EDF3"/>
+                </a:solidFill>
+                <a:latin typeface="Calibri" pitchFamily="34" charset="0"/>
+                <a:ea typeface="Calibri" pitchFamily="34" charset="-122"/>
+                <a:cs typeface="Calibri" pitchFamily="34" charset="-120"/>
+              </a:rPr>
+              <a:t>Congestion control matters as much as retransmission.</a:t>
+            </a:r>
+            <a:endParaRPr lang="en-US" sz="2000" dirty="0"/>
+          </a:p>
+          <a:p>
+            <a:pPr indent="0" marL="0">
+              <a:buNone/>
+            </a:pPr>
+            <a:r>
+              <a:rPr lang="en-US" sz="2000" dirty="0">
+                <a:solidFill>
+                  <a:srgbClr val="E6EDF3"/>
+                </a:solidFill>
+                <a:latin typeface="Calibri" pitchFamily="34" charset="0"/>
+                <a:ea typeface="Calibri" pitchFamily="34" charset="-122"/>
+                <a:cs typeface="Calibri" pitchFamily="34" charset="-120"/>
+              </a:rPr>
+              <a:t>Testing tools fail in surprising ways.</a:t>
+            </a:r>
+            <a:endParaRPr lang="en-US" sz="2000" dirty="0"/>
+          </a:p>
+        </p:txBody>
+      </p:sp>
+      <p:sp>
+        <p:nvSpPr>
+          <p:cNvPr id="7" name="Shape 5"/>
+          <p:cNvSpPr/>
+          <p:nvPr/>
+        </p:nvSpPr>
+        <p:spPr>
+          <a:xfrm>
+            <a:off x="6217920" y="1371600"/>
+            <a:ext cx="5394960" cy="4206240"/>
+          </a:xfrm>
+          <a:prstGeom prst="rect">
+            <a:avLst/>
+          </a:prstGeom>
+          <a:solidFill>
+            <a:srgbClr val="141B24"/>
+          </a:solidFill>
+          <a:ln w="12700">
+            <a:solidFill>
+              <a:srgbClr val="FFB000"/>
+            </a:solidFill>
+            <a:prstDash val="solid"/>
+          </a:ln>
+        </p:spPr>
+      </p:sp>
+      <p:sp>
+        <p:nvSpPr>
+          <p:cNvPr id="8" name="Text 6"/>
+          <p:cNvSpPr/>
+          <p:nvPr/>
+        </p:nvSpPr>
+        <p:spPr>
+          <a:xfrm>
+            <a:off x="6400800" y="1508760"/>
+            <a:ext cx="5029200" cy="457200"/>
+          </a:xfrm>
+          <a:prstGeom prst="rect">
+            <a:avLst/>
+          </a:prstGeom>
+          <a:noFill/>
+          <a:ln/>
+        </p:spPr>
+        <p:txBody>
+          <a:bodyPr wrap="square" lIns="0" tIns="0" rIns="0" bIns="0" rtlCol="0" anchor="ctr"/>
+          <a:lstStyle/>
+          <a:p>
+            <a:pPr indent="0" marL="0">
+              <a:buNone/>
+            </a:pPr>
+            <a:r>
+              <a:rPr lang="en-US" sz="2000" b="1" dirty="0">
+                <a:solidFill>
+                  <a:srgbClr val="FFB000"/>
+                </a:solidFill>
+                <a:latin typeface="Courier New" pitchFamily="34" charset="0"/>
+                <a:ea typeface="Courier New" pitchFamily="34" charset="-122"/>
+                <a:cs typeface="Courier New" pitchFamily="34" charset="-120"/>
+              </a:rPr>
+              <a:t>Next</a:t>
+            </a:r>
+            <a:endParaRPr lang="en-US" sz="2000" dirty="0"/>
+          </a:p>
+        </p:txBody>
+      </p:sp>
+      <p:sp>
+        <p:nvSpPr>
+          <p:cNvPr id="9" name="Text 7"/>
+          <p:cNvSpPr/>
+          <p:nvPr/>
+        </p:nvSpPr>
+        <p:spPr>
+          <a:xfrm>
+            <a:off x="6400800" y="2011680"/>
+            <a:ext cx="5029200" cy="3429000"/>
+          </a:xfrm>
+          <a:prstGeom prst="rect">
+            <a:avLst/>
+          </a:prstGeom>
+          <a:noFill/>
+          <a:ln/>
+        </p:spPr>
+        <p:txBody>
+          <a:bodyPr wrap="square" lIns="0" tIns="0" rIns="0" bIns="0" rtlCol="0" anchor="t"/>
+          <a:lstStyle/>
+          <a:p>
+            <a:pPr indent="0" marL="0">
+              <a:buNone/>
+            </a:pPr>
+            <a:r>
+              <a:rPr lang="en-US" sz="2000" dirty="0">
+                <a:solidFill>
+                  <a:srgbClr val="E6EDF3"/>
+                </a:solidFill>
+                <a:latin typeface="Calibri" pitchFamily="34" charset="0"/>
+                <a:ea typeface="Calibri" pitchFamily="34" charset="-122"/>
+                <a:cs typeface="Calibri" pitchFamily="34" charset="-120"/>
+              </a:rPr>
+              <a:t>Fairness-aware training, TCP coexistence</a:t>
+            </a:r>
+            <a:endParaRPr lang="en-US" sz="2000" dirty="0"/>
+          </a:p>
+          <a:p>
+            <a:pPr indent="0" marL="0">
+              <a:buNone/>
+            </a:pPr>
+            <a:r>
+              <a:rPr lang="en-US" sz="2000" dirty="0">
+                <a:solidFill>
+                  <a:srgbClr val="E6EDF3"/>
+                </a:solidFill>
+                <a:latin typeface="Calibri" pitchFamily="34" charset="0"/>
+                <a:ea typeface="Calibri" pitchFamily="34" charset="-122"/>
+                <a:cs typeface="Calibri" pitchFamily="34" charset="-120"/>
+              </a:rPr>
+              <a:t>Train on real traces with cross traffic</a:t>
+            </a:r>
+            <a:endParaRPr lang="en-US" sz="2000" dirty="0"/>
+          </a:p>
+          <a:p>
+            <a:pPr indent="0" marL="0">
+              <a:buNone/>
+            </a:pPr>
+            <a:r>
+              <a:rPr lang="en-US" sz="2000" dirty="0">
+                <a:solidFill>
+                  <a:srgbClr val="E6EDF3"/>
+                </a:solidFill>
+                <a:latin typeface="Calibri" pitchFamily="34" charset="0"/>
+                <a:ea typeface="Calibri" pitchFamily="34" charset="-122"/>
+                <a:cs typeface="Calibri" pitchFamily="34" charset="-120"/>
+              </a:rPr>
+              <a:t>Kernel netem and real multi-machine tests</a:t>
+            </a:r>
+            <a:endParaRPr lang="en-US" sz="2000" dirty="0"/>
+          </a:p>
+        </p:txBody>
+      </p:sp>
+      <p:sp>
+        <p:nvSpPr>
+          <p:cNvPr id="10" name="Text 8"/>
+          <p:cNvSpPr/>
+          <p:nvPr/>
+        </p:nvSpPr>
+        <p:spPr>
+          <a:xfrm>
+            <a:off x="548640" y="5852160"/>
+            <a:ext cx="10972800" cy="365760"/>
+          </a:xfrm>
+          <a:prstGeom prst="rect">
+            <a:avLst/>
+          </a:prstGeom>
+          <a:noFill/>
+          <a:ln/>
+        </p:spPr>
+        <p:txBody>
+          <a:bodyPr wrap="square" lIns="0" tIns="0" rIns="0" bIns="0" rtlCol="0" anchor="ctr"/>
+          <a:lstStyle/>
+          <a:p>
+            <a:pPr indent="0" marL="0">
+              <a:buNone/>
+            </a:pPr>
+            <a:r>
+              <a:rPr lang="en-US" sz="1400" dirty="0">
                 <a:solidFill>
                   <a:srgbClr val="8B98A5"/>
                 </a:solidFill>
@@ -24062,9 +26208,9 @@
                 <a:ea typeface="Calibri" pitchFamily="34" charset="-122"/>
                 <a:cs typeface="Calibri" pitchFamily="34" charset="-120"/>
               </a:rPr>
-              <a:t>Harshavardhan Mallela   Rohit Arya   Shloak Sinha</a:t>
-            </a:r>
-            <a:endParaRPr lang="en-US" sz="1800" dirty="0"/>
+              <a:t>Limits: no kernel netem or multi-machine test; polite mode is a hand-made rule that costs speed; level with CUBIC under bursty cross traffic; no gain at 10% random loss.</a:t>
+            </a:r>
+            <a:endParaRPr lang="en-US" sz="1400" dirty="0"/>
           </a:p>
         </p:txBody>
       </p:sp>
@@ -24108,6 +26254,155 @@
         </p:nvSpPr>
         <p:spPr>
           <a:xfrm>
+            <a:off x="731520" y="2103120"/>
+            <a:ext cx="10058400" cy="1097280"/>
+          </a:xfrm>
+          <a:prstGeom prst="rect">
+            <a:avLst/>
+          </a:prstGeom>
+          <a:noFill/>
+          <a:ln/>
+        </p:spPr>
+        <p:txBody>
+          <a:bodyPr wrap="square" lIns="0" tIns="0" rIns="0" bIns="0" rtlCol="0" anchor="ctr"/>
+          <a:lstStyle/>
+          <a:p>
+            <a:pPr indent="0" marL="0">
+              <a:buNone/>
+            </a:pPr>
+            <a:r>
+              <a:rPr lang="en-US" sz="6400" b="1" dirty="0">
+                <a:solidFill>
+                  <a:srgbClr val="39FF88"/>
+                </a:solidFill>
+                <a:latin typeface="Courier New" pitchFamily="34" charset="0"/>
+                <a:ea typeface="Courier New" pitchFamily="34" charset="-122"/>
+                <a:cs typeface="Courier New" pitchFamily="34" charset="-120"/>
+              </a:rPr>
+              <a:t>Thank you</a:t>
+            </a:r>
+            <a:endParaRPr lang="en-US" sz="6400" dirty="0"/>
+          </a:p>
+        </p:txBody>
+      </p:sp>
+      <p:sp>
+        <p:nvSpPr>
+          <p:cNvPr id="3" name="Text 1"/>
+          <p:cNvSpPr/>
+          <p:nvPr/>
+        </p:nvSpPr>
+        <p:spPr>
+          <a:xfrm>
+            <a:off x="731520" y="3474720"/>
+            <a:ext cx="10058400" cy="548640"/>
+          </a:xfrm>
+          <a:prstGeom prst="rect">
+            <a:avLst/>
+          </a:prstGeom>
+          <a:noFill/>
+          <a:ln/>
+        </p:spPr>
+        <p:txBody>
+          <a:bodyPr wrap="square" lIns="0" tIns="0" rIns="0" bIns="0" rtlCol="0" anchor="ctr"/>
+          <a:lstStyle/>
+          <a:p>
+            <a:pPr indent="0" marL="0">
+              <a:buNone/>
+            </a:pPr>
+            <a:r>
+              <a:rPr lang="en-US" sz="2600" dirty="0">
+                <a:solidFill>
+                  <a:srgbClr val="E6EDF3"/>
+                </a:solidFill>
+                <a:latin typeface="Courier New" pitchFamily="34" charset="0"/>
+                <a:ea typeface="Courier New" pitchFamily="34" charset="-122"/>
+                <a:cs typeface="Courier New" pitchFamily="34" charset="-120"/>
+              </a:rPr>
+              <a:t>github.com/Capsturrrr/rudp</a:t>
+            </a:r>
+            <a:endParaRPr lang="en-US" sz="2600" dirty="0"/>
+          </a:p>
+        </p:txBody>
+      </p:sp>
+      <p:sp>
+        <p:nvSpPr>
+          <p:cNvPr id="4" name="Text 2"/>
+          <p:cNvSpPr/>
+          <p:nvPr/>
+        </p:nvSpPr>
+        <p:spPr>
+          <a:xfrm>
+            <a:off x="731520" y="4206240"/>
+            <a:ext cx="10058400" cy="457200"/>
+          </a:xfrm>
+          <a:prstGeom prst="rect">
+            <a:avLst/>
+          </a:prstGeom>
+          <a:noFill/>
+          <a:ln/>
+        </p:spPr>
+        <p:txBody>
+          <a:bodyPr wrap="square" lIns="0" tIns="0" rIns="0" bIns="0" rtlCol="0" anchor="ctr"/>
+          <a:lstStyle/>
+          <a:p>
+            <a:pPr indent="0" marL="0">
+              <a:buNone/>
+            </a:pPr>
+            <a:r>
+              <a:rPr lang="en-US" sz="1800" dirty="0">
+                <a:solidFill>
+                  <a:srgbClr val="8B98A5"/>
+                </a:solidFill>
+                <a:latin typeface="Calibri" pitchFamily="34" charset="0"/>
+                <a:ea typeface="Calibri" pitchFamily="34" charset="-122"/>
+                <a:cs typeface="Calibri" pitchFamily="34" charset="-120"/>
+              </a:rPr>
+              <a:t>Harshavardhan Mallela   Rohit Arya   Shloak Sinha</a:t>
+            </a:r>
+            <a:endParaRPr lang="en-US" sz="1800" dirty="0"/>
+          </a:p>
+        </p:txBody>
+      </p:sp>
+    </p:spTree>
+  </p:cSld>
+  <p:clrMapOvr>
+    <a:masterClrMapping/>
+  </p:clrMapOvr>
+</p:sld>
+</file>
+
+<file path=ppt/slides/slide33.xml><?xml version="1.0" encoding="utf-8"?>
+<p:sld xmlns:a="http://schemas.openxmlformats.org/drawingml/2006/main" xmlns:r="http://schemas.openxmlformats.org/officeDocument/2006/relationships" xmlns:p="http://schemas.openxmlformats.org/presentationml/2006/main">
+  <p:cSld name="Slide 33">
+    <p:bg>
+      <p:bgPr>
+        <a:solidFill>
+          <a:srgbClr val="0B0F14"/>
+        </a:solidFill>
+      </p:bgPr>
+    </p:bg>
+    <p:spTree>
+      <p:nvGrpSpPr>
+        <p:cNvPr id="1" name=""/>
+        <p:cNvGrpSpPr/>
+        <p:nvPr/>
+      </p:nvGrpSpPr>
+      <p:grpSpPr>
+        <a:xfrm>
+          <a:off x="0" y="0"/>
+          <a:ext cx="0" cy="0"/>
+          <a:chOff x="0" y="0"/>
+          <a:chExt cx="0" cy="0"/>
+        </a:xfrm>
+      </p:grpSpPr>
+      <p:sp>
+        <p:nvSpPr>
+          <p:cNvPr id="2" name="Text 0"/>
+          <p:cNvSpPr/>
+          <p:nvPr/>
+        </p:nvSpPr>
+        <p:spPr>
+          <a:xfrm>
             <a:off x="548640" y="320040"/>
             <a:ext cx="11064240" cy="731520"/>
           </a:xfrm>
@@ -24412,7 +26707,7 @@
                 <a:ea typeface="Courier New" pitchFamily="34" charset="-122"/>
                 <a:cs typeface="Courier New" pitchFamily="34" charset="-120"/>
               </a:rPr>
-              <a:t>4 / 32   Smart-RUDP</a:t>
+              <a:t>4 / 33   Smart-RUDP</a:t>
             </a:r>
             <a:endParaRPr lang="en-US" sz="1000" dirty="0"/>
           </a:p>
@@ -24973,7 +27268,7 @@
                 <a:ea typeface="Courier New" pitchFamily="34" charset="-122"/>
                 <a:cs typeface="Courier New" pitchFamily="34" charset="-120"/>
               </a:rPr>
-              <a:t>5 / 32   Smart-RUDP</a:t>
+              <a:t>5 / 33   Smart-RUDP</a:t>
             </a:r>
             <a:endParaRPr lang="en-US" sz="1000" dirty="0"/>
           </a:p>
@@ -26412,7 +28707,7 @@
                 <a:ea typeface="Courier New" pitchFamily="34" charset="-122"/>
                 <a:cs typeface="Courier New" pitchFamily="34" charset="-120"/>
               </a:rPr>
-              <a:t>6 / 32   Smart-RUDP</a:t>
+              <a:t>6 / 33   Smart-RUDP</a:t>
             </a:r>
             <a:endParaRPr lang="en-US" sz="1000" dirty="0"/>
           </a:p>
@@ -27647,7 +29942,7 @@
                 <a:ea typeface="Courier New" pitchFamily="34" charset="-122"/>
                 <a:cs typeface="Courier New" pitchFamily="34" charset="-120"/>
               </a:rPr>
-              <a:t>7 / 32   Smart-RUDP</a:t>
+              <a:t>7 / 33   Smart-RUDP</a:t>
             </a:r>
             <a:endParaRPr lang="en-US" sz="1000" dirty="0"/>
           </a:p>
@@ -28090,7 +30385,7 @@
                 <a:ea typeface="Courier New" pitchFamily="34" charset="-122"/>
                 <a:cs typeface="Courier New" pitchFamily="34" charset="-120"/>
               </a:rPr>
-              <a:t>8 / 32   Smart-RUDP</a:t>
+              <a:t>8 / 33   Smart-RUDP</a:t>
             </a:r>
             <a:endParaRPr lang="en-US" sz="1000" dirty="0"/>
           </a:p>
@@ -28390,7 +30685,7 @@
                 <a:ea typeface="Courier New" pitchFamily="34" charset="-122"/>
                 <a:cs typeface="Courier New" pitchFamily="34" charset="-120"/>
               </a:rPr>
-              <a:t>9 / 32   Smart-RUDP</a:t>
+              <a:t>9 / 33   Smart-RUDP</a:t>
             </a:r>
             <a:endParaRPr lang="en-US" sz="1000" dirty="0"/>
           </a:p>

--- a/docs/RUDP_Presentation_with_notes.pptx
+++ b/docs/RUDP_Presentation_with_notes.pptx
@@ -38,9 +38,10 @@
     <p:sldId id="286" r:id="rId32"/>
     <p:sldId id="287" r:id="rId33"/>
     <p:sldId id="288" r:id="rId34"/>
+    <p:sldId id="289" r:id="rId35"/>
   </p:sldIdLst>
   <p:notesMasterIdLst>
-    <p:notesMasterId r:id="rId35"/>
+    <p:notesMasterId r:id="rId36"/>
   </p:notesMasterIdLst>
   <p:sldSz cx="12192000" cy="6858000"/>
   <p:notesSz cx="6858000" cy="12192000"/>
@@ -3304,19 +3305,13 @@
           <a:lstStyle/>
           <a:p>
             <a:r>
-              <a:t>[0:50] We worked on the weaknesses we had listed. For fairness we added an optional polite mode: when a standing queue builds, the agent backs off. Over 8 runs against tuned AIMD it takes 52 percent of the link instead of 70, and the Jain index rises from 0.86 to 0.94. The price is speed: on 100 random paths the average time goes from 0.53 to 0.58 times AIMD's, and the worst path is 2.95 times slower, so it stays off by default.</a:t>
+              <a:t>[0:40] This is the congestion window on the lossy path, same seed for both. AIMD, in grey, climbs one packet per round trip and halves on every loss, so it never gets above about 15 packets and takes nine seconds. The neural agent, in green, runs much higher, backs off when it sees loss or queueing delay, and finishes in four seconds. The figure comes from our virtual-time sender and can be regenerated with make figures.</a:t>
             </a:r>
           </a:p>
           <a:p/>
           <a:p>
             <a:r>
-              <a:t>We also added bursty cross traffic to the test proxy. Here the result is less flattering: the agent is 15 percent faster than tuned AIMD, but level with CUBIC, and it retransmits about three times as often as AIMD. Three tweaks did not fix that, so we report it as a limit. Finally the server now handles up to 16 clients, checked by sending two files at once.</a:t>
-            </a:r>
-          </a:p>
-          <a:p/>
-          <a:p>
-            <a:r>
-              <a:t>Likely question: Is polite mode learned? No. It is a hand-made rule on the delay signal. A learned version needs a two-flow training environment, which is future work.</a:t>
+              <a:t>Likely question: Why does the agent's window jump around so much? It picks one of five multipliers about once per round trip, so it moves in steps; that is the cost of a learned policy with a coarse action set.</a:t>
             </a:r>
           </a:p>
         </p:txBody>
@@ -3402,25 +3397,19 @@
           <a:lstStyle/>
           <a:p>
             <a:r>
-              <a:t>[0:50] What we learned: reliability is a set of simple rules working together, congestion control matters as much as retransmission, and tests tell you things about your own results that you do not want to hear.</a:t>
+              <a:t>[0:50] We worked on the weaknesses we had listed. For fairness we added an optional polite mode: when a standing queue builds, the agent backs off. Over 8 runs against tuned AIMD it takes 52 percent of the link instead of 70, and the Jain index rises from 0.86 to 0.94. The price is speed: on 100 random paths the average time goes from 0.53 to 0.58 times AIMD's, and the worst path is 2.95 times slower, so it stays off by default.</a:t>
             </a:r>
           </a:p>
           <a:p/>
           <a:p>
             <a:r>
-              <a:t>Our limits: no kernel netem or multi-machine test, the agent is not a polite neighbour, there is no gain at 10 percent random loss, and the tabular agent did not beat AIMD.</a:t>
+              <a:t>We also added bursty cross traffic to the test proxy. Here the result is less flattering: the agent is 15 percent faster than tuned AIMD, but level with CUBIC, and it retransmits about three times as often as AIMD. Three tweaks did not fix that, so we report it as a limit. Finally the server now handles up to 16 clients, checked by sending two files at once.</a:t>
             </a:r>
           </a:p>
           <a:p/>
           <a:p>
             <a:r>
-              <a:t>Next: fairness-aware training with TCP coexistence, training on real traces, and kernel and multi-machine tests.</a:t>
-            </a:r>
-          </a:p>
-          <a:p/>
-          <a:p>
-            <a:r>
-              <a:t>Likely question: What would you do first? Run the netem script on a Linux machine for kernel TCP and RUDP on the same path, then add a competing flow to the training.</a:t>
+              <a:t>Likely question: Is polite mode learned? No. It is a hand-made rule on the delay signal. A learned version needs a two-flow training environment, which is future work.</a:t>
             </a:r>
           </a:p>
         </p:txBody>
@@ -3506,13 +3495,25 @@
           <a:lstStyle/>
           <a:p>
             <a:r>
-              <a:t>[0:15] Thank you. The code, report and captures are at github.com/Capsturrrr/rudp. Happy to take questions.</a:t>
+              <a:t>[0:50] What we learned: reliability is a set of simple rules working together, congestion control matters as much as retransmission, and tests tell you things about your own results that you do not want to hear.</a:t>
             </a:r>
           </a:p>
           <a:p/>
           <a:p>
             <a:r>
-              <a:t>Likely question: Pause and smile; hand over to questions.</a:t>
+              <a:t>Our limits: no kernel netem or multi-machine test, the agent is not a polite neighbour, there is no gain at 10 percent random loss, and the tabular agent did not beat AIMD.</a:t>
+            </a:r>
+          </a:p>
+          <a:p/>
+          <a:p>
+            <a:r>
+              <a:t>Next: fairness-aware training with TCP coexistence, training on real traces, and kernel and multi-machine tests.</a:t>
+            </a:r>
+          </a:p>
+          <a:p/>
+          <a:p>
+            <a:r>
+              <a:t>Likely question: What would you do first? Run the netem script on a Linux machine for kernel TCP and RUDP on the same path, then add a competing flow to the training.</a:t>
             </a:r>
           </a:p>
         </p:txBody>
@@ -3598,13 +3599,13 @@
           <a:lstStyle/>
           <a:p>
             <a:r>
-              <a:t>[-] Only if asked: the window starts at 1, adds 1 per ACK until the threshold 16, then 1/window per ACK. In the 62-packet run the final window was 18.71.</a:t>
+              <a:t>[0:15] Thank you. The code, report and captures are at github.com/Capsturrrr/rudp. Happy to take questions.</a:t>
             </a:r>
           </a:p>
           <a:p/>
           <a:p>
             <a:r>
-              <a:t>Likely question: Use this slide to answer 'show me congestion avoidance'.</a:t>
+              <a:t>Likely question: Pause and smile; hand over to questions.</a:t>
             </a:r>
           </a:p>
         </p:txBody>
@@ -3627,6 +3628,98 @@
             <a:fld id="{F7021451-1387-4CA6-816F-3879F97B5CBC}" type="slidenum">
               <a:rPr lang="en-US"/>
               <a:t>33</a:t>
+            </a:fld>
+            <a:endParaRPr lang="en-US"/>
+          </a:p>
+        </p:txBody>
+      </p:sp>
+    </p:spTree>
+    <p:extLst>
+      <p:ext uri="{BB962C8B-B14F-4D97-AF65-F5344CB8AC3E}">
+        <p14:creationId xmlns:p14="http://schemas.microsoft.com/office/powerpoint/2010/main" val="1024086991"/>
+      </p:ext>
+    </p:extLst>
+  </p:cSld>
+  <p:clrMapOvr>
+    <a:masterClrMapping/>
+  </p:clrMapOvr>
+</p:notes>
+</file>
+
+<file path=ppt/notesSlides/notesSlide34.xml><?xml version="1.0" encoding="utf-8"?>
+<p:notes xmlns:a="http://schemas.openxmlformats.org/drawingml/2006/main" xmlns:r="http://schemas.openxmlformats.org/officeDocument/2006/relationships" xmlns:p="http://schemas.openxmlformats.org/presentationml/2006/main">
+  <p:cSld>
+    <p:spTree>
+      <p:nvGrpSpPr>
+        <p:cNvPr id="1" name=""/>
+        <p:cNvGrpSpPr/>
+        <p:nvPr/>
+      </p:nvGrpSpPr>
+      <p:grpSpPr>
+        <a:xfrm>
+          <a:off x="0" y="0"/>
+          <a:ext cx="0" cy="0"/>
+          <a:chOff x="0" y="0"/>
+          <a:chExt cx="0" cy="0"/>
+        </a:xfrm>
+      </p:grpSpPr>
+      <p:sp>
+        <p:nvSpPr>
+          <p:cNvPr id="2" name="Slide Image Placeholder 1"/>
+          <p:cNvSpPr>
+            <a:spLocks noGrp="1" noRot="1" noChangeAspect="1"/>
+          </p:cNvSpPr>
+          <p:nvPr>
+            <p:ph type="sldImg"/>
+          </p:nvPr>
+        </p:nvSpPr>
+        <p:spPr/>
+      </p:sp>
+      <p:sp>
+        <p:nvSpPr>
+          <p:cNvPr id="3" name="Notes Placeholder 2"/>
+          <p:cNvSpPr>
+            <a:spLocks noGrp="1"/>
+          </p:cNvSpPr>
+          <p:nvPr>
+            <p:ph type="body" idx="1"/>
+          </p:nvPr>
+        </p:nvSpPr>
+        <p:spPr/>
+        <p:txBody>
+          <a:bodyPr/>
+          <a:lstStyle/>
+          <a:p>
+            <a:r>
+              <a:t>[-] Only if asked: the window starts at 1, adds 1 per ACK until the threshold 16, then 1/window per ACK. In the 62-packet run the final window was 18.71.</a:t>
+            </a:r>
+          </a:p>
+          <a:p/>
+          <a:p>
+            <a:r>
+              <a:t>Likely question: Use this slide to answer 'show me congestion avoidance'.</a:t>
+            </a:r>
+          </a:p>
+        </p:txBody>
+      </p:sp>
+      <p:sp>
+        <p:nvSpPr>
+          <p:cNvPr id="4" name="Slide Number Placeholder 3"/>
+          <p:cNvSpPr>
+            <a:spLocks noGrp="1"/>
+          </p:cNvSpPr>
+          <p:nvPr>
+            <p:ph type="sldNum" sz="quarter" idx="10"/>
+          </p:nvPr>
+        </p:nvSpPr>
+        <p:spPr/>
+        <p:txBody>
+          <a:bodyPr/>
+          <a:lstStyle/>
+          <a:p>
+            <a:fld id="{F7021451-1387-4CA6-816F-3879F97B5CBC}" type="slidenum">
+              <a:rPr lang="en-US"/>
+              <a:t>34</a:t>
             </a:fld>
             <a:endParaRPr lang="en-US"/>
           </a:p>
@@ -4848,7 +4941,7 @@
                 <a:ea typeface="Courier New" pitchFamily="34" charset="-122"/>
                 <a:cs typeface="Courier New" pitchFamily="34" charset="-120"/>
               </a:rPr>
-              <a:t>10 / 33   Smart-RUDP</a:t>
+              <a:t>10 / 34   Smart-RUDP</a:t>
             </a:r>
             <a:endParaRPr lang="en-US" sz="1000" dirty="0"/>
           </a:p>
@@ -5045,7 +5138,7 @@
                 <a:ea typeface="Courier New" pitchFamily="34" charset="-122"/>
                 <a:cs typeface="Courier New" pitchFamily="34" charset="-120"/>
               </a:rPr>
-              <a:t>11 / 33   Smart-RUDP</a:t>
+              <a:t>11 / 34   Smart-RUDP</a:t>
             </a:r>
             <a:endParaRPr lang="en-US" sz="1000" dirty="0"/>
           </a:p>
@@ -5875,7 +5968,7 @@
                 <a:ea typeface="Courier New" pitchFamily="34" charset="-122"/>
                 <a:cs typeface="Courier New" pitchFamily="34" charset="-120"/>
               </a:rPr>
-              <a:t>12 / 33   Smart-RUDP</a:t>
+              <a:t>12 / 34   Smart-RUDP</a:t>
             </a:r>
             <a:endParaRPr lang="en-US" sz="1000" dirty="0"/>
           </a:p>
@@ -6172,7 +6265,7 @@
                 <a:ea typeface="Courier New" pitchFamily="34" charset="-122"/>
                 <a:cs typeface="Courier New" pitchFamily="34" charset="-120"/>
               </a:rPr>
-              <a:t>13 / 33   Smart-RUDP</a:t>
+              <a:t>13 / 34   Smart-RUDP</a:t>
             </a:r>
             <a:endParaRPr lang="en-US" sz="1000" dirty="0"/>
           </a:p>
@@ -6472,7 +6565,7 @@
                 <a:ea typeface="Courier New" pitchFamily="34" charset="-122"/>
                 <a:cs typeface="Courier New" pitchFamily="34" charset="-120"/>
               </a:rPr>
-              <a:t>14 / 33   Smart-RUDP</a:t>
+              <a:t>14 / 34   Smart-RUDP</a:t>
             </a:r>
             <a:endParaRPr lang="en-US" sz="1000" dirty="0"/>
           </a:p>
@@ -6856,7 +6949,7 @@
                 <a:ea typeface="Courier New" pitchFamily="34" charset="-122"/>
                 <a:cs typeface="Courier New" pitchFamily="34" charset="-120"/>
               </a:rPr>
-              <a:t>15 / 33   Smart-RUDP</a:t>
+              <a:t>15 / 34   Smart-RUDP</a:t>
             </a:r>
             <a:endParaRPr lang="en-US" sz="1000" dirty="0"/>
           </a:p>
@@ -7314,7 +7407,7 @@
                 <a:ea typeface="Courier New" pitchFamily="34" charset="-122"/>
                 <a:cs typeface="Courier New" pitchFamily="34" charset="-120"/>
               </a:rPr>
-              <a:t>16 / 33   Smart-RUDP</a:t>
+              <a:t>16 / 34   Smart-RUDP</a:t>
             </a:r>
             <a:endParaRPr lang="en-US" sz="1000" dirty="0"/>
           </a:p>
@@ -7999,7 +8092,7 @@
                 <a:ea typeface="Courier New" pitchFamily="34" charset="-122"/>
                 <a:cs typeface="Courier New" pitchFamily="34" charset="-120"/>
               </a:rPr>
-              <a:t>17 / 33   Smart-RUDP</a:t>
+              <a:t>17 / 34   Smart-RUDP</a:t>
             </a:r>
             <a:endParaRPr lang="en-US" sz="1000" dirty="0"/>
           </a:p>
@@ -8239,7 +8332,7 @@
                 <a:ea typeface="Courier New" pitchFamily="34" charset="-122"/>
                 <a:cs typeface="Courier New" pitchFamily="34" charset="-120"/>
               </a:rPr>
-              <a:t>18 / 33   Smart-RUDP</a:t>
+              <a:t>18 / 34   Smart-RUDP</a:t>
             </a:r>
             <a:endParaRPr lang="en-US" sz="1000" dirty="0"/>
           </a:p>
@@ -8479,7 +8572,7 @@
                 <a:ea typeface="Courier New" pitchFamily="34" charset="-122"/>
                 <a:cs typeface="Courier New" pitchFamily="34" charset="-120"/>
               </a:rPr>
-              <a:t>19 / 33   Smart-RUDP</a:t>
+              <a:t>19 / 34   Smart-RUDP</a:t>
             </a:r>
             <a:endParaRPr lang="en-US" sz="1000" dirty="0"/>
           </a:p>
@@ -8701,7 +8794,7 @@
                 <a:ea typeface="Courier New" pitchFamily="34" charset="-122"/>
                 <a:cs typeface="Courier New" pitchFamily="34" charset="-120"/>
               </a:rPr>
-              <a:t>2 / 33   Smart-RUDP</a:t>
+              <a:t>2 / 34   Smart-RUDP</a:t>
             </a:r>
             <a:endParaRPr lang="en-US" sz="1000" dirty="0"/>
           </a:p>
@@ -9095,7 +9188,7 @@
                 <a:ea typeface="Courier New" pitchFamily="34" charset="-122"/>
                 <a:cs typeface="Courier New" pitchFamily="34" charset="-120"/>
               </a:rPr>
-              <a:t>20 / 33   Smart-RUDP</a:t>
+              <a:t>20 / 34   Smart-RUDP</a:t>
             </a:r>
             <a:endParaRPr lang="en-US" sz="1000" dirty="0"/>
           </a:p>
@@ -9419,7 +9512,7 @@
                 <a:ea typeface="Courier New" pitchFamily="34" charset="-122"/>
                 <a:cs typeface="Courier New" pitchFamily="34" charset="-120"/>
               </a:rPr>
-              <a:t>21 / 33   Smart-RUDP</a:t>
+              <a:t>21 / 34   Smart-RUDP</a:t>
             </a:r>
             <a:endParaRPr lang="en-US" sz="1000" dirty="0"/>
           </a:p>
@@ -11126,7 +11219,7 @@
                 <a:ea typeface="Courier New" pitchFamily="34" charset="-122"/>
                 <a:cs typeface="Courier New" pitchFamily="34" charset="-120"/>
               </a:rPr>
-              <a:t>22 / 33   Smart-RUDP</a:t>
+              <a:t>22 / 34   Smart-RUDP</a:t>
             </a:r>
             <a:endParaRPr lang="en-US" sz="1000" dirty="0"/>
           </a:p>
@@ -12509,7 +12602,7 @@
                 <a:ea typeface="Courier New" pitchFamily="34" charset="-122"/>
                 <a:cs typeface="Courier New" pitchFamily="34" charset="-120"/>
               </a:rPr>
-              <a:t>23 / 33   Smart-RUDP</a:t>
+              <a:t>23 / 34   Smart-RUDP</a:t>
             </a:r>
             <a:endParaRPr lang="en-US" sz="1000" dirty="0"/>
           </a:p>
@@ -14052,7 +14145,7 @@
                 <a:ea typeface="Courier New" pitchFamily="34" charset="-122"/>
                 <a:cs typeface="Courier New" pitchFamily="34" charset="-120"/>
               </a:rPr>
-              <a:t>24 / 33   Smart-RUDP</a:t>
+              <a:t>24 / 34   Smart-RUDP</a:t>
             </a:r>
             <a:endParaRPr lang="en-US" sz="1000" dirty="0"/>
           </a:p>
@@ -15730,7 +15823,7 @@
                 <a:ea typeface="Courier New" pitchFamily="34" charset="-122"/>
                 <a:cs typeface="Courier New" pitchFamily="34" charset="-120"/>
               </a:rPr>
-              <a:t>25 / 33   Smart-RUDP</a:t>
+              <a:t>25 / 34   Smart-RUDP</a:t>
             </a:r>
             <a:endParaRPr lang="en-US" sz="1000" dirty="0"/>
           </a:p>
@@ -17408,7 +17501,7 @@
                 <a:ea typeface="Courier New" pitchFamily="34" charset="-122"/>
                 <a:cs typeface="Courier New" pitchFamily="34" charset="-120"/>
               </a:rPr>
-              <a:t>26 / 33   Smart-RUDP</a:t>
+              <a:t>26 / 34   Smart-RUDP</a:t>
             </a:r>
             <a:endParaRPr lang="en-US" sz="1000" dirty="0"/>
           </a:p>
@@ -19748,7 +19841,7 @@
                 <a:ea typeface="Courier New" pitchFamily="34" charset="-122"/>
                 <a:cs typeface="Courier New" pitchFamily="34" charset="-120"/>
               </a:rPr>
-              <a:t>27 / 33   Smart-RUDP</a:t>
+              <a:t>27 / 34   Smart-RUDP</a:t>
             </a:r>
             <a:endParaRPr lang="en-US" sz="1000" dirty="0"/>
           </a:p>
@@ -20206,7 +20299,7 @@
                 <a:ea typeface="Courier New" pitchFamily="34" charset="-122"/>
                 <a:cs typeface="Courier New" pitchFamily="34" charset="-120"/>
               </a:rPr>
-              <a:t>28 / 33   Smart-RUDP</a:t>
+              <a:t>28 / 34   Smart-RUDP</a:t>
             </a:r>
             <a:endParaRPr lang="en-US" sz="1000" dirty="0"/>
           </a:p>
@@ -20438,7 +20531,7 @@
                 <a:ea typeface="Courier New" pitchFamily="34" charset="-122"/>
                 <a:cs typeface="Courier New" pitchFamily="34" charset="-120"/>
               </a:rPr>
-              <a:t>29 / 33   Smart-RUDP</a:t>
+              <a:t>29 / 34   Smart-RUDP</a:t>
             </a:r>
             <a:endParaRPr lang="en-US" sz="1000" dirty="0"/>
           </a:p>
@@ -23184,7 +23277,7 @@
                 <a:ea typeface="Courier New" pitchFamily="34" charset="-122"/>
                 <a:cs typeface="Courier New" pitchFamily="34" charset="-120"/>
               </a:rPr>
-              <a:t>3 / 33   Smart-RUDP</a:t>
+              <a:t>3 / 34   Smart-RUDP</a:t>
             </a:r>
             <a:endParaRPr lang="en-US" sz="1000" dirty="0"/>
           </a:p>
@@ -23539,7 +23632,7 @@
                 <a:ea typeface="Courier New" pitchFamily="34" charset="-122"/>
                 <a:cs typeface="Courier New" pitchFamily="34" charset="-120"/>
               </a:rPr>
-              <a:t>Closing gaps: fairness and cross traffic</a:t>
+              <a:t>Seeing the difference: the window</a:t>
             </a:r>
             <a:endParaRPr lang="en-US" sz="3000" dirty="0"/>
           </a:p>
@@ -23578,7 +23671,247 @@
                 <a:ea typeface="Courier New" pitchFamily="34" charset="-122"/>
                 <a:cs typeface="Courier New" pitchFamily="34" charset="-120"/>
               </a:rPr>
-              <a:t>30 / 33   Smart-RUDP</a:t>
+              <a:t>30 / 34   Smart-RUDP</a:t>
+            </a:r>
+            <a:endParaRPr lang="en-US" sz="1000" dirty="0"/>
+          </a:p>
+        </p:txBody>
+      </p:sp>
+      <p:pic>
+        <p:nvPicPr>
+          <p:cNvPr id="4" name="Image 0" descr="fig_cwnd_agent.png">    </p:cNvPr>
+          <p:cNvPicPr>
+            <a:picLocks noChangeAspect="1"/>
+          </p:cNvPicPr>
+          <p:nvPr/>
+        </p:nvPicPr>
+        <p:blipFill>
+          <a:blip r:embed="rId1"/>
+          <a:stretch>
+            <a:fillRect/>
+          </a:stretch>
+        </p:blipFill>
+        <p:spPr>
+          <a:xfrm>
+            <a:off x="548640" y="1188720"/>
+            <a:ext cx="7315200" cy="3108960"/>
+          </a:xfrm>
+          <a:prstGeom prst="rect">
+            <a:avLst/>
+          </a:prstGeom>
+        </p:spPr>
+      </p:pic>
+      <p:sp>
+        <p:nvSpPr>
+          <p:cNvPr id="5" name="Text 2"/>
+          <p:cNvSpPr/>
+          <p:nvPr/>
+        </p:nvSpPr>
+        <p:spPr>
+          <a:xfrm>
+            <a:off x="8138160" y="1371600"/>
+            <a:ext cx="3657600" cy="4114800"/>
+          </a:xfrm>
+          <a:prstGeom prst="rect">
+            <a:avLst/>
+          </a:prstGeom>
+          <a:noFill/>
+          <a:ln/>
+        </p:spPr>
+        <p:txBody>
+          <a:bodyPr wrap="square" lIns="0" tIns="0" rIns="0" bIns="0" rtlCol="0" anchor="t"/>
+          <a:lstStyle/>
+          <a:p>
+            <a:pPr marL="342900" indent="-342900">
+              <a:spcAft>
+                <a:spcPts val="800"/>
+              </a:spcAft>
+              <a:buSzPct val="100000"/>
+              <a:buChar char="•"/>
+            </a:pPr>
+            <a:r>
+              <a:rPr lang="en-US" sz="1600" dirty="0">
+                <a:solidFill>
+                  <a:srgbClr val="E6EDF3"/>
+                </a:solidFill>
+                <a:latin typeface="Calibri" pitchFamily="34" charset="0"/>
+                <a:ea typeface="Calibri" pitchFamily="34" charset="-122"/>
+                <a:cs typeface="Calibri" pitchFamily="34" charset="-120"/>
+              </a:rPr>
+              <a:t>Same lossy path, same seed, same transport</a:t>
+            </a:r>
+            <a:endParaRPr lang="en-US" sz="1600" dirty="0"/>
+          </a:p>
+          <a:p>
+            <a:pPr marL="342900" indent="-342900">
+              <a:spcAft>
+                <a:spcPts val="800"/>
+              </a:spcAft>
+              <a:buSzPct val="100000"/>
+              <a:buChar char="•"/>
+            </a:pPr>
+            <a:r>
+              <a:rPr lang="en-US" sz="1600" dirty="0">
+                <a:solidFill>
+                  <a:srgbClr val="E6EDF3"/>
+                </a:solidFill>
+                <a:latin typeface="Calibri" pitchFamily="34" charset="0"/>
+                <a:ea typeface="Calibri" pitchFamily="34" charset="-122"/>
+                <a:cs typeface="Calibri" pitchFamily="34" charset="-120"/>
+              </a:rPr>
+              <a:t>AIMD (grey) saws between 5 and 15 packets and needs 9 s</a:t>
+            </a:r>
+            <a:endParaRPr lang="en-US" sz="1600" dirty="0"/>
+          </a:p>
+          <a:p>
+            <a:pPr marL="342900" indent="-342900">
+              <a:spcAft>
+                <a:spcPts val="800"/>
+              </a:spcAft>
+              <a:buSzPct val="100000"/>
+              <a:buChar char="•"/>
+            </a:pPr>
+            <a:r>
+              <a:rPr lang="en-US" sz="1600" dirty="0">
+                <a:solidFill>
+                  <a:srgbClr val="E6EDF3"/>
+                </a:solidFill>
+                <a:latin typeface="Calibri" pitchFamily="34" charset="0"/>
+                <a:ea typeface="Calibri" pitchFamily="34" charset="-122"/>
+                <a:cs typeface="Calibri" pitchFamily="34" charset="-120"/>
+              </a:rPr>
+              <a:t>The agent (green) rides much higher, backs off on loss, and finishes in 4 s</a:t>
+            </a:r>
+            <a:endParaRPr lang="en-US" sz="1600" dirty="0"/>
+          </a:p>
+          <a:p>
+            <a:pPr marL="342900" indent="-342900">
+              <a:spcAft>
+                <a:spcPts val="800"/>
+              </a:spcAft>
+              <a:buSzPct val="100000"/>
+              <a:buChar char="•"/>
+            </a:pPr>
+            <a:r>
+              <a:rPr lang="en-US" sz="1600" dirty="0">
+                <a:solidFill>
+                  <a:srgbClr val="E6EDF3"/>
+                </a:solidFill>
+                <a:latin typeface="Calibri" pitchFamily="34" charset="0"/>
+                <a:ea typeface="Calibri" pitchFamily="34" charset="-122"/>
+                <a:cs typeface="Calibri" pitchFamily="34" charset="-120"/>
+              </a:rPr>
+              <a:t>Regenerate: make figures</a:t>
+            </a:r>
+            <a:endParaRPr lang="en-US" sz="1600" dirty="0"/>
+          </a:p>
+        </p:txBody>
+      </p:sp>
+    </p:spTree>
+  </p:cSld>
+  <p:clrMapOvr>
+    <a:masterClrMapping/>
+  </p:clrMapOvr>
+</p:sld>
+</file>
+
+<file path=ppt/slides/slide31.xml><?xml version="1.0" encoding="utf-8"?>
+<p:sld xmlns:a="http://schemas.openxmlformats.org/drawingml/2006/main" xmlns:r="http://schemas.openxmlformats.org/officeDocument/2006/relationships" xmlns:p="http://schemas.openxmlformats.org/presentationml/2006/main">
+  <p:cSld name="Slide 31">
+    <p:bg>
+      <p:bgPr>
+        <a:solidFill>
+          <a:srgbClr val="0B0F14"/>
+        </a:solidFill>
+      </p:bgPr>
+    </p:bg>
+    <p:spTree>
+      <p:nvGrpSpPr>
+        <p:cNvPr id="1" name=""/>
+        <p:cNvGrpSpPr/>
+        <p:nvPr/>
+      </p:nvGrpSpPr>
+      <p:grpSpPr>
+        <a:xfrm>
+          <a:off x="0" y="0"/>
+          <a:ext cx="0" cy="0"/>
+          <a:chOff x="0" y="0"/>
+          <a:chExt cx="0" cy="0"/>
+        </a:xfrm>
+      </p:grpSpPr>
+      <p:sp>
+        <p:nvSpPr>
+          <p:cNvPr id="2" name="Text 0"/>
+          <p:cNvSpPr/>
+          <p:nvPr/>
+        </p:nvSpPr>
+        <p:spPr>
+          <a:xfrm>
+            <a:off x="548640" y="320040"/>
+            <a:ext cx="11064240" cy="731520"/>
+          </a:xfrm>
+          <a:prstGeom prst="rect">
+            <a:avLst/>
+          </a:prstGeom>
+          <a:noFill/>
+          <a:ln/>
+        </p:spPr>
+        <p:txBody>
+          <a:bodyPr wrap="square" lIns="0" tIns="0" rIns="0" bIns="0" rtlCol="0" anchor="ctr"/>
+          <a:lstStyle/>
+          <a:p>
+            <a:pPr indent="0" marL="0">
+              <a:buNone/>
+            </a:pPr>
+            <a:r>
+              <a:rPr lang="en-US" sz="3000" b="1" dirty="0">
+                <a:solidFill>
+                  <a:srgbClr val="39FF88"/>
+                </a:solidFill>
+                <a:latin typeface="Courier New" pitchFamily="34" charset="0"/>
+                <a:ea typeface="Courier New" pitchFamily="34" charset="-122"/>
+                <a:cs typeface="Courier New" pitchFamily="34" charset="-120"/>
+              </a:rPr>
+              <a:t>Closing gaps: fairness and cross traffic</a:t>
+            </a:r>
+            <a:endParaRPr lang="en-US" sz="3000" dirty="0"/>
+          </a:p>
+        </p:txBody>
+      </p:sp>
+      <p:sp>
+        <p:nvSpPr>
+          <p:cNvPr id="3" name="Text 1"/>
+          <p:cNvSpPr/>
+          <p:nvPr/>
+        </p:nvSpPr>
+        <p:spPr>
+          <a:xfrm>
+            <a:off x="9418320" y="6446520"/>
+            <a:ext cx="2377440" cy="274320"/>
+          </a:xfrm>
+          <a:prstGeom prst="rect">
+            <a:avLst/>
+          </a:prstGeom>
+          <a:noFill/>
+          <a:ln/>
+        </p:spPr>
+        <p:txBody>
+          <a:bodyPr wrap="square" lIns="0" tIns="0" rIns="0" bIns="0" rtlCol="0" anchor="ctr"/>
+          <a:lstStyle/>
+          <a:p>
+            <a:pPr algn="r" indent="0" marL="0">
+              <a:buNone/>
+            </a:pPr>
+            <a:r>
+              <a:rPr lang="en-US" sz="1000" dirty="0">
+                <a:solidFill>
+                  <a:srgbClr val="8B98A5"/>
+                </a:solidFill>
+                <a:latin typeface="Courier New" pitchFamily="34" charset="0"/>
+                <a:ea typeface="Courier New" pitchFamily="34" charset="-122"/>
+                <a:cs typeface="Courier New" pitchFamily="34" charset="-120"/>
+              </a:rPr>
+              <a:t>31 / 34   Smart-RUDP</a:t>
             </a:r>
             <a:endParaRPr lang="en-US" sz="1000" dirty="0"/>
           </a:p>
@@ -23586,7 +23919,7 @@
       </p:sp>
       <p:graphicFrame>
         <p:nvGraphicFramePr>
-          <p:cNvPr id="31" name="Table 0"/>
+          <p:cNvPr id="32" name="Table 0"/>
           <p:cNvGraphicFramePr>
             <a:graphicFrameLocks noGrp="1"/>
           </p:cNvGraphicFramePr>
@@ -24647,7 +24980,7 @@
       </p:graphicFrame>
       <p:graphicFrame>
         <p:nvGraphicFramePr>
-          <p:cNvPr id="61" name="Table 1"/>
+          <p:cNvPr id="63" name="Table 1"/>
           <p:cNvGraphicFramePr>
             <a:graphicFrameLocks noGrp="1"/>
           </p:cNvGraphicFramePr>
@@ -25799,429 +26132,6 @@
 </p:sld>
 </file>
 
-<file path=ppt/slides/slide31.xml><?xml version="1.0" encoding="utf-8"?>
-<p:sld xmlns:a="http://schemas.openxmlformats.org/drawingml/2006/main" xmlns:r="http://schemas.openxmlformats.org/officeDocument/2006/relationships" xmlns:p="http://schemas.openxmlformats.org/presentationml/2006/main">
-  <p:cSld name="Slide 31">
-    <p:bg>
-      <p:bgPr>
-        <a:solidFill>
-          <a:srgbClr val="0B0F14"/>
-        </a:solidFill>
-      </p:bgPr>
-    </p:bg>
-    <p:spTree>
-      <p:nvGrpSpPr>
-        <p:cNvPr id="1" name=""/>
-        <p:cNvGrpSpPr/>
-        <p:nvPr/>
-      </p:nvGrpSpPr>
-      <p:grpSpPr>
-        <a:xfrm>
-          <a:off x="0" y="0"/>
-          <a:ext cx="0" cy="0"/>
-          <a:chOff x="0" y="0"/>
-          <a:chExt cx="0" cy="0"/>
-        </a:xfrm>
-      </p:grpSpPr>
-      <p:sp>
-        <p:nvSpPr>
-          <p:cNvPr id="2" name="Text 0"/>
-          <p:cNvSpPr/>
-          <p:nvPr/>
-        </p:nvSpPr>
-        <p:spPr>
-          <a:xfrm>
-            <a:off x="548640" y="320040"/>
-            <a:ext cx="11064240" cy="731520"/>
-          </a:xfrm>
-          <a:prstGeom prst="rect">
-            <a:avLst/>
-          </a:prstGeom>
-          <a:noFill/>
-          <a:ln/>
-        </p:spPr>
-        <p:txBody>
-          <a:bodyPr wrap="square" lIns="0" tIns="0" rIns="0" bIns="0" rtlCol="0" anchor="ctr"/>
-          <a:lstStyle/>
-          <a:p>
-            <a:pPr indent="0" marL="0">
-              <a:buNone/>
-            </a:pPr>
-            <a:r>
-              <a:rPr lang="en-US" sz="3000" b="1" dirty="0">
-                <a:solidFill>
-                  <a:srgbClr val="39FF88"/>
-                </a:solidFill>
-                <a:latin typeface="Courier New" pitchFamily="34" charset="0"/>
-                <a:ea typeface="Courier New" pitchFamily="34" charset="-122"/>
-                <a:cs typeface="Courier New" pitchFamily="34" charset="-120"/>
-              </a:rPr>
-              <a:t>Learnings and future work</a:t>
-            </a:r>
-            <a:endParaRPr lang="en-US" sz="3000" dirty="0"/>
-          </a:p>
-        </p:txBody>
-      </p:sp>
-      <p:sp>
-        <p:nvSpPr>
-          <p:cNvPr id="3" name="Text 1"/>
-          <p:cNvSpPr/>
-          <p:nvPr/>
-        </p:nvSpPr>
-        <p:spPr>
-          <a:xfrm>
-            <a:off x="9418320" y="6446520"/>
-            <a:ext cx="2377440" cy="274320"/>
-          </a:xfrm>
-          <a:prstGeom prst="rect">
-            <a:avLst/>
-          </a:prstGeom>
-          <a:noFill/>
-          <a:ln/>
-        </p:spPr>
-        <p:txBody>
-          <a:bodyPr wrap="square" lIns="0" tIns="0" rIns="0" bIns="0" rtlCol="0" anchor="ctr"/>
-          <a:lstStyle/>
-          <a:p>
-            <a:pPr algn="r" indent="0" marL="0">
-              <a:buNone/>
-            </a:pPr>
-            <a:r>
-              <a:rPr lang="en-US" sz="1000" dirty="0">
-                <a:solidFill>
-                  <a:srgbClr val="8B98A5"/>
-                </a:solidFill>
-                <a:latin typeface="Courier New" pitchFamily="34" charset="0"/>
-                <a:ea typeface="Courier New" pitchFamily="34" charset="-122"/>
-                <a:cs typeface="Courier New" pitchFamily="34" charset="-120"/>
-              </a:rPr>
-              <a:t>31 / 33   Smart-RUDP</a:t>
-            </a:r>
-            <a:endParaRPr lang="en-US" sz="1000" dirty="0"/>
-          </a:p>
-        </p:txBody>
-      </p:sp>
-      <p:sp>
-        <p:nvSpPr>
-          <p:cNvPr id="4" name="Shape 2"/>
-          <p:cNvSpPr/>
-          <p:nvPr/>
-        </p:nvSpPr>
-        <p:spPr>
-          <a:xfrm>
-            <a:off x="548640" y="1371600"/>
-            <a:ext cx="5394960" cy="4206240"/>
-          </a:xfrm>
-          <a:prstGeom prst="rect">
-            <a:avLst/>
-          </a:prstGeom>
-          <a:solidFill>
-            <a:srgbClr val="141B24"/>
-          </a:solidFill>
-          <a:ln w="12700">
-            <a:solidFill>
-              <a:srgbClr val="39FF88"/>
-            </a:solidFill>
-            <a:prstDash val="solid"/>
-          </a:ln>
-        </p:spPr>
-      </p:sp>
-      <p:sp>
-        <p:nvSpPr>
-          <p:cNvPr id="5" name="Text 3"/>
-          <p:cNvSpPr/>
-          <p:nvPr/>
-        </p:nvSpPr>
-        <p:spPr>
-          <a:xfrm>
-            <a:off x="731520" y="1508760"/>
-            <a:ext cx="5029200" cy="457200"/>
-          </a:xfrm>
-          <a:prstGeom prst="rect">
-            <a:avLst/>
-          </a:prstGeom>
-          <a:noFill/>
-          <a:ln/>
-        </p:spPr>
-        <p:txBody>
-          <a:bodyPr wrap="square" lIns="0" tIns="0" rIns="0" bIns="0" rtlCol="0" anchor="ctr"/>
-          <a:lstStyle/>
-          <a:p>
-            <a:pPr indent="0" marL="0">
-              <a:buNone/>
-            </a:pPr>
-            <a:r>
-              <a:rPr lang="en-US" sz="2000" b="1" dirty="0">
-                <a:solidFill>
-                  <a:srgbClr val="39FF88"/>
-                </a:solidFill>
-                <a:latin typeface="Courier New" pitchFamily="34" charset="0"/>
-                <a:ea typeface="Courier New" pitchFamily="34" charset="-122"/>
-                <a:cs typeface="Courier New" pitchFamily="34" charset="-120"/>
-              </a:rPr>
-              <a:t>Learned</a:t>
-            </a:r>
-            <a:endParaRPr lang="en-US" sz="2000" dirty="0"/>
-          </a:p>
-        </p:txBody>
-      </p:sp>
-      <p:sp>
-        <p:nvSpPr>
-          <p:cNvPr id="6" name="Text 4"/>
-          <p:cNvSpPr/>
-          <p:nvPr/>
-        </p:nvSpPr>
-        <p:spPr>
-          <a:xfrm>
-            <a:off x="731520" y="2011680"/>
-            <a:ext cx="5029200" cy="3429000"/>
-          </a:xfrm>
-          <a:prstGeom prst="rect">
-            <a:avLst/>
-          </a:prstGeom>
-          <a:noFill/>
-          <a:ln/>
-        </p:spPr>
-        <p:txBody>
-          <a:bodyPr wrap="square" lIns="0" tIns="0" rIns="0" bIns="0" rtlCol="0" anchor="t"/>
-          <a:lstStyle/>
-          <a:p>
-            <a:pPr indent="0" marL="0">
-              <a:buNone/>
-            </a:pPr>
-            <a:r>
-              <a:rPr lang="en-US" sz="2000" dirty="0">
-                <a:solidFill>
-                  <a:srgbClr val="E6EDF3"/>
-                </a:solidFill>
-                <a:latin typeface="Calibri" pitchFamily="34" charset="0"/>
-                <a:ea typeface="Calibri" pitchFamily="34" charset="-122"/>
-                <a:cs typeface="Calibri" pitchFamily="34" charset="-120"/>
-              </a:rPr>
-              <a:t>Reliability is a set of simple rules working together.</a:t>
-            </a:r>
-            <a:endParaRPr lang="en-US" sz="2000" dirty="0"/>
-          </a:p>
-          <a:p>
-            <a:pPr indent="0" marL="0">
-              <a:buNone/>
-            </a:pPr>
-            <a:r>
-              <a:rPr lang="en-US" sz="2000" dirty="0">
-                <a:solidFill>
-                  <a:srgbClr val="E6EDF3"/>
-                </a:solidFill>
-                <a:latin typeface="Calibri" pitchFamily="34" charset="0"/>
-                <a:ea typeface="Calibri" pitchFamily="34" charset="-122"/>
-                <a:cs typeface="Calibri" pitchFamily="34" charset="-120"/>
-              </a:rPr>
-              <a:t>Congestion control matters as much as retransmission.</a:t>
-            </a:r>
-            <a:endParaRPr lang="en-US" sz="2000" dirty="0"/>
-          </a:p>
-          <a:p>
-            <a:pPr indent="0" marL="0">
-              <a:buNone/>
-            </a:pPr>
-            <a:r>
-              <a:rPr lang="en-US" sz="2000" dirty="0">
-                <a:solidFill>
-                  <a:srgbClr val="E6EDF3"/>
-                </a:solidFill>
-                <a:latin typeface="Calibri" pitchFamily="34" charset="0"/>
-                <a:ea typeface="Calibri" pitchFamily="34" charset="-122"/>
-                <a:cs typeface="Calibri" pitchFamily="34" charset="-120"/>
-              </a:rPr>
-              <a:t>Testing tools fail in surprising ways.</a:t>
-            </a:r>
-            <a:endParaRPr lang="en-US" sz="2000" dirty="0"/>
-          </a:p>
-        </p:txBody>
-      </p:sp>
-      <p:sp>
-        <p:nvSpPr>
-          <p:cNvPr id="7" name="Shape 5"/>
-          <p:cNvSpPr/>
-          <p:nvPr/>
-        </p:nvSpPr>
-        <p:spPr>
-          <a:xfrm>
-            <a:off x="6217920" y="1371600"/>
-            <a:ext cx="5394960" cy="4206240"/>
-          </a:xfrm>
-          <a:prstGeom prst="rect">
-            <a:avLst/>
-          </a:prstGeom>
-          <a:solidFill>
-            <a:srgbClr val="141B24"/>
-          </a:solidFill>
-          <a:ln w="12700">
-            <a:solidFill>
-              <a:srgbClr val="FFB000"/>
-            </a:solidFill>
-            <a:prstDash val="solid"/>
-          </a:ln>
-        </p:spPr>
-      </p:sp>
-      <p:sp>
-        <p:nvSpPr>
-          <p:cNvPr id="8" name="Text 6"/>
-          <p:cNvSpPr/>
-          <p:nvPr/>
-        </p:nvSpPr>
-        <p:spPr>
-          <a:xfrm>
-            <a:off x="6400800" y="1508760"/>
-            <a:ext cx="5029200" cy="457200"/>
-          </a:xfrm>
-          <a:prstGeom prst="rect">
-            <a:avLst/>
-          </a:prstGeom>
-          <a:noFill/>
-          <a:ln/>
-        </p:spPr>
-        <p:txBody>
-          <a:bodyPr wrap="square" lIns="0" tIns="0" rIns="0" bIns="0" rtlCol="0" anchor="ctr"/>
-          <a:lstStyle/>
-          <a:p>
-            <a:pPr indent="0" marL="0">
-              <a:buNone/>
-            </a:pPr>
-            <a:r>
-              <a:rPr lang="en-US" sz="2000" b="1" dirty="0">
-                <a:solidFill>
-                  <a:srgbClr val="FFB000"/>
-                </a:solidFill>
-                <a:latin typeface="Courier New" pitchFamily="34" charset="0"/>
-                <a:ea typeface="Courier New" pitchFamily="34" charset="-122"/>
-                <a:cs typeface="Courier New" pitchFamily="34" charset="-120"/>
-              </a:rPr>
-              <a:t>Next</a:t>
-            </a:r>
-            <a:endParaRPr lang="en-US" sz="2000" dirty="0"/>
-          </a:p>
-        </p:txBody>
-      </p:sp>
-      <p:sp>
-        <p:nvSpPr>
-          <p:cNvPr id="9" name="Text 7"/>
-          <p:cNvSpPr/>
-          <p:nvPr/>
-        </p:nvSpPr>
-        <p:spPr>
-          <a:xfrm>
-            <a:off x="6400800" y="2011680"/>
-            <a:ext cx="5029200" cy="3429000"/>
-          </a:xfrm>
-          <a:prstGeom prst="rect">
-            <a:avLst/>
-          </a:prstGeom>
-          <a:noFill/>
-          <a:ln/>
-        </p:spPr>
-        <p:txBody>
-          <a:bodyPr wrap="square" lIns="0" tIns="0" rIns="0" bIns="0" rtlCol="0" anchor="t"/>
-          <a:lstStyle/>
-          <a:p>
-            <a:pPr indent="0" marL="0">
-              <a:buNone/>
-            </a:pPr>
-            <a:r>
-              <a:rPr lang="en-US" sz="2000" dirty="0">
-                <a:solidFill>
-                  <a:srgbClr val="E6EDF3"/>
-                </a:solidFill>
-                <a:latin typeface="Calibri" pitchFamily="34" charset="0"/>
-                <a:ea typeface="Calibri" pitchFamily="34" charset="-122"/>
-                <a:cs typeface="Calibri" pitchFamily="34" charset="-120"/>
-              </a:rPr>
-              <a:t>Fairness-aware training, TCP coexistence</a:t>
-            </a:r>
-            <a:endParaRPr lang="en-US" sz="2000" dirty="0"/>
-          </a:p>
-          <a:p>
-            <a:pPr indent="0" marL="0">
-              <a:buNone/>
-            </a:pPr>
-            <a:r>
-              <a:rPr lang="en-US" sz="2000" dirty="0">
-                <a:solidFill>
-                  <a:srgbClr val="E6EDF3"/>
-                </a:solidFill>
-                <a:latin typeface="Calibri" pitchFamily="34" charset="0"/>
-                <a:ea typeface="Calibri" pitchFamily="34" charset="-122"/>
-                <a:cs typeface="Calibri" pitchFamily="34" charset="-120"/>
-              </a:rPr>
-              <a:t>Train on real traces with cross traffic</a:t>
-            </a:r>
-            <a:endParaRPr lang="en-US" sz="2000" dirty="0"/>
-          </a:p>
-          <a:p>
-            <a:pPr indent="0" marL="0">
-              <a:buNone/>
-            </a:pPr>
-            <a:r>
-              <a:rPr lang="en-US" sz="2000" dirty="0">
-                <a:solidFill>
-                  <a:srgbClr val="E6EDF3"/>
-                </a:solidFill>
-                <a:latin typeface="Calibri" pitchFamily="34" charset="0"/>
-                <a:ea typeface="Calibri" pitchFamily="34" charset="-122"/>
-                <a:cs typeface="Calibri" pitchFamily="34" charset="-120"/>
-              </a:rPr>
-              <a:t>Kernel netem and real multi-machine tests</a:t>
-            </a:r>
-            <a:endParaRPr lang="en-US" sz="2000" dirty="0"/>
-          </a:p>
-        </p:txBody>
-      </p:sp>
-      <p:sp>
-        <p:nvSpPr>
-          <p:cNvPr id="10" name="Text 8"/>
-          <p:cNvSpPr/>
-          <p:nvPr/>
-        </p:nvSpPr>
-        <p:spPr>
-          <a:xfrm>
-            <a:off x="548640" y="5852160"/>
-            <a:ext cx="10972800" cy="365760"/>
-          </a:xfrm>
-          <a:prstGeom prst="rect">
-            <a:avLst/>
-          </a:prstGeom>
-          <a:noFill/>
-          <a:ln/>
-        </p:spPr>
-        <p:txBody>
-          <a:bodyPr wrap="square" lIns="0" tIns="0" rIns="0" bIns="0" rtlCol="0" anchor="ctr"/>
-          <a:lstStyle/>
-          <a:p>
-            <a:pPr indent="0" marL="0">
-              <a:buNone/>
-            </a:pPr>
-            <a:r>
-              <a:rPr lang="en-US" sz="1400" dirty="0">
-                <a:solidFill>
-                  <a:srgbClr val="8B98A5"/>
-                </a:solidFill>
-                <a:latin typeface="Calibri" pitchFamily="34" charset="0"/>
-                <a:ea typeface="Calibri" pitchFamily="34" charset="-122"/>
-                <a:cs typeface="Calibri" pitchFamily="34" charset="-120"/>
-              </a:rPr>
-              <a:t>Limits: no kernel netem or multi-machine test; polite mode is a hand-made rule that costs speed; level with CUBIC under bursty cross traffic; no gain at 10% random loss.</a:t>
-            </a:r>
-            <a:endParaRPr lang="en-US" sz="1400" dirty="0"/>
-          </a:p>
-        </p:txBody>
-      </p:sp>
-    </p:spTree>
-  </p:cSld>
-  <p:clrMapOvr>
-    <a:masterClrMapping/>
-  </p:clrMapOvr>
-</p:sld>
-</file>
-
 <file path=ppt/slides/slide32.xml><?xml version="1.0" encoding="utf-8"?>
 <p:sld xmlns:a="http://schemas.openxmlformats.org/drawingml/2006/main" xmlns:r="http://schemas.openxmlformats.org/officeDocument/2006/relationships" xmlns:p="http://schemas.openxmlformats.org/presentationml/2006/main">
   <p:cSld name="Slide 32">
@@ -26254,8 +26164,8 @@
         </p:nvSpPr>
         <p:spPr>
           <a:xfrm>
-            <a:off x="731520" y="2103120"/>
-            <a:ext cx="10058400" cy="1097280"/>
+            <a:off x="548640" y="320040"/>
+            <a:ext cx="11064240" cy="731520"/>
           </a:xfrm>
           <a:prstGeom prst="rect">
             <a:avLst/>
@@ -26271,7 +26181,7 @@
               <a:buNone/>
             </a:pPr>
             <a:r>
-              <a:rPr lang="en-US" sz="6400" b="1" dirty="0">
+              <a:rPr lang="en-US" sz="3000" b="1" dirty="0">
                 <a:solidFill>
                   <a:srgbClr val="39FF88"/>
                 </a:solidFill>
@@ -26279,9 +26189,9 @@
                 <a:ea typeface="Courier New" pitchFamily="34" charset="-122"/>
                 <a:cs typeface="Courier New" pitchFamily="34" charset="-120"/>
               </a:rPr>
-              <a:t>Thank you</a:t>
-            </a:r>
-            <a:endParaRPr lang="en-US" sz="6400" dirty="0"/>
+              <a:t>Learnings and future work</a:t>
+            </a:r>
+            <a:endParaRPr lang="en-US" sz="3000" dirty="0"/>
           </a:p>
         </p:txBody>
       </p:sp>
@@ -26293,8 +26203,8 @@
         </p:nvSpPr>
         <p:spPr>
           <a:xfrm>
-            <a:off x="731520" y="3474720"/>
-            <a:ext cx="10058400" cy="548640"/>
+            <a:off x="9418320" y="6446520"/>
+            <a:ext cx="2377440" cy="274320"/>
           </a:xfrm>
           <a:prstGeom prst="rect">
             <a:avLst/>
@@ -26306,34 +26216,59 @@
           <a:bodyPr wrap="square" lIns="0" tIns="0" rIns="0" bIns="0" rtlCol="0" anchor="ctr"/>
           <a:lstStyle/>
           <a:p>
-            <a:pPr indent="0" marL="0">
+            <a:pPr algn="r" indent="0" marL="0">
               <a:buNone/>
             </a:pPr>
             <a:r>
-              <a:rPr lang="en-US" sz="2600" dirty="0">
+              <a:rPr lang="en-US" sz="1000" dirty="0">
                 <a:solidFill>
-                  <a:srgbClr val="E6EDF3"/>
+                  <a:srgbClr val="8B98A5"/>
                 </a:solidFill>
                 <a:latin typeface="Courier New" pitchFamily="34" charset="0"/>
                 <a:ea typeface="Courier New" pitchFamily="34" charset="-122"/>
                 <a:cs typeface="Courier New" pitchFamily="34" charset="-120"/>
               </a:rPr>
-              <a:t>github.com/Capsturrrr/rudp</a:t>
-            </a:r>
-            <a:endParaRPr lang="en-US" sz="2600" dirty="0"/>
+              <a:t>32 / 34   Smart-RUDP</a:t>
+            </a:r>
+            <a:endParaRPr lang="en-US" sz="1000" dirty="0"/>
           </a:p>
         </p:txBody>
       </p:sp>
       <p:sp>
         <p:nvSpPr>
-          <p:cNvPr id="4" name="Text 2"/>
+          <p:cNvPr id="4" name="Shape 2"/>
           <p:cNvSpPr/>
           <p:nvPr/>
         </p:nvSpPr>
         <p:spPr>
           <a:xfrm>
-            <a:off x="731520" y="4206240"/>
-            <a:ext cx="10058400" cy="457200"/>
+            <a:off x="548640" y="1371600"/>
+            <a:ext cx="5394960" cy="4206240"/>
+          </a:xfrm>
+          <a:prstGeom prst="rect">
+            <a:avLst/>
+          </a:prstGeom>
+          <a:solidFill>
+            <a:srgbClr val="141B24"/>
+          </a:solidFill>
+          <a:ln w="12700">
+            <a:solidFill>
+              <a:srgbClr val="39FF88"/>
+            </a:solidFill>
+            <a:prstDash val="solid"/>
+          </a:ln>
+        </p:spPr>
+      </p:sp>
+      <p:sp>
+        <p:nvSpPr>
+          <p:cNvPr id="5" name="Text 3"/>
+          <p:cNvSpPr/>
+          <p:nvPr/>
+        </p:nvSpPr>
+        <p:spPr>
+          <a:xfrm>
+            <a:off x="731520" y="1508760"/>
+            <a:ext cx="5029200" cy="457200"/>
           </a:xfrm>
           <a:prstGeom prst="rect">
             <a:avLst/>
@@ -26349,7 +26284,256 @@
               <a:buNone/>
             </a:pPr>
             <a:r>
-              <a:rPr lang="en-US" sz="1800" dirty="0">
+              <a:rPr lang="en-US" sz="2000" b="1" dirty="0">
+                <a:solidFill>
+                  <a:srgbClr val="39FF88"/>
+                </a:solidFill>
+                <a:latin typeface="Courier New" pitchFamily="34" charset="0"/>
+                <a:ea typeface="Courier New" pitchFamily="34" charset="-122"/>
+                <a:cs typeface="Courier New" pitchFamily="34" charset="-120"/>
+              </a:rPr>
+              <a:t>Learned</a:t>
+            </a:r>
+            <a:endParaRPr lang="en-US" sz="2000" dirty="0"/>
+          </a:p>
+        </p:txBody>
+      </p:sp>
+      <p:sp>
+        <p:nvSpPr>
+          <p:cNvPr id="6" name="Text 4"/>
+          <p:cNvSpPr/>
+          <p:nvPr/>
+        </p:nvSpPr>
+        <p:spPr>
+          <a:xfrm>
+            <a:off x="731520" y="2011680"/>
+            <a:ext cx="5029200" cy="3429000"/>
+          </a:xfrm>
+          <a:prstGeom prst="rect">
+            <a:avLst/>
+          </a:prstGeom>
+          <a:noFill/>
+          <a:ln/>
+        </p:spPr>
+        <p:txBody>
+          <a:bodyPr wrap="square" lIns="0" tIns="0" rIns="0" bIns="0" rtlCol="0" anchor="t"/>
+          <a:lstStyle/>
+          <a:p>
+            <a:pPr indent="0" marL="0">
+              <a:buNone/>
+            </a:pPr>
+            <a:r>
+              <a:rPr lang="en-US" sz="2000" dirty="0">
+                <a:solidFill>
+                  <a:srgbClr val="E6EDF3"/>
+                </a:solidFill>
+                <a:latin typeface="Calibri" pitchFamily="34" charset="0"/>
+                <a:ea typeface="Calibri" pitchFamily="34" charset="-122"/>
+                <a:cs typeface="Calibri" pitchFamily="34" charset="-120"/>
+              </a:rPr>
+              <a:t>Reliability is a set of simple rules working together.</a:t>
+            </a:r>
+            <a:endParaRPr lang="en-US" sz="2000" dirty="0"/>
+          </a:p>
+          <a:p>
+            <a:pPr indent="0" marL="0">
+              <a:buNone/>
+            </a:pPr>
+            <a:r>
+              <a:rPr lang="en-US" sz="2000" dirty="0">
+                <a:solidFill>
+                  <a:srgbClr val="E6EDF3"/>
+                </a:solidFill>
+                <a:latin typeface="Calibri" pitchFamily="34" charset="0"/>
+                <a:ea typeface="Calibri" pitchFamily="34" charset="-122"/>
+                <a:cs typeface="Calibri" pitchFamily="34" charset="-120"/>
+              </a:rPr>
+              <a:t>Congestion control matters as much as retransmission.</a:t>
+            </a:r>
+            <a:endParaRPr lang="en-US" sz="2000" dirty="0"/>
+          </a:p>
+          <a:p>
+            <a:pPr indent="0" marL="0">
+              <a:buNone/>
+            </a:pPr>
+            <a:r>
+              <a:rPr lang="en-US" sz="2000" dirty="0">
+                <a:solidFill>
+                  <a:srgbClr val="E6EDF3"/>
+                </a:solidFill>
+                <a:latin typeface="Calibri" pitchFamily="34" charset="0"/>
+                <a:ea typeface="Calibri" pitchFamily="34" charset="-122"/>
+                <a:cs typeface="Calibri" pitchFamily="34" charset="-120"/>
+              </a:rPr>
+              <a:t>Testing tools fail in surprising ways.</a:t>
+            </a:r>
+            <a:endParaRPr lang="en-US" sz="2000" dirty="0"/>
+          </a:p>
+        </p:txBody>
+      </p:sp>
+      <p:sp>
+        <p:nvSpPr>
+          <p:cNvPr id="7" name="Shape 5"/>
+          <p:cNvSpPr/>
+          <p:nvPr/>
+        </p:nvSpPr>
+        <p:spPr>
+          <a:xfrm>
+            <a:off x="6217920" y="1371600"/>
+            <a:ext cx="5394960" cy="4206240"/>
+          </a:xfrm>
+          <a:prstGeom prst="rect">
+            <a:avLst/>
+          </a:prstGeom>
+          <a:solidFill>
+            <a:srgbClr val="141B24"/>
+          </a:solidFill>
+          <a:ln w="12700">
+            <a:solidFill>
+              <a:srgbClr val="FFB000"/>
+            </a:solidFill>
+            <a:prstDash val="solid"/>
+          </a:ln>
+        </p:spPr>
+      </p:sp>
+      <p:sp>
+        <p:nvSpPr>
+          <p:cNvPr id="8" name="Text 6"/>
+          <p:cNvSpPr/>
+          <p:nvPr/>
+        </p:nvSpPr>
+        <p:spPr>
+          <a:xfrm>
+            <a:off x="6400800" y="1508760"/>
+            <a:ext cx="5029200" cy="457200"/>
+          </a:xfrm>
+          <a:prstGeom prst="rect">
+            <a:avLst/>
+          </a:prstGeom>
+          <a:noFill/>
+          <a:ln/>
+        </p:spPr>
+        <p:txBody>
+          <a:bodyPr wrap="square" lIns="0" tIns="0" rIns="0" bIns="0" rtlCol="0" anchor="ctr"/>
+          <a:lstStyle/>
+          <a:p>
+            <a:pPr indent="0" marL="0">
+              <a:buNone/>
+            </a:pPr>
+            <a:r>
+              <a:rPr lang="en-US" sz="2000" b="1" dirty="0">
+                <a:solidFill>
+                  <a:srgbClr val="FFB000"/>
+                </a:solidFill>
+                <a:latin typeface="Courier New" pitchFamily="34" charset="0"/>
+                <a:ea typeface="Courier New" pitchFamily="34" charset="-122"/>
+                <a:cs typeface="Courier New" pitchFamily="34" charset="-120"/>
+              </a:rPr>
+              <a:t>Next</a:t>
+            </a:r>
+            <a:endParaRPr lang="en-US" sz="2000" dirty="0"/>
+          </a:p>
+        </p:txBody>
+      </p:sp>
+      <p:sp>
+        <p:nvSpPr>
+          <p:cNvPr id="9" name="Text 7"/>
+          <p:cNvSpPr/>
+          <p:nvPr/>
+        </p:nvSpPr>
+        <p:spPr>
+          <a:xfrm>
+            <a:off x="6400800" y="2011680"/>
+            <a:ext cx="5029200" cy="3429000"/>
+          </a:xfrm>
+          <a:prstGeom prst="rect">
+            <a:avLst/>
+          </a:prstGeom>
+          <a:noFill/>
+          <a:ln/>
+        </p:spPr>
+        <p:txBody>
+          <a:bodyPr wrap="square" lIns="0" tIns="0" rIns="0" bIns="0" rtlCol="0" anchor="t"/>
+          <a:lstStyle/>
+          <a:p>
+            <a:pPr indent="0" marL="0">
+              <a:buNone/>
+            </a:pPr>
+            <a:r>
+              <a:rPr lang="en-US" sz="2000" dirty="0">
+                <a:solidFill>
+                  <a:srgbClr val="E6EDF3"/>
+                </a:solidFill>
+                <a:latin typeface="Calibri" pitchFamily="34" charset="0"/>
+                <a:ea typeface="Calibri" pitchFamily="34" charset="-122"/>
+                <a:cs typeface="Calibri" pitchFamily="34" charset="-120"/>
+              </a:rPr>
+              <a:t>Fairness-aware training, TCP coexistence</a:t>
+            </a:r>
+            <a:endParaRPr lang="en-US" sz="2000" dirty="0"/>
+          </a:p>
+          <a:p>
+            <a:pPr indent="0" marL="0">
+              <a:buNone/>
+            </a:pPr>
+            <a:r>
+              <a:rPr lang="en-US" sz="2000" dirty="0">
+                <a:solidFill>
+                  <a:srgbClr val="E6EDF3"/>
+                </a:solidFill>
+                <a:latin typeface="Calibri" pitchFamily="34" charset="0"/>
+                <a:ea typeface="Calibri" pitchFamily="34" charset="-122"/>
+                <a:cs typeface="Calibri" pitchFamily="34" charset="-120"/>
+              </a:rPr>
+              <a:t>Train on real traces with cross traffic</a:t>
+            </a:r>
+            <a:endParaRPr lang="en-US" sz="2000" dirty="0"/>
+          </a:p>
+          <a:p>
+            <a:pPr indent="0" marL="0">
+              <a:buNone/>
+            </a:pPr>
+            <a:r>
+              <a:rPr lang="en-US" sz="2000" dirty="0">
+                <a:solidFill>
+                  <a:srgbClr val="E6EDF3"/>
+                </a:solidFill>
+                <a:latin typeface="Calibri" pitchFamily="34" charset="0"/>
+                <a:ea typeface="Calibri" pitchFamily="34" charset="-122"/>
+                <a:cs typeface="Calibri" pitchFamily="34" charset="-120"/>
+              </a:rPr>
+              <a:t>Kernel netem and real multi-machine tests</a:t>
+            </a:r>
+            <a:endParaRPr lang="en-US" sz="2000" dirty="0"/>
+          </a:p>
+        </p:txBody>
+      </p:sp>
+      <p:sp>
+        <p:nvSpPr>
+          <p:cNvPr id="10" name="Text 8"/>
+          <p:cNvSpPr/>
+          <p:nvPr/>
+        </p:nvSpPr>
+        <p:spPr>
+          <a:xfrm>
+            <a:off x="548640" y="5852160"/>
+            <a:ext cx="10972800" cy="365760"/>
+          </a:xfrm>
+          <a:prstGeom prst="rect">
+            <a:avLst/>
+          </a:prstGeom>
+          <a:noFill/>
+          <a:ln/>
+        </p:spPr>
+        <p:txBody>
+          <a:bodyPr wrap="square" lIns="0" tIns="0" rIns="0" bIns="0" rtlCol="0" anchor="ctr"/>
+          <a:lstStyle/>
+          <a:p>
+            <a:pPr indent="0" marL="0">
+              <a:buNone/>
+            </a:pPr>
+            <a:r>
+              <a:rPr lang="en-US" sz="1400" dirty="0">
                 <a:solidFill>
                   <a:srgbClr val="8B98A5"/>
                 </a:solidFill>
@@ -26357,9 +26541,9 @@
                 <a:ea typeface="Calibri" pitchFamily="34" charset="-122"/>
                 <a:cs typeface="Calibri" pitchFamily="34" charset="-120"/>
               </a:rPr>
-              <a:t>Harshavardhan Mallela   Rohit Arya   Shloak Sinha</a:t>
-            </a:r>
-            <a:endParaRPr lang="en-US" sz="1800" dirty="0"/>
+              <a:t>Limits: no kernel netem or multi-machine test; polite mode is a hand-made rule that costs speed; level with CUBIC under bursty cross traffic; no gain at 10% random loss.</a:t>
+            </a:r>
+            <a:endParaRPr lang="en-US" sz="1400" dirty="0"/>
           </a:p>
         </p:txBody>
       </p:sp>
@@ -26403,6 +26587,155 @@
         </p:nvSpPr>
         <p:spPr>
           <a:xfrm>
+            <a:off x="731520" y="2103120"/>
+            <a:ext cx="10058400" cy="1097280"/>
+          </a:xfrm>
+          <a:prstGeom prst="rect">
+            <a:avLst/>
+          </a:prstGeom>
+          <a:noFill/>
+          <a:ln/>
+        </p:spPr>
+        <p:txBody>
+          <a:bodyPr wrap="square" lIns="0" tIns="0" rIns="0" bIns="0" rtlCol="0" anchor="ctr"/>
+          <a:lstStyle/>
+          <a:p>
+            <a:pPr indent="0" marL="0">
+              <a:buNone/>
+            </a:pPr>
+            <a:r>
+              <a:rPr lang="en-US" sz="6400" b="1" dirty="0">
+                <a:solidFill>
+                  <a:srgbClr val="39FF88"/>
+                </a:solidFill>
+                <a:latin typeface="Courier New" pitchFamily="34" charset="0"/>
+                <a:ea typeface="Courier New" pitchFamily="34" charset="-122"/>
+                <a:cs typeface="Courier New" pitchFamily="34" charset="-120"/>
+              </a:rPr>
+              <a:t>Thank you</a:t>
+            </a:r>
+            <a:endParaRPr lang="en-US" sz="6400" dirty="0"/>
+          </a:p>
+        </p:txBody>
+      </p:sp>
+      <p:sp>
+        <p:nvSpPr>
+          <p:cNvPr id="3" name="Text 1"/>
+          <p:cNvSpPr/>
+          <p:nvPr/>
+        </p:nvSpPr>
+        <p:spPr>
+          <a:xfrm>
+            <a:off x="731520" y="3474720"/>
+            <a:ext cx="10058400" cy="548640"/>
+          </a:xfrm>
+          <a:prstGeom prst="rect">
+            <a:avLst/>
+          </a:prstGeom>
+          <a:noFill/>
+          <a:ln/>
+        </p:spPr>
+        <p:txBody>
+          <a:bodyPr wrap="square" lIns="0" tIns="0" rIns="0" bIns="0" rtlCol="0" anchor="ctr"/>
+          <a:lstStyle/>
+          <a:p>
+            <a:pPr indent="0" marL="0">
+              <a:buNone/>
+            </a:pPr>
+            <a:r>
+              <a:rPr lang="en-US" sz="2600" dirty="0">
+                <a:solidFill>
+                  <a:srgbClr val="E6EDF3"/>
+                </a:solidFill>
+                <a:latin typeface="Courier New" pitchFamily="34" charset="0"/>
+                <a:ea typeface="Courier New" pitchFamily="34" charset="-122"/>
+                <a:cs typeface="Courier New" pitchFamily="34" charset="-120"/>
+              </a:rPr>
+              <a:t>github.com/Capsturrrr/rudp</a:t>
+            </a:r>
+            <a:endParaRPr lang="en-US" sz="2600" dirty="0"/>
+          </a:p>
+        </p:txBody>
+      </p:sp>
+      <p:sp>
+        <p:nvSpPr>
+          <p:cNvPr id="4" name="Text 2"/>
+          <p:cNvSpPr/>
+          <p:nvPr/>
+        </p:nvSpPr>
+        <p:spPr>
+          <a:xfrm>
+            <a:off x="731520" y="4206240"/>
+            <a:ext cx="10058400" cy="457200"/>
+          </a:xfrm>
+          <a:prstGeom prst="rect">
+            <a:avLst/>
+          </a:prstGeom>
+          <a:noFill/>
+          <a:ln/>
+        </p:spPr>
+        <p:txBody>
+          <a:bodyPr wrap="square" lIns="0" tIns="0" rIns="0" bIns="0" rtlCol="0" anchor="ctr"/>
+          <a:lstStyle/>
+          <a:p>
+            <a:pPr indent="0" marL="0">
+              <a:buNone/>
+            </a:pPr>
+            <a:r>
+              <a:rPr lang="en-US" sz="1800" dirty="0">
+                <a:solidFill>
+                  <a:srgbClr val="8B98A5"/>
+                </a:solidFill>
+                <a:latin typeface="Calibri" pitchFamily="34" charset="0"/>
+                <a:ea typeface="Calibri" pitchFamily="34" charset="-122"/>
+                <a:cs typeface="Calibri" pitchFamily="34" charset="-120"/>
+              </a:rPr>
+              <a:t>Harshavardhan Mallela   Rohit Arya   Shloak Sinha</a:t>
+            </a:r>
+            <a:endParaRPr lang="en-US" sz="1800" dirty="0"/>
+          </a:p>
+        </p:txBody>
+      </p:sp>
+    </p:spTree>
+  </p:cSld>
+  <p:clrMapOvr>
+    <a:masterClrMapping/>
+  </p:clrMapOvr>
+</p:sld>
+</file>
+
+<file path=ppt/slides/slide34.xml><?xml version="1.0" encoding="utf-8"?>
+<p:sld xmlns:a="http://schemas.openxmlformats.org/drawingml/2006/main" xmlns:r="http://schemas.openxmlformats.org/officeDocument/2006/relationships" xmlns:p="http://schemas.openxmlformats.org/presentationml/2006/main">
+  <p:cSld name="Slide 34">
+    <p:bg>
+      <p:bgPr>
+        <a:solidFill>
+          <a:srgbClr val="0B0F14"/>
+        </a:solidFill>
+      </p:bgPr>
+    </p:bg>
+    <p:spTree>
+      <p:nvGrpSpPr>
+        <p:cNvPr id="1" name=""/>
+        <p:cNvGrpSpPr/>
+        <p:nvPr/>
+      </p:nvGrpSpPr>
+      <p:grpSpPr>
+        <a:xfrm>
+          <a:off x="0" y="0"/>
+          <a:ext cx="0" cy="0"/>
+          <a:chOff x="0" y="0"/>
+          <a:chExt cx="0" cy="0"/>
+        </a:xfrm>
+      </p:grpSpPr>
+      <p:sp>
+        <p:nvSpPr>
+          <p:cNvPr id="2" name="Text 0"/>
+          <p:cNvSpPr/>
+          <p:nvPr/>
+        </p:nvSpPr>
+        <p:spPr>
+          <a:xfrm>
             <a:off x="548640" y="320040"/>
             <a:ext cx="11064240" cy="731520"/>
           </a:xfrm>
@@ -26707,7 +27040,7 @@
                 <a:ea typeface="Courier New" pitchFamily="34" charset="-122"/>
                 <a:cs typeface="Courier New" pitchFamily="34" charset="-120"/>
               </a:rPr>
-              <a:t>4 / 33   Smart-RUDP</a:t>
+              <a:t>4 / 34   Smart-RUDP</a:t>
             </a:r>
             <a:endParaRPr lang="en-US" sz="1000" dirty="0"/>
           </a:p>
@@ -27268,7 +27601,7 @@
                 <a:ea typeface="Courier New" pitchFamily="34" charset="-122"/>
                 <a:cs typeface="Courier New" pitchFamily="34" charset="-120"/>
               </a:rPr>
-              <a:t>5 / 33   Smart-RUDP</a:t>
+              <a:t>5 / 34   Smart-RUDP</a:t>
             </a:r>
             <a:endParaRPr lang="en-US" sz="1000" dirty="0"/>
           </a:p>
@@ -28707,7 +29040,7 @@
                 <a:ea typeface="Courier New" pitchFamily="34" charset="-122"/>
                 <a:cs typeface="Courier New" pitchFamily="34" charset="-120"/>
               </a:rPr>
-              <a:t>6 / 33   Smart-RUDP</a:t>
+              <a:t>6 / 34   Smart-RUDP</a:t>
             </a:r>
             <a:endParaRPr lang="en-US" sz="1000" dirty="0"/>
           </a:p>
@@ -29942,7 +30275,7 @@
                 <a:ea typeface="Courier New" pitchFamily="34" charset="-122"/>
                 <a:cs typeface="Courier New" pitchFamily="34" charset="-120"/>
               </a:rPr>
-              <a:t>7 / 33   Smart-RUDP</a:t>
+              <a:t>7 / 34   Smart-RUDP</a:t>
             </a:r>
             <a:endParaRPr lang="en-US" sz="1000" dirty="0"/>
           </a:p>
@@ -30385,7 +30718,7 @@
                 <a:ea typeface="Courier New" pitchFamily="34" charset="-122"/>
                 <a:cs typeface="Courier New" pitchFamily="34" charset="-120"/>
               </a:rPr>
-              <a:t>8 / 33   Smart-RUDP</a:t>
+              <a:t>8 / 34   Smart-RUDP</a:t>
             </a:r>
             <a:endParaRPr lang="en-US" sz="1000" dirty="0"/>
           </a:p>
@@ -30685,7 +31018,7 @@
                 <a:ea typeface="Courier New" pitchFamily="34" charset="-122"/>
                 <a:cs typeface="Courier New" pitchFamily="34" charset="-120"/>
               </a:rPr>
-              <a:t>9 / 33   Smart-RUDP</a:t>
+              <a:t>9 / 34   Smart-RUDP</a:t>
             </a:r>
             <a:endParaRPr lang="en-US" sz="1000" dirty="0"/>
           </a:p>

--- a/docs/RUDP_Presentation_with_notes.pptx
+++ b/docs/RUDP_Presentation_with_notes.pptx
@@ -39,9 +39,10 @@
     <p:sldId id="287" r:id="rId33"/>
     <p:sldId id="288" r:id="rId34"/>
     <p:sldId id="289" r:id="rId35"/>
+    <p:sldId id="290" r:id="rId36"/>
   </p:sldIdLst>
   <p:notesMasterIdLst>
-    <p:notesMasterId r:id="rId36"/>
+    <p:notesMasterId r:id="rId37"/>
   </p:notesMasterIdLst>
   <p:sldSz cx="12192000" cy="6858000"/>
   <p:notesSz cx="6858000" cy="12192000"/>
@@ -3495,25 +3496,31 @@
           <a:lstStyle/>
           <a:p>
             <a:r>
-              <a:t>[0:50] What we learned: reliability is a set of simple rules working together, congestion control matters as much as retransmission, and tests tell you things about your own results that you do not want to hear.</a:t>
+              <a:t>[1:00] Until now our real-socket tests ran through our own proxy. We repeated them on the Linux kernel itself, using tc netem, with kernel TCP in the same table.</a:t>
             </a:r>
           </a:p>
           <a:p/>
           <a:p>
             <a:r>
-              <a:t>Our limits: no kernel netem or multi-machine test, the agent is not a polite neighbour, there is no gain at 10 percent random loss, and the tabular agent did not beat AIMD.</a:t>
+              <a:t>Against tuned AIMD the neural agent is 61 percent faster on the lossy path, 70 percent on the 5G-like path and 83 percent on the satellite path. All three are highly significant. On the reordering path it is 33 percent faster but that is not significant.</a:t>
             </a:r>
           </a:p>
           <a:p/>
           <a:p>
             <a:r>
-              <a:t>Next: fairness-aware training with TCP coexistence, training on real traces, and kernel and multi-machine tests.</a:t>
+              <a:t>Kernel TCP is still faster than our agent on every path, between one and a half and three times. We are not claiming to beat TCP.</a:t>
             </a:r>
           </a:p>
           <a:p/>
           <a:p>
             <a:r>
-              <a:t>Likely question: What would you do first? Run the netem script on a Linux machine for kernel TCP and RUDP on the same path, then add a competing flow to the training.</a:t>
+              <a:t>Our first three runs were wrong: the netem queue limit counted packets in flight, our baseline was untuned, and TCP sent bigger payloads. We found that, fixed it and re-ran everything.</a:t>
+            </a:r>
+          </a:p>
+          <a:p/>
+          <a:p>
+            <a:r>
+              <a:t>Likely question: Q: Does it beat TCP? A: No. It beats our AIMD baselines on a real kernel path; mature kernel TCP is faster, by 1.5x to 3.2x. Q: Why were the first runs wrong? A: netem's limit also counts packets in the delay line, so a large window overflowed it on the satellite path.</a:t>
             </a:r>
           </a:p>
         </p:txBody>
@@ -3599,13 +3606,25 @@
           <a:lstStyle/>
           <a:p>
             <a:r>
-              <a:t>[0:15] Thank you. The code, report and captures are at github.com/Capsturrrr/rudp. Happy to take questions.</a:t>
+              <a:t>[0:50] What we learned: reliability is a set of simple rules working together, congestion control matters as much as retransmission, and tests tell you things about your own results that you do not want to hear.</a:t>
             </a:r>
           </a:p>
           <a:p/>
           <a:p>
             <a:r>
-              <a:t>Likely question: Pause and smile; hand over to questions.</a:t>
+              <a:t>Our limits: no kernel netem or multi-machine test, the agent is not a polite neighbour, there is no gain at 10 percent random loss, and the tabular agent did not beat AIMD.</a:t>
+            </a:r>
+          </a:p>
+          <a:p/>
+          <a:p>
+            <a:r>
+              <a:t>Next: fairness-aware training with TCP coexistence, training on real traces, and kernel and multi-machine tests.</a:t>
+            </a:r>
+          </a:p>
+          <a:p/>
+          <a:p>
+            <a:r>
+              <a:t>Likely question: What would you do first? Run the netem script on a Linux machine for kernel TCP and RUDP on the same path, then add a competing flow to the training.</a:t>
             </a:r>
           </a:p>
         </p:txBody>
@@ -3691,13 +3710,13 @@
           <a:lstStyle/>
           <a:p>
             <a:r>
-              <a:t>[-] Only if asked: the window starts at 1, adds 1 per ACK until the threshold 16, then 1/window per ACK. In the 62-packet run the final window was 18.71.</a:t>
+              <a:t>[0:15] Thank you. The code, report and captures are at github.com/Capsturrrr/rudp. Happy to take questions.</a:t>
             </a:r>
           </a:p>
           <a:p/>
           <a:p>
             <a:r>
-              <a:t>Likely question: Use this slide to answer 'show me congestion avoidance'.</a:t>
+              <a:t>Likely question: Pause and smile; hand over to questions.</a:t>
             </a:r>
           </a:p>
         </p:txBody>
@@ -3720,6 +3739,98 @@
             <a:fld id="{F7021451-1387-4CA6-816F-3879F97B5CBC}" type="slidenum">
               <a:rPr lang="en-US"/>
               <a:t>34</a:t>
+            </a:fld>
+            <a:endParaRPr lang="en-US"/>
+          </a:p>
+        </p:txBody>
+      </p:sp>
+    </p:spTree>
+    <p:extLst>
+      <p:ext uri="{BB962C8B-B14F-4D97-AF65-F5344CB8AC3E}">
+        <p14:creationId xmlns:p14="http://schemas.microsoft.com/office/powerpoint/2010/main" val="1024086991"/>
+      </p:ext>
+    </p:extLst>
+  </p:cSld>
+  <p:clrMapOvr>
+    <a:masterClrMapping/>
+  </p:clrMapOvr>
+</p:notes>
+</file>
+
+<file path=ppt/notesSlides/notesSlide35.xml><?xml version="1.0" encoding="utf-8"?>
+<p:notes xmlns:a="http://schemas.openxmlformats.org/drawingml/2006/main" xmlns:r="http://schemas.openxmlformats.org/officeDocument/2006/relationships" xmlns:p="http://schemas.openxmlformats.org/presentationml/2006/main">
+  <p:cSld>
+    <p:spTree>
+      <p:nvGrpSpPr>
+        <p:cNvPr id="1" name=""/>
+        <p:cNvGrpSpPr/>
+        <p:nvPr/>
+      </p:nvGrpSpPr>
+      <p:grpSpPr>
+        <a:xfrm>
+          <a:off x="0" y="0"/>
+          <a:ext cx="0" cy="0"/>
+          <a:chOff x="0" y="0"/>
+          <a:chExt cx="0" cy="0"/>
+        </a:xfrm>
+      </p:grpSpPr>
+      <p:sp>
+        <p:nvSpPr>
+          <p:cNvPr id="2" name="Slide Image Placeholder 1"/>
+          <p:cNvSpPr>
+            <a:spLocks noGrp="1" noRot="1" noChangeAspect="1"/>
+          </p:cNvSpPr>
+          <p:nvPr>
+            <p:ph type="sldImg"/>
+          </p:nvPr>
+        </p:nvSpPr>
+        <p:spPr/>
+      </p:sp>
+      <p:sp>
+        <p:nvSpPr>
+          <p:cNvPr id="3" name="Notes Placeholder 2"/>
+          <p:cNvSpPr>
+            <a:spLocks noGrp="1"/>
+          </p:cNvSpPr>
+          <p:nvPr>
+            <p:ph type="body" idx="1"/>
+          </p:nvPr>
+        </p:nvSpPr>
+        <p:spPr/>
+        <p:txBody>
+          <a:bodyPr/>
+          <a:lstStyle/>
+          <a:p>
+            <a:r>
+              <a:t>[-] Only if asked: the window starts at 1, adds 1 per ACK until the threshold 16, then 1/window per ACK. In the 62-packet run the final window was 18.71.</a:t>
+            </a:r>
+          </a:p>
+          <a:p/>
+          <a:p>
+            <a:r>
+              <a:t>Likely question: Use this slide to answer 'show me congestion avoidance'.</a:t>
+            </a:r>
+          </a:p>
+        </p:txBody>
+      </p:sp>
+      <p:sp>
+        <p:nvSpPr>
+          <p:cNvPr id="4" name="Slide Number Placeholder 3"/>
+          <p:cNvSpPr>
+            <a:spLocks noGrp="1"/>
+          </p:cNvSpPr>
+          <p:nvPr>
+            <p:ph type="sldNum" sz="quarter" idx="10"/>
+          </p:nvPr>
+        </p:nvSpPr>
+        <p:spPr/>
+        <p:txBody>
+          <a:bodyPr/>
+          <a:lstStyle/>
+          <a:p>
+            <a:fld id="{F7021451-1387-4CA6-816F-3879F97B5CBC}" type="slidenum">
+              <a:rPr lang="en-US"/>
+              <a:t>35</a:t>
             </a:fld>
             <a:endParaRPr lang="en-US"/>
           </a:p>
@@ -4941,7 +5052,7 @@
                 <a:ea typeface="Courier New" pitchFamily="34" charset="-122"/>
                 <a:cs typeface="Courier New" pitchFamily="34" charset="-120"/>
               </a:rPr>
-              <a:t>10 / 34   Smart-RUDP</a:t>
+              <a:t>10 / 35   Smart-RUDP</a:t>
             </a:r>
             <a:endParaRPr lang="en-US" sz="1000" dirty="0"/>
           </a:p>
@@ -5138,7 +5249,7 @@
                 <a:ea typeface="Courier New" pitchFamily="34" charset="-122"/>
                 <a:cs typeface="Courier New" pitchFamily="34" charset="-120"/>
               </a:rPr>
-              <a:t>11 / 34   Smart-RUDP</a:t>
+              <a:t>11 / 35   Smart-RUDP</a:t>
             </a:r>
             <a:endParaRPr lang="en-US" sz="1000" dirty="0"/>
           </a:p>
@@ -5968,7 +6079,7 @@
                 <a:ea typeface="Courier New" pitchFamily="34" charset="-122"/>
                 <a:cs typeface="Courier New" pitchFamily="34" charset="-120"/>
               </a:rPr>
-              <a:t>12 / 34   Smart-RUDP</a:t>
+              <a:t>12 / 35   Smart-RUDP</a:t>
             </a:r>
             <a:endParaRPr lang="en-US" sz="1000" dirty="0"/>
           </a:p>
@@ -6265,7 +6376,7 @@
                 <a:ea typeface="Courier New" pitchFamily="34" charset="-122"/>
                 <a:cs typeface="Courier New" pitchFamily="34" charset="-120"/>
               </a:rPr>
-              <a:t>13 / 34   Smart-RUDP</a:t>
+              <a:t>13 / 35   Smart-RUDP</a:t>
             </a:r>
             <a:endParaRPr lang="en-US" sz="1000" dirty="0"/>
           </a:p>
@@ -6565,7 +6676,7 @@
                 <a:ea typeface="Courier New" pitchFamily="34" charset="-122"/>
                 <a:cs typeface="Courier New" pitchFamily="34" charset="-120"/>
               </a:rPr>
-              <a:t>14 / 34   Smart-RUDP</a:t>
+              <a:t>14 / 35   Smart-RUDP</a:t>
             </a:r>
             <a:endParaRPr lang="en-US" sz="1000" dirty="0"/>
           </a:p>
@@ -6949,7 +7060,7 @@
                 <a:ea typeface="Courier New" pitchFamily="34" charset="-122"/>
                 <a:cs typeface="Courier New" pitchFamily="34" charset="-120"/>
               </a:rPr>
-              <a:t>15 / 34   Smart-RUDP</a:t>
+              <a:t>15 / 35   Smart-RUDP</a:t>
             </a:r>
             <a:endParaRPr lang="en-US" sz="1000" dirty="0"/>
           </a:p>
@@ -7407,7 +7518,7 @@
                 <a:ea typeface="Courier New" pitchFamily="34" charset="-122"/>
                 <a:cs typeface="Courier New" pitchFamily="34" charset="-120"/>
               </a:rPr>
-              <a:t>16 / 34   Smart-RUDP</a:t>
+              <a:t>16 / 35   Smart-RUDP</a:t>
             </a:r>
             <a:endParaRPr lang="en-US" sz="1000" dirty="0"/>
           </a:p>
@@ -8092,7 +8203,7 @@
                 <a:ea typeface="Courier New" pitchFamily="34" charset="-122"/>
                 <a:cs typeface="Courier New" pitchFamily="34" charset="-120"/>
               </a:rPr>
-              <a:t>17 / 34   Smart-RUDP</a:t>
+              <a:t>17 / 35   Smart-RUDP</a:t>
             </a:r>
             <a:endParaRPr lang="en-US" sz="1000" dirty="0"/>
           </a:p>
@@ -8332,7 +8443,7 @@
                 <a:ea typeface="Courier New" pitchFamily="34" charset="-122"/>
                 <a:cs typeface="Courier New" pitchFamily="34" charset="-120"/>
               </a:rPr>
-              <a:t>18 / 34   Smart-RUDP</a:t>
+              <a:t>18 / 35   Smart-RUDP</a:t>
             </a:r>
             <a:endParaRPr lang="en-US" sz="1000" dirty="0"/>
           </a:p>
@@ -8572,7 +8683,7 @@
                 <a:ea typeface="Courier New" pitchFamily="34" charset="-122"/>
                 <a:cs typeface="Courier New" pitchFamily="34" charset="-120"/>
               </a:rPr>
-              <a:t>19 / 34   Smart-RUDP</a:t>
+              <a:t>19 / 35   Smart-RUDP</a:t>
             </a:r>
             <a:endParaRPr lang="en-US" sz="1000" dirty="0"/>
           </a:p>
@@ -8794,7 +8905,7 @@
                 <a:ea typeface="Courier New" pitchFamily="34" charset="-122"/>
                 <a:cs typeface="Courier New" pitchFamily="34" charset="-120"/>
               </a:rPr>
-              <a:t>2 / 34   Smart-RUDP</a:t>
+              <a:t>2 / 35   Smart-RUDP</a:t>
             </a:r>
             <a:endParaRPr lang="en-US" sz="1000" dirty="0"/>
           </a:p>
@@ -9188,7 +9299,7 @@
                 <a:ea typeface="Courier New" pitchFamily="34" charset="-122"/>
                 <a:cs typeface="Courier New" pitchFamily="34" charset="-120"/>
               </a:rPr>
-              <a:t>20 / 34   Smart-RUDP</a:t>
+              <a:t>20 / 35   Smart-RUDP</a:t>
             </a:r>
             <a:endParaRPr lang="en-US" sz="1000" dirty="0"/>
           </a:p>
@@ -9512,7 +9623,7 @@
                 <a:ea typeface="Courier New" pitchFamily="34" charset="-122"/>
                 <a:cs typeface="Courier New" pitchFamily="34" charset="-120"/>
               </a:rPr>
-              <a:t>21 / 34   Smart-RUDP</a:t>
+              <a:t>21 / 35   Smart-RUDP</a:t>
             </a:r>
             <a:endParaRPr lang="en-US" sz="1000" dirty="0"/>
           </a:p>
@@ -11219,7 +11330,7 @@
                 <a:ea typeface="Courier New" pitchFamily="34" charset="-122"/>
                 <a:cs typeface="Courier New" pitchFamily="34" charset="-120"/>
               </a:rPr>
-              <a:t>22 / 34   Smart-RUDP</a:t>
+              <a:t>22 / 35   Smart-RUDP</a:t>
             </a:r>
             <a:endParaRPr lang="en-US" sz="1000" dirty="0"/>
           </a:p>
@@ -12602,7 +12713,7 @@
                 <a:ea typeface="Courier New" pitchFamily="34" charset="-122"/>
                 <a:cs typeface="Courier New" pitchFamily="34" charset="-120"/>
               </a:rPr>
-              <a:t>23 / 34   Smart-RUDP</a:t>
+              <a:t>23 / 35   Smart-RUDP</a:t>
             </a:r>
             <a:endParaRPr lang="en-US" sz="1000" dirty="0"/>
           </a:p>
@@ -14145,7 +14256,7 @@
                 <a:ea typeface="Courier New" pitchFamily="34" charset="-122"/>
                 <a:cs typeface="Courier New" pitchFamily="34" charset="-120"/>
               </a:rPr>
-              <a:t>24 / 34   Smart-RUDP</a:t>
+              <a:t>24 / 35   Smart-RUDP</a:t>
             </a:r>
             <a:endParaRPr lang="en-US" sz="1000" dirty="0"/>
           </a:p>
@@ -15823,7 +15934,7 @@
                 <a:ea typeface="Courier New" pitchFamily="34" charset="-122"/>
                 <a:cs typeface="Courier New" pitchFamily="34" charset="-120"/>
               </a:rPr>
-              <a:t>25 / 34   Smart-RUDP</a:t>
+              <a:t>25 / 35   Smart-RUDP</a:t>
             </a:r>
             <a:endParaRPr lang="en-US" sz="1000" dirty="0"/>
           </a:p>
@@ -17501,7 +17612,7 @@
                 <a:ea typeface="Courier New" pitchFamily="34" charset="-122"/>
                 <a:cs typeface="Courier New" pitchFamily="34" charset="-120"/>
               </a:rPr>
-              <a:t>26 / 34   Smart-RUDP</a:t>
+              <a:t>26 / 35   Smart-RUDP</a:t>
             </a:r>
             <a:endParaRPr lang="en-US" sz="1000" dirty="0"/>
           </a:p>
@@ -19841,7 +19952,7 @@
                 <a:ea typeface="Courier New" pitchFamily="34" charset="-122"/>
                 <a:cs typeface="Courier New" pitchFamily="34" charset="-120"/>
               </a:rPr>
-              <a:t>27 / 34   Smart-RUDP</a:t>
+              <a:t>27 / 35   Smart-RUDP</a:t>
             </a:r>
             <a:endParaRPr lang="en-US" sz="1000" dirty="0"/>
           </a:p>
@@ -20299,7 +20410,7 @@
                 <a:ea typeface="Courier New" pitchFamily="34" charset="-122"/>
                 <a:cs typeface="Courier New" pitchFamily="34" charset="-120"/>
               </a:rPr>
-              <a:t>28 / 34   Smart-RUDP</a:t>
+              <a:t>28 / 35   Smart-RUDP</a:t>
             </a:r>
             <a:endParaRPr lang="en-US" sz="1000" dirty="0"/>
           </a:p>
@@ -20531,7 +20642,7 @@
                 <a:ea typeface="Courier New" pitchFamily="34" charset="-122"/>
                 <a:cs typeface="Courier New" pitchFamily="34" charset="-120"/>
               </a:rPr>
-              <a:t>29 / 34   Smart-RUDP</a:t>
+              <a:t>29 / 35   Smart-RUDP</a:t>
             </a:r>
             <a:endParaRPr lang="en-US" sz="1000" dirty="0"/>
           </a:p>
@@ -23277,7 +23388,7 @@
                 <a:ea typeface="Courier New" pitchFamily="34" charset="-122"/>
                 <a:cs typeface="Courier New" pitchFamily="34" charset="-120"/>
               </a:rPr>
-              <a:t>3 / 34   Smart-RUDP</a:t>
+              <a:t>3 / 35   Smart-RUDP</a:t>
             </a:r>
             <a:endParaRPr lang="en-US" sz="1000" dirty="0"/>
           </a:p>
@@ -23671,7 +23782,7 @@
                 <a:ea typeface="Courier New" pitchFamily="34" charset="-122"/>
                 <a:cs typeface="Courier New" pitchFamily="34" charset="-120"/>
               </a:rPr>
-              <a:t>30 / 34   Smart-RUDP</a:t>
+              <a:t>30 / 35   Smart-RUDP</a:t>
             </a:r>
             <a:endParaRPr lang="en-US" sz="1000" dirty="0"/>
           </a:p>
@@ -23911,7 +24022,7 @@
                 <a:ea typeface="Courier New" pitchFamily="34" charset="-122"/>
                 <a:cs typeface="Courier New" pitchFamily="34" charset="-120"/>
               </a:rPr>
-              <a:t>31 / 34   Smart-RUDP</a:t>
+              <a:t>31 / 35   Smart-RUDP</a:t>
             </a:r>
             <a:endParaRPr lang="en-US" sz="1000" dirty="0"/>
           </a:p>
@@ -26189,7 +26300,7 @@
                 <a:ea typeface="Courier New" pitchFamily="34" charset="-122"/>
                 <a:cs typeface="Courier New" pitchFamily="34" charset="-120"/>
               </a:rPr>
-              <a:t>Learnings and future work</a:t>
+              <a:t>Reality check: real kernel (tc/netem)</a:t>
             </a:r>
             <a:endParaRPr lang="en-US" sz="3000" dirty="0"/>
           </a:p>
@@ -26228,7 +26339,1966 @@
                 <a:ea typeface="Courier New" pitchFamily="34" charset="-122"/>
                 <a:cs typeface="Courier New" pitchFamily="34" charset="-120"/>
               </a:rPr>
-              <a:t>32 / 34   Smart-RUDP</a:t>
+              <a:t>32 / 35   Smart-RUDP</a:t>
+            </a:r>
+            <a:endParaRPr lang="en-US" sz="1000" dirty="0"/>
+          </a:p>
+        </p:txBody>
+      </p:sp>
+      <p:graphicFrame>
+        <p:nvGraphicFramePr>
+          <p:cNvPr id="33" name="Table 0"/>
+          <p:cNvGraphicFramePr>
+            <a:graphicFrameLocks noGrp="1"/>
+          </p:cNvGraphicFramePr>
+          <p:nvPr>
+            <p:extLst>
+              <p:ext uri="{D42A27DB-BD31-4B8C-83A1-F6EECF244321}">
+                <p14:modId xmlns:p14="http://schemas.microsoft.com/office/powerpoint/2010/main" val="1579011935"/>
+              </p:ext>
+            </p:extLst>
+          </p:nvPr>
+        </p:nvGraphicFramePr>
+        <p:xfrm>
+          <a:off x="548640" y="1188720"/>
+          <a:ext cx="7498080" cy="914400"/>
+        </p:xfrm>
+        <a:graphic>
+          <a:graphicData uri="http://schemas.openxmlformats.org/drawingml/2006/table">
+            <a:tbl>
+              <a:tblPr/>
+              <a:tblGrid>
+                <a:gridCol w="2377440"/>
+                <a:gridCol w="1097280"/>
+                <a:gridCol w="1371600"/>
+                <a:gridCol w="1280160"/>
+                <a:gridCol w="1371600"/>
+              </a:tblGrid>
+              <a:tr h="420624">
+                <a:tc>
+                  <a:txBody>
+                    <a:bodyPr/>
+                    <a:lstStyle/>
+                    <a:p>
+                      <a:pPr indent="0" marL="0">
+                        <a:buNone/>
+                      </a:pPr>
+                      <a:r>
+                        <a:rPr lang="en-US" sz="1300" b="1" dirty="0">
+                          <a:solidFill>
+                            <a:srgbClr val="0B0F14"/>
+                          </a:solidFill>
+                          <a:latin typeface="Courier New" pitchFamily="34" charset="0"/>
+                          <a:ea typeface="Courier New" pitchFamily="34" charset="-122"/>
+                          <a:cs typeface="Courier New" pitchFamily="34" charset="-120"/>
+                        </a:rPr>
+                        <a:t>Path (500 packets)</a:t>
+                      </a:r>
+                      <a:endParaRPr lang="en-US" sz="1300" dirty="0">
+                        <a:latin typeface="Courier New" charset="0"/>
+                        <a:ea typeface="Courier New" charset="0"/>
+                        <a:cs typeface="Courier New" charset="0"/>
+                      </a:endParaRPr>
+                    </a:p>
+                  </a:txBody>
+                  <a:tcPr marL="91440" marR="91440" marT="45720" marB="45720">
+                    <a:lnL w="12700" cap="flat" cmpd="sng" algn="ctr">
+                      <a:solidFill>
+                        <a:srgbClr val="2A3441"/>
+                      </a:solidFill>
+                      <a:prstDash val="solid"/>
+                      <a:round/>
+                      <a:headEnd type="none" w="med" len="med"/>
+                      <a:tailEnd type="none" w="med" len="med"/>
+                    </a:lnL>
+                    <a:lnR w="12700" cap="flat" cmpd="sng" algn="ctr">
+                      <a:solidFill>
+                        <a:srgbClr val="2A3441"/>
+                      </a:solidFill>
+                      <a:prstDash val="solid"/>
+                      <a:round/>
+                      <a:headEnd type="none" w="med" len="med"/>
+                      <a:tailEnd type="none" w="med" len="med"/>
+                    </a:lnR>
+                    <a:lnT w="12700" cap="flat" cmpd="sng" algn="ctr">
+                      <a:solidFill>
+                        <a:srgbClr val="2A3441"/>
+                      </a:solidFill>
+                      <a:prstDash val="solid"/>
+                      <a:round/>
+                      <a:headEnd type="none" w="med" len="med"/>
+                      <a:tailEnd type="none" w="med" len="med"/>
+                    </a:lnT>
+                    <a:lnB w="12700" cap="flat" cmpd="sng" algn="ctr">
+                      <a:solidFill>
+                        <a:srgbClr val="2A3441"/>
+                      </a:solidFill>
+                      <a:prstDash val="solid"/>
+                      <a:round/>
+                      <a:headEnd type="none" w="med" len="med"/>
+                      <a:tailEnd type="none" w="med" len="med"/>
+                    </a:lnB>
+                    <a:solidFill>
+                      <a:srgbClr val="39FF88"/>
+                    </a:solidFill>
+                  </a:tcPr>
+                </a:tc>
+                <a:tc>
+                  <a:txBody>
+                    <a:bodyPr/>
+                    <a:lstStyle/>
+                    <a:p>
+                      <a:pPr indent="0" marL="0">
+                        <a:buNone/>
+                      </a:pPr>
+                      <a:r>
+                        <a:rPr lang="en-US" sz="1300" b="1" dirty="0">
+                          <a:solidFill>
+                            <a:srgbClr val="0B0F14"/>
+                          </a:solidFill>
+                          <a:latin typeface="Courier New" pitchFamily="34" charset="0"/>
+                          <a:ea typeface="Courier New" pitchFamily="34" charset="-122"/>
+                          <a:cs typeface="Courier New" pitchFamily="34" charset="-120"/>
+                        </a:rPr>
+                        <a:t>TCP</a:t>
+                      </a:r>
+                      <a:endParaRPr lang="en-US" sz="1300" dirty="0">
+                        <a:latin typeface="Courier New" charset="0"/>
+                        <a:ea typeface="Courier New" charset="0"/>
+                        <a:cs typeface="Courier New" charset="0"/>
+                      </a:endParaRPr>
+                    </a:p>
+                  </a:txBody>
+                  <a:tcPr marL="91440" marR="91440" marT="45720" marB="45720">
+                    <a:lnL w="12700" cap="flat" cmpd="sng" algn="ctr">
+                      <a:solidFill>
+                        <a:srgbClr val="2A3441"/>
+                      </a:solidFill>
+                      <a:prstDash val="solid"/>
+                      <a:round/>
+                      <a:headEnd type="none" w="med" len="med"/>
+                      <a:tailEnd type="none" w="med" len="med"/>
+                    </a:lnL>
+                    <a:lnR w="12700" cap="flat" cmpd="sng" algn="ctr">
+                      <a:solidFill>
+                        <a:srgbClr val="2A3441"/>
+                      </a:solidFill>
+                      <a:prstDash val="solid"/>
+                      <a:round/>
+                      <a:headEnd type="none" w="med" len="med"/>
+                      <a:tailEnd type="none" w="med" len="med"/>
+                    </a:lnR>
+                    <a:lnT w="12700" cap="flat" cmpd="sng" algn="ctr">
+                      <a:solidFill>
+                        <a:srgbClr val="2A3441"/>
+                      </a:solidFill>
+                      <a:prstDash val="solid"/>
+                      <a:round/>
+                      <a:headEnd type="none" w="med" len="med"/>
+                      <a:tailEnd type="none" w="med" len="med"/>
+                    </a:lnT>
+                    <a:lnB w="12700" cap="flat" cmpd="sng" algn="ctr">
+                      <a:solidFill>
+                        <a:srgbClr val="2A3441"/>
+                      </a:solidFill>
+                      <a:prstDash val="solid"/>
+                      <a:round/>
+                      <a:headEnd type="none" w="med" len="med"/>
+                      <a:tailEnd type="none" w="med" len="med"/>
+                    </a:lnB>
+                    <a:solidFill>
+                      <a:srgbClr val="39FF88"/>
+                    </a:solidFill>
+                  </a:tcPr>
+                </a:tc>
+                <a:tc>
+                  <a:txBody>
+                    <a:bodyPr/>
+                    <a:lstStyle/>
+                    <a:p>
+                      <a:pPr indent="0" marL="0">
+                        <a:buNone/>
+                      </a:pPr>
+                      <a:r>
+                        <a:rPr lang="en-US" sz="1300" b="1" dirty="0">
+                          <a:solidFill>
+                            <a:srgbClr val="0B0F14"/>
+                          </a:solidFill>
+                          <a:latin typeface="Courier New" pitchFamily="34" charset="0"/>
+                          <a:ea typeface="Courier New" pitchFamily="34" charset="-122"/>
+                          <a:cs typeface="Courier New" pitchFamily="34" charset="-120"/>
+                        </a:rPr>
+                        <a:t>AIMD tuned</a:t>
+                      </a:r>
+                      <a:endParaRPr lang="en-US" sz="1300" dirty="0">
+                        <a:latin typeface="Courier New" charset="0"/>
+                        <a:ea typeface="Courier New" charset="0"/>
+                        <a:cs typeface="Courier New" charset="0"/>
+                      </a:endParaRPr>
+                    </a:p>
+                  </a:txBody>
+                  <a:tcPr marL="91440" marR="91440" marT="45720" marB="45720">
+                    <a:lnL w="12700" cap="flat" cmpd="sng" algn="ctr">
+                      <a:solidFill>
+                        <a:srgbClr val="2A3441"/>
+                      </a:solidFill>
+                      <a:prstDash val="solid"/>
+                      <a:round/>
+                      <a:headEnd type="none" w="med" len="med"/>
+                      <a:tailEnd type="none" w="med" len="med"/>
+                    </a:lnL>
+                    <a:lnR w="12700" cap="flat" cmpd="sng" algn="ctr">
+                      <a:solidFill>
+                        <a:srgbClr val="2A3441"/>
+                      </a:solidFill>
+                      <a:prstDash val="solid"/>
+                      <a:round/>
+                      <a:headEnd type="none" w="med" len="med"/>
+                      <a:tailEnd type="none" w="med" len="med"/>
+                    </a:lnR>
+                    <a:lnT w="12700" cap="flat" cmpd="sng" algn="ctr">
+                      <a:solidFill>
+                        <a:srgbClr val="2A3441"/>
+                      </a:solidFill>
+                      <a:prstDash val="solid"/>
+                      <a:round/>
+                      <a:headEnd type="none" w="med" len="med"/>
+                      <a:tailEnd type="none" w="med" len="med"/>
+                    </a:lnT>
+                    <a:lnB w="12700" cap="flat" cmpd="sng" algn="ctr">
+                      <a:solidFill>
+                        <a:srgbClr val="2A3441"/>
+                      </a:solidFill>
+                      <a:prstDash val="solid"/>
+                      <a:round/>
+                      <a:headEnd type="none" w="med" len="med"/>
+                      <a:tailEnd type="none" w="med" len="med"/>
+                    </a:lnB>
+                    <a:solidFill>
+                      <a:srgbClr val="39FF88"/>
+                    </a:solidFill>
+                  </a:tcPr>
+                </a:tc>
+                <a:tc>
+                  <a:txBody>
+                    <a:bodyPr/>
+                    <a:lstStyle/>
+                    <a:p>
+                      <a:pPr indent="0" marL="0">
+                        <a:buNone/>
+                      </a:pPr>
+                      <a:r>
+                        <a:rPr lang="en-US" sz="1300" b="1" dirty="0">
+                          <a:solidFill>
+                            <a:srgbClr val="0B0F14"/>
+                          </a:solidFill>
+                          <a:latin typeface="Courier New" pitchFamily="34" charset="0"/>
+                          <a:ea typeface="Courier New" pitchFamily="34" charset="-122"/>
+                          <a:cs typeface="Courier New" pitchFamily="34" charset="-120"/>
+                        </a:rPr>
+                        <a:t>Neural</a:t>
+                      </a:r>
+                      <a:endParaRPr lang="en-US" sz="1300" dirty="0">
+                        <a:latin typeface="Courier New" charset="0"/>
+                        <a:ea typeface="Courier New" charset="0"/>
+                        <a:cs typeface="Courier New" charset="0"/>
+                      </a:endParaRPr>
+                    </a:p>
+                  </a:txBody>
+                  <a:tcPr marL="91440" marR="91440" marT="45720" marB="45720">
+                    <a:lnL w="12700" cap="flat" cmpd="sng" algn="ctr">
+                      <a:solidFill>
+                        <a:srgbClr val="2A3441"/>
+                      </a:solidFill>
+                      <a:prstDash val="solid"/>
+                      <a:round/>
+                      <a:headEnd type="none" w="med" len="med"/>
+                      <a:tailEnd type="none" w="med" len="med"/>
+                    </a:lnL>
+                    <a:lnR w="12700" cap="flat" cmpd="sng" algn="ctr">
+                      <a:solidFill>
+                        <a:srgbClr val="2A3441"/>
+                      </a:solidFill>
+                      <a:prstDash val="solid"/>
+                      <a:round/>
+                      <a:headEnd type="none" w="med" len="med"/>
+                      <a:tailEnd type="none" w="med" len="med"/>
+                    </a:lnR>
+                    <a:lnT w="12700" cap="flat" cmpd="sng" algn="ctr">
+                      <a:solidFill>
+                        <a:srgbClr val="2A3441"/>
+                      </a:solidFill>
+                      <a:prstDash val="solid"/>
+                      <a:round/>
+                      <a:headEnd type="none" w="med" len="med"/>
+                      <a:tailEnd type="none" w="med" len="med"/>
+                    </a:lnT>
+                    <a:lnB w="12700" cap="flat" cmpd="sng" algn="ctr">
+                      <a:solidFill>
+                        <a:srgbClr val="2A3441"/>
+                      </a:solidFill>
+                      <a:prstDash val="solid"/>
+                      <a:round/>
+                      <a:headEnd type="none" w="med" len="med"/>
+                      <a:tailEnd type="none" w="med" len="med"/>
+                    </a:lnB>
+                    <a:solidFill>
+                      <a:srgbClr val="39FF88"/>
+                    </a:solidFill>
+                  </a:tcPr>
+                </a:tc>
+                <a:tc>
+                  <a:txBody>
+                    <a:bodyPr/>
+                    <a:lstStyle/>
+                    <a:p>
+                      <a:pPr indent="0" marL="0">
+                        <a:buNone/>
+                      </a:pPr>
+                      <a:r>
+                        <a:rPr lang="en-US" sz="1300" b="1" dirty="0">
+                          <a:solidFill>
+                            <a:srgbClr val="0B0F14"/>
+                          </a:solidFill>
+                          <a:latin typeface="Courier New" pitchFamily="34" charset="0"/>
+                          <a:ea typeface="Courier New" pitchFamily="34" charset="-122"/>
+                          <a:cs typeface="Courier New" pitchFamily="34" charset="-120"/>
+                        </a:rPr>
+                        <a:t>vs AIMD</a:t>
+                      </a:r>
+                      <a:endParaRPr lang="en-US" sz="1300" dirty="0">
+                        <a:latin typeface="Courier New" charset="0"/>
+                        <a:ea typeface="Courier New" charset="0"/>
+                        <a:cs typeface="Courier New" charset="0"/>
+                      </a:endParaRPr>
+                    </a:p>
+                  </a:txBody>
+                  <a:tcPr marL="91440" marR="91440" marT="45720" marB="45720">
+                    <a:lnL w="12700" cap="flat" cmpd="sng" algn="ctr">
+                      <a:solidFill>
+                        <a:srgbClr val="2A3441"/>
+                      </a:solidFill>
+                      <a:prstDash val="solid"/>
+                      <a:round/>
+                      <a:headEnd type="none" w="med" len="med"/>
+                      <a:tailEnd type="none" w="med" len="med"/>
+                    </a:lnL>
+                    <a:lnR w="12700" cap="flat" cmpd="sng" algn="ctr">
+                      <a:solidFill>
+                        <a:srgbClr val="2A3441"/>
+                      </a:solidFill>
+                      <a:prstDash val="solid"/>
+                      <a:round/>
+                      <a:headEnd type="none" w="med" len="med"/>
+                      <a:tailEnd type="none" w="med" len="med"/>
+                    </a:lnR>
+                    <a:lnT w="12700" cap="flat" cmpd="sng" algn="ctr">
+                      <a:solidFill>
+                        <a:srgbClr val="2A3441"/>
+                      </a:solidFill>
+                      <a:prstDash val="solid"/>
+                      <a:round/>
+                      <a:headEnd type="none" w="med" len="med"/>
+                      <a:tailEnd type="none" w="med" len="med"/>
+                    </a:lnT>
+                    <a:lnB w="12700" cap="flat" cmpd="sng" algn="ctr">
+                      <a:solidFill>
+                        <a:srgbClr val="2A3441"/>
+                      </a:solidFill>
+                      <a:prstDash val="solid"/>
+                      <a:round/>
+                      <a:headEnd type="none" w="med" len="med"/>
+                      <a:tailEnd type="none" w="med" len="med"/>
+                    </a:lnB>
+                    <a:solidFill>
+                      <a:srgbClr val="39FF88"/>
+                    </a:solidFill>
+                  </a:tcPr>
+                </a:tc>
+              </a:tr>
+              <a:tr h="420624">
+                <a:tc>
+                  <a:txBody>
+                    <a:bodyPr/>
+                    <a:lstStyle/>
+                    <a:p>
+                      <a:pPr indent="0" marL="0">
+                        <a:buNone/>
+                      </a:pPr>
+                      <a:r>
+                        <a:rPr lang="en-US" sz="1300" dirty="0">
+                          <a:solidFill>
+                            <a:srgbClr val="E6EDF3"/>
+                          </a:solidFill>
+                          <a:latin typeface="Calibri" pitchFamily="34" charset="0"/>
+                          <a:ea typeface="Calibri" pitchFamily="34" charset="-122"/>
+                          <a:cs typeface="Calibri" pitchFamily="34" charset="-120"/>
+                        </a:rPr>
+                        <a:t>Lossy, 2% loss</a:t>
+                      </a:r>
+                      <a:endParaRPr lang="en-US" sz="1300" dirty="0">
+                        <a:latin typeface="Calibri" charset="0"/>
+                        <a:ea typeface="Calibri" charset="0"/>
+                        <a:cs typeface="Calibri" charset="0"/>
+                      </a:endParaRPr>
+                    </a:p>
+                  </a:txBody>
+                  <a:tcPr marL="91440" marR="91440" marT="45720" marB="45720">
+                    <a:lnL w="12700" cap="flat" cmpd="sng" algn="ctr">
+                      <a:solidFill>
+                        <a:srgbClr val="2A3441"/>
+                      </a:solidFill>
+                      <a:prstDash val="solid"/>
+                      <a:round/>
+                      <a:headEnd type="none" w="med" len="med"/>
+                      <a:tailEnd type="none" w="med" len="med"/>
+                    </a:lnL>
+                    <a:lnR w="12700" cap="flat" cmpd="sng" algn="ctr">
+                      <a:solidFill>
+                        <a:srgbClr val="2A3441"/>
+                      </a:solidFill>
+                      <a:prstDash val="solid"/>
+                      <a:round/>
+                      <a:headEnd type="none" w="med" len="med"/>
+                      <a:tailEnd type="none" w="med" len="med"/>
+                    </a:lnR>
+                    <a:lnT w="12700" cap="flat" cmpd="sng" algn="ctr">
+                      <a:solidFill>
+                        <a:srgbClr val="2A3441"/>
+                      </a:solidFill>
+                      <a:prstDash val="solid"/>
+                      <a:round/>
+                      <a:headEnd type="none" w="med" len="med"/>
+                      <a:tailEnd type="none" w="med" len="med"/>
+                    </a:lnT>
+                    <a:lnB w="12700" cap="flat" cmpd="sng" algn="ctr">
+                      <a:solidFill>
+                        <a:srgbClr val="2A3441"/>
+                      </a:solidFill>
+                      <a:prstDash val="solid"/>
+                      <a:round/>
+                      <a:headEnd type="none" w="med" len="med"/>
+                      <a:tailEnd type="none" w="med" len="med"/>
+                    </a:lnB>
+                    <a:solidFill>
+                      <a:srgbClr val="141B24"/>
+                    </a:solidFill>
+                  </a:tcPr>
+                </a:tc>
+                <a:tc>
+                  <a:txBody>
+                    <a:bodyPr/>
+                    <a:lstStyle/>
+                    <a:p>
+                      <a:pPr indent="0" marL="0">
+                        <a:buNone/>
+                      </a:pPr>
+                      <a:r>
+                        <a:rPr lang="en-US" sz="1300" dirty="0">
+                          <a:solidFill>
+                            <a:srgbClr val="E6EDF3"/>
+                          </a:solidFill>
+                          <a:latin typeface="Calibri" pitchFamily="34" charset="0"/>
+                          <a:ea typeface="Calibri" pitchFamily="34" charset="-122"/>
+                          <a:cs typeface="Calibri" pitchFamily="34" charset="-120"/>
+                        </a:rPr>
+                        <a:t>0.58 s</a:t>
+                      </a:r>
+                      <a:endParaRPr lang="en-US" sz="1300" dirty="0">
+                        <a:latin typeface="Calibri" charset="0"/>
+                        <a:ea typeface="Calibri" charset="0"/>
+                        <a:cs typeface="Calibri" charset="0"/>
+                      </a:endParaRPr>
+                    </a:p>
+                  </a:txBody>
+                  <a:tcPr marL="91440" marR="91440" marT="45720" marB="45720">
+                    <a:lnL w="12700" cap="flat" cmpd="sng" algn="ctr">
+                      <a:solidFill>
+                        <a:srgbClr val="2A3441"/>
+                      </a:solidFill>
+                      <a:prstDash val="solid"/>
+                      <a:round/>
+                      <a:headEnd type="none" w="med" len="med"/>
+                      <a:tailEnd type="none" w="med" len="med"/>
+                    </a:lnL>
+                    <a:lnR w="12700" cap="flat" cmpd="sng" algn="ctr">
+                      <a:solidFill>
+                        <a:srgbClr val="2A3441"/>
+                      </a:solidFill>
+                      <a:prstDash val="solid"/>
+                      <a:round/>
+                      <a:headEnd type="none" w="med" len="med"/>
+                      <a:tailEnd type="none" w="med" len="med"/>
+                    </a:lnR>
+                    <a:lnT w="12700" cap="flat" cmpd="sng" algn="ctr">
+                      <a:solidFill>
+                        <a:srgbClr val="2A3441"/>
+                      </a:solidFill>
+                      <a:prstDash val="solid"/>
+                      <a:round/>
+                      <a:headEnd type="none" w="med" len="med"/>
+                      <a:tailEnd type="none" w="med" len="med"/>
+                    </a:lnT>
+                    <a:lnB w="12700" cap="flat" cmpd="sng" algn="ctr">
+                      <a:solidFill>
+                        <a:srgbClr val="2A3441"/>
+                      </a:solidFill>
+                      <a:prstDash val="solid"/>
+                      <a:round/>
+                      <a:headEnd type="none" w="med" len="med"/>
+                      <a:tailEnd type="none" w="med" len="med"/>
+                    </a:lnB>
+                    <a:solidFill>
+                      <a:srgbClr val="141B24"/>
+                    </a:solidFill>
+                  </a:tcPr>
+                </a:tc>
+                <a:tc>
+                  <a:txBody>
+                    <a:bodyPr/>
+                    <a:lstStyle/>
+                    <a:p>
+                      <a:pPr indent="0" marL="0">
+                        <a:buNone/>
+                      </a:pPr>
+                      <a:r>
+                        <a:rPr lang="en-US" sz="1300" dirty="0">
+                          <a:solidFill>
+                            <a:srgbClr val="E6EDF3"/>
+                          </a:solidFill>
+                          <a:latin typeface="Calibri" pitchFamily="34" charset="0"/>
+                          <a:ea typeface="Calibri" pitchFamily="34" charset="-122"/>
+                          <a:cs typeface="Calibri" pitchFamily="34" charset="-120"/>
+                        </a:rPr>
+                        <a:t>4.68 s</a:t>
+                      </a:r>
+                      <a:endParaRPr lang="en-US" sz="1300" dirty="0">
+                        <a:latin typeface="Calibri" charset="0"/>
+                        <a:ea typeface="Calibri" charset="0"/>
+                        <a:cs typeface="Calibri" charset="0"/>
+                      </a:endParaRPr>
+                    </a:p>
+                  </a:txBody>
+                  <a:tcPr marL="91440" marR="91440" marT="45720" marB="45720">
+                    <a:lnL w="12700" cap="flat" cmpd="sng" algn="ctr">
+                      <a:solidFill>
+                        <a:srgbClr val="2A3441"/>
+                      </a:solidFill>
+                      <a:prstDash val="solid"/>
+                      <a:round/>
+                      <a:headEnd type="none" w="med" len="med"/>
+                      <a:tailEnd type="none" w="med" len="med"/>
+                    </a:lnL>
+                    <a:lnR w="12700" cap="flat" cmpd="sng" algn="ctr">
+                      <a:solidFill>
+                        <a:srgbClr val="2A3441"/>
+                      </a:solidFill>
+                      <a:prstDash val="solid"/>
+                      <a:round/>
+                      <a:headEnd type="none" w="med" len="med"/>
+                      <a:tailEnd type="none" w="med" len="med"/>
+                    </a:lnR>
+                    <a:lnT w="12700" cap="flat" cmpd="sng" algn="ctr">
+                      <a:solidFill>
+                        <a:srgbClr val="2A3441"/>
+                      </a:solidFill>
+                      <a:prstDash val="solid"/>
+                      <a:round/>
+                      <a:headEnd type="none" w="med" len="med"/>
+                      <a:tailEnd type="none" w="med" len="med"/>
+                    </a:lnT>
+                    <a:lnB w="12700" cap="flat" cmpd="sng" algn="ctr">
+                      <a:solidFill>
+                        <a:srgbClr val="2A3441"/>
+                      </a:solidFill>
+                      <a:prstDash val="solid"/>
+                      <a:round/>
+                      <a:headEnd type="none" w="med" len="med"/>
+                      <a:tailEnd type="none" w="med" len="med"/>
+                    </a:lnB>
+                    <a:solidFill>
+                      <a:srgbClr val="141B24"/>
+                    </a:solidFill>
+                  </a:tcPr>
+                </a:tc>
+                <a:tc>
+                  <a:txBody>
+                    <a:bodyPr/>
+                    <a:lstStyle/>
+                    <a:p>
+                      <a:pPr indent="0" marL="0">
+                        <a:buNone/>
+                      </a:pPr>
+                      <a:r>
+                        <a:rPr lang="en-US" sz="1300" dirty="0">
+                          <a:solidFill>
+                            <a:srgbClr val="E6EDF3"/>
+                          </a:solidFill>
+                          <a:latin typeface="Calibri" pitchFamily="34" charset="0"/>
+                          <a:ea typeface="Calibri" pitchFamily="34" charset="-122"/>
+                          <a:cs typeface="Calibri" pitchFamily="34" charset="-120"/>
+                        </a:rPr>
+                        <a:t>1.85 s</a:t>
+                      </a:r>
+                      <a:endParaRPr lang="en-US" sz="1300" dirty="0">
+                        <a:latin typeface="Calibri" charset="0"/>
+                        <a:ea typeface="Calibri" charset="0"/>
+                        <a:cs typeface="Calibri" charset="0"/>
+                      </a:endParaRPr>
+                    </a:p>
+                  </a:txBody>
+                  <a:tcPr marL="91440" marR="91440" marT="45720" marB="45720">
+                    <a:lnL w="12700" cap="flat" cmpd="sng" algn="ctr">
+                      <a:solidFill>
+                        <a:srgbClr val="2A3441"/>
+                      </a:solidFill>
+                      <a:prstDash val="solid"/>
+                      <a:round/>
+                      <a:headEnd type="none" w="med" len="med"/>
+                      <a:tailEnd type="none" w="med" len="med"/>
+                    </a:lnL>
+                    <a:lnR w="12700" cap="flat" cmpd="sng" algn="ctr">
+                      <a:solidFill>
+                        <a:srgbClr val="2A3441"/>
+                      </a:solidFill>
+                      <a:prstDash val="solid"/>
+                      <a:round/>
+                      <a:headEnd type="none" w="med" len="med"/>
+                      <a:tailEnd type="none" w="med" len="med"/>
+                    </a:lnR>
+                    <a:lnT w="12700" cap="flat" cmpd="sng" algn="ctr">
+                      <a:solidFill>
+                        <a:srgbClr val="2A3441"/>
+                      </a:solidFill>
+                      <a:prstDash val="solid"/>
+                      <a:round/>
+                      <a:headEnd type="none" w="med" len="med"/>
+                      <a:tailEnd type="none" w="med" len="med"/>
+                    </a:lnT>
+                    <a:lnB w="12700" cap="flat" cmpd="sng" algn="ctr">
+                      <a:solidFill>
+                        <a:srgbClr val="2A3441"/>
+                      </a:solidFill>
+                      <a:prstDash val="solid"/>
+                      <a:round/>
+                      <a:headEnd type="none" w="med" len="med"/>
+                      <a:tailEnd type="none" w="med" len="med"/>
+                    </a:lnB>
+                    <a:solidFill>
+                      <a:srgbClr val="141B24"/>
+                    </a:solidFill>
+                  </a:tcPr>
+                </a:tc>
+                <a:tc>
+                  <a:txBody>
+                    <a:bodyPr/>
+                    <a:lstStyle/>
+                    <a:p>
+                      <a:pPr indent="0" marL="0">
+                        <a:buNone/>
+                      </a:pPr>
+                      <a:r>
+                        <a:rPr lang="en-US" sz="1300" dirty="0">
+                          <a:solidFill>
+                            <a:srgbClr val="E6EDF3"/>
+                          </a:solidFill>
+                          <a:latin typeface="Calibri" pitchFamily="34" charset="0"/>
+                          <a:ea typeface="Calibri" pitchFamily="34" charset="-122"/>
+                          <a:cs typeface="Calibri" pitchFamily="34" charset="-120"/>
+                        </a:rPr>
+                        <a:t>-61%</a:t>
+                      </a:r>
+                      <a:endParaRPr lang="en-US" sz="1300" dirty="0">
+                        <a:latin typeface="Calibri" charset="0"/>
+                        <a:ea typeface="Calibri" charset="0"/>
+                        <a:cs typeface="Calibri" charset="0"/>
+                      </a:endParaRPr>
+                    </a:p>
+                  </a:txBody>
+                  <a:tcPr marL="91440" marR="91440" marT="45720" marB="45720">
+                    <a:lnL w="12700" cap="flat" cmpd="sng" algn="ctr">
+                      <a:solidFill>
+                        <a:srgbClr val="2A3441"/>
+                      </a:solidFill>
+                      <a:prstDash val="solid"/>
+                      <a:round/>
+                      <a:headEnd type="none" w="med" len="med"/>
+                      <a:tailEnd type="none" w="med" len="med"/>
+                    </a:lnL>
+                    <a:lnR w="12700" cap="flat" cmpd="sng" algn="ctr">
+                      <a:solidFill>
+                        <a:srgbClr val="2A3441"/>
+                      </a:solidFill>
+                      <a:prstDash val="solid"/>
+                      <a:round/>
+                      <a:headEnd type="none" w="med" len="med"/>
+                      <a:tailEnd type="none" w="med" len="med"/>
+                    </a:lnR>
+                    <a:lnT w="12700" cap="flat" cmpd="sng" algn="ctr">
+                      <a:solidFill>
+                        <a:srgbClr val="2A3441"/>
+                      </a:solidFill>
+                      <a:prstDash val="solid"/>
+                      <a:round/>
+                      <a:headEnd type="none" w="med" len="med"/>
+                      <a:tailEnd type="none" w="med" len="med"/>
+                    </a:lnT>
+                    <a:lnB w="12700" cap="flat" cmpd="sng" algn="ctr">
+                      <a:solidFill>
+                        <a:srgbClr val="2A3441"/>
+                      </a:solidFill>
+                      <a:prstDash val="solid"/>
+                      <a:round/>
+                      <a:headEnd type="none" w="med" len="med"/>
+                      <a:tailEnd type="none" w="med" len="med"/>
+                    </a:lnB>
+                    <a:solidFill>
+                      <a:srgbClr val="141B24"/>
+                    </a:solidFill>
+                  </a:tcPr>
+                </a:tc>
+              </a:tr>
+              <a:tr h="420624">
+                <a:tc>
+                  <a:txBody>
+                    <a:bodyPr/>
+                    <a:lstStyle/>
+                    <a:p>
+                      <a:pPr indent="0" marL="0">
+                        <a:buNone/>
+                      </a:pPr>
+                      <a:r>
+                        <a:rPr lang="en-US" sz="1300" dirty="0">
+                          <a:solidFill>
+                            <a:srgbClr val="E6EDF3"/>
+                          </a:solidFill>
+                          <a:latin typeface="Calibri" pitchFamily="34" charset="0"/>
+                          <a:ea typeface="Calibri" pitchFamily="34" charset="-122"/>
+                          <a:cs typeface="Calibri" pitchFamily="34" charset="-120"/>
+                        </a:rPr>
+                        <a:t>5G-like</a:t>
+                      </a:r>
+                      <a:endParaRPr lang="en-US" sz="1300" dirty="0">
+                        <a:latin typeface="Calibri" charset="0"/>
+                        <a:ea typeface="Calibri" charset="0"/>
+                        <a:cs typeface="Calibri" charset="0"/>
+                      </a:endParaRPr>
+                    </a:p>
+                  </a:txBody>
+                  <a:tcPr marL="91440" marR="91440" marT="45720" marB="45720">
+                    <a:lnL w="12700" cap="flat" cmpd="sng" algn="ctr">
+                      <a:solidFill>
+                        <a:srgbClr val="2A3441"/>
+                      </a:solidFill>
+                      <a:prstDash val="solid"/>
+                      <a:round/>
+                      <a:headEnd type="none" w="med" len="med"/>
+                      <a:tailEnd type="none" w="med" len="med"/>
+                    </a:lnL>
+                    <a:lnR w="12700" cap="flat" cmpd="sng" algn="ctr">
+                      <a:solidFill>
+                        <a:srgbClr val="2A3441"/>
+                      </a:solidFill>
+                      <a:prstDash val="solid"/>
+                      <a:round/>
+                      <a:headEnd type="none" w="med" len="med"/>
+                      <a:tailEnd type="none" w="med" len="med"/>
+                    </a:lnR>
+                    <a:lnT w="12700" cap="flat" cmpd="sng" algn="ctr">
+                      <a:solidFill>
+                        <a:srgbClr val="2A3441"/>
+                      </a:solidFill>
+                      <a:prstDash val="solid"/>
+                      <a:round/>
+                      <a:headEnd type="none" w="med" len="med"/>
+                      <a:tailEnd type="none" w="med" len="med"/>
+                    </a:lnT>
+                    <a:lnB w="12700" cap="flat" cmpd="sng" algn="ctr">
+                      <a:solidFill>
+                        <a:srgbClr val="2A3441"/>
+                      </a:solidFill>
+                      <a:prstDash val="solid"/>
+                      <a:round/>
+                      <a:headEnd type="none" w="med" len="med"/>
+                      <a:tailEnd type="none" w="med" len="med"/>
+                    </a:lnB>
+                    <a:solidFill>
+                      <a:srgbClr val="141B24"/>
+                    </a:solidFill>
+                  </a:tcPr>
+                </a:tc>
+                <a:tc>
+                  <a:txBody>
+                    <a:bodyPr/>
+                    <a:lstStyle/>
+                    <a:p>
+                      <a:pPr indent="0" marL="0">
+                        <a:buNone/>
+                      </a:pPr>
+                      <a:r>
+                        <a:rPr lang="en-US" sz="1300" dirty="0">
+                          <a:solidFill>
+                            <a:srgbClr val="E6EDF3"/>
+                          </a:solidFill>
+                          <a:latin typeface="Calibri" pitchFamily="34" charset="0"/>
+                          <a:ea typeface="Calibri" pitchFamily="34" charset="-122"/>
+                          <a:cs typeface="Calibri" pitchFamily="34" charset="-120"/>
+                        </a:rPr>
+                        <a:t>0.23 s</a:t>
+                      </a:r>
+                      <a:endParaRPr lang="en-US" sz="1300" dirty="0">
+                        <a:latin typeface="Calibri" charset="0"/>
+                        <a:ea typeface="Calibri" charset="0"/>
+                        <a:cs typeface="Calibri" charset="0"/>
+                      </a:endParaRPr>
+                    </a:p>
+                  </a:txBody>
+                  <a:tcPr marL="91440" marR="91440" marT="45720" marB="45720">
+                    <a:lnL w="12700" cap="flat" cmpd="sng" algn="ctr">
+                      <a:solidFill>
+                        <a:srgbClr val="2A3441"/>
+                      </a:solidFill>
+                      <a:prstDash val="solid"/>
+                      <a:round/>
+                      <a:headEnd type="none" w="med" len="med"/>
+                      <a:tailEnd type="none" w="med" len="med"/>
+                    </a:lnL>
+                    <a:lnR w="12700" cap="flat" cmpd="sng" algn="ctr">
+                      <a:solidFill>
+                        <a:srgbClr val="2A3441"/>
+                      </a:solidFill>
+                      <a:prstDash val="solid"/>
+                      <a:round/>
+                      <a:headEnd type="none" w="med" len="med"/>
+                      <a:tailEnd type="none" w="med" len="med"/>
+                    </a:lnR>
+                    <a:lnT w="12700" cap="flat" cmpd="sng" algn="ctr">
+                      <a:solidFill>
+                        <a:srgbClr val="2A3441"/>
+                      </a:solidFill>
+                      <a:prstDash val="solid"/>
+                      <a:round/>
+                      <a:headEnd type="none" w="med" len="med"/>
+                      <a:tailEnd type="none" w="med" len="med"/>
+                    </a:lnT>
+                    <a:lnB w="12700" cap="flat" cmpd="sng" algn="ctr">
+                      <a:solidFill>
+                        <a:srgbClr val="2A3441"/>
+                      </a:solidFill>
+                      <a:prstDash val="solid"/>
+                      <a:round/>
+                      <a:headEnd type="none" w="med" len="med"/>
+                      <a:tailEnd type="none" w="med" len="med"/>
+                    </a:lnB>
+                    <a:solidFill>
+                      <a:srgbClr val="141B24"/>
+                    </a:solidFill>
+                  </a:tcPr>
+                </a:tc>
+                <a:tc>
+                  <a:txBody>
+                    <a:bodyPr/>
+                    <a:lstStyle/>
+                    <a:p>
+                      <a:pPr indent="0" marL="0">
+                        <a:buNone/>
+                      </a:pPr>
+                      <a:r>
+                        <a:rPr lang="en-US" sz="1300" dirty="0">
+                          <a:solidFill>
+                            <a:srgbClr val="E6EDF3"/>
+                          </a:solidFill>
+                          <a:latin typeface="Calibri" pitchFamily="34" charset="0"/>
+                          <a:ea typeface="Calibri" pitchFamily="34" charset="-122"/>
+                          <a:cs typeface="Calibri" pitchFamily="34" charset="-120"/>
+                        </a:rPr>
+                        <a:t>1.26 s</a:t>
+                      </a:r>
+                      <a:endParaRPr lang="en-US" sz="1300" dirty="0">
+                        <a:latin typeface="Calibri" charset="0"/>
+                        <a:ea typeface="Calibri" charset="0"/>
+                        <a:cs typeface="Calibri" charset="0"/>
+                      </a:endParaRPr>
+                    </a:p>
+                  </a:txBody>
+                  <a:tcPr marL="91440" marR="91440" marT="45720" marB="45720">
+                    <a:lnL w="12700" cap="flat" cmpd="sng" algn="ctr">
+                      <a:solidFill>
+                        <a:srgbClr val="2A3441"/>
+                      </a:solidFill>
+                      <a:prstDash val="solid"/>
+                      <a:round/>
+                      <a:headEnd type="none" w="med" len="med"/>
+                      <a:tailEnd type="none" w="med" len="med"/>
+                    </a:lnL>
+                    <a:lnR w="12700" cap="flat" cmpd="sng" algn="ctr">
+                      <a:solidFill>
+                        <a:srgbClr val="2A3441"/>
+                      </a:solidFill>
+                      <a:prstDash val="solid"/>
+                      <a:round/>
+                      <a:headEnd type="none" w="med" len="med"/>
+                      <a:tailEnd type="none" w="med" len="med"/>
+                    </a:lnR>
+                    <a:lnT w="12700" cap="flat" cmpd="sng" algn="ctr">
+                      <a:solidFill>
+                        <a:srgbClr val="2A3441"/>
+                      </a:solidFill>
+                      <a:prstDash val="solid"/>
+                      <a:round/>
+                      <a:headEnd type="none" w="med" len="med"/>
+                      <a:tailEnd type="none" w="med" len="med"/>
+                    </a:lnT>
+                    <a:lnB w="12700" cap="flat" cmpd="sng" algn="ctr">
+                      <a:solidFill>
+                        <a:srgbClr val="2A3441"/>
+                      </a:solidFill>
+                      <a:prstDash val="solid"/>
+                      <a:round/>
+                      <a:headEnd type="none" w="med" len="med"/>
+                      <a:tailEnd type="none" w="med" len="med"/>
+                    </a:lnB>
+                    <a:solidFill>
+                      <a:srgbClr val="141B24"/>
+                    </a:solidFill>
+                  </a:tcPr>
+                </a:tc>
+                <a:tc>
+                  <a:txBody>
+                    <a:bodyPr/>
+                    <a:lstStyle/>
+                    <a:p>
+                      <a:pPr indent="0" marL="0">
+                        <a:buNone/>
+                      </a:pPr>
+                      <a:r>
+                        <a:rPr lang="en-US" sz="1300" dirty="0">
+                          <a:solidFill>
+                            <a:srgbClr val="E6EDF3"/>
+                          </a:solidFill>
+                          <a:latin typeface="Calibri" pitchFamily="34" charset="0"/>
+                          <a:ea typeface="Calibri" pitchFamily="34" charset="-122"/>
+                          <a:cs typeface="Calibri" pitchFamily="34" charset="-120"/>
+                        </a:rPr>
+                        <a:t>0.38 s</a:t>
+                      </a:r>
+                      <a:endParaRPr lang="en-US" sz="1300" dirty="0">
+                        <a:latin typeface="Calibri" charset="0"/>
+                        <a:ea typeface="Calibri" charset="0"/>
+                        <a:cs typeface="Calibri" charset="0"/>
+                      </a:endParaRPr>
+                    </a:p>
+                  </a:txBody>
+                  <a:tcPr marL="91440" marR="91440" marT="45720" marB="45720">
+                    <a:lnL w="12700" cap="flat" cmpd="sng" algn="ctr">
+                      <a:solidFill>
+                        <a:srgbClr val="2A3441"/>
+                      </a:solidFill>
+                      <a:prstDash val="solid"/>
+                      <a:round/>
+                      <a:headEnd type="none" w="med" len="med"/>
+                      <a:tailEnd type="none" w="med" len="med"/>
+                    </a:lnL>
+                    <a:lnR w="12700" cap="flat" cmpd="sng" algn="ctr">
+                      <a:solidFill>
+                        <a:srgbClr val="2A3441"/>
+                      </a:solidFill>
+                      <a:prstDash val="solid"/>
+                      <a:round/>
+                      <a:headEnd type="none" w="med" len="med"/>
+                      <a:tailEnd type="none" w="med" len="med"/>
+                    </a:lnR>
+                    <a:lnT w="12700" cap="flat" cmpd="sng" algn="ctr">
+                      <a:solidFill>
+                        <a:srgbClr val="2A3441"/>
+                      </a:solidFill>
+                      <a:prstDash val="solid"/>
+                      <a:round/>
+                      <a:headEnd type="none" w="med" len="med"/>
+                      <a:tailEnd type="none" w="med" len="med"/>
+                    </a:lnT>
+                    <a:lnB w="12700" cap="flat" cmpd="sng" algn="ctr">
+                      <a:solidFill>
+                        <a:srgbClr val="2A3441"/>
+                      </a:solidFill>
+                      <a:prstDash val="solid"/>
+                      <a:round/>
+                      <a:headEnd type="none" w="med" len="med"/>
+                      <a:tailEnd type="none" w="med" len="med"/>
+                    </a:lnB>
+                    <a:solidFill>
+                      <a:srgbClr val="141B24"/>
+                    </a:solidFill>
+                  </a:tcPr>
+                </a:tc>
+                <a:tc>
+                  <a:txBody>
+                    <a:bodyPr/>
+                    <a:lstStyle/>
+                    <a:p>
+                      <a:pPr indent="0" marL="0">
+                        <a:buNone/>
+                      </a:pPr>
+                      <a:r>
+                        <a:rPr lang="en-US" sz="1300" dirty="0">
+                          <a:solidFill>
+                            <a:srgbClr val="E6EDF3"/>
+                          </a:solidFill>
+                          <a:latin typeface="Calibri" pitchFamily="34" charset="0"/>
+                          <a:ea typeface="Calibri" pitchFamily="34" charset="-122"/>
+                          <a:cs typeface="Calibri" pitchFamily="34" charset="-120"/>
+                        </a:rPr>
+                        <a:t>-70%</a:t>
+                      </a:r>
+                      <a:endParaRPr lang="en-US" sz="1300" dirty="0">
+                        <a:latin typeface="Calibri" charset="0"/>
+                        <a:ea typeface="Calibri" charset="0"/>
+                        <a:cs typeface="Calibri" charset="0"/>
+                      </a:endParaRPr>
+                    </a:p>
+                  </a:txBody>
+                  <a:tcPr marL="91440" marR="91440" marT="45720" marB="45720">
+                    <a:lnL w="12700" cap="flat" cmpd="sng" algn="ctr">
+                      <a:solidFill>
+                        <a:srgbClr val="2A3441"/>
+                      </a:solidFill>
+                      <a:prstDash val="solid"/>
+                      <a:round/>
+                      <a:headEnd type="none" w="med" len="med"/>
+                      <a:tailEnd type="none" w="med" len="med"/>
+                    </a:lnL>
+                    <a:lnR w="12700" cap="flat" cmpd="sng" algn="ctr">
+                      <a:solidFill>
+                        <a:srgbClr val="2A3441"/>
+                      </a:solidFill>
+                      <a:prstDash val="solid"/>
+                      <a:round/>
+                      <a:headEnd type="none" w="med" len="med"/>
+                      <a:tailEnd type="none" w="med" len="med"/>
+                    </a:lnR>
+                    <a:lnT w="12700" cap="flat" cmpd="sng" algn="ctr">
+                      <a:solidFill>
+                        <a:srgbClr val="2A3441"/>
+                      </a:solidFill>
+                      <a:prstDash val="solid"/>
+                      <a:round/>
+                      <a:headEnd type="none" w="med" len="med"/>
+                      <a:tailEnd type="none" w="med" len="med"/>
+                    </a:lnT>
+                    <a:lnB w="12700" cap="flat" cmpd="sng" algn="ctr">
+                      <a:solidFill>
+                        <a:srgbClr val="2A3441"/>
+                      </a:solidFill>
+                      <a:prstDash val="solid"/>
+                      <a:round/>
+                      <a:headEnd type="none" w="med" len="med"/>
+                      <a:tailEnd type="none" w="med" len="med"/>
+                    </a:lnB>
+                    <a:solidFill>
+                      <a:srgbClr val="141B24"/>
+                    </a:solidFill>
+                  </a:tcPr>
+                </a:tc>
+              </a:tr>
+              <a:tr h="420624">
+                <a:tc>
+                  <a:txBody>
+                    <a:bodyPr/>
+                    <a:lstStyle/>
+                    <a:p>
+                      <a:pPr indent="0" marL="0">
+                        <a:buNone/>
+                      </a:pPr>
+                      <a:r>
+                        <a:rPr lang="en-US" sz="1300" dirty="0">
+                          <a:solidFill>
+                            <a:srgbClr val="E6EDF3"/>
+                          </a:solidFill>
+                          <a:latin typeface="Calibri" pitchFamily="34" charset="0"/>
+                          <a:ea typeface="Calibri" pitchFamily="34" charset="-122"/>
+                          <a:cs typeface="Calibri" pitchFamily="34" charset="-120"/>
+                        </a:rPr>
+                        <a:t>Satellite, 150 ms</a:t>
+                      </a:r>
+                      <a:endParaRPr lang="en-US" sz="1300" dirty="0">
+                        <a:latin typeface="Calibri" charset="0"/>
+                        <a:ea typeface="Calibri" charset="0"/>
+                        <a:cs typeface="Calibri" charset="0"/>
+                      </a:endParaRPr>
+                    </a:p>
+                  </a:txBody>
+                  <a:tcPr marL="91440" marR="91440" marT="45720" marB="45720">
+                    <a:lnL w="12700" cap="flat" cmpd="sng" algn="ctr">
+                      <a:solidFill>
+                        <a:srgbClr val="2A3441"/>
+                      </a:solidFill>
+                      <a:prstDash val="solid"/>
+                      <a:round/>
+                      <a:headEnd type="none" w="med" len="med"/>
+                      <a:tailEnd type="none" w="med" len="med"/>
+                    </a:lnL>
+                    <a:lnR w="12700" cap="flat" cmpd="sng" algn="ctr">
+                      <a:solidFill>
+                        <a:srgbClr val="2A3441"/>
+                      </a:solidFill>
+                      <a:prstDash val="solid"/>
+                      <a:round/>
+                      <a:headEnd type="none" w="med" len="med"/>
+                      <a:tailEnd type="none" w="med" len="med"/>
+                    </a:lnR>
+                    <a:lnT w="12700" cap="flat" cmpd="sng" algn="ctr">
+                      <a:solidFill>
+                        <a:srgbClr val="2A3441"/>
+                      </a:solidFill>
+                      <a:prstDash val="solid"/>
+                      <a:round/>
+                      <a:headEnd type="none" w="med" len="med"/>
+                      <a:tailEnd type="none" w="med" len="med"/>
+                    </a:lnT>
+                    <a:lnB w="12700" cap="flat" cmpd="sng" algn="ctr">
+                      <a:solidFill>
+                        <a:srgbClr val="2A3441"/>
+                      </a:solidFill>
+                      <a:prstDash val="solid"/>
+                      <a:round/>
+                      <a:headEnd type="none" w="med" len="med"/>
+                      <a:tailEnd type="none" w="med" len="med"/>
+                    </a:lnB>
+                    <a:solidFill>
+                      <a:srgbClr val="141B24"/>
+                    </a:solidFill>
+                  </a:tcPr>
+                </a:tc>
+                <a:tc>
+                  <a:txBody>
+                    <a:bodyPr/>
+                    <a:lstStyle/>
+                    <a:p>
+                      <a:pPr indent="0" marL="0">
+                        <a:buNone/>
+                      </a:pPr>
+                      <a:r>
+                        <a:rPr lang="en-US" sz="1300" dirty="0">
+                          <a:solidFill>
+                            <a:srgbClr val="E6EDF3"/>
+                          </a:solidFill>
+                          <a:latin typeface="Calibri" pitchFamily="34" charset="0"/>
+                          <a:ea typeface="Calibri" pitchFamily="34" charset="-122"/>
+                          <a:cs typeface="Calibri" pitchFamily="34" charset="-120"/>
+                        </a:rPr>
+                        <a:t>2.10 s</a:t>
+                      </a:r>
+                      <a:endParaRPr lang="en-US" sz="1300" dirty="0">
+                        <a:latin typeface="Calibri" charset="0"/>
+                        <a:ea typeface="Calibri" charset="0"/>
+                        <a:cs typeface="Calibri" charset="0"/>
+                      </a:endParaRPr>
+                    </a:p>
+                  </a:txBody>
+                  <a:tcPr marL="91440" marR="91440" marT="45720" marB="45720">
+                    <a:lnL w="12700" cap="flat" cmpd="sng" algn="ctr">
+                      <a:solidFill>
+                        <a:srgbClr val="2A3441"/>
+                      </a:solidFill>
+                      <a:prstDash val="solid"/>
+                      <a:round/>
+                      <a:headEnd type="none" w="med" len="med"/>
+                      <a:tailEnd type="none" w="med" len="med"/>
+                    </a:lnL>
+                    <a:lnR w="12700" cap="flat" cmpd="sng" algn="ctr">
+                      <a:solidFill>
+                        <a:srgbClr val="2A3441"/>
+                      </a:solidFill>
+                      <a:prstDash val="solid"/>
+                      <a:round/>
+                      <a:headEnd type="none" w="med" len="med"/>
+                      <a:tailEnd type="none" w="med" len="med"/>
+                    </a:lnR>
+                    <a:lnT w="12700" cap="flat" cmpd="sng" algn="ctr">
+                      <a:solidFill>
+                        <a:srgbClr val="2A3441"/>
+                      </a:solidFill>
+                      <a:prstDash val="solid"/>
+                      <a:round/>
+                      <a:headEnd type="none" w="med" len="med"/>
+                      <a:tailEnd type="none" w="med" len="med"/>
+                    </a:lnT>
+                    <a:lnB w="12700" cap="flat" cmpd="sng" algn="ctr">
+                      <a:solidFill>
+                        <a:srgbClr val="2A3441"/>
+                      </a:solidFill>
+                      <a:prstDash val="solid"/>
+                      <a:round/>
+                      <a:headEnd type="none" w="med" len="med"/>
+                      <a:tailEnd type="none" w="med" len="med"/>
+                    </a:lnB>
+                    <a:solidFill>
+                      <a:srgbClr val="141B24"/>
+                    </a:solidFill>
+                  </a:tcPr>
+                </a:tc>
+                <a:tc>
+                  <a:txBody>
+                    <a:bodyPr/>
+                    <a:lstStyle/>
+                    <a:p>
+                      <a:pPr indent="0" marL="0">
+                        <a:buNone/>
+                      </a:pPr>
+                      <a:r>
+                        <a:rPr lang="en-US" sz="1300" dirty="0">
+                          <a:solidFill>
+                            <a:srgbClr val="E6EDF3"/>
+                          </a:solidFill>
+                          <a:latin typeface="Calibri" pitchFamily="34" charset="0"/>
+                          <a:ea typeface="Calibri" pitchFamily="34" charset="-122"/>
+                          <a:cs typeface="Calibri" pitchFamily="34" charset="-120"/>
+                        </a:rPr>
+                        <a:t>18.9 s</a:t>
+                      </a:r>
+                      <a:endParaRPr lang="en-US" sz="1300" dirty="0">
+                        <a:latin typeface="Calibri" charset="0"/>
+                        <a:ea typeface="Calibri" charset="0"/>
+                        <a:cs typeface="Calibri" charset="0"/>
+                      </a:endParaRPr>
+                    </a:p>
+                  </a:txBody>
+                  <a:tcPr marL="91440" marR="91440" marT="45720" marB="45720">
+                    <a:lnL w="12700" cap="flat" cmpd="sng" algn="ctr">
+                      <a:solidFill>
+                        <a:srgbClr val="2A3441"/>
+                      </a:solidFill>
+                      <a:prstDash val="solid"/>
+                      <a:round/>
+                      <a:headEnd type="none" w="med" len="med"/>
+                      <a:tailEnd type="none" w="med" len="med"/>
+                    </a:lnL>
+                    <a:lnR w="12700" cap="flat" cmpd="sng" algn="ctr">
+                      <a:solidFill>
+                        <a:srgbClr val="2A3441"/>
+                      </a:solidFill>
+                      <a:prstDash val="solid"/>
+                      <a:round/>
+                      <a:headEnd type="none" w="med" len="med"/>
+                      <a:tailEnd type="none" w="med" len="med"/>
+                    </a:lnR>
+                    <a:lnT w="12700" cap="flat" cmpd="sng" algn="ctr">
+                      <a:solidFill>
+                        <a:srgbClr val="2A3441"/>
+                      </a:solidFill>
+                      <a:prstDash val="solid"/>
+                      <a:round/>
+                      <a:headEnd type="none" w="med" len="med"/>
+                      <a:tailEnd type="none" w="med" len="med"/>
+                    </a:lnT>
+                    <a:lnB w="12700" cap="flat" cmpd="sng" algn="ctr">
+                      <a:solidFill>
+                        <a:srgbClr val="2A3441"/>
+                      </a:solidFill>
+                      <a:prstDash val="solid"/>
+                      <a:round/>
+                      <a:headEnd type="none" w="med" len="med"/>
+                      <a:tailEnd type="none" w="med" len="med"/>
+                    </a:lnB>
+                    <a:solidFill>
+                      <a:srgbClr val="141B24"/>
+                    </a:solidFill>
+                  </a:tcPr>
+                </a:tc>
+                <a:tc>
+                  <a:txBody>
+                    <a:bodyPr/>
+                    <a:lstStyle/>
+                    <a:p>
+                      <a:pPr indent="0" marL="0">
+                        <a:buNone/>
+                      </a:pPr>
+                      <a:r>
+                        <a:rPr lang="en-US" sz="1300" dirty="0">
+                          <a:solidFill>
+                            <a:srgbClr val="E6EDF3"/>
+                          </a:solidFill>
+                          <a:latin typeface="Calibri" pitchFamily="34" charset="0"/>
+                          <a:ea typeface="Calibri" pitchFamily="34" charset="-122"/>
+                          <a:cs typeface="Calibri" pitchFamily="34" charset="-120"/>
+                        </a:rPr>
+                        <a:t>3.16 s</a:t>
+                      </a:r>
+                      <a:endParaRPr lang="en-US" sz="1300" dirty="0">
+                        <a:latin typeface="Calibri" charset="0"/>
+                        <a:ea typeface="Calibri" charset="0"/>
+                        <a:cs typeface="Calibri" charset="0"/>
+                      </a:endParaRPr>
+                    </a:p>
+                  </a:txBody>
+                  <a:tcPr marL="91440" marR="91440" marT="45720" marB="45720">
+                    <a:lnL w="12700" cap="flat" cmpd="sng" algn="ctr">
+                      <a:solidFill>
+                        <a:srgbClr val="2A3441"/>
+                      </a:solidFill>
+                      <a:prstDash val="solid"/>
+                      <a:round/>
+                      <a:headEnd type="none" w="med" len="med"/>
+                      <a:tailEnd type="none" w="med" len="med"/>
+                    </a:lnL>
+                    <a:lnR w="12700" cap="flat" cmpd="sng" algn="ctr">
+                      <a:solidFill>
+                        <a:srgbClr val="2A3441"/>
+                      </a:solidFill>
+                      <a:prstDash val="solid"/>
+                      <a:round/>
+                      <a:headEnd type="none" w="med" len="med"/>
+                      <a:tailEnd type="none" w="med" len="med"/>
+                    </a:lnR>
+                    <a:lnT w="12700" cap="flat" cmpd="sng" algn="ctr">
+                      <a:solidFill>
+                        <a:srgbClr val="2A3441"/>
+                      </a:solidFill>
+                      <a:prstDash val="solid"/>
+                      <a:round/>
+                      <a:headEnd type="none" w="med" len="med"/>
+                      <a:tailEnd type="none" w="med" len="med"/>
+                    </a:lnT>
+                    <a:lnB w="12700" cap="flat" cmpd="sng" algn="ctr">
+                      <a:solidFill>
+                        <a:srgbClr val="2A3441"/>
+                      </a:solidFill>
+                      <a:prstDash val="solid"/>
+                      <a:round/>
+                      <a:headEnd type="none" w="med" len="med"/>
+                      <a:tailEnd type="none" w="med" len="med"/>
+                    </a:lnB>
+                    <a:solidFill>
+                      <a:srgbClr val="141B24"/>
+                    </a:solidFill>
+                  </a:tcPr>
+                </a:tc>
+                <a:tc>
+                  <a:txBody>
+                    <a:bodyPr/>
+                    <a:lstStyle/>
+                    <a:p>
+                      <a:pPr indent="0" marL="0">
+                        <a:buNone/>
+                      </a:pPr>
+                      <a:r>
+                        <a:rPr lang="en-US" sz="1300" dirty="0">
+                          <a:solidFill>
+                            <a:srgbClr val="E6EDF3"/>
+                          </a:solidFill>
+                          <a:latin typeface="Calibri" pitchFamily="34" charset="0"/>
+                          <a:ea typeface="Calibri" pitchFamily="34" charset="-122"/>
+                          <a:cs typeface="Calibri" pitchFamily="34" charset="-120"/>
+                        </a:rPr>
+                        <a:t>-83%</a:t>
+                      </a:r>
+                      <a:endParaRPr lang="en-US" sz="1300" dirty="0">
+                        <a:latin typeface="Calibri" charset="0"/>
+                        <a:ea typeface="Calibri" charset="0"/>
+                        <a:cs typeface="Calibri" charset="0"/>
+                      </a:endParaRPr>
+                    </a:p>
+                  </a:txBody>
+                  <a:tcPr marL="91440" marR="91440" marT="45720" marB="45720">
+                    <a:lnL w="12700" cap="flat" cmpd="sng" algn="ctr">
+                      <a:solidFill>
+                        <a:srgbClr val="2A3441"/>
+                      </a:solidFill>
+                      <a:prstDash val="solid"/>
+                      <a:round/>
+                      <a:headEnd type="none" w="med" len="med"/>
+                      <a:tailEnd type="none" w="med" len="med"/>
+                    </a:lnL>
+                    <a:lnR w="12700" cap="flat" cmpd="sng" algn="ctr">
+                      <a:solidFill>
+                        <a:srgbClr val="2A3441"/>
+                      </a:solidFill>
+                      <a:prstDash val="solid"/>
+                      <a:round/>
+                      <a:headEnd type="none" w="med" len="med"/>
+                      <a:tailEnd type="none" w="med" len="med"/>
+                    </a:lnR>
+                    <a:lnT w="12700" cap="flat" cmpd="sng" algn="ctr">
+                      <a:solidFill>
+                        <a:srgbClr val="2A3441"/>
+                      </a:solidFill>
+                      <a:prstDash val="solid"/>
+                      <a:round/>
+                      <a:headEnd type="none" w="med" len="med"/>
+                      <a:tailEnd type="none" w="med" len="med"/>
+                    </a:lnT>
+                    <a:lnB w="12700" cap="flat" cmpd="sng" algn="ctr">
+                      <a:solidFill>
+                        <a:srgbClr val="2A3441"/>
+                      </a:solidFill>
+                      <a:prstDash val="solid"/>
+                      <a:round/>
+                      <a:headEnd type="none" w="med" len="med"/>
+                      <a:tailEnd type="none" w="med" len="med"/>
+                    </a:lnB>
+                    <a:solidFill>
+                      <a:srgbClr val="141B24"/>
+                    </a:solidFill>
+                  </a:tcPr>
+                </a:tc>
+              </a:tr>
+              <a:tr h="420624">
+                <a:tc>
+                  <a:txBody>
+                    <a:bodyPr/>
+                    <a:lstStyle/>
+                    <a:p>
+                      <a:pPr indent="0" marL="0">
+                        <a:buNone/>
+                      </a:pPr>
+                      <a:r>
+                        <a:rPr lang="en-US" sz="1300" dirty="0">
+                          <a:solidFill>
+                            <a:srgbClr val="E6EDF3"/>
+                          </a:solidFill>
+                          <a:latin typeface="Calibri" pitchFamily="34" charset="0"/>
+                          <a:ea typeface="Calibri" pitchFamily="34" charset="-122"/>
+                          <a:cs typeface="Calibri" pitchFamily="34" charset="-120"/>
+                        </a:rPr>
+                        <a:t>Reordering</a:t>
+                      </a:r>
+                      <a:endParaRPr lang="en-US" sz="1300" dirty="0">
+                        <a:latin typeface="Calibri" charset="0"/>
+                        <a:ea typeface="Calibri" charset="0"/>
+                        <a:cs typeface="Calibri" charset="0"/>
+                      </a:endParaRPr>
+                    </a:p>
+                  </a:txBody>
+                  <a:tcPr marL="91440" marR="91440" marT="45720" marB="45720">
+                    <a:lnL w="12700" cap="flat" cmpd="sng" algn="ctr">
+                      <a:solidFill>
+                        <a:srgbClr val="2A3441"/>
+                      </a:solidFill>
+                      <a:prstDash val="solid"/>
+                      <a:round/>
+                      <a:headEnd type="none" w="med" len="med"/>
+                      <a:tailEnd type="none" w="med" len="med"/>
+                    </a:lnL>
+                    <a:lnR w="12700" cap="flat" cmpd="sng" algn="ctr">
+                      <a:solidFill>
+                        <a:srgbClr val="2A3441"/>
+                      </a:solidFill>
+                      <a:prstDash val="solid"/>
+                      <a:round/>
+                      <a:headEnd type="none" w="med" len="med"/>
+                      <a:tailEnd type="none" w="med" len="med"/>
+                    </a:lnR>
+                    <a:lnT w="12700" cap="flat" cmpd="sng" algn="ctr">
+                      <a:solidFill>
+                        <a:srgbClr val="2A3441"/>
+                      </a:solidFill>
+                      <a:prstDash val="solid"/>
+                      <a:round/>
+                      <a:headEnd type="none" w="med" len="med"/>
+                      <a:tailEnd type="none" w="med" len="med"/>
+                    </a:lnT>
+                    <a:lnB w="12700" cap="flat" cmpd="sng" algn="ctr">
+                      <a:solidFill>
+                        <a:srgbClr val="2A3441"/>
+                      </a:solidFill>
+                      <a:prstDash val="solid"/>
+                      <a:round/>
+                      <a:headEnd type="none" w="med" len="med"/>
+                      <a:tailEnd type="none" w="med" len="med"/>
+                    </a:lnB>
+                    <a:solidFill>
+                      <a:srgbClr val="141B24"/>
+                    </a:solidFill>
+                  </a:tcPr>
+                </a:tc>
+                <a:tc>
+                  <a:txBody>
+                    <a:bodyPr/>
+                    <a:lstStyle/>
+                    <a:p>
+                      <a:pPr indent="0" marL="0">
+                        <a:buNone/>
+                      </a:pPr>
+                      <a:r>
+                        <a:rPr lang="en-US" sz="1300" dirty="0">
+                          <a:solidFill>
+                            <a:srgbClr val="E6EDF3"/>
+                          </a:solidFill>
+                          <a:latin typeface="Calibri" pitchFamily="34" charset="0"/>
+                          <a:ea typeface="Calibri" pitchFamily="34" charset="-122"/>
+                          <a:cs typeface="Calibri" pitchFamily="34" charset="-120"/>
+                        </a:rPr>
+                        <a:t>1.03 s</a:t>
+                      </a:r>
+                      <a:endParaRPr lang="en-US" sz="1300" dirty="0">
+                        <a:latin typeface="Calibri" charset="0"/>
+                        <a:ea typeface="Calibri" charset="0"/>
+                        <a:cs typeface="Calibri" charset="0"/>
+                      </a:endParaRPr>
+                    </a:p>
+                  </a:txBody>
+                  <a:tcPr marL="91440" marR="91440" marT="45720" marB="45720">
+                    <a:lnL w="12700" cap="flat" cmpd="sng" algn="ctr">
+                      <a:solidFill>
+                        <a:srgbClr val="2A3441"/>
+                      </a:solidFill>
+                      <a:prstDash val="solid"/>
+                      <a:round/>
+                      <a:headEnd type="none" w="med" len="med"/>
+                      <a:tailEnd type="none" w="med" len="med"/>
+                    </a:lnL>
+                    <a:lnR w="12700" cap="flat" cmpd="sng" algn="ctr">
+                      <a:solidFill>
+                        <a:srgbClr val="2A3441"/>
+                      </a:solidFill>
+                      <a:prstDash val="solid"/>
+                      <a:round/>
+                      <a:headEnd type="none" w="med" len="med"/>
+                      <a:tailEnd type="none" w="med" len="med"/>
+                    </a:lnR>
+                    <a:lnT w="12700" cap="flat" cmpd="sng" algn="ctr">
+                      <a:solidFill>
+                        <a:srgbClr val="2A3441"/>
+                      </a:solidFill>
+                      <a:prstDash val="solid"/>
+                      <a:round/>
+                      <a:headEnd type="none" w="med" len="med"/>
+                      <a:tailEnd type="none" w="med" len="med"/>
+                    </a:lnT>
+                    <a:lnB w="12700" cap="flat" cmpd="sng" algn="ctr">
+                      <a:solidFill>
+                        <a:srgbClr val="2A3441"/>
+                      </a:solidFill>
+                      <a:prstDash val="solid"/>
+                      <a:round/>
+                      <a:headEnd type="none" w="med" len="med"/>
+                      <a:tailEnd type="none" w="med" len="med"/>
+                    </a:lnB>
+                    <a:solidFill>
+                      <a:srgbClr val="141B24"/>
+                    </a:solidFill>
+                  </a:tcPr>
+                </a:tc>
+                <a:tc>
+                  <a:txBody>
+                    <a:bodyPr/>
+                    <a:lstStyle/>
+                    <a:p>
+                      <a:pPr indent="0" marL="0">
+                        <a:buNone/>
+                      </a:pPr>
+                      <a:r>
+                        <a:rPr lang="en-US" sz="1300" dirty="0">
+                          <a:solidFill>
+                            <a:srgbClr val="E6EDF3"/>
+                          </a:solidFill>
+                          <a:latin typeface="Calibri" pitchFamily="34" charset="0"/>
+                          <a:ea typeface="Calibri" pitchFamily="34" charset="-122"/>
+                          <a:cs typeface="Calibri" pitchFamily="34" charset="-120"/>
+                        </a:rPr>
+                        <a:t>2.68 s</a:t>
+                      </a:r>
+                      <a:endParaRPr lang="en-US" sz="1300" dirty="0">
+                        <a:latin typeface="Calibri" charset="0"/>
+                        <a:ea typeface="Calibri" charset="0"/>
+                        <a:cs typeface="Calibri" charset="0"/>
+                      </a:endParaRPr>
+                    </a:p>
+                  </a:txBody>
+                  <a:tcPr marL="91440" marR="91440" marT="45720" marB="45720">
+                    <a:lnL w="12700" cap="flat" cmpd="sng" algn="ctr">
+                      <a:solidFill>
+                        <a:srgbClr val="2A3441"/>
+                      </a:solidFill>
+                      <a:prstDash val="solid"/>
+                      <a:round/>
+                      <a:headEnd type="none" w="med" len="med"/>
+                      <a:tailEnd type="none" w="med" len="med"/>
+                    </a:lnL>
+                    <a:lnR w="12700" cap="flat" cmpd="sng" algn="ctr">
+                      <a:solidFill>
+                        <a:srgbClr val="2A3441"/>
+                      </a:solidFill>
+                      <a:prstDash val="solid"/>
+                      <a:round/>
+                      <a:headEnd type="none" w="med" len="med"/>
+                      <a:tailEnd type="none" w="med" len="med"/>
+                    </a:lnR>
+                    <a:lnT w="12700" cap="flat" cmpd="sng" algn="ctr">
+                      <a:solidFill>
+                        <a:srgbClr val="2A3441"/>
+                      </a:solidFill>
+                      <a:prstDash val="solid"/>
+                      <a:round/>
+                      <a:headEnd type="none" w="med" len="med"/>
+                      <a:tailEnd type="none" w="med" len="med"/>
+                    </a:lnT>
+                    <a:lnB w="12700" cap="flat" cmpd="sng" algn="ctr">
+                      <a:solidFill>
+                        <a:srgbClr val="2A3441"/>
+                      </a:solidFill>
+                      <a:prstDash val="solid"/>
+                      <a:round/>
+                      <a:headEnd type="none" w="med" len="med"/>
+                      <a:tailEnd type="none" w="med" len="med"/>
+                    </a:lnB>
+                    <a:solidFill>
+                      <a:srgbClr val="141B24"/>
+                    </a:solidFill>
+                  </a:tcPr>
+                </a:tc>
+                <a:tc>
+                  <a:txBody>
+                    <a:bodyPr/>
+                    <a:lstStyle/>
+                    <a:p>
+                      <a:pPr indent="0" marL="0">
+                        <a:buNone/>
+                      </a:pPr>
+                      <a:r>
+                        <a:rPr lang="en-US" sz="1300" dirty="0">
+                          <a:solidFill>
+                            <a:srgbClr val="E6EDF3"/>
+                          </a:solidFill>
+                          <a:latin typeface="Calibri" pitchFamily="34" charset="0"/>
+                          <a:ea typeface="Calibri" pitchFamily="34" charset="-122"/>
+                          <a:cs typeface="Calibri" pitchFamily="34" charset="-120"/>
+                        </a:rPr>
+                        <a:t>1.78 s</a:t>
+                      </a:r>
+                      <a:endParaRPr lang="en-US" sz="1300" dirty="0">
+                        <a:latin typeface="Calibri" charset="0"/>
+                        <a:ea typeface="Calibri" charset="0"/>
+                        <a:cs typeface="Calibri" charset="0"/>
+                      </a:endParaRPr>
+                    </a:p>
+                  </a:txBody>
+                  <a:tcPr marL="91440" marR="91440" marT="45720" marB="45720">
+                    <a:lnL w="12700" cap="flat" cmpd="sng" algn="ctr">
+                      <a:solidFill>
+                        <a:srgbClr val="2A3441"/>
+                      </a:solidFill>
+                      <a:prstDash val="solid"/>
+                      <a:round/>
+                      <a:headEnd type="none" w="med" len="med"/>
+                      <a:tailEnd type="none" w="med" len="med"/>
+                    </a:lnL>
+                    <a:lnR w="12700" cap="flat" cmpd="sng" algn="ctr">
+                      <a:solidFill>
+                        <a:srgbClr val="2A3441"/>
+                      </a:solidFill>
+                      <a:prstDash val="solid"/>
+                      <a:round/>
+                      <a:headEnd type="none" w="med" len="med"/>
+                      <a:tailEnd type="none" w="med" len="med"/>
+                    </a:lnR>
+                    <a:lnT w="12700" cap="flat" cmpd="sng" algn="ctr">
+                      <a:solidFill>
+                        <a:srgbClr val="2A3441"/>
+                      </a:solidFill>
+                      <a:prstDash val="solid"/>
+                      <a:round/>
+                      <a:headEnd type="none" w="med" len="med"/>
+                      <a:tailEnd type="none" w="med" len="med"/>
+                    </a:lnT>
+                    <a:lnB w="12700" cap="flat" cmpd="sng" algn="ctr">
+                      <a:solidFill>
+                        <a:srgbClr val="2A3441"/>
+                      </a:solidFill>
+                      <a:prstDash val="solid"/>
+                      <a:round/>
+                      <a:headEnd type="none" w="med" len="med"/>
+                      <a:tailEnd type="none" w="med" len="med"/>
+                    </a:lnB>
+                    <a:solidFill>
+                      <a:srgbClr val="141B24"/>
+                    </a:solidFill>
+                  </a:tcPr>
+                </a:tc>
+                <a:tc>
+                  <a:txBody>
+                    <a:bodyPr/>
+                    <a:lstStyle/>
+                    <a:p>
+                      <a:pPr indent="0" marL="0">
+                        <a:buNone/>
+                      </a:pPr>
+                      <a:r>
+                        <a:rPr lang="en-US" sz="1300" dirty="0">
+                          <a:solidFill>
+                            <a:srgbClr val="E6EDF3"/>
+                          </a:solidFill>
+                          <a:latin typeface="Calibri" pitchFamily="34" charset="0"/>
+                          <a:ea typeface="Calibri" pitchFamily="34" charset="-122"/>
+                          <a:cs typeface="Calibri" pitchFamily="34" charset="-120"/>
+                        </a:rPr>
+                        <a:t>-33% (n.s.)</a:t>
+                      </a:r>
+                      <a:endParaRPr lang="en-US" sz="1300" dirty="0">
+                        <a:latin typeface="Calibri" charset="0"/>
+                        <a:ea typeface="Calibri" charset="0"/>
+                        <a:cs typeface="Calibri" charset="0"/>
+                      </a:endParaRPr>
+                    </a:p>
+                  </a:txBody>
+                  <a:tcPr marL="91440" marR="91440" marT="45720" marB="45720">
+                    <a:lnL w="12700" cap="flat" cmpd="sng" algn="ctr">
+                      <a:solidFill>
+                        <a:srgbClr val="2A3441"/>
+                      </a:solidFill>
+                      <a:prstDash val="solid"/>
+                      <a:round/>
+                      <a:headEnd type="none" w="med" len="med"/>
+                      <a:tailEnd type="none" w="med" len="med"/>
+                    </a:lnL>
+                    <a:lnR w="12700" cap="flat" cmpd="sng" algn="ctr">
+                      <a:solidFill>
+                        <a:srgbClr val="2A3441"/>
+                      </a:solidFill>
+                      <a:prstDash val="solid"/>
+                      <a:round/>
+                      <a:headEnd type="none" w="med" len="med"/>
+                      <a:tailEnd type="none" w="med" len="med"/>
+                    </a:lnR>
+                    <a:lnT w="12700" cap="flat" cmpd="sng" algn="ctr">
+                      <a:solidFill>
+                        <a:srgbClr val="2A3441"/>
+                      </a:solidFill>
+                      <a:prstDash val="solid"/>
+                      <a:round/>
+                      <a:headEnd type="none" w="med" len="med"/>
+                      <a:tailEnd type="none" w="med" len="med"/>
+                    </a:lnT>
+                    <a:lnB w="12700" cap="flat" cmpd="sng" algn="ctr">
+                      <a:solidFill>
+                        <a:srgbClr val="2A3441"/>
+                      </a:solidFill>
+                      <a:prstDash val="solid"/>
+                      <a:round/>
+                      <a:headEnd type="none" w="med" len="med"/>
+                      <a:tailEnd type="none" w="med" len="med"/>
+                    </a:lnB>
+                    <a:solidFill>
+                      <a:srgbClr val="141B24"/>
+                    </a:solidFill>
+                  </a:tcPr>
+                </a:tc>
+              </a:tr>
+            </a:tbl>
+          </a:graphicData>
+        </a:graphic>
+      </p:graphicFrame>
+      <p:sp>
+        <p:nvSpPr>
+          <p:cNvPr id="5" name="Text 2"/>
+          <p:cNvSpPr/>
+          <p:nvPr/>
+        </p:nvSpPr>
+        <p:spPr>
+          <a:xfrm>
+            <a:off x="548640" y="3657600"/>
+            <a:ext cx="10972800" cy="2651760"/>
+          </a:xfrm>
+          <a:prstGeom prst="rect">
+            <a:avLst/>
+          </a:prstGeom>
+          <a:noFill/>
+          <a:ln/>
+        </p:spPr>
+        <p:txBody>
+          <a:bodyPr wrap="square" lIns="0" tIns="0" rIns="0" bIns="0" rtlCol="0" anchor="t"/>
+          <a:lstStyle/>
+          <a:p>
+            <a:pPr marL="342900" indent="-342900">
+              <a:spcAft>
+                <a:spcPts val="800"/>
+              </a:spcAft>
+              <a:buSzPct val="100000"/>
+              <a:buChar char="•"/>
+            </a:pPr>
+            <a:r>
+              <a:rPr lang="en-US" sz="1600" dirty="0">
+                <a:solidFill>
+                  <a:srgbClr val="E6EDF3"/>
+                </a:solidFill>
+                <a:latin typeface="Calibri" pitchFamily="34" charset="0"/>
+                <a:ea typeface="Calibri" pitchFamily="34" charset="-122"/>
+                <a:cs typeface="Calibri" pitchFamily="34" charset="-120"/>
+              </a:rPr>
+              <a:t>Kernel tc/netem on loopback, 5 runs per cell, same 512-byte payloads for TCP, UDP and RUDP</a:t>
+            </a:r>
+            <a:endParaRPr lang="en-US" sz="1600" dirty="0"/>
+          </a:p>
+          <a:p>
+            <a:pPr marL="342900" indent="-342900">
+              <a:spcAft>
+                <a:spcPts val="800"/>
+              </a:spcAft>
+              <a:buSzPct val="100000"/>
+              <a:buChar char="•"/>
+            </a:pPr>
+            <a:r>
+              <a:rPr lang="en-US" sz="1600" dirty="0">
+                <a:solidFill>
+                  <a:srgbClr val="E6EDF3"/>
+                </a:solidFill>
+                <a:latin typeface="Calibri" pitchFamily="34" charset="0"/>
+                <a:ea typeface="Calibri" pitchFamily="34" charset="-122"/>
+                <a:cs typeface="Calibri" pitchFamily="34" charset="-120"/>
+              </a:rPr>
+              <a:t>Neural beats tuned AIMD on a real kernel path: 61% to 83% faster, highly significant on three paths</a:t>
+            </a:r>
+            <a:endParaRPr lang="en-US" sz="1600" dirty="0"/>
+          </a:p>
+          <a:p>
+            <a:pPr marL="342900" indent="-342900">
+              <a:spcAft>
+                <a:spcPts val="800"/>
+              </a:spcAft>
+              <a:buSzPct val="100000"/>
+              <a:buChar char="•"/>
+            </a:pPr>
+            <a:r>
+              <a:rPr lang="en-US" sz="1600" dirty="0">
+                <a:solidFill>
+                  <a:srgbClr val="E6EDF3"/>
+                </a:solidFill>
+                <a:latin typeface="Calibri" pitchFamily="34" charset="0"/>
+                <a:ea typeface="Calibri" pitchFamily="34" charset="-122"/>
+                <a:cs typeface="Calibri" pitchFamily="34" charset="-120"/>
+              </a:rPr>
+              <a:t>Kernel TCP is still faster than us everywhere: 1.5x (satellite) to 3.2x (lossy)</a:t>
+            </a:r>
+            <a:endParaRPr lang="en-US" sz="1600" dirty="0"/>
+          </a:p>
+          <a:p>
+            <a:pPr marL="342900" indent="-342900">
+              <a:spcAft>
+                <a:spcPts val="800"/>
+              </a:spcAft>
+              <a:buSzPct val="100000"/>
+              <a:buChar char="•"/>
+            </a:pPr>
+            <a:r>
+              <a:rPr lang="en-US" sz="1600" dirty="0">
+                <a:solidFill>
+                  <a:srgbClr val="E6EDF3"/>
+                </a:solidFill>
+                <a:latin typeface="Calibri" pitchFamily="34" charset="0"/>
+                <a:ea typeface="Calibri" pitchFamily="34" charset="-122"/>
+                <a:cs typeface="Calibri" pitchFamily="34" charset="-120"/>
+              </a:rPr>
+              <a:t>Our first three runs were wrong (netem limit counted packets in flight; untuned baseline; unequal payloads). Found, fixed, re-run, documented</a:t>
+            </a:r>
+            <a:endParaRPr lang="en-US" sz="1600" dirty="0"/>
+          </a:p>
+        </p:txBody>
+      </p:sp>
+    </p:spTree>
+  </p:cSld>
+  <p:clrMapOvr>
+    <a:masterClrMapping/>
+  </p:clrMapOvr>
+</p:sld>
+</file>
+
+<file path=ppt/slides/slide33.xml><?xml version="1.0" encoding="utf-8"?>
+<p:sld xmlns:a="http://schemas.openxmlformats.org/drawingml/2006/main" xmlns:r="http://schemas.openxmlformats.org/officeDocument/2006/relationships" xmlns:p="http://schemas.openxmlformats.org/presentationml/2006/main">
+  <p:cSld name="Slide 33">
+    <p:bg>
+      <p:bgPr>
+        <a:solidFill>
+          <a:srgbClr val="0B0F14"/>
+        </a:solidFill>
+      </p:bgPr>
+    </p:bg>
+    <p:spTree>
+      <p:nvGrpSpPr>
+        <p:cNvPr id="1" name=""/>
+        <p:cNvGrpSpPr/>
+        <p:nvPr/>
+      </p:nvGrpSpPr>
+      <p:grpSpPr>
+        <a:xfrm>
+          <a:off x="0" y="0"/>
+          <a:ext cx="0" cy="0"/>
+          <a:chOff x="0" y="0"/>
+          <a:chExt cx="0" cy="0"/>
+        </a:xfrm>
+      </p:grpSpPr>
+      <p:sp>
+        <p:nvSpPr>
+          <p:cNvPr id="2" name="Text 0"/>
+          <p:cNvSpPr/>
+          <p:nvPr/>
+        </p:nvSpPr>
+        <p:spPr>
+          <a:xfrm>
+            <a:off x="548640" y="320040"/>
+            <a:ext cx="11064240" cy="731520"/>
+          </a:xfrm>
+          <a:prstGeom prst="rect">
+            <a:avLst/>
+          </a:prstGeom>
+          <a:noFill/>
+          <a:ln/>
+        </p:spPr>
+        <p:txBody>
+          <a:bodyPr wrap="square" lIns="0" tIns="0" rIns="0" bIns="0" rtlCol="0" anchor="ctr"/>
+          <a:lstStyle/>
+          <a:p>
+            <a:pPr indent="0" marL="0">
+              <a:buNone/>
+            </a:pPr>
+            <a:r>
+              <a:rPr lang="en-US" sz="3000" b="1" dirty="0">
+                <a:solidFill>
+                  <a:srgbClr val="39FF88"/>
+                </a:solidFill>
+                <a:latin typeface="Courier New" pitchFamily="34" charset="0"/>
+                <a:ea typeface="Courier New" pitchFamily="34" charset="-122"/>
+                <a:cs typeface="Courier New" pitchFamily="34" charset="-120"/>
+              </a:rPr>
+              <a:t>Learnings and future work</a:t>
+            </a:r>
+            <a:endParaRPr lang="en-US" sz="3000" dirty="0"/>
+          </a:p>
+        </p:txBody>
+      </p:sp>
+      <p:sp>
+        <p:nvSpPr>
+          <p:cNvPr id="3" name="Text 1"/>
+          <p:cNvSpPr/>
+          <p:nvPr/>
+        </p:nvSpPr>
+        <p:spPr>
+          <a:xfrm>
+            <a:off x="9418320" y="6446520"/>
+            <a:ext cx="2377440" cy="274320"/>
+          </a:xfrm>
+          <a:prstGeom prst="rect">
+            <a:avLst/>
+          </a:prstGeom>
+          <a:noFill/>
+          <a:ln/>
+        </p:spPr>
+        <p:txBody>
+          <a:bodyPr wrap="square" lIns="0" tIns="0" rIns="0" bIns="0" rtlCol="0" anchor="ctr"/>
+          <a:lstStyle/>
+          <a:p>
+            <a:pPr algn="r" indent="0" marL="0">
+              <a:buNone/>
+            </a:pPr>
+            <a:r>
+              <a:rPr lang="en-US" sz="1000" dirty="0">
+                <a:solidFill>
+                  <a:srgbClr val="8B98A5"/>
+                </a:solidFill>
+                <a:latin typeface="Courier New" pitchFamily="34" charset="0"/>
+                <a:ea typeface="Courier New" pitchFamily="34" charset="-122"/>
+                <a:cs typeface="Courier New" pitchFamily="34" charset="-120"/>
+              </a:rPr>
+              <a:t>33 / 35   Smart-RUDP</a:t>
             </a:r>
             <a:endParaRPr lang="en-US" sz="1000" dirty="0"/>
           </a:p>
@@ -26502,7 +28572,7 @@
                 <a:ea typeface="Calibri" pitchFamily="34" charset="-122"/>
                 <a:cs typeface="Calibri" pitchFamily="34" charset="-120"/>
               </a:rPr>
-              <a:t>Kernel netem and real multi-machine tests</a:t>
+              <a:t>Close the gap to kernel TCP; real multi-machine tests</a:t>
             </a:r>
             <a:endParaRPr lang="en-US" sz="2000" dirty="0"/>
           </a:p>
@@ -26541,7 +28611,7 @@
                 <a:ea typeface="Calibri" pitchFamily="34" charset="-122"/>
                 <a:cs typeface="Calibri" pitchFamily="34" charset="-120"/>
               </a:rPr>
-              <a:t>Limits: no kernel netem or multi-machine test; polite mode is a hand-made rule that costs speed; level with CUBIC under bursty cross traffic; no gain at 10% random loss.</a:t>
+              <a:t>Limits: kernel TCP is 1.5x to 3.2x faster; no multi-machine test; polite mode is a hand-made rule that costs speed; level with CUBIC under bursty cross traffic; no gain at 10% random loss.</a:t>
             </a:r>
             <a:endParaRPr lang="en-US" sz="1400" dirty="0"/>
           </a:p>
@@ -26555,9 +28625,9 @@
 </p:sld>
 </file>
 
-<file path=ppt/slides/slide33.xml><?xml version="1.0" encoding="utf-8"?>
+<file path=ppt/slides/slide34.xml><?xml version="1.0" encoding="utf-8"?>
 <p:sld xmlns:a="http://schemas.openxmlformats.org/drawingml/2006/main" xmlns:r="http://schemas.openxmlformats.org/officeDocument/2006/relationships" xmlns:p="http://schemas.openxmlformats.org/presentationml/2006/main">
-  <p:cSld name="Slide 33">
+  <p:cSld name="Slide 34">
     <p:bg>
       <p:bgPr>
         <a:solidFill>
@@ -26704,9 +28774,9 @@
 </p:sld>
 </file>
 
-<file path=ppt/slides/slide34.xml><?xml version="1.0" encoding="utf-8"?>
+<file path=ppt/slides/slide35.xml><?xml version="1.0" encoding="utf-8"?>
 <p:sld xmlns:a="http://schemas.openxmlformats.org/drawingml/2006/main" xmlns:r="http://schemas.openxmlformats.org/officeDocument/2006/relationships" xmlns:p="http://schemas.openxmlformats.org/presentationml/2006/main">
-  <p:cSld name="Slide 34">
+  <p:cSld name="Slide 35">
     <p:bg>
       <p:bgPr>
         <a:solidFill>
@@ -27040,7 +29110,7 @@
                 <a:ea typeface="Courier New" pitchFamily="34" charset="-122"/>
                 <a:cs typeface="Courier New" pitchFamily="34" charset="-120"/>
               </a:rPr>
-              <a:t>4 / 34   Smart-RUDP</a:t>
+              <a:t>4 / 35   Smart-RUDP</a:t>
             </a:r>
             <a:endParaRPr lang="en-US" sz="1000" dirty="0"/>
           </a:p>
@@ -27601,7 +29671,7 @@
                 <a:ea typeface="Courier New" pitchFamily="34" charset="-122"/>
                 <a:cs typeface="Courier New" pitchFamily="34" charset="-120"/>
               </a:rPr>
-              <a:t>5 / 34   Smart-RUDP</a:t>
+              <a:t>5 / 35   Smart-RUDP</a:t>
             </a:r>
             <a:endParaRPr lang="en-US" sz="1000" dirty="0"/>
           </a:p>
@@ -29040,7 +31110,7 @@
                 <a:ea typeface="Courier New" pitchFamily="34" charset="-122"/>
                 <a:cs typeface="Courier New" pitchFamily="34" charset="-120"/>
               </a:rPr>
-              <a:t>6 / 34   Smart-RUDP</a:t>
+              <a:t>6 / 35   Smart-RUDP</a:t>
             </a:r>
             <a:endParaRPr lang="en-US" sz="1000" dirty="0"/>
           </a:p>
@@ -30275,7 +32345,7 @@
                 <a:ea typeface="Courier New" pitchFamily="34" charset="-122"/>
                 <a:cs typeface="Courier New" pitchFamily="34" charset="-120"/>
               </a:rPr>
-              <a:t>7 / 34   Smart-RUDP</a:t>
+              <a:t>7 / 35   Smart-RUDP</a:t>
             </a:r>
             <a:endParaRPr lang="en-US" sz="1000" dirty="0"/>
           </a:p>
@@ -30718,7 +32788,7 @@
                 <a:ea typeface="Courier New" pitchFamily="34" charset="-122"/>
                 <a:cs typeface="Courier New" pitchFamily="34" charset="-120"/>
               </a:rPr>
-              <a:t>8 / 34   Smart-RUDP</a:t>
+              <a:t>8 / 35   Smart-RUDP</a:t>
             </a:r>
             <a:endParaRPr lang="en-US" sz="1000" dirty="0"/>
           </a:p>
@@ -31018,7 +33088,7 @@
                 <a:ea typeface="Courier New" pitchFamily="34" charset="-122"/>
                 <a:cs typeface="Courier New" pitchFamily="34" charset="-120"/>
               </a:rPr>
-              <a:t>9 / 34   Smart-RUDP</a:t>
+              <a:t>9 / 35   Smart-RUDP</a:t>
             </a:r>
             <a:endParaRPr lang="en-US" sz="1000" dirty="0"/>
           </a:p>

--- a/docs/RUDP_Presentation_with_notes.pptx
+++ b/docs/RUDP_Presentation_with_notes.pptx
@@ -40,9 +40,11 @@
     <p:sldId id="288" r:id="rId34"/>
     <p:sldId id="289" r:id="rId35"/>
     <p:sldId id="290" r:id="rId36"/>
+    <p:sldId id="291" r:id="rId37"/>
+    <p:sldId id="292" r:id="rId38"/>
   </p:sldIdLst>
   <p:notesMasterIdLst>
-    <p:notesMasterId r:id="rId37"/>
+    <p:notesMasterId r:id="rId39"/>
   </p:notesMasterIdLst>
   <p:sldSz cx="12192000" cy="6858000"/>
   <p:notesSz cx="6858000" cy="12192000"/>
@@ -836,19 +838,12 @@
           <a:lstStyle/>
           <a:p>
             <a:r>
-              <a:t>[0:20] Good morning ma'am. We are Harshavardhan, Rohit and Shloak.</a:t>
-            </a:r>
-          </a:p>
-          <a:p/>
+              <a:t>Good morning ma'am. We are Harshavardhan, Rohit and Shloak.</a:t>
+            </a:r>
+          </a:p>
           <a:p>
             <a:r>
               <a:t>Our project is Smart-RUDP: a reliable transport protocol we built in C on top of UDP, plus a controller that learns how fast to send.</a:t>
-            </a:r>
-          </a:p>
-          <a:p/>
-          <a:p>
-            <a:r>
-              <a:t>Likely question: Say the three names and the GitHub link once, then move on.</a:t>
             </a:r>
           </a:p>
         </p:txBody>
@@ -934,19 +929,12 @@
           <a:lstStyle/>
           <a:p>
             <a:r>
-              <a:t>[0:40] 62 of 62 packets were delivered at every loss level from 0 to 40 percent.</a:t>
-            </a:r>
-          </a:p>
-          <a:p/>
+              <a:t>62 of 62 packets were delivered at every loss level from 0 to 40 percent.</a:t>
+            </a:r>
+          </a:p>
           <a:p>
             <a:r>
               <a:t>Higher loss costs time and retransmissions, never correctness.</a:t>
-            </a:r>
-          </a:p>
-          <a:p/>
-          <a:p>
-            <a:r>
-              <a:t>Likely question: Q: Single runs? A: Yes, the original benchmark ran each level once. Smart-RUDP evaluation uses 6 runs per scenario.</a:t>
             </a:r>
           </a:p>
         </p:txBody>
@@ -1032,31 +1020,22 @@
           <a:lstStyle/>
           <a:p>
             <a:r>
-              <a:t>[0:40] Server stuck after a killed client: it hung 15.5 s; fix was to accept SYN in any state.</a:t>
-            </a:r>
-          </a:p>
-          <a:p/>
+              <a:t>Server stuck after a killed client: it hung 15.5 s; fix was to accept SYN in any state.</a:t>
+            </a:r>
+          </a:p>
           <a:p>
             <a:r>
               <a:t>A leftover netem rule distorted results; we now check tc qdisc before each test.</a:t>
             </a:r>
           </a:p>
-          <a:p/>
           <a:p>
             <a:r>
               <a:t>Windows Wireshark saw nothing: capture inside WSL.</a:t>
             </a:r>
           </a:p>
-          <a:p/>
           <a:p>
             <a:r>
               <a:t>Benchmark script portability: replaced date and grep tricks with awk and sed.</a:t>
-            </a:r>
-          </a:p>
-          <a:p/>
-          <a:p>
-            <a:r>
-              <a:t>Likely question: Say these quickly: it shows real debugging, which is what separates a project from a lab.</a:t>
             </a:r>
           </a:p>
         </p:txBody>
@@ -1142,31 +1121,22 @@
           <a:lstStyle/>
           <a:p>
             <a:r>
-              <a:t>[0:30] Jacobson and Karels 1988 is the origin of AIMD; Chiu and Jain 1989 explains why it converges fairly.</a:t>
-            </a:r>
-          </a:p>
-          <a:p/>
+              <a:t>Jacobson and Karels 1988 is the origin of AIMD; Chiu and Jain 1989 explains why it converges fairly.</a:t>
+            </a:r>
+          </a:p>
           <a:p>
             <a:r>
               <a:t>RFC 5681 is the standard; CUBIC is future work; QUIC and RFC 9000 are reliable transport over UDP in production.</a:t>
             </a:r>
           </a:p>
-          <a:p/>
           <a:p>
             <a:r>
               <a:t>The AI part comes from Midhula and Arun Raj Kumar (2024) and Cao et al. (2023, DRLFcc): deep reinforcement learning for congestion control. Smart-RUDP applies the same idea with a smaller tabular Q-learning agent.</a:t>
             </a:r>
           </a:p>
-          <a:p/>
           <a:p>
             <a:r>
               <a:t>Key researcher: Van Jacobson.</a:t>
-            </a:r>
-          </a:p>
-          <a:p/>
-          <a:p>
-            <a:r>
-              <a:t>Likely question: Q: Why AIMD? A: Chiu and Jain show it converges to a fair share. Q: Are those papers deep RL and yours is not? A: Yes; we used a lookup table, which is simpler and inspectable.</a:t>
             </a:r>
           </a:p>
         </p:txBody>
@@ -1252,25 +1222,17 @@
           <a:lstStyle/>
           <a:p>
             <a:r>
-              <a:t>[0:50] Four routers, OSPF area 0: R1, R2, R3 form a triangle and R4 is a branch.</a:t>
-            </a:r>
-          </a:p>
-          <a:p/>
+              <a:t>Four routers, OSPF area 0: R1, R2, R3 form a triangle and R4 is a branch.</a:t>
+            </a:r>
+          </a:p>
           <a:p>
             <a:r>
               <a:t>Two VLANs with router-on-a-stick, DHCP on R1 and R4, and an access list blocking student to staff.</a:t>
             </a:r>
           </a:p>
-          <a:p/>
           <a:p>
             <a:r>
               <a:t>Server LAN is metric 2 via R3; branch is metric 3 via R2. Failover: shutting R1 Gi0/2 still gave 70 of 71 pings, rerouted via R2.</a:t>
-            </a:r>
-          </a:p>
-          <a:p/>
-          <a:p>
-            <a:r>
-              <a:t>Likely question: Q: Does RUDP run inside Packet Tracer? A: No, it cannot run C. Packet Tracer validates the network design; protocol is validated on one machine plus Wireshark.</a:t>
             </a:r>
           </a:p>
         </p:txBody>
@@ -1356,13 +1318,7 @@
           <a:lstStyle/>
           <a:p>
             <a:r>
-              <a:t>[0:40] Left: OSPF routes on R1 with the metrics. Middle: the link-failure test, 70 of 71 pings. Right: the ACL, where the student gets destination unreachable to staff but the server is still reachable (TTL 126).</a:t>
-            </a:r>
-          </a:p>
-          <a:p/>
-          <a:p>
-            <a:r>
-              <a:t>Likely question: If asked to show it live: have the .pkt file open and follow Demo_Steps.txt.</a:t>
+              <a:t>Left: OSPF routes on R1 with the metrics. Middle: the link-failure test, 70 of 71 pings. Right: the ACL, where the student gets destination unreachable to staff but the server is still reachable (TTL 126).</a:t>
             </a:r>
           </a:p>
         </p:txBody>
@@ -1448,25 +1404,17 @@
           <a:lstStyle/>
           <a:p>
             <a:r>
-              <a:t>[0:50] Q-learning with 80 states (RTT ratio, loss fraction, window size), sampled once per RTT.</a:t>
-            </a:r>
-          </a:p>
-          <a:p/>
+              <a:t>Q-learning with 80 states (RTT ratio, loss fraction, window size), sampled once per RTT.</a:t>
+            </a:r>
+          </a:p>
           <a:p>
             <a:r>
               <a:t>Five actions: multiply the window by 0.5, 0.85, 1.0, 1.15 or 1.5.</a:t>
             </a:r>
           </a:p>
-          <a:p/>
           <a:p>
             <a:r>
               <a:t>Reward: throughput gained, minus delay growth, minus retransmissions. Same Go-Back-N reliability; only the window policy changes. Paths are emulated in the program: 5G-like, lossy wireless, satellite-like.</a:t>
-            </a:r>
-          </a:p>
-          <a:p/>
-          <a:p>
-            <a:r>
-              <a:t>Likely question: Q: Is it really learning? A: Yes, 40 training episodes; the learning-curve figure shows it. It is small and tabular with limited training.</a:t>
             </a:r>
           </a:p>
         </p:txBody>
@@ -1552,43 +1500,32 @@
           <a:lstStyle/>
           <a:p>
             <a:r>
-              <a:t>[1:00] This is the agent itself. Left: rl_cc.h, 73 lines of C. The state is 80 buckets of RTT ratio, loss and window size.</a:t>
-            </a:r>
-          </a:p>
-          <a:p/>
+              <a:t>This is the agent itself. Left: rl_cc.h, 73 lines of C. The state is 80 buckets of RTT ratio, loss and window size.</a:t>
+            </a:r>
+          </a:p>
           <a:p>
             <a:r>
               <a:t>choose picks one of five window multipliers, usually the best, sometimes random so it keeps exploring.</a:t>
             </a:r>
           </a:p>
-          <a:p/>
           <a:p>
             <a:r>
               <a:t>update is the Q-learning rule: move the value of the action we took toward the reward plus the best value of the next state.</a:t>
             </a:r>
           </a:p>
-          <a:p/>
           <a:p>
             <a:r>
               <a:t>Right: the loop in smart_client.c. Once per RTT it computes the reward, throughput minus delay growth minus loss, updates the table, picks the next action and scales the window.</a:t>
             </a:r>
           </a:p>
-          <a:p/>
           <a:p>
             <a:r>
               <a:t>The code on the slide is simplified; the real files are in the repo.</a:t>
             </a:r>
           </a:p>
-          <a:p/>
           <a:p>
             <a:r>
               <a:t>We also built a deep version: web/dqn.py is a small neural network, two hidden layers of 32, trained with DQN in the same simulator. It reads continuous inputs instead of buckets.</a:t>
-            </a:r>
-          </a:p>
-          <a:p/>
-          <a:p>
-            <a:r>
-              <a:t>Likely question: Q: Is this deep RL? A: The C agent is tabular. The chat also has a deep agent, a small DQN in numpy (5-32-32-5). Q: Does deep beat the table? A: Modestly: 3.20 s vs 3.73 s mean on 48 unseen paths, faster on 19, slower on 6. Q: Any problem? A: Training is seed-sensitive: 1 of 4 seeds failed, so we select on validation paths. It is simulated and not in the C code. Q: Where is it trained? A: web/train.py for the chat, the smart client trains online for the main experiments; table in results/q_chat.txt.</a:t>
             </a:r>
           </a:p>
         </p:txBody>
@@ -1674,31 +1611,22 @@
           <a:lstStyle/>
           <a:p>
             <a:r>
-              <a:t>[0:50] Be honest: it did not beat AIMD. Plus 63 percent time on 5G-like, plus 10 percent on satellite, a tie on the lossy path.</a:t>
-            </a:r>
-          </a:p>
-          <a:p/>
+              <a:t>Be honest: it did not beat AIMD. Plus 63 percent time on 5G-like, plus 10 percent on satellite, a tie on the lossy path.</a:t>
+            </a:r>
+          </a:p>
           <a:p>
             <a:r>
               <a:t>It used somewhat fewer retransmissions on two paths, within run-to-run noise.</a:t>
             </a:r>
           </a:p>
-          <a:p/>
           <a:p>
             <a:r>
               <a:t>Earlier training rounds were much worse; this is the final configuration. The finding is that a simple learner does not beat a tuned rule.</a:t>
             </a:r>
           </a:p>
-          <a:p/>
           <a:p>
             <a:r>
               <a:t>In the chat, retrained for bursty random-loss traffic, it does beat AIMD on most simulated paths; mention that on slide 19.</a:t>
-            </a:r>
-          </a:p>
-          <a:p/>
-          <a:p>
-            <a:r>
-              <a:t>Likely question: Q: Then what was the point? A: The experiment. We tested whether a learned window helps and report the answer, including the negative result.</a:t>
             </a:r>
           </a:p>
         </p:txBody>
@@ -1784,31 +1712,22 @@
           <a:lstStyle/>
           <a:p>
             <a:r>
-              <a:t>[0:40] We wrote a Lua dissector, named smartrudp, that decodes sequence, ack, flags, checksum and length.</a:t>
-            </a:r>
-          </a:p>
-          <a:p/>
+              <a:t>We wrote a Lua dissector, named smartrudp, that decodes sequence, ack, flags, checksum and length.</a:t>
+            </a:r>
+          </a:p>
           <a:p>
             <a:r>
               <a:t>Useful filters: smartrudp.flags.data == 1 and smartrudp.seq == N.</a:t>
             </a:r>
           </a:p>
-          <a:p/>
           <a:p>
             <a:r>
               <a:t>In a 400-packet lossy run the receiver saw 87 (AIMD) and 95 (Smart) repeated data segments.</a:t>
             </a:r>
           </a:p>
-          <a:p/>
           <a:p>
             <a:r>
               <a:t>The program's exported trace uses topology addresses and has no handshake.</a:t>
-            </a:r>
-          </a:p>
-          <a:p/>
-          <a:p>
-            <a:r>
-              <a:t>Likely question: Q: Why no handshake in the export? A: The export builds synthetic packets. The real tshark capture on the next slide shows the handshake.</a:t>
             </a:r>
           </a:p>
         </p:txBody>
@@ -1894,19 +1813,12 @@
           <a:lstStyle/>
           <a:p>
             <a:r>
-              <a:t>[0:50] Left: the first three packets, SYN, SYN-ACK and ACK, decoded by our dissector (filter frame.number &lt;= 3).</a:t>
-            </a:r>
-          </a:p>
-          <a:p/>
+              <a:t>Left: the first three packets, SYN, SYN-ACK and ACK, decoded by our dissector (filter frame.number &lt;= 3).</a:t>
+            </a:r>
+          </a:p>
           <a:p>
             <a:r>
               <a:t>Right: filter smartrudp.seq == N shows the same segment twice, a retransmission.</a:t>
-            </a:r>
-          </a:p>
-          <a:p/>
-          <a:p>
-            <a:r>
-              <a:t>Likely question: If Wireshark is open live: Analyze, Decode As, UDP 8888 = RUDP, then use these two filters.</a:t>
             </a:r>
           </a:p>
         </p:txBody>
@@ -1992,31 +1904,22 @@
           <a:lstStyle/>
           <a:p>
             <a:r>
-              <a:t>[0:40] UDP is fast but gives no guarantees: packets can be lost, duplicated or reordered.</a:t>
-            </a:r>
-          </a:p>
-          <a:p/>
+              <a:t>UDP is fast but gives no guarantees: packets can be lost, duplicated or reordered.</a:t>
+            </a:r>
+          </a:p>
           <a:p>
             <a:r>
               <a:t>TCP is reliable but sits inside the operating system, so you cannot see or change it.</a:t>
             </a:r>
           </a:p>
-          <a:p/>
           <a:p>
             <a:r>
               <a:t>In 1986 the early Internet had congestion collapse: throughput fell from 32 Kbps to 40 bps. TCP's congestion control was invented to fix that.</a:t>
             </a:r>
           </a:p>
-          <a:p/>
           <a:p>
             <a:r>
               <a:t>Our question: can we rebuild TCP's core ideas ourselves, on UDP?</a:t>
-            </a:r>
-          </a:p>
-          <a:p/>
-          <a:p>
-            <a:r>
-              <a:t>Likely question: Q: Why not just use TCP? A: TCP cannot be changed or inspected; building our own makes every mechanism visible. QUIC and HTTP/3 do the same in practice.</a:t>
             </a:r>
           </a:p>
         </p:txBody>
@@ -2102,31 +2005,22 @@
           <a:lstStyle/>
           <a:p>
             <a:r>
-              <a:t>[1:00] The protocol in use: each message is one numbered, checksummed RUDP segment, ACKed in order.</a:t>
-            </a:r>
-          </a:p>
-          <a:p/>
+              <a:t>The protocol in use: each message is one numbered, checksummed RUDP segment, ACKed in order.</a:t>
+            </a:r>
+          </a:p>
           <a:p>
             <a:r>
               <a:t>There is a terminal version and a browser version; two devices were linked over Tailscale, laptop and phone.</a:t>
             </a:r>
           </a:p>
-          <a:p/>
           <a:p>
             <a:r>
               <a:t>Drag the loss slider: lost messages are resent and still arrive in order. The right panel shows sent, lost and resent counts and the log.</a:t>
             </a:r>
           </a:p>
-          <a:p/>
           <a:p>
             <a:r>
               <a:t>There is a controller switch: fixed window, AIMD, or Smart-RUDP. For the chat we retrained Smart-RUDP on simulated paths: it was faster than AIMD on 5 of 6 held-out paths and equal on 1, because AIMD resets to one packet on random loss. Say it is simulated, and that the agent may not shrink the window without a congestion signal. Stress test: 48 random paths the agent never trained on, 3 seeds each. Mean delivery time was 3.73 seconds for Smart-RUDP against 7.16 for AIMD. Smart-RUDP was faster on 27 paths, slower on 5, within 5 percent on 16. So on our data, in simulation, it beats AIMD in the chat setting. There is also a deep neural-network option in the controller dropdown; it gave 3.20 seconds mean on the stress paths against 3.73 for the table.</a:t>
-            </a:r>
-          </a:p>
-          <a:p/>
-          <a:p>
-            <a:r>
-              <a:t>Likely question: Q: Is that a fair win? A: Both start from the same window of 10; held-out paths and seeds; honest limits: simulated, and without the no-shrink rule the agent lost. Q: Did it win in Section 8? A: No, that result stands. Q: Where does it lose? A: Tight bottleneck queues and very high loss; the fixed window of 8 is hard to beat there. A broader-trained agent did worse, so we kept the first.</a:t>
             </a:r>
           </a:p>
         </p:txBody>
@@ -2212,49 +2106,37 @@
           <a:lstStyle/>
           <a:p>
             <a:r>
-              <a:t>[1:00] The abstract also promised TCP and plain UDP baselines, so we ran them on the same 48 unseen simulated paths.</a:t>
-            </a:r>
-          </a:p>
-          <a:p/>
+              <a:t>The abstract also promised TCP and plain UDP baselines, so we ran them on the same 48 unseen simulated paths.</a:t>
+            </a:r>
+          </a:p>
           <a:p>
             <a:r>
               <a:t>Plain UDP delivered only 68 percent of the messages, so reliability is needed. Our TCP model, with selective acknowledgments, has the lowest median at 1.48 seconds.</a:t>
             </a:r>
           </a:p>
-          <a:p/>
           <a:p>
             <a:r>
               <a:t>Smart-RUDP deep is at 3.20 seconds mean and is about even with the TCP model path by path: faster on 22, slower on 23.</a:t>
             </a:r>
           </a:p>
-          <a:p/>
           <a:p>
             <a:r>
               <a:t>The gap to TCP is mostly Go-Back-N. A selective-ack version of our transport cut AIMD from 7.16 to 4.90 seconds in simulation.</a:t>
             </a:r>
           </a:p>
-          <a:p/>
           <a:p>
             <a:r>
               <a:t>Reordering hurts Go-Back-N badly: AIMD goes from 0.82 to 6.79 seconds at 20 milliseconds of jitter. The learned agents cope better and selective ack removes most of the damage.</a:t>
             </a:r>
           </a:p>
-          <a:p/>
           <a:p>
             <a:r>
               <a:t>For the C experiments we repeated 20 runs per mode: Smart-RUDP is still slower on 5G and satellite and ties on lossy.</a:t>
             </a:r>
           </a:p>
-          <a:p/>
           <a:p>
             <a:r>
               <a:t>Be upfront: our simulator originally allowed a duplicate-ACK retransmission storm that flatters aggressive controllers. With the realistic rule the neural agent is about level with AIMD in simulation (7.27 s against 7.75 s). The C results are the evidence we rely on.</a:t>
-            </a:r>
-          </a:p>
-          <a:p/>
-          <a:p>
-            <a:r>
-              <a:t>Likely question: Q: Is the TCP row real TCP? A: No, it is a model with the same window cap; real kernel TCP needs netem on Linux, and we provide the script. Q: Why did you not implement SACK in C? A: Time; the simulation shows it is the biggest win and it is the first item of future work. Q: Is 20 runs enough? A: The intervals exclude zero for 5G and satellite and include zero for lossy. Did you check it is not a simulator artefact? Yes: with the realistic rule the simulated gain mostly disappears, so we lean on the C results, which use that rule and equal window caps.</a:t>
             </a:r>
           </a:p>
         </p:txBody>
@@ -2340,37 +2222,27 @@
           <a:lstStyle/>
           <a:p>
             <a:r>
-              <a:t>[1:00] We then put the neural agent into the C transport, the same code as Section 8, and tested it on the same three emulated paths with 15 runs each.</a:t>
-            </a:r>
-          </a:p>
-          <a:p/>
+              <a:t>We then put the neural agent into the C transport, the same code as Section 8, and tested it on the same three emulated paths with 15 runs each.</a:t>
+            </a:r>
+          </a:p>
           <a:p>
             <a:r>
               <a:t>AIMD and the agents all start from a window of 10. The neural agent was faster than AIMD on all three: 15 percent on 5G-like, 27 percent on lossy, 24 percent on satellite-like. The intervals exclude zero.</a:t>
             </a:r>
           </a:p>
-          <a:p/>
           <a:p>
             <a:r>
               <a:t>The retrained table did not carry over: it was slower on 5G and satellite. A network generalises to unseen paths where a table does not.</a:t>
             </a:r>
           </a:p>
-          <a:p/>
           <a:p>
             <a:r>
               <a:t>We also added selective acknowledgments to the C code: about ten times fewer retransmissions, but no significant change in completion time on these emulated paths.</a:t>
             </a:r>
           </a:p>
-          <a:p/>
           <a:p>
             <a:r>
               <a:t>We also reran it with AIMD capped at 32 like the agent: the neural agent still wins by 19, 29 and 28 percent, all significant.</a:t>
-            </a:r>
-          </a:p>
-          <a:p/>
-          <a:p>
-            <a:r>
-              <a:t>Likely question: Q: So Smart-RUDP now beats AIMD? A: The neural version does, in the C transport on emulated paths, trained in a simulator; the original table agent in Section 8 did not. Q: Is it fair? A: Same start window; AIMD keeps a cap of 128 while the agents are capped at 32; the agent retransmits more on random loss. Q: Why no gain from SACK? A: Those paths are limited by the bottleneck rate, so extra retransmissions cost little; the simulator, with different paths, showed a large gain.</a:t>
             </a:r>
           </a:p>
         </p:txBody>
@@ -2456,31 +2328,22 @@
           <a:lstStyle/>
           <a:p>
             <a:r>
-              <a:t>[0:50] We also tested two things people ask about. Fairness: two flows through one bottleneck. The neural agent is fair against itself and on short paths, but takes 74 percent against AIMD on the long 120 ms path, about like a fixed window.</a:t>
-            </a:r>
-          </a:p>
-          <a:p/>
+              <a:t>We also tested two things people ask about. Fairness: two flows through one bottleneck. The neural agent is fair against itself and on short paths, but takes 74 percent against AIMD on the long 120 ms path, about like a fixed window.</a:t>
+            </a:r>
+          </a:p>
           <a:p>
             <a:r>
               <a:t>Ablation: we retrained the agent with one piece removed. Only the no-shrink mask matters; without it the agent is no better than AIMD. The other pieces showed no measurable value.</a:t>
             </a:r>
           </a:p>
-          <a:p/>
           <a:p>
             <a:r>
               <a:t>The same recipe also gave very different results by seed, between 3.2 and 7.4 seconds, so we pick the seed on validation paths.</a:t>
             </a:r>
           </a:p>
-          <a:p/>
           <a:p>
             <a:r>
               <a:t>While building the dashboard we found a retransmission storm in the web gateway and fixed it; there is also an adaptive timeout option now.</a:t>
-            </a:r>
-          </a:p>
-          <a:p/>
-          <a:p>
-            <a:r>
-              <a:t>Likely question: Is the agent fair? Mostly, but not on the long path against AIMD (74% share, Jain 0.82). Fairness was only tested in the simulator, not in C.</a:t>
             </a:r>
           </a:p>
         </p:txBody>
@@ -2566,31 +2429,22 @@
           <a:lstStyle/>
           <a:p>
             <a:r>
-              <a:t>[0:50] While checking our own result we found where the neural agent fails: on a hostile path with 10 percent loss it needed about 85 seconds where AIMD needed 11.</a:t>
-            </a:r>
-          </a:p>
-          <a:p/>
+              <a:t>While checking our own result we found where the neural agent fails: on a hostile path with 10 percent loss it needed about 85 seconds where AIMD needed 11.</a:t>
+            </a:r>
+          </a:p>
           <a:p>
             <a:r>
               <a:t>The fix is a hand-over: when a decision interval loses 10 percent or more of its packets, plain AIMD controls the window; after three clean intervals the agent takes over again.</a:t>
             </a:r>
           </a:p>
-          <a:p/>
           <a:p>
             <a:r>
               <a:t>With that, the three benign paths keep the agent's advantage and the hostile path is back near AIMD at about 14 seconds.</a:t>
             </a:r>
           </a:p>
-          <a:p/>
           <a:p>
             <a:r>
               <a:t>We also tried cutting the window on every timeout; it fixed the hostile case but made the 2 percent path much worse, so we dropped it. So the learned agent is useful on clean to moderate paths and needs a classical safety net elsewhere.</a:t>
-            </a:r>
-          </a:p>
-          <a:p/>
-          <a:p>
-            <a:r>
-              <a:t>Likely question: Is the hybrid still 'AI'? Yes on clean and moderate paths, where the neural network decides; on heavy loss it deliberately defers to AIMD. It is a rule we added, not something the network learned.</a:t>
             </a:r>
           </a:p>
         </p:txBody>
@@ -2676,31 +2530,22 @@
           <a:lstStyle/>
           <a:p>
             <a:r>
-              <a:t>[0:50] We swapped Go-Back-N for Selective Repeat as the default. The receiver now keeps out-of-order packets and tells the sender exactly which ones it holds in a bitmap inside every ACK; the sender has one timer per packet and resends only what is missing.</a:t>
-            </a:r>
-          </a:p>
-          <a:p/>
+              <a:t>We swapped Go-Back-N for Selective Repeat as the default. The receiver now keeps out-of-order packets and tells the sender exactly which ones it holds in a bitmap inside every ACK; the sender has one timer per packet and resends only what is missing.</a:t>
+            </a:r>
+          </a:p>
           <a:p>
             <a:r>
               <a:t>The result: about ten times fewer retransmissions, and the neural agent's lead over AIMD grows to 46 percent on the lossy path and 50 percent on the satellite path.</a:t>
             </a:r>
           </a:p>
-          <a:p/>
           <a:p>
             <a:r>
               <a:t>The 10 percent loss failure we found earlier was mostly a Go-Back-N effect: with Selective Repeat the agent ties AIMD there.</a:t>
             </a:r>
           </a:p>
-          <a:p/>
           <a:p>
             <a:r>
               <a:t>Go-Back-N is still in the code behind a flag, and the earlier tables in the report were measured with it and are labelled that way.</a:t>
-            </a:r>
-          </a:p>
-          <a:p/>
-          <a:p>
-            <a:r>
-              <a:t>Likely question: Is it textbook Selective Repeat? Nearly: per-packet timers and a buffering receiver, but we use a cumulative ACK plus a 64-bit bitmap instead of one ACK per packet, and the window is capped at 60.</a:t>
             </a:r>
           </a:p>
         </p:txBody>
@@ -2786,25 +2631,17 @@
           <a:lstStyle/>
           <a:p>
             <a:r>
-              <a:t>[1:00] This is the final comparison. Everything runs in the C transport with Selective Repeat, a real clock and a real server process. We compare four policies: the original AIMD with a window cap of 32, AIMD tuned with a cap of 128, tuned CUBIC, and the neural agent with its final settings.</a:t>
-            </a:r>
-          </a:p>
-          <a:p/>
+              <a:t>This is the final comparison. Everything runs in the C transport with Selective Repeat, a real clock and a real server process. We compare four policies: the original AIMD with a window cap of 32, AIMD tuned with a cap of 128, tuned CUBIC, and the neural agent with its final settings.</a:t>
+            </a:r>
+          </a:p>
           <a:p>
             <a:r>
               <a:t>The neural agent is fastest on four of the five paths and significantly faster than tuned AIMD on all four: 15 percent on the 5G-like path, 49 percent on lossy, and 52 percent on the satellite-like and fast paths. It beats CUBIC significantly on lossy and satellite. On the hostile 10 percent loss path nothing is significantly different.</a:t>
             </a:r>
           </a:p>
-          <a:p/>
           <a:p>
             <a:r>
               <a:t>One correction we want to be upfront about: earlier we reported bigger margins and 262 retransmissions on the fast path. That came from a timer that fired too early. Fixing it helped AIMD even more than the agent, so these numbers are the honest ones.</a:t>
-            </a:r>
-          </a:p>
-          <a:p/>
-          <a:p>
-            <a:r>
-              <a:t>Likely question: Why did the margin shrink? A retransmission timer defect was hurting AIMD more than the agent. We found it by tracing the retransmissions, fixed it for every policy, and re-ran everything. Without the fix AIMD is 41 percent slower on random paths.</a:t>
             </a:r>
           </a:p>
         </p:txBody>
@@ -2890,25 +2727,17 @@
           <a:lstStyle/>
           <a:p>
             <a:r>
-              <a:t>[0:50] The emulator is inside our client, so we also tested through a separate impairment process on real UDP sockets. That found three real defects.</a:t>
-            </a:r>
-          </a:p>
-          <a:p/>
+              <a:t>The emulator is inside our client, so we also tested through a separate impairment process on real UDP sockets. That found three real defects.</a:t>
+            </a:r>
+          </a:p>
           <a:p>
             <a:r>
               <a:t>First, if the client's last handshake ACK is lost, the server ignored all following data and the transfer hung. We fixed it the way TCP does and added a regression test. Second, the spurious timeouts I just mentioned. Third, a fuzzer showed our byte-sum checksum let about 2 percent of corrupted packets through, so it is now CRC-16 and the fuzzer accepts none.</a:t>
             </a:r>
           </a:p>
-          <a:p/>
           <a:p>
             <a:r>
               <a:t>On real sockets the neural agent is again fastest on every path: 17, 53, 45 and 39 percent faster than tuned AIMD on 5G, lossy, satellite and fast, and a tie on the hostile path.</a:t>
-            </a:r>
-          </a:p>
-          <a:p/>
-          <a:p>
-            <a:r>
-              <a:t>Likely question: Is this a real network? It is real UDP sockets on one machine, with the impairment applied by a separate process. It is not a kernel netem or a multi-machine path; we provide the script for that but had no root access.</a:t>
             </a:r>
           </a:p>
         </p:txBody>
@@ -2994,25 +2823,17 @@
           <a:lstStyle/>
           <a:p>
             <a:r>
-              <a:t>[1:00] Our old simulator was in Python and never matched the C code exactly. So we added a virtual-time mode to the C sender itself: same code, simulated receiver and clock, about a thousand times faster. It reproduces the real-clock results in all 15 calibration cells.</a:t>
-            </a:r>
-          </a:p>
-          <a:p/>
+              <a:t>Our old simulator was in Python and never matched the C code exactly. So we added a virtual-time mode to the C sender itself: same code, simulated receiver and clock, about a thousand times faster. It reproduces the real-clock results in all 15 calibration cells.</a:t>
+            </a:r>
+          </a:p>
           <a:p>
             <a:r>
               <a:t>That let us test on 100 random paths that we never tuned on. The neural agent needs 0.53 times the time of tuned AIMD, is faster on 89 paths and never more than 20 percent slower. Tuned CUBIC is slower by more than 20 percent on 27 paths.</a:t>
             </a:r>
           </a:p>
-          <a:p/>
           <a:p>
             <a:r>
               <a:t>The ablation shows which parts matter: the window cap of 128 most, then pacing, the timer floor and slow start. We also tried evolution-strategy retraining directly in the C sender and it only gave 2 percent, so we did not adopt it.</a:t>
-            </a:r>
-          </a:p>
-          <a:p/>
-          <a:p>
-            <a:r>
-              <a:t>Likely question: Is the test set separate from tuning? Yes. Slow-start and hand-over settings were chosen on a different set of random paths; the 100 test paths were used only for the reported numbers.</a:t>
             </a:r>
           </a:p>
         </p:txBody>
@@ -3098,25 +2919,17 @@
           <a:lstStyle/>
           <a:p>
             <a:r>
-              <a:t>[0:50] Fairness on real sockets: two neural flows split the link evenly, and so do two AIMD flows. But against tuned AIMD the neural agent takes 68 percent of the link, and 76 percent against the original AIMD. CUBIC takes 61 percent. So the agent is a more aggressive neighbour. Nothing starves, but it is not polite, and we did not test coexistence with TCP. That is our main limitation.</a:t>
-            </a:r>
-          </a:p>
-          <a:p/>
+              <a:t>Fairness on real sockets: two neural flows split the link evenly, and so do two AIMD flows. But against tuned AIMD the neural agent takes 68 percent of the link, and 76 percent against the original AIMD. CUBIC takes 61 percent. So the agent is a more aggressive neighbour. Nothing starves, but it is not polite, and we did not test coexistence with TCP. That is our main limitation.</a:t>
+            </a:r>
+          </a:p>
           <a:p>
             <a:r>
               <a:t>We also added file transfer: the sender sends a real file and the received file is byte-identical in every run. A 4 megabyte file over the fast path takes 8.9 seconds with the agent against 21 seconds with tuned AIMD.</a:t>
             </a:r>
           </a:p>
-          <a:p/>
           <a:p>
             <a:r>
               <a:t>The chat and web gateway now use the same window and bitmap as the C transport, and there is CI, fuzzing and an architecture document.</a:t>
-            </a:r>
-          </a:p>
-          <a:p/>
-          <a:p>
-            <a:r>
-              <a:t>Likely question: Would this be safe to deploy? Not on a shared link yet: it needs fairness-aware training and TCP coexistence tests. For a dedicated path it is a clear win.</a:t>
             </a:r>
           </a:p>
         </p:txBody>
@@ -3202,25 +3015,17 @@
           <a:lstStyle/>
           <a:p>
             <a:r>
-              <a:t>[0:50] The need: campus users send data to a server across a routed network. TCP is fixed in the kernel; UDP gives no guarantees.</a:t>
-            </a:r>
-          </a:p>
-          <a:p/>
+              <a:t>The need: campus users send data to a server across a routed network. TCP is fixed in the kernel; UDP gives no guarantees.</a:t>
+            </a:r>
+          </a:p>
           <a:p>
             <a:r>
               <a:t>Our answer: RUDP, a readable and tunable transport, and Smart-RUDP, which learns the window from RTT and loss.</a:t>
             </a:r>
           </a:p>
-          <a:p/>
           <a:p>
             <a:r>
               <a:t>Scenario: a student on VLAN 10 uploads to the server LAN. The ACL keeps students out of staff VLAN 20. If a core link fails, OSPF reroutes through R2: longer path, higher RTT, and the transport must adapt.</a:t>
-            </a:r>
-          </a:p>
-          <a:p/>
-          <a:p>
-            <a:r>
-              <a:t>Likely question: Q: Is this just a lab exercise? A: A lab sends datagrams. We built reliability and congestion control on top, measured them, and used them in an application.</a:t>
             </a:r>
           </a:p>
         </p:txBody>
@@ -3306,13 +3111,7 @@
           <a:lstStyle/>
           <a:p>
             <a:r>
-              <a:t>[0:40] This is the congestion window on the lossy path, same seed for both. AIMD, in grey, climbs one packet per round trip and halves on every loss, so it never gets above about 15 packets and takes nine seconds. The neural agent, in green, runs much higher, backs off when it sees loss or queueing delay, and finishes in four seconds. The figure comes from our virtual-time sender and can be regenerated with make figures.</a:t>
-            </a:r>
-          </a:p>
-          <a:p/>
-          <a:p>
-            <a:r>
-              <a:t>Likely question: Why does the agent's window jump around so much? It picks one of five multipliers about once per round trip, so it moves in steps; that is the cost of a learned policy with a coarse action set.</a:t>
+              <a:t>This is the congestion window on the lossy path, same seed for both. AIMD, in grey, climbs one packet per round trip and halves on every loss, so it never gets above about 15 packets and takes nine seconds. The neural agent, in green, runs much higher, backs off when it sees loss or queueing delay, and finishes in four seconds. The figure comes from our virtual-time sender and can be regenerated with make figures.</a:t>
             </a:r>
           </a:p>
         </p:txBody>
@@ -3398,19 +3197,12 @@
           <a:lstStyle/>
           <a:p>
             <a:r>
-              <a:t>[0:50] We worked on the weaknesses we had listed. For fairness we added an optional polite mode: when a standing queue builds, the agent backs off. Over 8 runs against tuned AIMD it takes 52 percent of the link instead of 70, and the Jain index rises from 0.86 to 0.94. The price is speed: on 100 random paths the average time goes from 0.53 to 0.58 times AIMD's, and the worst path is 2.95 times slower, so it stays off by default.</a:t>
-            </a:r>
-          </a:p>
-          <a:p/>
+              <a:t>We worked on the weaknesses we had listed. For fairness we added an optional polite mode: when a standing queue builds, the agent backs off. Over 8 runs against tuned AIMD it takes 52 percent of the link instead of 70, and the Jain index rises from 0.86 to 0.94. The price is speed: on 100 random paths the average time goes from 0.53 to 0.58 times AIMD's, and the worst path is 2.95 times slower, so it stays off by default.</a:t>
+            </a:r>
+          </a:p>
           <a:p>
             <a:r>
               <a:t>We also added bursty cross traffic to the test proxy. Here the result is less flattering: the agent is 15 percent faster than tuned AIMD, but level with CUBIC, and it retransmits about three times as often as AIMD. Three tweaks did not fix that, so we report it as a limit. Finally the server now handles up to 16 clients, checked by sending two files at once.</a:t>
-            </a:r>
-          </a:p>
-          <a:p/>
-          <a:p>
-            <a:r>
-              <a:t>Likely question: Is polite mode learned? No. It is a hand-made rule on the delay signal. A learned version needs a two-flow training environment, which is future work.</a:t>
             </a:r>
           </a:p>
         </p:txBody>
@@ -3496,31 +3288,22 @@
           <a:lstStyle/>
           <a:p>
             <a:r>
-              <a:t>[1:00] Until now our real-socket tests ran through our own proxy. We repeated them on the Linux kernel itself, using tc netem, with kernel TCP in the same table.</a:t>
-            </a:r>
-          </a:p>
-          <a:p/>
+              <a:t>Until now our real-socket tests ran through our own proxy. We repeated them on the Linux kernel itself, using tc netem, with kernel TCP in the same table.</a:t>
+            </a:r>
+          </a:p>
           <a:p>
             <a:r>
               <a:t>Against tuned AIMD the neural agent is 61 percent faster on the lossy path, 70 percent on the 5G-like path and 83 percent on the satellite path. All three are highly significant. On the reordering path it is 33 percent faster but that is not significant.</a:t>
             </a:r>
           </a:p>
-          <a:p/>
           <a:p>
             <a:r>
               <a:t>Kernel TCP is still faster than our agent on every path, between one and a half and three times. We are not claiming to beat TCP.</a:t>
             </a:r>
           </a:p>
-          <a:p/>
           <a:p>
             <a:r>
               <a:t>Our first three runs were wrong: the netem queue limit counted packets in flight, our baseline was untuned, and TCP sent bigger payloads. We found that, fixed it and re-ran everything.</a:t>
-            </a:r>
-          </a:p>
-          <a:p/>
-          <a:p>
-            <a:r>
-              <a:t>Likely question: Q: Does it beat TCP? A: No. It beats our AIMD baselines on a real kernel path; mature kernel TCP is faster, by 1.5x to 3.2x. Q: Why were the first runs wrong? A: netem's limit also counts packets in the delay line, so a large window overflowed it on the satellite path.</a:t>
             </a:r>
           </a:p>
         </p:txBody>
@@ -3606,25 +3389,32 @@
           <a:lstStyle/>
           <a:p>
             <a:r>
-              <a:t>[0:50] What we learned: reliability is a set of simple rules working together, congestion control matters as much as retransmission, and tests tell you things about your own results that you do not want to hear.</a:t>
-            </a:r>
-          </a:p>
-          <a:p/>
-          <a:p>
-            <a:r>
-              <a:t>Our limits: no kernel netem or multi-machine test, the agent is not a polite neighbour, there is no gain at 10 percent random loss, and the tabular agent did not beat AIMD.</a:t>
-            </a:r>
-          </a:p>
-          <a:p/>
-          <a:p>
-            <a:r>
-              <a:t>Next: fairness-aware training with TCP coexistence, training on real traces, and kernel and multi-machine tests.</a:t>
-            </a:r>
-          </a:p>
-          <a:p/>
-          <a:p>
-            <a:r>
-              <a:t>Likely question: What would you do first? Run the netem script on a Linux machine for kernel TCP and RUDP on the same path, then add a competing flow to the training.</a:t>
+              <a:t>Two more research gaps we tested.</a:t>
+            </a:r>
+          </a:p>
+          <a:p>
+            <a:r>
+              <a:t>First, paths that change during a transfer: we added a --dyn option so bandwidth and delay change mid-run.</a:t>
+            </a:r>
+          </a:p>
+          <a:p>
+            <a:r>
+              <a:t>The neural agent was fastest in all four cases, 6 to 53 percent faster than tuned AIMD, but it retransmits 1 to 6 percent of packets.</a:t>
+            </a:r>
+          </a:p>
+          <a:p>
+            <a:r>
+              <a:t>Second, a stronger baseline: a simplified BBR.</a:t>
+            </a:r>
+          </a:p>
+          <a:p>
+            <a:r>
+              <a:t>It beats tuned AIMD on four of five paths and is actually faster than our agent on the 2 percent lossy path, 8.2 seconds against 9.8.</a:t>
+            </a:r>
+          </a:p>
+          <a:p>
+            <a:r>
+              <a:t>Be honest that our BBR is a simplification and that two bugs in it were found and fixed by these tests.</a:t>
             </a:r>
           </a:p>
         </p:txBody>
@@ -3710,13 +3500,32 @@
           <a:lstStyle/>
           <a:p>
             <a:r>
-              <a:t>[0:15] Thank you. The code, report and captures are at github.com/Capsturrrr/rudp. Happy to take questions.</a:t>
-            </a:r>
-          </a:p>
-          <a:p/>
-          <a:p>
-            <a:r>
-              <a:t>Likely question: Pause and smile; hand over to questions.</a:t>
+              <a:t>Fairness and trust.</a:t>
+            </a:r>
+          </a:p>
+          <a:p>
+            <a:r>
+              <a:t>Two neural flows with unequal round-trip times share the link more evenly than two AIMD flows, Jain 0.84 against 0.64 at 150 ms extra RTT, but still favour the short-RTT flow; six pairs per cell so only the largest gap is clear.</a:t>
+            </a:r>
+          </a:p>
+          <a:p>
+            <a:r>
+              <a:t>A small decision tree agrees with the network on only 79 percent of decisions but gives the same transfer time on four of five paths.</a:t>
+            </a:r>
+          </a:p>
+          <a:p>
+            <a:r>
+              <a:t>Noise on the inputs costs at most 12 percent.</a:t>
+            </a:r>
+          </a:p>
+          <a:p>
+            <a:r>
+              <a:t>Formal certification only works at tiny perturbations, so the agent is robust in practice but not proven.</a:t>
+            </a:r>
+          </a:p>
+          <a:p>
+            <a:r>
+              <a:t>The kernel TCP coexistence measurement is written but not yet run.</a:t>
             </a:r>
           </a:p>
         </p:txBody>
@@ -3802,13 +3611,17 @@
           <a:lstStyle/>
           <a:p>
             <a:r>
-              <a:t>[-] Only if asked: the window starts at 1, adds 1 per ACK until the threshold 16, then 1/window per ACK. In the 62-packet run the final window was 18.71.</a:t>
-            </a:r>
-          </a:p>
-          <a:p/>
-          <a:p>
-            <a:r>
-              <a:t>Likely question: Use this slide to answer 'show me congestion avoidance'.</a:t>
+              <a:t>What we learned: reliability is a set of simple rules working together, congestion control matters as much as retransmission, and tests tell you things about your own results that you do not want to hear.</a:t>
+            </a:r>
+          </a:p>
+          <a:p>
+            <a:r>
+              <a:t>Our limits: no kernel netem or multi-machine test, the agent is not a polite neighbour, there is no gain at 10 percent random loss, and the tabular agent did not beat AIMD.</a:t>
+            </a:r>
+          </a:p>
+          <a:p>
+            <a:r>
+              <a:t>Next: fairness-aware training with TCP coexistence, training on real traces, and kernel and multi-machine tests.</a:t>
             </a:r>
           </a:p>
         </p:txBody>
@@ -3831,6 +3644,178 @@
             <a:fld id="{F7021451-1387-4CA6-816F-3879F97B5CBC}" type="slidenum">
               <a:rPr lang="en-US"/>
               <a:t>35</a:t>
+            </a:fld>
+            <a:endParaRPr lang="en-US"/>
+          </a:p>
+        </p:txBody>
+      </p:sp>
+    </p:spTree>
+    <p:extLst>
+      <p:ext uri="{BB962C8B-B14F-4D97-AF65-F5344CB8AC3E}">
+        <p14:creationId xmlns:p14="http://schemas.microsoft.com/office/powerpoint/2010/main" val="1024086991"/>
+      </p:ext>
+    </p:extLst>
+  </p:cSld>
+  <p:clrMapOvr>
+    <a:masterClrMapping/>
+  </p:clrMapOvr>
+</p:notes>
+</file>
+
+<file path=ppt/notesSlides/notesSlide36.xml><?xml version="1.0" encoding="utf-8"?>
+<p:notes xmlns:a="http://schemas.openxmlformats.org/drawingml/2006/main" xmlns:r="http://schemas.openxmlformats.org/officeDocument/2006/relationships" xmlns:p="http://schemas.openxmlformats.org/presentationml/2006/main">
+  <p:cSld>
+    <p:spTree>
+      <p:nvGrpSpPr>
+        <p:cNvPr id="1" name=""/>
+        <p:cNvGrpSpPr/>
+        <p:nvPr/>
+      </p:nvGrpSpPr>
+      <p:grpSpPr>
+        <a:xfrm>
+          <a:off x="0" y="0"/>
+          <a:ext cx="0" cy="0"/>
+          <a:chOff x="0" y="0"/>
+          <a:chExt cx="0" cy="0"/>
+        </a:xfrm>
+      </p:grpSpPr>
+      <p:sp>
+        <p:nvSpPr>
+          <p:cNvPr id="2" name="Slide Image Placeholder 1"/>
+          <p:cNvSpPr>
+            <a:spLocks noGrp="1" noRot="1" noChangeAspect="1"/>
+          </p:cNvSpPr>
+          <p:nvPr>
+            <p:ph type="sldImg"/>
+          </p:nvPr>
+        </p:nvSpPr>
+        <p:spPr/>
+      </p:sp>
+      <p:sp>
+        <p:nvSpPr>
+          <p:cNvPr id="3" name="Notes Placeholder 2"/>
+          <p:cNvSpPr>
+            <a:spLocks noGrp="1"/>
+          </p:cNvSpPr>
+          <p:nvPr>
+            <p:ph type="body" idx="1"/>
+          </p:nvPr>
+        </p:nvSpPr>
+        <p:spPr/>
+        <p:txBody>
+          <a:bodyPr/>
+          <a:lstStyle/>
+          <a:p>
+            <a:r>
+              <a:t>Thank you. The code, report and captures are at github.com/Capsturrrr/rudp. Happy to take questions.</a:t>
+            </a:r>
+          </a:p>
+        </p:txBody>
+      </p:sp>
+      <p:sp>
+        <p:nvSpPr>
+          <p:cNvPr id="4" name="Slide Number Placeholder 3"/>
+          <p:cNvSpPr>
+            <a:spLocks noGrp="1"/>
+          </p:cNvSpPr>
+          <p:nvPr>
+            <p:ph type="sldNum" sz="quarter" idx="10"/>
+          </p:nvPr>
+        </p:nvSpPr>
+        <p:spPr/>
+        <p:txBody>
+          <a:bodyPr/>
+          <a:lstStyle/>
+          <a:p>
+            <a:fld id="{F7021451-1387-4CA6-816F-3879F97B5CBC}" type="slidenum">
+              <a:rPr lang="en-US"/>
+              <a:t>36</a:t>
+            </a:fld>
+            <a:endParaRPr lang="en-US"/>
+          </a:p>
+        </p:txBody>
+      </p:sp>
+    </p:spTree>
+    <p:extLst>
+      <p:ext uri="{BB962C8B-B14F-4D97-AF65-F5344CB8AC3E}">
+        <p14:creationId xmlns:p14="http://schemas.microsoft.com/office/powerpoint/2010/main" val="1024086991"/>
+      </p:ext>
+    </p:extLst>
+  </p:cSld>
+  <p:clrMapOvr>
+    <a:masterClrMapping/>
+  </p:clrMapOvr>
+</p:notes>
+</file>
+
+<file path=ppt/notesSlides/notesSlide37.xml><?xml version="1.0" encoding="utf-8"?>
+<p:notes xmlns:a="http://schemas.openxmlformats.org/drawingml/2006/main" xmlns:r="http://schemas.openxmlformats.org/officeDocument/2006/relationships" xmlns:p="http://schemas.openxmlformats.org/presentationml/2006/main">
+  <p:cSld>
+    <p:spTree>
+      <p:nvGrpSpPr>
+        <p:cNvPr id="1" name=""/>
+        <p:cNvGrpSpPr/>
+        <p:nvPr/>
+      </p:nvGrpSpPr>
+      <p:grpSpPr>
+        <a:xfrm>
+          <a:off x="0" y="0"/>
+          <a:ext cx="0" cy="0"/>
+          <a:chOff x="0" y="0"/>
+          <a:chExt cx="0" cy="0"/>
+        </a:xfrm>
+      </p:grpSpPr>
+      <p:sp>
+        <p:nvSpPr>
+          <p:cNvPr id="2" name="Slide Image Placeholder 1"/>
+          <p:cNvSpPr>
+            <a:spLocks noGrp="1" noRot="1" noChangeAspect="1"/>
+          </p:cNvSpPr>
+          <p:nvPr>
+            <p:ph type="sldImg"/>
+          </p:nvPr>
+        </p:nvSpPr>
+        <p:spPr/>
+      </p:sp>
+      <p:sp>
+        <p:nvSpPr>
+          <p:cNvPr id="3" name="Notes Placeholder 2"/>
+          <p:cNvSpPr>
+            <a:spLocks noGrp="1"/>
+          </p:cNvSpPr>
+          <p:nvPr>
+            <p:ph type="body" idx="1"/>
+          </p:nvPr>
+        </p:nvSpPr>
+        <p:spPr/>
+        <p:txBody>
+          <a:bodyPr/>
+          <a:lstStyle/>
+          <a:p>
+            <a:r>
+              <a:t>Only if asked: the window starts at 1, adds 1 per ACK until the threshold 16, then 1/window per ACK. In the 62-packet run the final window was 18.71.</a:t>
+            </a:r>
+          </a:p>
+        </p:txBody>
+      </p:sp>
+      <p:sp>
+        <p:nvSpPr>
+          <p:cNvPr id="4" name="Slide Number Placeholder 3"/>
+          <p:cNvSpPr>
+            <a:spLocks noGrp="1"/>
+          </p:cNvSpPr>
+          <p:nvPr>
+            <p:ph type="sldNum" sz="quarter" idx="10"/>
+          </p:nvPr>
+        </p:nvSpPr>
+        <p:spPr/>
+        <p:txBody>
+          <a:bodyPr/>
+          <a:lstStyle/>
+          <a:p>
+            <a:fld id="{F7021451-1387-4CA6-816F-3879F97B5CBC}" type="slidenum">
+              <a:rPr lang="en-US"/>
+              <a:t>37</a:t>
             </a:fld>
             <a:endParaRPr lang="en-US"/>
           </a:p>
@@ -3894,19 +3879,12 @@
           <a:lstStyle/>
           <a:p>
             <a:r>
-              <a:t>[0:40] Four pieces: handshake, reliability, flow control and congestion control.</a:t>
-            </a:r>
-          </a:p>
-          <a:p/>
+              <a:t>Four pieces: handshake, reliability, flow control and congestion control.</a:t>
+            </a:r>
+          </a:p>
           <a:p>
             <a:r>
               <a:t>About 670 lines of C across four source files, built in eight phases, on GitHub at Capsturrrr/rudp.</a:t>
-            </a:r>
-          </a:p>
-          <a:p/>
-          <a:p>
-            <a:r>
-              <a:t>Likely question: Q: Who did what? A: Agree one answer as a team before you go in.</a:t>
             </a:r>
           </a:p>
         </p:txBody>
@@ -3992,25 +3970,17 @@
           <a:lstStyle/>
           <a:p>
             <a:r>
-              <a:t>[0:40] 13-byte header: sequence 4, ack 4, flags 1, checksum 2, payload length 2.</a:t>
-            </a:r>
-          </a:p>
-          <a:p/>
+              <a:t>13-byte header: sequence 4, ack 4, flags 1, checksum 2, payload length 2.</a:t>
+            </a:r>
+          </a:p>
           <a:p>
             <a:r>
               <a:t>Fields are packed byte by byte so compiler padding never changes the wire format.</a:t>
             </a:r>
           </a:p>
-          <a:p/>
           <a:p>
             <a:r>
               <a:t>A data packet is 53 bytes on the wire; ACKs and handshake packets are 13.</a:t>
-            </a:r>
-          </a:p>
-          <a:p/>
-          <a:p>
-            <a:r>
-              <a:t>Likely question: Q: How does the checksum work? A: 16-bit one's-complement sum over header and payload, like UDP/TCP. A corrupted packet fails and is recovered by retransmission.</a:t>
             </a:r>
           </a:p>
         </p:txBody>
@@ -4096,25 +4066,17 @@
           <a:lstStyle/>
           <a:p>
             <a:r>
-              <a:t>[0:50] Three-way handshake: SYN, SYN-ACK, ACK. Then data, up to a window of packets in flight.</a:t>
-            </a:r>
-          </a:p>
-          <a:p/>
+              <a:t>Three-way handshake: SYN, SYN-ACK, ACK. Then data, up to a window of packets in flight.</a:t>
+            </a:r>
+          </a:p>
           <a:p>
             <a:r>
               <a:t>ACKs are cumulative: ACK N confirms everything before N. FIN closes the connection.</a:t>
             </a:r>
           </a:p>
-          <a:p/>
           <a:p>
             <a:r>
               <a:t>The server accepts a new SYN in any state, so a killed client can never leave it stuck. That was a real bug we fixed.</a:t>
-            </a:r>
-          </a:p>
-          <a:p/>
-          <a:p>
-            <a:r>
-              <a:t>Likely question: Q: What if the peer disappears? A: Sender keeps retransmitting on timeout. An abort after repeated timeouts is not implemented; it is the fix we would add.</a:t>
             </a:r>
           </a:p>
         </p:txBody>
@@ -4200,25 +4162,17 @@
           <a:lstStyle/>
           <a:p>
             <a:r>
-              <a:t>[0:50] The window is the number of packets in flight; it started fixed at 4 and is now driven by the congestion window.</a:t>
-            </a:r>
-          </a:p>
-          <a:p/>
+              <a:t>The window is the number of packets in flight; it started fixed at 4 and is now driven by the congestion window.</a:t>
+            </a:r>
+          </a:p>
           <a:p>
             <a:r>
               <a:t>Timeout is 500 ms; fast retransmit triggers after 3 duplicate ACKs, no waiting for the timer.</a:t>
             </a:r>
           </a:p>
-          <a:p/>
           <a:p>
             <a:r>
               <a:t>Proof: in a 20% loss netem capture we saw 12 timeouts about 500 ms apart. Result: the 2,442-byte message reassembled correctly.</a:t>
-            </a:r>
-          </a:p>
-          <a:p/>
-          <a:p>
-            <a:r>
-              <a:t>Likely question: Q: Why Go-Back-N? A: Simpler to build and explain. It wastes bandwidth under loss; Selective Repeat with SACK is our stated future work.</a:t>
             </a:r>
           </a:p>
         </p:txBody>
@@ -4304,25 +4258,17 @@
           <a:lstStyle/>
           <a:p>
             <a:r>
-              <a:t>[0:50] Slow start: window grows by one per ACK until the threshold of 16. Then avoidance: plus 1/window per ACK.</a:t>
-            </a:r>
-          </a:p>
-          <a:p/>
+              <a:t>Slow start: window grows by one per ACK until the threshold of 16. Then avoidance: plus 1/window per ACK.</a:t>
+            </a:r>
+          </a:p>
           <a:p>
             <a:r>
               <a:t>Three duplicate ACKs: window halves. A timeout: window resets to 1 and the threshold halves. Cap is 32.</a:t>
             </a:r>
           </a:p>
-          <a:p/>
           <a:p>
             <a:r>
               <a:t>The graph shows fresh runs at 0, 10, 20 and 40 percent loss. Red marks are timeouts, green are fast retransmits.</a:t>
-            </a:r>
-          </a:p>
-          <a:p/>
-          <a:p>
-            <a:r>
-              <a:t>Likely question: Q: Why cap 32 and ssthresh 16? A: The cap stops a lossless run growing without bound; 16 is where doubling switches to linear growth.</a:t>
             </a:r>
           </a:p>
         </p:txBody>
@@ -4408,19 +4354,12 @@
           <a:lstStyle/>
           <a:p>
             <a:r>
-              <a:t>[0:40] Three tools: a loss simulator inside the code (used for the benchmark), Linux tc/netem injecting real loss on loopback, and Wireshark/tshark.</a:t>
-            </a:r>
-          </a:p>
-          <a:p/>
+              <a:t>Three tools: a loss simulator inside the code (used for the benchmark), Linux tc/netem injecting real loss on loopback, and Wireshark/tshark.</a:t>
+            </a:r>
+          </a:p>
           <a:p>
             <a:r>
               <a:t>Windows Wireshark could not see WSL loopback, so we captured with tshark inside WSL and copied the file across.</a:t>
-            </a:r>
-          </a:p>
-          <a:p/>
-          <a:p>
-            <a:r>
-              <a:t>Likely question: Q: Is the loss real? A: Benchmark and chat loss is simulated in the program. We also captured a real loopback run with tshark and netem loss.</a:t>
             </a:r>
           </a:p>
         </p:txBody>
@@ -5052,7 +4991,7 @@
                 <a:ea typeface="Courier New" pitchFamily="34" charset="-122"/>
                 <a:cs typeface="Courier New" pitchFamily="34" charset="-120"/>
               </a:rPr>
-              <a:t>10 / 35   Smart-RUDP</a:t>
+              <a:t>10 / 37   Smart-RUDP</a:t>
             </a:r>
             <a:endParaRPr lang="en-US" sz="1000" dirty="0"/>
           </a:p>
@@ -5249,7 +5188,7 @@
                 <a:ea typeface="Courier New" pitchFamily="34" charset="-122"/>
                 <a:cs typeface="Courier New" pitchFamily="34" charset="-120"/>
               </a:rPr>
-              <a:t>11 / 35   Smart-RUDP</a:t>
+              <a:t>11 / 37   Smart-RUDP</a:t>
             </a:r>
             <a:endParaRPr lang="en-US" sz="1000" dirty="0"/>
           </a:p>
@@ -6079,7 +6018,7 @@
                 <a:ea typeface="Courier New" pitchFamily="34" charset="-122"/>
                 <a:cs typeface="Courier New" pitchFamily="34" charset="-120"/>
               </a:rPr>
-              <a:t>12 / 35   Smart-RUDP</a:t>
+              <a:t>12 / 37   Smart-RUDP</a:t>
             </a:r>
             <a:endParaRPr lang="en-US" sz="1000" dirty="0"/>
           </a:p>
@@ -6376,7 +6315,7 @@
                 <a:ea typeface="Courier New" pitchFamily="34" charset="-122"/>
                 <a:cs typeface="Courier New" pitchFamily="34" charset="-120"/>
               </a:rPr>
-              <a:t>13 / 35   Smart-RUDP</a:t>
+              <a:t>13 / 37   Smart-RUDP</a:t>
             </a:r>
             <a:endParaRPr lang="en-US" sz="1000" dirty="0"/>
           </a:p>
@@ -6676,7 +6615,7 @@
                 <a:ea typeface="Courier New" pitchFamily="34" charset="-122"/>
                 <a:cs typeface="Courier New" pitchFamily="34" charset="-120"/>
               </a:rPr>
-              <a:t>14 / 35   Smart-RUDP</a:t>
+              <a:t>14 / 37   Smart-RUDP</a:t>
             </a:r>
             <a:endParaRPr lang="en-US" sz="1000" dirty="0"/>
           </a:p>
@@ -7060,7 +6999,7 @@
                 <a:ea typeface="Courier New" pitchFamily="34" charset="-122"/>
                 <a:cs typeface="Courier New" pitchFamily="34" charset="-120"/>
               </a:rPr>
-              <a:t>15 / 35   Smart-RUDP</a:t>
+              <a:t>15 / 37   Smart-RUDP</a:t>
             </a:r>
             <a:endParaRPr lang="en-US" sz="1000" dirty="0"/>
           </a:p>
@@ -7518,7 +7457,7 @@
                 <a:ea typeface="Courier New" pitchFamily="34" charset="-122"/>
                 <a:cs typeface="Courier New" pitchFamily="34" charset="-120"/>
               </a:rPr>
-              <a:t>16 / 35   Smart-RUDP</a:t>
+              <a:t>16 / 37   Smart-RUDP</a:t>
             </a:r>
             <a:endParaRPr lang="en-US" sz="1000" dirty="0"/>
           </a:p>
@@ -8203,7 +8142,7 @@
                 <a:ea typeface="Courier New" pitchFamily="34" charset="-122"/>
                 <a:cs typeface="Courier New" pitchFamily="34" charset="-120"/>
               </a:rPr>
-              <a:t>17 / 35   Smart-RUDP</a:t>
+              <a:t>17 / 37   Smart-RUDP</a:t>
             </a:r>
             <a:endParaRPr lang="en-US" sz="1000" dirty="0"/>
           </a:p>
@@ -8443,7 +8382,7 @@
                 <a:ea typeface="Courier New" pitchFamily="34" charset="-122"/>
                 <a:cs typeface="Courier New" pitchFamily="34" charset="-120"/>
               </a:rPr>
-              <a:t>18 / 35   Smart-RUDP</a:t>
+              <a:t>18 / 37   Smart-RUDP</a:t>
             </a:r>
             <a:endParaRPr lang="en-US" sz="1000" dirty="0"/>
           </a:p>
@@ -8683,7 +8622,7 @@
                 <a:ea typeface="Courier New" pitchFamily="34" charset="-122"/>
                 <a:cs typeface="Courier New" pitchFamily="34" charset="-120"/>
               </a:rPr>
-              <a:t>19 / 35   Smart-RUDP</a:t>
+              <a:t>19 / 37   Smart-RUDP</a:t>
             </a:r>
             <a:endParaRPr lang="en-US" sz="1000" dirty="0"/>
           </a:p>
@@ -8905,7 +8844,7 @@
                 <a:ea typeface="Courier New" pitchFamily="34" charset="-122"/>
                 <a:cs typeface="Courier New" pitchFamily="34" charset="-120"/>
               </a:rPr>
-              <a:t>2 / 35   Smart-RUDP</a:t>
+              <a:t>2 / 37   Smart-RUDP</a:t>
             </a:r>
             <a:endParaRPr lang="en-US" sz="1000" dirty="0"/>
           </a:p>
@@ -9299,7 +9238,7 @@
                 <a:ea typeface="Courier New" pitchFamily="34" charset="-122"/>
                 <a:cs typeface="Courier New" pitchFamily="34" charset="-120"/>
               </a:rPr>
-              <a:t>20 / 35   Smart-RUDP</a:t>
+              <a:t>20 / 37   Smart-RUDP</a:t>
             </a:r>
             <a:endParaRPr lang="en-US" sz="1000" dirty="0"/>
           </a:p>
@@ -9623,7 +9562,7 @@
                 <a:ea typeface="Courier New" pitchFamily="34" charset="-122"/>
                 <a:cs typeface="Courier New" pitchFamily="34" charset="-120"/>
               </a:rPr>
-              <a:t>21 / 35   Smart-RUDP</a:t>
+              <a:t>21 / 37   Smart-RUDP</a:t>
             </a:r>
             <a:endParaRPr lang="en-US" sz="1000" dirty="0"/>
           </a:p>
@@ -11330,7 +11269,7 @@
                 <a:ea typeface="Courier New" pitchFamily="34" charset="-122"/>
                 <a:cs typeface="Courier New" pitchFamily="34" charset="-120"/>
               </a:rPr>
-              <a:t>22 / 35   Smart-RUDP</a:t>
+              <a:t>22 / 37   Smart-RUDP</a:t>
             </a:r>
             <a:endParaRPr lang="en-US" sz="1000" dirty="0"/>
           </a:p>
@@ -12713,7 +12652,7 @@
                 <a:ea typeface="Courier New" pitchFamily="34" charset="-122"/>
                 <a:cs typeface="Courier New" pitchFamily="34" charset="-120"/>
               </a:rPr>
-              <a:t>23 / 35   Smart-RUDP</a:t>
+              <a:t>23 / 37   Smart-RUDP</a:t>
             </a:r>
             <a:endParaRPr lang="en-US" sz="1000" dirty="0"/>
           </a:p>
@@ -14256,7 +14195,7 @@
                 <a:ea typeface="Courier New" pitchFamily="34" charset="-122"/>
                 <a:cs typeface="Courier New" pitchFamily="34" charset="-120"/>
               </a:rPr>
-              <a:t>24 / 35   Smart-RUDP</a:t>
+              <a:t>24 / 37   Smart-RUDP</a:t>
             </a:r>
             <a:endParaRPr lang="en-US" sz="1000" dirty="0"/>
           </a:p>
@@ -15934,7 +15873,7 @@
                 <a:ea typeface="Courier New" pitchFamily="34" charset="-122"/>
                 <a:cs typeface="Courier New" pitchFamily="34" charset="-120"/>
               </a:rPr>
-              <a:t>25 / 35   Smart-RUDP</a:t>
+              <a:t>25 / 37   Smart-RUDP</a:t>
             </a:r>
             <a:endParaRPr lang="en-US" sz="1000" dirty="0"/>
           </a:p>
@@ -17612,7 +17551,7 @@
                 <a:ea typeface="Courier New" pitchFamily="34" charset="-122"/>
                 <a:cs typeface="Courier New" pitchFamily="34" charset="-120"/>
               </a:rPr>
-              <a:t>26 / 35   Smart-RUDP</a:t>
+              <a:t>26 / 37   Smart-RUDP</a:t>
             </a:r>
             <a:endParaRPr lang="en-US" sz="1000" dirty="0"/>
           </a:p>
@@ -19952,7 +19891,7 @@
                 <a:ea typeface="Courier New" pitchFamily="34" charset="-122"/>
                 <a:cs typeface="Courier New" pitchFamily="34" charset="-120"/>
               </a:rPr>
-              <a:t>27 / 35   Smart-RUDP</a:t>
+              <a:t>27 / 37   Smart-RUDP</a:t>
             </a:r>
             <a:endParaRPr lang="en-US" sz="1000" dirty="0"/>
           </a:p>
@@ -20410,7 +20349,7 @@
                 <a:ea typeface="Courier New" pitchFamily="34" charset="-122"/>
                 <a:cs typeface="Courier New" pitchFamily="34" charset="-120"/>
               </a:rPr>
-              <a:t>28 / 35   Smart-RUDP</a:t>
+              <a:t>28 / 37   Smart-RUDP</a:t>
             </a:r>
             <a:endParaRPr lang="en-US" sz="1000" dirty="0"/>
           </a:p>
@@ -20642,7 +20581,7 @@
                 <a:ea typeface="Courier New" pitchFamily="34" charset="-122"/>
                 <a:cs typeface="Courier New" pitchFamily="34" charset="-120"/>
               </a:rPr>
-              <a:t>29 / 35   Smart-RUDP</a:t>
+              <a:t>29 / 37   Smart-RUDP</a:t>
             </a:r>
             <a:endParaRPr lang="en-US" sz="1000" dirty="0"/>
           </a:p>
@@ -23388,7 +23327,7 @@
                 <a:ea typeface="Courier New" pitchFamily="34" charset="-122"/>
                 <a:cs typeface="Courier New" pitchFamily="34" charset="-120"/>
               </a:rPr>
-              <a:t>3 / 35   Smart-RUDP</a:t>
+              <a:t>3 / 37   Smart-RUDP</a:t>
             </a:r>
             <a:endParaRPr lang="en-US" sz="1000" dirty="0"/>
           </a:p>
@@ -23782,7 +23721,7 @@
                 <a:ea typeface="Courier New" pitchFamily="34" charset="-122"/>
                 <a:cs typeface="Courier New" pitchFamily="34" charset="-120"/>
               </a:rPr>
-              <a:t>30 / 35   Smart-RUDP</a:t>
+              <a:t>30 / 37   Smart-RUDP</a:t>
             </a:r>
             <a:endParaRPr lang="en-US" sz="1000" dirty="0"/>
           </a:p>
@@ -24022,7 +23961,7 @@
                 <a:ea typeface="Courier New" pitchFamily="34" charset="-122"/>
                 <a:cs typeface="Courier New" pitchFamily="34" charset="-120"/>
               </a:rPr>
-              <a:t>31 / 35   Smart-RUDP</a:t>
+              <a:t>31 / 37   Smart-RUDP</a:t>
             </a:r>
             <a:endParaRPr lang="en-US" sz="1000" dirty="0"/>
           </a:p>
@@ -26339,7 +26278,7 @@
                 <a:ea typeface="Courier New" pitchFamily="34" charset="-122"/>
                 <a:cs typeface="Courier New" pitchFamily="34" charset="-120"/>
               </a:rPr>
-              <a:t>32 / 35   Smart-RUDP</a:t>
+              <a:t>32 / 37   Smart-RUDP</a:t>
             </a:r>
             <a:endParaRPr lang="en-US" sz="1000" dirty="0"/>
           </a:p>
@@ -28259,7 +28198,7 @@
                 <a:ea typeface="Courier New" pitchFamily="34" charset="-122"/>
                 <a:cs typeface="Courier New" pitchFamily="34" charset="-120"/>
               </a:rPr>
-              <a:t>Learnings and future work</a:t>
+              <a:t>Research gaps: changing paths and a BBR baseline</a:t>
             </a:r>
             <a:endParaRPr lang="en-US" sz="3000" dirty="0"/>
           </a:p>
@@ -28298,86 +28237,2449 @@
                 <a:ea typeface="Courier New" pitchFamily="34" charset="-122"/>
                 <a:cs typeface="Courier New" pitchFamily="34" charset="-120"/>
               </a:rPr>
-              <a:t>33 / 35   Smart-RUDP</a:t>
+              <a:t>33 / 37   Smart-RUDP</a:t>
             </a:r>
             <a:endParaRPr lang="en-US" sz="1000" dirty="0"/>
           </a:p>
         </p:txBody>
       </p:sp>
+      <p:graphicFrame>
+        <p:nvGraphicFramePr>
+          <p:cNvPr id="34" name="Table 0"/>
+          <p:cNvGraphicFramePr>
+            <a:graphicFrameLocks noGrp="1"/>
+          </p:cNvGraphicFramePr>
+          <p:nvPr>
+            <p:extLst>
+              <p:ext uri="{D42A27DB-BD31-4B8C-83A1-F6EECF244321}">
+                <p14:modId xmlns:p14="http://schemas.microsoft.com/office/powerpoint/2010/main" val="1579011935"/>
+              </p:ext>
+            </p:extLst>
+          </p:nvPr>
+        </p:nvGraphicFramePr>
+        <p:xfrm>
+          <a:off x="548640" y="1188720"/>
+          <a:ext cx="7863840" cy="914400"/>
+        </p:xfrm>
+        <a:graphic>
+          <a:graphicData uri="http://schemas.openxmlformats.org/drawingml/2006/table">
+            <a:tbl>
+              <a:tblPr/>
+              <a:tblGrid>
+                <a:gridCol w="2743200"/>
+                <a:gridCol w="1280160"/>
+                <a:gridCol w="1097280"/>
+                <a:gridCol w="1371600"/>
+                <a:gridCol w="1371600"/>
+              </a:tblGrid>
+              <a:tr h="402336">
+                <a:tc>
+                  <a:txBody>
+                    <a:bodyPr/>
+                    <a:lstStyle/>
+                    <a:p>
+                      <a:pPr indent="0" marL="0">
+                        <a:buNone/>
+                      </a:pPr>
+                      <a:r>
+                        <a:rPr lang="en-US" sz="1300" b="1" dirty="0">
+                          <a:solidFill>
+                            <a:srgbClr val="0B0F14"/>
+                          </a:solidFill>
+                          <a:latin typeface="Courier New" pitchFamily="34" charset="0"/>
+                          <a:ea typeface="Courier New" pitchFamily="34" charset="-122"/>
+                          <a:cs typeface="Courier New" pitchFamily="34" charset="-120"/>
+                        </a:rPr>
+                        <a:t>Mean time (s)</a:t>
+                      </a:r>
+                      <a:endParaRPr lang="en-US" sz="1300" dirty="0">
+                        <a:latin typeface="Courier New" charset="0"/>
+                        <a:ea typeface="Courier New" charset="0"/>
+                        <a:cs typeface="Courier New" charset="0"/>
+                      </a:endParaRPr>
+                    </a:p>
+                  </a:txBody>
+                  <a:tcPr marL="91440" marR="91440" marT="45720" marB="45720">
+                    <a:lnL w="12700" cap="flat" cmpd="sng" algn="ctr">
+                      <a:solidFill>
+                        <a:srgbClr val="2A3441"/>
+                      </a:solidFill>
+                      <a:prstDash val="solid"/>
+                      <a:round/>
+                      <a:headEnd type="none" w="med" len="med"/>
+                      <a:tailEnd type="none" w="med" len="med"/>
+                    </a:lnL>
+                    <a:lnR w="12700" cap="flat" cmpd="sng" algn="ctr">
+                      <a:solidFill>
+                        <a:srgbClr val="2A3441"/>
+                      </a:solidFill>
+                      <a:prstDash val="solid"/>
+                      <a:round/>
+                      <a:headEnd type="none" w="med" len="med"/>
+                      <a:tailEnd type="none" w="med" len="med"/>
+                    </a:lnR>
+                    <a:lnT w="12700" cap="flat" cmpd="sng" algn="ctr">
+                      <a:solidFill>
+                        <a:srgbClr val="2A3441"/>
+                      </a:solidFill>
+                      <a:prstDash val="solid"/>
+                      <a:round/>
+                      <a:headEnd type="none" w="med" len="med"/>
+                      <a:tailEnd type="none" w="med" len="med"/>
+                    </a:lnT>
+                    <a:lnB w="12700" cap="flat" cmpd="sng" algn="ctr">
+                      <a:solidFill>
+                        <a:srgbClr val="2A3441"/>
+                      </a:solidFill>
+                      <a:prstDash val="solid"/>
+                      <a:round/>
+                      <a:headEnd type="none" w="med" len="med"/>
+                      <a:tailEnd type="none" w="med" len="med"/>
+                    </a:lnB>
+                    <a:solidFill>
+                      <a:srgbClr val="39FF88"/>
+                    </a:solidFill>
+                  </a:tcPr>
+                </a:tc>
+                <a:tc>
+                  <a:txBody>
+                    <a:bodyPr/>
+                    <a:lstStyle/>
+                    <a:p>
+                      <a:pPr indent="0" marL="0">
+                        <a:buNone/>
+                      </a:pPr>
+                      <a:r>
+                        <a:rPr lang="en-US" sz="1300" b="1" dirty="0">
+                          <a:solidFill>
+                            <a:srgbClr val="0B0F14"/>
+                          </a:solidFill>
+                          <a:latin typeface="Courier New" pitchFamily="34" charset="0"/>
+                          <a:ea typeface="Courier New" pitchFamily="34" charset="-122"/>
+                          <a:cs typeface="Courier New" pitchFamily="34" charset="-120"/>
+                        </a:rPr>
+                        <a:t>AIMD tuned</a:t>
+                      </a:r>
+                      <a:endParaRPr lang="en-US" sz="1300" dirty="0">
+                        <a:latin typeface="Courier New" charset="0"/>
+                        <a:ea typeface="Courier New" charset="0"/>
+                        <a:cs typeface="Courier New" charset="0"/>
+                      </a:endParaRPr>
+                    </a:p>
+                  </a:txBody>
+                  <a:tcPr marL="91440" marR="91440" marT="45720" marB="45720">
+                    <a:lnL w="12700" cap="flat" cmpd="sng" algn="ctr">
+                      <a:solidFill>
+                        <a:srgbClr val="2A3441"/>
+                      </a:solidFill>
+                      <a:prstDash val="solid"/>
+                      <a:round/>
+                      <a:headEnd type="none" w="med" len="med"/>
+                      <a:tailEnd type="none" w="med" len="med"/>
+                    </a:lnL>
+                    <a:lnR w="12700" cap="flat" cmpd="sng" algn="ctr">
+                      <a:solidFill>
+                        <a:srgbClr val="2A3441"/>
+                      </a:solidFill>
+                      <a:prstDash val="solid"/>
+                      <a:round/>
+                      <a:headEnd type="none" w="med" len="med"/>
+                      <a:tailEnd type="none" w="med" len="med"/>
+                    </a:lnR>
+                    <a:lnT w="12700" cap="flat" cmpd="sng" algn="ctr">
+                      <a:solidFill>
+                        <a:srgbClr val="2A3441"/>
+                      </a:solidFill>
+                      <a:prstDash val="solid"/>
+                      <a:round/>
+                      <a:headEnd type="none" w="med" len="med"/>
+                      <a:tailEnd type="none" w="med" len="med"/>
+                    </a:lnT>
+                    <a:lnB w="12700" cap="flat" cmpd="sng" algn="ctr">
+                      <a:solidFill>
+                        <a:srgbClr val="2A3441"/>
+                      </a:solidFill>
+                      <a:prstDash val="solid"/>
+                      <a:round/>
+                      <a:headEnd type="none" w="med" len="med"/>
+                      <a:tailEnd type="none" w="med" len="med"/>
+                    </a:lnB>
+                    <a:solidFill>
+                      <a:srgbClr val="39FF88"/>
+                    </a:solidFill>
+                  </a:tcPr>
+                </a:tc>
+                <a:tc>
+                  <a:txBody>
+                    <a:bodyPr/>
+                    <a:lstStyle/>
+                    <a:p>
+                      <a:pPr indent="0" marL="0">
+                        <a:buNone/>
+                      </a:pPr>
+                      <a:r>
+                        <a:rPr lang="en-US" sz="1300" b="1" dirty="0">
+                          <a:solidFill>
+                            <a:srgbClr val="0B0F14"/>
+                          </a:solidFill>
+                          <a:latin typeface="Courier New" pitchFamily="34" charset="0"/>
+                          <a:ea typeface="Courier New" pitchFamily="34" charset="-122"/>
+                          <a:cs typeface="Courier New" pitchFamily="34" charset="-120"/>
+                        </a:rPr>
+                        <a:t>CUBIC</a:t>
+                      </a:r>
+                      <a:endParaRPr lang="en-US" sz="1300" dirty="0">
+                        <a:latin typeface="Courier New" charset="0"/>
+                        <a:ea typeface="Courier New" charset="0"/>
+                        <a:cs typeface="Courier New" charset="0"/>
+                      </a:endParaRPr>
+                    </a:p>
+                  </a:txBody>
+                  <a:tcPr marL="91440" marR="91440" marT="45720" marB="45720">
+                    <a:lnL w="12700" cap="flat" cmpd="sng" algn="ctr">
+                      <a:solidFill>
+                        <a:srgbClr val="2A3441"/>
+                      </a:solidFill>
+                      <a:prstDash val="solid"/>
+                      <a:round/>
+                      <a:headEnd type="none" w="med" len="med"/>
+                      <a:tailEnd type="none" w="med" len="med"/>
+                    </a:lnL>
+                    <a:lnR w="12700" cap="flat" cmpd="sng" algn="ctr">
+                      <a:solidFill>
+                        <a:srgbClr val="2A3441"/>
+                      </a:solidFill>
+                      <a:prstDash val="solid"/>
+                      <a:round/>
+                      <a:headEnd type="none" w="med" len="med"/>
+                      <a:tailEnd type="none" w="med" len="med"/>
+                    </a:lnR>
+                    <a:lnT w="12700" cap="flat" cmpd="sng" algn="ctr">
+                      <a:solidFill>
+                        <a:srgbClr val="2A3441"/>
+                      </a:solidFill>
+                      <a:prstDash val="solid"/>
+                      <a:round/>
+                      <a:headEnd type="none" w="med" len="med"/>
+                      <a:tailEnd type="none" w="med" len="med"/>
+                    </a:lnT>
+                    <a:lnB w="12700" cap="flat" cmpd="sng" algn="ctr">
+                      <a:solidFill>
+                        <a:srgbClr val="2A3441"/>
+                      </a:solidFill>
+                      <a:prstDash val="solid"/>
+                      <a:round/>
+                      <a:headEnd type="none" w="med" len="med"/>
+                      <a:tailEnd type="none" w="med" len="med"/>
+                    </a:lnB>
+                    <a:solidFill>
+                      <a:srgbClr val="39FF88"/>
+                    </a:solidFill>
+                  </a:tcPr>
+                </a:tc>
+                <a:tc>
+                  <a:txBody>
+                    <a:bodyPr/>
+                    <a:lstStyle/>
+                    <a:p>
+                      <a:pPr indent="0" marL="0">
+                        <a:buNone/>
+                      </a:pPr>
+                      <a:r>
+                        <a:rPr lang="en-US" sz="1300" b="1" dirty="0">
+                          <a:solidFill>
+                            <a:srgbClr val="0B0F14"/>
+                          </a:solidFill>
+                          <a:latin typeface="Courier New" pitchFamily="34" charset="0"/>
+                          <a:ea typeface="Courier New" pitchFamily="34" charset="-122"/>
+                          <a:cs typeface="Courier New" pitchFamily="34" charset="-120"/>
+                        </a:rPr>
+                        <a:t>BBR-style</a:t>
+                      </a:r>
+                      <a:endParaRPr lang="en-US" sz="1300" dirty="0">
+                        <a:latin typeface="Courier New" charset="0"/>
+                        <a:ea typeface="Courier New" charset="0"/>
+                        <a:cs typeface="Courier New" charset="0"/>
+                      </a:endParaRPr>
+                    </a:p>
+                  </a:txBody>
+                  <a:tcPr marL="91440" marR="91440" marT="45720" marB="45720">
+                    <a:lnL w="12700" cap="flat" cmpd="sng" algn="ctr">
+                      <a:solidFill>
+                        <a:srgbClr val="2A3441"/>
+                      </a:solidFill>
+                      <a:prstDash val="solid"/>
+                      <a:round/>
+                      <a:headEnd type="none" w="med" len="med"/>
+                      <a:tailEnd type="none" w="med" len="med"/>
+                    </a:lnL>
+                    <a:lnR w="12700" cap="flat" cmpd="sng" algn="ctr">
+                      <a:solidFill>
+                        <a:srgbClr val="2A3441"/>
+                      </a:solidFill>
+                      <a:prstDash val="solid"/>
+                      <a:round/>
+                      <a:headEnd type="none" w="med" len="med"/>
+                      <a:tailEnd type="none" w="med" len="med"/>
+                    </a:lnR>
+                    <a:lnT w="12700" cap="flat" cmpd="sng" algn="ctr">
+                      <a:solidFill>
+                        <a:srgbClr val="2A3441"/>
+                      </a:solidFill>
+                      <a:prstDash val="solid"/>
+                      <a:round/>
+                      <a:headEnd type="none" w="med" len="med"/>
+                      <a:tailEnd type="none" w="med" len="med"/>
+                    </a:lnT>
+                    <a:lnB w="12700" cap="flat" cmpd="sng" algn="ctr">
+                      <a:solidFill>
+                        <a:srgbClr val="2A3441"/>
+                      </a:solidFill>
+                      <a:prstDash val="solid"/>
+                      <a:round/>
+                      <a:headEnd type="none" w="med" len="med"/>
+                      <a:tailEnd type="none" w="med" len="med"/>
+                    </a:lnB>
+                    <a:solidFill>
+                      <a:srgbClr val="39FF88"/>
+                    </a:solidFill>
+                  </a:tcPr>
+                </a:tc>
+                <a:tc>
+                  <a:txBody>
+                    <a:bodyPr/>
+                    <a:lstStyle/>
+                    <a:p>
+                      <a:pPr indent="0" marL="0">
+                        <a:buNone/>
+                      </a:pPr>
+                      <a:r>
+                        <a:rPr lang="en-US" sz="1300" b="1" dirty="0">
+                          <a:solidFill>
+                            <a:srgbClr val="0B0F14"/>
+                          </a:solidFill>
+                          <a:latin typeface="Courier New" pitchFamily="34" charset="0"/>
+                          <a:ea typeface="Courier New" pitchFamily="34" charset="-122"/>
+                          <a:cs typeface="Courier New" pitchFamily="34" charset="-120"/>
+                        </a:rPr>
+                        <a:t>Neural</a:t>
+                      </a:r>
+                      <a:endParaRPr lang="en-US" sz="1300" dirty="0">
+                        <a:latin typeface="Courier New" charset="0"/>
+                        <a:ea typeface="Courier New" charset="0"/>
+                        <a:cs typeface="Courier New" charset="0"/>
+                      </a:endParaRPr>
+                    </a:p>
+                  </a:txBody>
+                  <a:tcPr marL="91440" marR="91440" marT="45720" marB="45720">
+                    <a:lnL w="12700" cap="flat" cmpd="sng" algn="ctr">
+                      <a:solidFill>
+                        <a:srgbClr val="2A3441"/>
+                      </a:solidFill>
+                      <a:prstDash val="solid"/>
+                      <a:round/>
+                      <a:headEnd type="none" w="med" len="med"/>
+                      <a:tailEnd type="none" w="med" len="med"/>
+                    </a:lnL>
+                    <a:lnR w="12700" cap="flat" cmpd="sng" algn="ctr">
+                      <a:solidFill>
+                        <a:srgbClr val="2A3441"/>
+                      </a:solidFill>
+                      <a:prstDash val="solid"/>
+                      <a:round/>
+                      <a:headEnd type="none" w="med" len="med"/>
+                      <a:tailEnd type="none" w="med" len="med"/>
+                    </a:lnR>
+                    <a:lnT w="12700" cap="flat" cmpd="sng" algn="ctr">
+                      <a:solidFill>
+                        <a:srgbClr val="2A3441"/>
+                      </a:solidFill>
+                      <a:prstDash val="solid"/>
+                      <a:round/>
+                      <a:headEnd type="none" w="med" len="med"/>
+                      <a:tailEnd type="none" w="med" len="med"/>
+                    </a:lnT>
+                    <a:lnB w="12700" cap="flat" cmpd="sng" algn="ctr">
+                      <a:solidFill>
+                        <a:srgbClr val="2A3441"/>
+                      </a:solidFill>
+                      <a:prstDash val="solid"/>
+                      <a:round/>
+                      <a:headEnd type="none" w="med" len="med"/>
+                      <a:tailEnd type="none" w="med" len="med"/>
+                    </a:lnB>
+                    <a:solidFill>
+                      <a:srgbClr val="39FF88"/>
+                    </a:solidFill>
+                  </a:tcPr>
+                </a:tc>
+              </a:tr>
+              <a:tr h="402336">
+                <a:tc>
+                  <a:txBody>
+                    <a:bodyPr/>
+                    <a:lstStyle/>
+                    <a:p>
+                      <a:pPr indent="0" marL="0">
+                        <a:buNone/>
+                      </a:pPr>
+                      <a:r>
+                        <a:rPr lang="en-US" sz="1300" dirty="0">
+                          <a:solidFill>
+                            <a:srgbClr val="E6EDF3"/>
+                          </a:solidFill>
+                          <a:latin typeface="Calibri" pitchFamily="34" charset="0"/>
+                          <a:ea typeface="Calibri" pitchFamily="34" charset="-122"/>
+                          <a:cs typeface="Calibri" pitchFamily="34" charset="-120"/>
+                        </a:rPr>
+                        <a:t>Bandwidth drop</a:t>
+                      </a:r>
+                      <a:endParaRPr lang="en-US" sz="1300" dirty="0">
+                        <a:latin typeface="Calibri" charset="0"/>
+                        <a:ea typeface="Calibri" charset="0"/>
+                        <a:cs typeface="Calibri" charset="0"/>
+                      </a:endParaRPr>
+                    </a:p>
+                  </a:txBody>
+                  <a:tcPr marL="91440" marR="91440" marT="45720" marB="45720">
+                    <a:lnL w="12700" cap="flat" cmpd="sng" algn="ctr">
+                      <a:solidFill>
+                        <a:srgbClr val="2A3441"/>
+                      </a:solidFill>
+                      <a:prstDash val="solid"/>
+                      <a:round/>
+                      <a:headEnd type="none" w="med" len="med"/>
+                      <a:tailEnd type="none" w="med" len="med"/>
+                    </a:lnL>
+                    <a:lnR w="12700" cap="flat" cmpd="sng" algn="ctr">
+                      <a:solidFill>
+                        <a:srgbClr val="2A3441"/>
+                      </a:solidFill>
+                      <a:prstDash val="solid"/>
+                      <a:round/>
+                      <a:headEnd type="none" w="med" len="med"/>
+                      <a:tailEnd type="none" w="med" len="med"/>
+                    </a:lnR>
+                    <a:lnT w="12700" cap="flat" cmpd="sng" algn="ctr">
+                      <a:solidFill>
+                        <a:srgbClr val="2A3441"/>
+                      </a:solidFill>
+                      <a:prstDash val="solid"/>
+                      <a:round/>
+                      <a:headEnd type="none" w="med" len="med"/>
+                      <a:tailEnd type="none" w="med" len="med"/>
+                    </a:lnT>
+                    <a:lnB w="12700" cap="flat" cmpd="sng" algn="ctr">
+                      <a:solidFill>
+                        <a:srgbClr val="2A3441"/>
+                      </a:solidFill>
+                      <a:prstDash val="solid"/>
+                      <a:round/>
+                      <a:headEnd type="none" w="med" len="med"/>
+                      <a:tailEnd type="none" w="med" len="med"/>
+                    </a:lnB>
+                    <a:solidFill>
+                      <a:srgbClr val="141B24"/>
+                    </a:solidFill>
+                  </a:tcPr>
+                </a:tc>
+                <a:tc>
+                  <a:txBody>
+                    <a:bodyPr/>
+                    <a:lstStyle/>
+                    <a:p>
+                      <a:pPr indent="0" marL="0">
+                        <a:buNone/>
+                      </a:pPr>
+                      <a:r>
+                        <a:rPr lang="en-US" sz="1300" dirty="0">
+                          <a:solidFill>
+                            <a:srgbClr val="E6EDF3"/>
+                          </a:solidFill>
+                          <a:latin typeface="Calibri" pitchFamily="34" charset="0"/>
+                          <a:ea typeface="Calibri" pitchFamily="34" charset="-122"/>
+                          <a:cs typeface="Calibri" pitchFamily="34" charset="-120"/>
+                        </a:rPr>
+                        <a:t>13.6</a:t>
+                      </a:r>
+                      <a:endParaRPr lang="en-US" sz="1300" dirty="0">
+                        <a:latin typeface="Calibri" charset="0"/>
+                        <a:ea typeface="Calibri" charset="0"/>
+                        <a:cs typeface="Calibri" charset="0"/>
+                      </a:endParaRPr>
+                    </a:p>
+                  </a:txBody>
+                  <a:tcPr marL="91440" marR="91440" marT="45720" marB="45720">
+                    <a:lnL w="12700" cap="flat" cmpd="sng" algn="ctr">
+                      <a:solidFill>
+                        <a:srgbClr val="2A3441"/>
+                      </a:solidFill>
+                      <a:prstDash val="solid"/>
+                      <a:round/>
+                      <a:headEnd type="none" w="med" len="med"/>
+                      <a:tailEnd type="none" w="med" len="med"/>
+                    </a:lnL>
+                    <a:lnR w="12700" cap="flat" cmpd="sng" algn="ctr">
+                      <a:solidFill>
+                        <a:srgbClr val="2A3441"/>
+                      </a:solidFill>
+                      <a:prstDash val="solid"/>
+                      <a:round/>
+                      <a:headEnd type="none" w="med" len="med"/>
+                      <a:tailEnd type="none" w="med" len="med"/>
+                    </a:lnR>
+                    <a:lnT w="12700" cap="flat" cmpd="sng" algn="ctr">
+                      <a:solidFill>
+                        <a:srgbClr val="2A3441"/>
+                      </a:solidFill>
+                      <a:prstDash val="solid"/>
+                      <a:round/>
+                      <a:headEnd type="none" w="med" len="med"/>
+                      <a:tailEnd type="none" w="med" len="med"/>
+                    </a:lnT>
+                    <a:lnB w="12700" cap="flat" cmpd="sng" algn="ctr">
+                      <a:solidFill>
+                        <a:srgbClr val="2A3441"/>
+                      </a:solidFill>
+                      <a:prstDash val="solid"/>
+                      <a:round/>
+                      <a:headEnd type="none" w="med" len="med"/>
+                      <a:tailEnd type="none" w="med" len="med"/>
+                    </a:lnB>
+                    <a:solidFill>
+                      <a:srgbClr val="141B24"/>
+                    </a:solidFill>
+                  </a:tcPr>
+                </a:tc>
+                <a:tc>
+                  <a:txBody>
+                    <a:bodyPr/>
+                    <a:lstStyle/>
+                    <a:p>
+                      <a:pPr indent="0" marL="0">
+                        <a:buNone/>
+                      </a:pPr>
+                      <a:r>
+                        <a:rPr lang="en-US" sz="1300" dirty="0">
+                          <a:solidFill>
+                            <a:srgbClr val="E6EDF3"/>
+                          </a:solidFill>
+                          <a:latin typeface="Calibri" pitchFamily="34" charset="0"/>
+                          <a:ea typeface="Calibri" pitchFamily="34" charset="-122"/>
+                          <a:cs typeface="Calibri" pitchFamily="34" charset="-120"/>
+                        </a:rPr>
+                        <a:t>17.7</a:t>
+                      </a:r>
+                      <a:endParaRPr lang="en-US" sz="1300" dirty="0">
+                        <a:latin typeface="Calibri" charset="0"/>
+                        <a:ea typeface="Calibri" charset="0"/>
+                        <a:cs typeface="Calibri" charset="0"/>
+                      </a:endParaRPr>
+                    </a:p>
+                  </a:txBody>
+                  <a:tcPr marL="91440" marR="91440" marT="45720" marB="45720">
+                    <a:lnL w="12700" cap="flat" cmpd="sng" algn="ctr">
+                      <a:solidFill>
+                        <a:srgbClr val="2A3441"/>
+                      </a:solidFill>
+                      <a:prstDash val="solid"/>
+                      <a:round/>
+                      <a:headEnd type="none" w="med" len="med"/>
+                      <a:tailEnd type="none" w="med" len="med"/>
+                    </a:lnL>
+                    <a:lnR w="12700" cap="flat" cmpd="sng" algn="ctr">
+                      <a:solidFill>
+                        <a:srgbClr val="2A3441"/>
+                      </a:solidFill>
+                      <a:prstDash val="solid"/>
+                      <a:round/>
+                      <a:headEnd type="none" w="med" len="med"/>
+                      <a:tailEnd type="none" w="med" len="med"/>
+                    </a:lnR>
+                    <a:lnT w="12700" cap="flat" cmpd="sng" algn="ctr">
+                      <a:solidFill>
+                        <a:srgbClr val="2A3441"/>
+                      </a:solidFill>
+                      <a:prstDash val="solid"/>
+                      <a:round/>
+                      <a:headEnd type="none" w="med" len="med"/>
+                      <a:tailEnd type="none" w="med" len="med"/>
+                    </a:lnT>
+                    <a:lnB w="12700" cap="flat" cmpd="sng" algn="ctr">
+                      <a:solidFill>
+                        <a:srgbClr val="2A3441"/>
+                      </a:solidFill>
+                      <a:prstDash val="solid"/>
+                      <a:round/>
+                      <a:headEnd type="none" w="med" len="med"/>
+                      <a:tailEnd type="none" w="med" len="med"/>
+                    </a:lnB>
+                    <a:solidFill>
+                      <a:srgbClr val="141B24"/>
+                    </a:solidFill>
+                  </a:tcPr>
+                </a:tc>
+                <a:tc>
+                  <a:txBody>
+                    <a:bodyPr/>
+                    <a:lstStyle/>
+                    <a:p>
+                      <a:pPr indent="0" marL="0">
+                        <a:buNone/>
+                      </a:pPr>
+                      <a:r>
+                        <a:rPr lang="en-US" sz="1300" dirty="0">
+                          <a:solidFill>
+                            <a:srgbClr val="E6EDF3"/>
+                          </a:solidFill>
+                          <a:latin typeface="Calibri" pitchFamily="34" charset="0"/>
+                          <a:ea typeface="Calibri" pitchFamily="34" charset="-122"/>
+                          <a:cs typeface="Calibri" pitchFamily="34" charset="-120"/>
+                        </a:rPr>
+                        <a:t>13.4</a:t>
+                      </a:r>
+                      <a:endParaRPr lang="en-US" sz="1300" dirty="0">
+                        <a:latin typeface="Calibri" charset="0"/>
+                        <a:ea typeface="Calibri" charset="0"/>
+                        <a:cs typeface="Calibri" charset="0"/>
+                      </a:endParaRPr>
+                    </a:p>
+                  </a:txBody>
+                  <a:tcPr marL="91440" marR="91440" marT="45720" marB="45720">
+                    <a:lnL w="12700" cap="flat" cmpd="sng" algn="ctr">
+                      <a:solidFill>
+                        <a:srgbClr val="2A3441"/>
+                      </a:solidFill>
+                      <a:prstDash val="solid"/>
+                      <a:round/>
+                      <a:headEnd type="none" w="med" len="med"/>
+                      <a:tailEnd type="none" w="med" len="med"/>
+                    </a:lnL>
+                    <a:lnR w="12700" cap="flat" cmpd="sng" algn="ctr">
+                      <a:solidFill>
+                        <a:srgbClr val="2A3441"/>
+                      </a:solidFill>
+                      <a:prstDash val="solid"/>
+                      <a:round/>
+                      <a:headEnd type="none" w="med" len="med"/>
+                      <a:tailEnd type="none" w="med" len="med"/>
+                    </a:lnR>
+                    <a:lnT w="12700" cap="flat" cmpd="sng" algn="ctr">
+                      <a:solidFill>
+                        <a:srgbClr val="2A3441"/>
+                      </a:solidFill>
+                      <a:prstDash val="solid"/>
+                      <a:round/>
+                      <a:headEnd type="none" w="med" len="med"/>
+                      <a:tailEnd type="none" w="med" len="med"/>
+                    </a:lnT>
+                    <a:lnB w="12700" cap="flat" cmpd="sng" algn="ctr">
+                      <a:solidFill>
+                        <a:srgbClr val="2A3441"/>
+                      </a:solidFill>
+                      <a:prstDash val="solid"/>
+                      <a:round/>
+                      <a:headEnd type="none" w="med" len="med"/>
+                      <a:tailEnd type="none" w="med" len="med"/>
+                    </a:lnB>
+                    <a:solidFill>
+                      <a:srgbClr val="141B24"/>
+                    </a:solidFill>
+                  </a:tcPr>
+                </a:tc>
+                <a:tc>
+                  <a:txBody>
+                    <a:bodyPr/>
+                    <a:lstStyle/>
+                    <a:p>
+                      <a:pPr indent="0" marL="0">
+                        <a:buNone/>
+                      </a:pPr>
+                      <a:r>
+                        <a:rPr lang="en-US" sz="1300" dirty="0">
+                          <a:solidFill>
+                            <a:srgbClr val="E6EDF3"/>
+                          </a:solidFill>
+                          <a:latin typeface="Calibri" pitchFamily="34" charset="0"/>
+                          <a:ea typeface="Calibri" pitchFamily="34" charset="-122"/>
+                          <a:cs typeface="Calibri" pitchFamily="34" charset="-120"/>
+                        </a:rPr>
+                        <a:t>12.7</a:t>
+                      </a:r>
+                      <a:endParaRPr lang="en-US" sz="1300" dirty="0">
+                        <a:latin typeface="Calibri" charset="0"/>
+                        <a:ea typeface="Calibri" charset="0"/>
+                        <a:cs typeface="Calibri" charset="0"/>
+                      </a:endParaRPr>
+                    </a:p>
+                  </a:txBody>
+                  <a:tcPr marL="91440" marR="91440" marT="45720" marB="45720">
+                    <a:lnL w="12700" cap="flat" cmpd="sng" algn="ctr">
+                      <a:solidFill>
+                        <a:srgbClr val="2A3441"/>
+                      </a:solidFill>
+                      <a:prstDash val="solid"/>
+                      <a:round/>
+                      <a:headEnd type="none" w="med" len="med"/>
+                      <a:tailEnd type="none" w="med" len="med"/>
+                    </a:lnL>
+                    <a:lnR w="12700" cap="flat" cmpd="sng" algn="ctr">
+                      <a:solidFill>
+                        <a:srgbClr val="2A3441"/>
+                      </a:solidFill>
+                      <a:prstDash val="solid"/>
+                      <a:round/>
+                      <a:headEnd type="none" w="med" len="med"/>
+                      <a:tailEnd type="none" w="med" len="med"/>
+                    </a:lnR>
+                    <a:lnT w="12700" cap="flat" cmpd="sng" algn="ctr">
+                      <a:solidFill>
+                        <a:srgbClr val="2A3441"/>
+                      </a:solidFill>
+                      <a:prstDash val="solid"/>
+                      <a:round/>
+                      <a:headEnd type="none" w="med" len="med"/>
+                      <a:tailEnd type="none" w="med" len="med"/>
+                    </a:lnT>
+                    <a:lnB w="12700" cap="flat" cmpd="sng" algn="ctr">
+                      <a:solidFill>
+                        <a:srgbClr val="2A3441"/>
+                      </a:solidFill>
+                      <a:prstDash val="solid"/>
+                      <a:round/>
+                      <a:headEnd type="none" w="med" len="med"/>
+                      <a:tailEnd type="none" w="med" len="med"/>
+                    </a:lnB>
+                    <a:solidFill>
+                      <a:srgbClr val="141B24"/>
+                    </a:solidFill>
+                  </a:tcPr>
+                </a:tc>
+              </a:tr>
+              <a:tr h="402336">
+                <a:tc>
+                  <a:txBody>
+                    <a:bodyPr/>
+                    <a:lstStyle/>
+                    <a:p>
+                      <a:pPr indent="0" marL="0">
+                        <a:buNone/>
+                      </a:pPr>
+                      <a:r>
+                        <a:rPr lang="en-US" sz="1300" dirty="0">
+                          <a:solidFill>
+                            <a:srgbClr val="E6EDF3"/>
+                          </a:solidFill>
+                          <a:latin typeface="Calibri" pitchFamily="34" charset="0"/>
+                          <a:ea typeface="Calibri" pitchFamily="34" charset="-122"/>
+                          <a:cs typeface="Calibri" pitchFamily="34" charset="-120"/>
+                        </a:rPr>
+                        <a:t>Bandwidth rise</a:t>
+                      </a:r>
+                      <a:endParaRPr lang="en-US" sz="1300" dirty="0">
+                        <a:latin typeface="Calibri" charset="0"/>
+                        <a:ea typeface="Calibri" charset="0"/>
+                        <a:cs typeface="Calibri" charset="0"/>
+                      </a:endParaRPr>
+                    </a:p>
+                  </a:txBody>
+                  <a:tcPr marL="91440" marR="91440" marT="45720" marB="45720">
+                    <a:lnL w="12700" cap="flat" cmpd="sng" algn="ctr">
+                      <a:solidFill>
+                        <a:srgbClr val="2A3441"/>
+                      </a:solidFill>
+                      <a:prstDash val="solid"/>
+                      <a:round/>
+                      <a:headEnd type="none" w="med" len="med"/>
+                      <a:tailEnd type="none" w="med" len="med"/>
+                    </a:lnL>
+                    <a:lnR w="12700" cap="flat" cmpd="sng" algn="ctr">
+                      <a:solidFill>
+                        <a:srgbClr val="2A3441"/>
+                      </a:solidFill>
+                      <a:prstDash val="solid"/>
+                      <a:round/>
+                      <a:headEnd type="none" w="med" len="med"/>
+                      <a:tailEnd type="none" w="med" len="med"/>
+                    </a:lnR>
+                    <a:lnT w="12700" cap="flat" cmpd="sng" algn="ctr">
+                      <a:solidFill>
+                        <a:srgbClr val="2A3441"/>
+                      </a:solidFill>
+                      <a:prstDash val="solid"/>
+                      <a:round/>
+                      <a:headEnd type="none" w="med" len="med"/>
+                      <a:tailEnd type="none" w="med" len="med"/>
+                    </a:lnT>
+                    <a:lnB w="12700" cap="flat" cmpd="sng" algn="ctr">
+                      <a:solidFill>
+                        <a:srgbClr val="2A3441"/>
+                      </a:solidFill>
+                      <a:prstDash val="solid"/>
+                      <a:round/>
+                      <a:headEnd type="none" w="med" len="med"/>
+                      <a:tailEnd type="none" w="med" len="med"/>
+                    </a:lnB>
+                    <a:solidFill>
+                      <a:srgbClr val="141B24"/>
+                    </a:solidFill>
+                  </a:tcPr>
+                </a:tc>
+                <a:tc>
+                  <a:txBody>
+                    <a:bodyPr/>
+                    <a:lstStyle/>
+                    <a:p>
+                      <a:pPr indent="0" marL="0">
+                        <a:buNone/>
+                      </a:pPr>
+                      <a:r>
+                        <a:rPr lang="en-US" sz="1300" dirty="0">
+                          <a:solidFill>
+                            <a:srgbClr val="E6EDF3"/>
+                          </a:solidFill>
+                          <a:latin typeface="Calibri" pitchFamily="34" charset="0"/>
+                          <a:ea typeface="Calibri" pitchFamily="34" charset="-122"/>
+                          <a:cs typeface="Calibri" pitchFamily="34" charset="-120"/>
+                        </a:rPr>
+                        <a:t>9.2</a:t>
+                      </a:r>
+                      <a:endParaRPr lang="en-US" sz="1300" dirty="0">
+                        <a:latin typeface="Calibri" charset="0"/>
+                        <a:ea typeface="Calibri" charset="0"/>
+                        <a:cs typeface="Calibri" charset="0"/>
+                      </a:endParaRPr>
+                    </a:p>
+                  </a:txBody>
+                  <a:tcPr marL="91440" marR="91440" marT="45720" marB="45720">
+                    <a:lnL w="12700" cap="flat" cmpd="sng" algn="ctr">
+                      <a:solidFill>
+                        <a:srgbClr val="2A3441"/>
+                      </a:solidFill>
+                      <a:prstDash val="solid"/>
+                      <a:round/>
+                      <a:headEnd type="none" w="med" len="med"/>
+                      <a:tailEnd type="none" w="med" len="med"/>
+                    </a:lnL>
+                    <a:lnR w="12700" cap="flat" cmpd="sng" algn="ctr">
+                      <a:solidFill>
+                        <a:srgbClr val="2A3441"/>
+                      </a:solidFill>
+                      <a:prstDash val="solid"/>
+                      <a:round/>
+                      <a:headEnd type="none" w="med" len="med"/>
+                      <a:tailEnd type="none" w="med" len="med"/>
+                    </a:lnR>
+                    <a:lnT w="12700" cap="flat" cmpd="sng" algn="ctr">
+                      <a:solidFill>
+                        <a:srgbClr val="2A3441"/>
+                      </a:solidFill>
+                      <a:prstDash val="solid"/>
+                      <a:round/>
+                      <a:headEnd type="none" w="med" len="med"/>
+                      <a:tailEnd type="none" w="med" len="med"/>
+                    </a:lnT>
+                    <a:lnB w="12700" cap="flat" cmpd="sng" algn="ctr">
+                      <a:solidFill>
+                        <a:srgbClr val="2A3441"/>
+                      </a:solidFill>
+                      <a:prstDash val="solid"/>
+                      <a:round/>
+                      <a:headEnd type="none" w="med" len="med"/>
+                      <a:tailEnd type="none" w="med" len="med"/>
+                    </a:lnB>
+                    <a:solidFill>
+                      <a:srgbClr val="141B24"/>
+                    </a:solidFill>
+                  </a:tcPr>
+                </a:tc>
+                <a:tc>
+                  <a:txBody>
+                    <a:bodyPr/>
+                    <a:lstStyle/>
+                    <a:p>
+                      <a:pPr indent="0" marL="0">
+                        <a:buNone/>
+                      </a:pPr>
+                      <a:r>
+                        <a:rPr lang="en-US" sz="1300" dirty="0">
+                          <a:solidFill>
+                            <a:srgbClr val="E6EDF3"/>
+                          </a:solidFill>
+                          <a:latin typeface="Calibri" pitchFamily="34" charset="0"/>
+                          <a:ea typeface="Calibri" pitchFamily="34" charset="-122"/>
+                          <a:cs typeface="Calibri" pitchFamily="34" charset="-120"/>
+                        </a:rPr>
+                        <a:t>15.1</a:t>
+                      </a:r>
+                      <a:endParaRPr lang="en-US" sz="1300" dirty="0">
+                        <a:latin typeface="Calibri" charset="0"/>
+                        <a:ea typeface="Calibri" charset="0"/>
+                        <a:cs typeface="Calibri" charset="0"/>
+                      </a:endParaRPr>
+                    </a:p>
+                  </a:txBody>
+                  <a:tcPr marL="91440" marR="91440" marT="45720" marB="45720">
+                    <a:lnL w="12700" cap="flat" cmpd="sng" algn="ctr">
+                      <a:solidFill>
+                        <a:srgbClr val="2A3441"/>
+                      </a:solidFill>
+                      <a:prstDash val="solid"/>
+                      <a:round/>
+                      <a:headEnd type="none" w="med" len="med"/>
+                      <a:tailEnd type="none" w="med" len="med"/>
+                    </a:lnL>
+                    <a:lnR w="12700" cap="flat" cmpd="sng" algn="ctr">
+                      <a:solidFill>
+                        <a:srgbClr val="2A3441"/>
+                      </a:solidFill>
+                      <a:prstDash val="solid"/>
+                      <a:round/>
+                      <a:headEnd type="none" w="med" len="med"/>
+                      <a:tailEnd type="none" w="med" len="med"/>
+                    </a:lnR>
+                    <a:lnT w="12700" cap="flat" cmpd="sng" algn="ctr">
+                      <a:solidFill>
+                        <a:srgbClr val="2A3441"/>
+                      </a:solidFill>
+                      <a:prstDash val="solid"/>
+                      <a:round/>
+                      <a:headEnd type="none" w="med" len="med"/>
+                      <a:tailEnd type="none" w="med" len="med"/>
+                    </a:lnT>
+                    <a:lnB w="12700" cap="flat" cmpd="sng" algn="ctr">
+                      <a:solidFill>
+                        <a:srgbClr val="2A3441"/>
+                      </a:solidFill>
+                      <a:prstDash val="solid"/>
+                      <a:round/>
+                      <a:headEnd type="none" w="med" len="med"/>
+                      <a:tailEnd type="none" w="med" len="med"/>
+                    </a:lnB>
+                    <a:solidFill>
+                      <a:srgbClr val="141B24"/>
+                    </a:solidFill>
+                  </a:tcPr>
+                </a:tc>
+                <a:tc>
+                  <a:txBody>
+                    <a:bodyPr/>
+                    <a:lstStyle/>
+                    <a:p>
+                      <a:pPr indent="0" marL="0">
+                        <a:buNone/>
+                      </a:pPr>
+                      <a:r>
+                        <a:rPr lang="en-US" sz="1300" dirty="0">
+                          <a:solidFill>
+                            <a:srgbClr val="E6EDF3"/>
+                          </a:solidFill>
+                          <a:latin typeface="Calibri" pitchFamily="34" charset="0"/>
+                          <a:ea typeface="Calibri" pitchFamily="34" charset="-122"/>
+                          <a:cs typeface="Calibri" pitchFamily="34" charset="-120"/>
+                        </a:rPr>
+                        <a:t>5.0</a:t>
+                      </a:r>
+                      <a:endParaRPr lang="en-US" sz="1300" dirty="0">
+                        <a:latin typeface="Calibri" charset="0"/>
+                        <a:ea typeface="Calibri" charset="0"/>
+                        <a:cs typeface="Calibri" charset="0"/>
+                      </a:endParaRPr>
+                    </a:p>
+                  </a:txBody>
+                  <a:tcPr marL="91440" marR="91440" marT="45720" marB="45720">
+                    <a:lnL w="12700" cap="flat" cmpd="sng" algn="ctr">
+                      <a:solidFill>
+                        <a:srgbClr val="2A3441"/>
+                      </a:solidFill>
+                      <a:prstDash val="solid"/>
+                      <a:round/>
+                      <a:headEnd type="none" w="med" len="med"/>
+                      <a:tailEnd type="none" w="med" len="med"/>
+                    </a:lnL>
+                    <a:lnR w="12700" cap="flat" cmpd="sng" algn="ctr">
+                      <a:solidFill>
+                        <a:srgbClr val="2A3441"/>
+                      </a:solidFill>
+                      <a:prstDash val="solid"/>
+                      <a:round/>
+                      <a:headEnd type="none" w="med" len="med"/>
+                      <a:tailEnd type="none" w="med" len="med"/>
+                    </a:lnR>
+                    <a:lnT w="12700" cap="flat" cmpd="sng" algn="ctr">
+                      <a:solidFill>
+                        <a:srgbClr val="2A3441"/>
+                      </a:solidFill>
+                      <a:prstDash val="solid"/>
+                      <a:round/>
+                      <a:headEnd type="none" w="med" len="med"/>
+                      <a:tailEnd type="none" w="med" len="med"/>
+                    </a:lnT>
+                    <a:lnB w="12700" cap="flat" cmpd="sng" algn="ctr">
+                      <a:solidFill>
+                        <a:srgbClr val="2A3441"/>
+                      </a:solidFill>
+                      <a:prstDash val="solid"/>
+                      <a:round/>
+                      <a:headEnd type="none" w="med" len="med"/>
+                      <a:tailEnd type="none" w="med" len="med"/>
+                    </a:lnB>
+                    <a:solidFill>
+                      <a:srgbClr val="141B24"/>
+                    </a:solidFill>
+                  </a:tcPr>
+                </a:tc>
+                <a:tc>
+                  <a:txBody>
+                    <a:bodyPr/>
+                    <a:lstStyle/>
+                    <a:p>
+                      <a:pPr indent="0" marL="0">
+                        <a:buNone/>
+                      </a:pPr>
+                      <a:r>
+                        <a:rPr lang="en-US" sz="1300" dirty="0">
+                          <a:solidFill>
+                            <a:srgbClr val="E6EDF3"/>
+                          </a:solidFill>
+                          <a:latin typeface="Calibri" pitchFamily="34" charset="0"/>
+                          <a:ea typeface="Calibri" pitchFamily="34" charset="-122"/>
+                          <a:cs typeface="Calibri" pitchFamily="34" charset="-120"/>
+                        </a:rPr>
+                        <a:t>4.3</a:t>
+                      </a:r>
+                      <a:endParaRPr lang="en-US" sz="1300" dirty="0">
+                        <a:latin typeface="Calibri" charset="0"/>
+                        <a:ea typeface="Calibri" charset="0"/>
+                        <a:cs typeface="Calibri" charset="0"/>
+                      </a:endParaRPr>
+                    </a:p>
+                  </a:txBody>
+                  <a:tcPr marL="91440" marR="91440" marT="45720" marB="45720">
+                    <a:lnL w="12700" cap="flat" cmpd="sng" algn="ctr">
+                      <a:solidFill>
+                        <a:srgbClr val="2A3441"/>
+                      </a:solidFill>
+                      <a:prstDash val="solid"/>
+                      <a:round/>
+                      <a:headEnd type="none" w="med" len="med"/>
+                      <a:tailEnd type="none" w="med" len="med"/>
+                    </a:lnL>
+                    <a:lnR w="12700" cap="flat" cmpd="sng" algn="ctr">
+                      <a:solidFill>
+                        <a:srgbClr val="2A3441"/>
+                      </a:solidFill>
+                      <a:prstDash val="solid"/>
+                      <a:round/>
+                      <a:headEnd type="none" w="med" len="med"/>
+                      <a:tailEnd type="none" w="med" len="med"/>
+                    </a:lnR>
+                    <a:lnT w="12700" cap="flat" cmpd="sng" algn="ctr">
+                      <a:solidFill>
+                        <a:srgbClr val="2A3441"/>
+                      </a:solidFill>
+                      <a:prstDash val="solid"/>
+                      <a:round/>
+                      <a:headEnd type="none" w="med" len="med"/>
+                      <a:tailEnd type="none" w="med" len="med"/>
+                    </a:lnT>
+                    <a:lnB w="12700" cap="flat" cmpd="sng" algn="ctr">
+                      <a:solidFill>
+                        <a:srgbClr val="2A3441"/>
+                      </a:solidFill>
+                      <a:prstDash val="solid"/>
+                      <a:round/>
+                      <a:headEnd type="none" w="med" len="med"/>
+                      <a:tailEnd type="none" w="med" len="med"/>
+                    </a:lnB>
+                    <a:solidFill>
+                      <a:srgbClr val="141B24"/>
+                    </a:solidFill>
+                  </a:tcPr>
+                </a:tc>
+              </a:tr>
+              <a:tr h="402336">
+                <a:tc>
+                  <a:txBody>
+                    <a:bodyPr/>
+                    <a:lstStyle/>
+                    <a:p>
+                      <a:pPr indent="0" marL="0">
+                        <a:buNone/>
+                      </a:pPr>
+                      <a:r>
+                        <a:rPr lang="en-US" sz="1300" dirty="0">
+                          <a:solidFill>
+                            <a:srgbClr val="E6EDF3"/>
+                          </a:solidFill>
+                          <a:latin typeface="Calibri" pitchFamily="34" charset="0"/>
+                          <a:ea typeface="Calibri" pitchFamily="34" charset="-122"/>
+                          <a:cs typeface="Calibri" pitchFamily="34" charset="-120"/>
+                        </a:rPr>
+                        <a:t>Delay jump</a:t>
+                      </a:r>
+                      <a:endParaRPr lang="en-US" sz="1300" dirty="0">
+                        <a:latin typeface="Calibri" charset="0"/>
+                        <a:ea typeface="Calibri" charset="0"/>
+                        <a:cs typeface="Calibri" charset="0"/>
+                      </a:endParaRPr>
+                    </a:p>
+                  </a:txBody>
+                  <a:tcPr marL="91440" marR="91440" marT="45720" marB="45720">
+                    <a:lnL w="12700" cap="flat" cmpd="sng" algn="ctr">
+                      <a:solidFill>
+                        <a:srgbClr val="2A3441"/>
+                      </a:solidFill>
+                      <a:prstDash val="solid"/>
+                      <a:round/>
+                      <a:headEnd type="none" w="med" len="med"/>
+                      <a:tailEnd type="none" w="med" len="med"/>
+                    </a:lnL>
+                    <a:lnR w="12700" cap="flat" cmpd="sng" algn="ctr">
+                      <a:solidFill>
+                        <a:srgbClr val="2A3441"/>
+                      </a:solidFill>
+                      <a:prstDash val="solid"/>
+                      <a:round/>
+                      <a:headEnd type="none" w="med" len="med"/>
+                      <a:tailEnd type="none" w="med" len="med"/>
+                    </a:lnR>
+                    <a:lnT w="12700" cap="flat" cmpd="sng" algn="ctr">
+                      <a:solidFill>
+                        <a:srgbClr val="2A3441"/>
+                      </a:solidFill>
+                      <a:prstDash val="solid"/>
+                      <a:round/>
+                      <a:headEnd type="none" w="med" len="med"/>
+                      <a:tailEnd type="none" w="med" len="med"/>
+                    </a:lnT>
+                    <a:lnB w="12700" cap="flat" cmpd="sng" algn="ctr">
+                      <a:solidFill>
+                        <a:srgbClr val="2A3441"/>
+                      </a:solidFill>
+                      <a:prstDash val="solid"/>
+                      <a:round/>
+                      <a:headEnd type="none" w="med" len="med"/>
+                      <a:tailEnd type="none" w="med" len="med"/>
+                    </a:lnB>
+                    <a:solidFill>
+                      <a:srgbClr val="141B24"/>
+                    </a:solidFill>
+                  </a:tcPr>
+                </a:tc>
+                <a:tc>
+                  <a:txBody>
+                    <a:bodyPr/>
+                    <a:lstStyle/>
+                    <a:p>
+                      <a:pPr indent="0" marL="0">
+                        <a:buNone/>
+                      </a:pPr>
+                      <a:r>
+                        <a:rPr lang="en-US" sz="1300" dirty="0">
+                          <a:solidFill>
+                            <a:srgbClr val="E6EDF3"/>
+                          </a:solidFill>
+                          <a:latin typeface="Calibri" pitchFamily="34" charset="0"/>
+                          <a:ea typeface="Calibri" pitchFamily="34" charset="-122"/>
+                          <a:cs typeface="Calibri" pitchFamily="34" charset="-120"/>
+                        </a:rPr>
+                        <a:t>33.3</a:t>
+                      </a:r>
+                      <a:endParaRPr lang="en-US" sz="1300" dirty="0">
+                        <a:latin typeface="Calibri" charset="0"/>
+                        <a:ea typeface="Calibri" charset="0"/>
+                        <a:cs typeface="Calibri" charset="0"/>
+                      </a:endParaRPr>
+                    </a:p>
+                  </a:txBody>
+                  <a:tcPr marL="91440" marR="91440" marT="45720" marB="45720">
+                    <a:lnL w="12700" cap="flat" cmpd="sng" algn="ctr">
+                      <a:solidFill>
+                        <a:srgbClr val="2A3441"/>
+                      </a:solidFill>
+                      <a:prstDash val="solid"/>
+                      <a:round/>
+                      <a:headEnd type="none" w="med" len="med"/>
+                      <a:tailEnd type="none" w="med" len="med"/>
+                    </a:lnL>
+                    <a:lnR w="12700" cap="flat" cmpd="sng" algn="ctr">
+                      <a:solidFill>
+                        <a:srgbClr val="2A3441"/>
+                      </a:solidFill>
+                      <a:prstDash val="solid"/>
+                      <a:round/>
+                      <a:headEnd type="none" w="med" len="med"/>
+                      <a:tailEnd type="none" w="med" len="med"/>
+                    </a:lnR>
+                    <a:lnT w="12700" cap="flat" cmpd="sng" algn="ctr">
+                      <a:solidFill>
+                        <a:srgbClr val="2A3441"/>
+                      </a:solidFill>
+                      <a:prstDash val="solid"/>
+                      <a:round/>
+                      <a:headEnd type="none" w="med" len="med"/>
+                      <a:tailEnd type="none" w="med" len="med"/>
+                    </a:lnT>
+                    <a:lnB w="12700" cap="flat" cmpd="sng" algn="ctr">
+                      <a:solidFill>
+                        <a:srgbClr val="2A3441"/>
+                      </a:solidFill>
+                      <a:prstDash val="solid"/>
+                      <a:round/>
+                      <a:headEnd type="none" w="med" len="med"/>
+                      <a:tailEnd type="none" w="med" len="med"/>
+                    </a:lnB>
+                    <a:solidFill>
+                      <a:srgbClr val="141B24"/>
+                    </a:solidFill>
+                  </a:tcPr>
+                </a:tc>
+                <a:tc>
+                  <a:txBody>
+                    <a:bodyPr/>
+                    <a:lstStyle/>
+                    <a:p>
+                      <a:pPr indent="0" marL="0">
+                        <a:buNone/>
+                      </a:pPr>
+                      <a:r>
+                        <a:rPr lang="en-US" sz="1300" dirty="0">
+                          <a:solidFill>
+                            <a:srgbClr val="E6EDF3"/>
+                          </a:solidFill>
+                          <a:latin typeface="Calibri" pitchFamily="34" charset="0"/>
+                          <a:ea typeface="Calibri" pitchFamily="34" charset="-122"/>
+                          <a:cs typeface="Calibri" pitchFamily="34" charset="-120"/>
+                        </a:rPr>
+                        <a:t>27.5</a:t>
+                      </a:r>
+                      <a:endParaRPr lang="en-US" sz="1300" dirty="0">
+                        <a:latin typeface="Calibri" charset="0"/>
+                        <a:ea typeface="Calibri" charset="0"/>
+                        <a:cs typeface="Calibri" charset="0"/>
+                      </a:endParaRPr>
+                    </a:p>
+                  </a:txBody>
+                  <a:tcPr marL="91440" marR="91440" marT="45720" marB="45720">
+                    <a:lnL w="12700" cap="flat" cmpd="sng" algn="ctr">
+                      <a:solidFill>
+                        <a:srgbClr val="2A3441"/>
+                      </a:solidFill>
+                      <a:prstDash val="solid"/>
+                      <a:round/>
+                      <a:headEnd type="none" w="med" len="med"/>
+                      <a:tailEnd type="none" w="med" len="med"/>
+                    </a:lnL>
+                    <a:lnR w="12700" cap="flat" cmpd="sng" algn="ctr">
+                      <a:solidFill>
+                        <a:srgbClr val="2A3441"/>
+                      </a:solidFill>
+                      <a:prstDash val="solid"/>
+                      <a:round/>
+                      <a:headEnd type="none" w="med" len="med"/>
+                      <a:tailEnd type="none" w="med" len="med"/>
+                    </a:lnR>
+                    <a:lnT w="12700" cap="flat" cmpd="sng" algn="ctr">
+                      <a:solidFill>
+                        <a:srgbClr val="2A3441"/>
+                      </a:solidFill>
+                      <a:prstDash val="solid"/>
+                      <a:round/>
+                      <a:headEnd type="none" w="med" len="med"/>
+                      <a:tailEnd type="none" w="med" len="med"/>
+                    </a:lnT>
+                    <a:lnB w="12700" cap="flat" cmpd="sng" algn="ctr">
+                      <a:solidFill>
+                        <a:srgbClr val="2A3441"/>
+                      </a:solidFill>
+                      <a:prstDash val="solid"/>
+                      <a:round/>
+                      <a:headEnd type="none" w="med" len="med"/>
+                      <a:tailEnd type="none" w="med" len="med"/>
+                    </a:lnB>
+                    <a:solidFill>
+                      <a:srgbClr val="141B24"/>
+                    </a:solidFill>
+                  </a:tcPr>
+                </a:tc>
+                <a:tc>
+                  <a:txBody>
+                    <a:bodyPr/>
+                    <a:lstStyle/>
+                    <a:p>
+                      <a:pPr indent="0" marL="0">
+                        <a:buNone/>
+                      </a:pPr>
+                      <a:r>
+                        <a:rPr lang="en-US" sz="1300" dirty="0">
+                          <a:solidFill>
+                            <a:srgbClr val="E6EDF3"/>
+                          </a:solidFill>
+                          <a:latin typeface="Calibri" pitchFamily="34" charset="0"/>
+                          <a:ea typeface="Calibri" pitchFamily="34" charset="-122"/>
+                          <a:cs typeface="Calibri" pitchFamily="34" charset="-120"/>
+                        </a:rPr>
+                        <a:t>25.9</a:t>
+                      </a:r>
+                      <a:endParaRPr lang="en-US" sz="1300" dirty="0">
+                        <a:latin typeface="Calibri" charset="0"/>
+                        <a:ea typeface="Calibri" charset="0"/>
+                        <a:cs typeface="Calibri" charset="0"/>
+                      </a:endParaRPr>
+                    </a:p>
+                  </a:txBody>
+                  <a:tcPr marL="91440" marR="91440" marT="45720" marB="45720">
+                    <a:lnL w="12700" cap="flat" cmpd="sng" algn="ctr">
+                      <a:solidFill>
+                        <a:srgbClr val="2A3441"/>
+                      </a:solidFill>
+                      <a:prstDash val="solid"/>
+                      <a:round/>
+                      <a:headEnd type="none" w="med" len="med"/>
+                      <a:tailEnd type="none" w="med" len="med"/>
+                    </a:lnL>
+                    <a:lnR w="12700" cap="flat" cmpd="sng" algn="ctr">
+                      <a:solidFill>
+                        <a:srgbClr val="2A3441"/>
+                      </a:solidFill>
+                      <a:prstDash val="solid"/>
+                      <a:round/>
+                      <a:headEnd type="none" w="med" len="med"/>
+                      <a:tailEnd type="none" w="med" len="med"/>
+                    </a:lnR>
+                    <a:lnT w="12700" cap="flat" cmpd="sng" algn="ctr">
+                      <a:solidFill>
+                        <a:srgbClr val="2A3441"/>
+                      </a:solidFill>
+                      <a:prstDash val="solid"/>
+                      <a:round/>
+                      <a:headEnd type="none" w="med" len="med"/>
+                      <a:tailEnd type="none" w="med" len="med"/>
+                    </a:lnT>
+                    <a:lnB w="12700" cap="flat" cmpd="sng" algn="ctr">
+                      <a:solidFill>
+                        <a:srgbClr val="2A3441"/>
+                      </a:solidFill>
+                      <a:prstDash val="solid"/>
+                      <a:round/>
+                      <a:headEnd type="none" w="med" len="med"/>
+                      <a:tailEnd type="none" w="med" len="med"/>
+                    </a:lnB>
+                    <a:solidFill>
+                      <a:srgbClr val="141B24"/>
+                    </a:solidFill>
+                  </a:tcPr>
+                </a:tc>
+                <a:tc>
+                  <a:txBody>
+                    <a:bodyPr/>
+                    <a:lstStyle/>
+                    <a:p>
+                      <a:pPr indent="0" marL="0">
+                        <a:buNone/>
+                      </a:pPr>
+                      <a:r>
+                        <a:rPr lang="en-US" sz="1300" dirty="0">
+                          <a:solidFill>
+                            <a:srgbClr val="E6EDF3"/>
+                          </a:solidFill>
+                          <a:latin typeface="Calibri" pitchFamily="34" charset="0"/>
+                          <a:ea typeface="Calibri" pitchFamily="34" charset="-122"/>
+                          <a:cs typeface="Calibri" pitchFamily="34" charset="-120"/>
+                        </a:rPr>
+                        <a:t>19.8</a:t>
+                      </a:r>
+                      <a:endParaRPr lang="en-US" sz="1300" dirty="0">
+                        <a:latin typeface="Calibri" charset="0"/>
+                        <a:ea typeface="Calibri" charset="0"/>
+                        <a:cs typeface="Calibri" charset="0"/>
+                      </a:endParaRPr>
+                    </a:p>
+                  </a:txBody>
+                  <a:tcPr marL="91440" marR="91440" marT="45720" marB="45720">
+                    <a:lnL w="12700" cap="flat" cmpd="sng" algn="ctr">
+                      <a:solidFill>
+                        <a:srgbClr val="2A3441"/>
+                      </a:solidFill>
+                      <a:prstDash val="solid"/>
+                      <a:round/>
+                      <a:headEnd type="none" w="med" len="med"/>
+                      <a:tailEnd type="none" w="med" len="med"/>
+                    </a:lnL>
+                    <a:lnR w="12700" cap="flat" cmpd="sng" algn="ctr">
+                      <a:solidFill>
+                        <a:srgbClr val="2A3441"/>
+                      </a:solidFill>
+                      <a:prstDash val="solid"/>
+                      <a:round/>
+                      <a:headEnd type="none" w="med" len="med"/>
+                      <a:tailEnd type="none" w="med" len="med"/>
+                    </a:lnR>
+                    <a:lnT w="12700" cap="flat" cmpd="sng" algn="ctr">
+                      <a:solidFill>
+                        <a:srgbClr val="2A3441"/>
+                      </a:solidFill>
+                      <a:prstDash val="solid"/>
+                      <a:round/>
+                      <a:headEnd type="none" w="med" len="med"/>
+                      <a:tailEnd type="none" w="med" len="med"/>
+                    </a:lnT>
+                    <a:lnB w="12700" cap="flat" cmpd="sng" algn="ctr">
+                      <a:solidFill>
+                        <a:srgbClr val="2A3441"/>
+                      </a:solidFill>
+                      <a:prstDash val="solid"/>
+                      <a:round/>
+                      <a:headEnd type="none" w="med" len="med"/>
+                      <a:tailEnd type="none" w="med" len="med"/>
+                    </a:lnB>
+                    <a:solidFill>
+                      <a:srgbClr val="141B24"/>
+                    </a:solidFill>
+                  </a:tcPr>
+                </a:tc>
+              </a:tr>
+              <a:tr h="402336">
+                <a:tc>
+                  <a:txBody>
+                    <a:bodyPr/>
+                    <a:lstStyle/>
+                    <a:p>
+                      <a:pPr indent="0" marL="0">
+                        <a:buNone/>
+                      </a:pPr>
+                      <a:r>
+                        <a:rPr lang="en-US" sz="1300" dirty="0">
+                          <a:solidFill>
+                            <a:srgbClr val="E6EDF3"/>
+                          </a:solidFill>
+                          <a:latin typeface="Calibri" pitchFamily="34" charset="0"/>
+                          <a:ea typeface="Calibri" pitchFamily="34" charset="-122"/>
+                          <a:cs typeface="Calibri" pitchFamily="34" charset="-120"/>
+                        </a:rPr>
+                        <a:t>Hand-over pattern</a:t>
+                      </a:r>
+                      <a:endParaRPr lang="en-US" sz="1300" dirty="0">
+                        <a:latin typeface="Calibri" charset="0"/>
+                        <a:ea typeface="Calibri" charset="0"/>
+                        <a:cs typeface="Calibri" charset="0"/>
+                      </a:endParaRPr>
+                    </a:p>
+                  </a:txBody>
+                  <a:tcPr marL="91440" marR="91440" marT="45720" marB="45720">
+                    <a:lnL w="12700" cap="flat" cmpd="sng" algn="ctr">
+                      <a:solidFill>
+                        <a:srgbClr val="2A3441"/>
+                      </a:solidFill>
+                      <a:prstDash val="solid"/>
+                      <a:round/>
+                      <a:headEnd type="none" w="med" len="med"/>
+                      <a:tailEnd type="none" w="med" len="med"/>
+                    </a:lnL>
+                    <a:lnR w="12700" cap="flat" cmpd="sng" algn="ctr">
+                      <a:solidFill>
+                        <a:srgbClr val="2A3441"/>
+                      </a:solidFill>
+                      <a:prstDash val="solid"/>
+                      <a:round/>
+                      <a:headEnd type="none" w="med" len="med"/>
+                      <a:tailEnd type="none" w="med" len="med"/>
+                    </a:lnR>
+                    <a:lnT w="12700" cap="flat" cmpd="sng" algn="ctr">
+                      <a:solidFill>
+                        <a:srgbClr val="2A3441"/>
+                      </a:solidFill>
+                      <a:prstDash val="solid"/>
+                      <a:round/>
+                      <a:headEnd type="none" w="med" len="med"/>
+                      <a:tailEnd type="none" w="med" len="med"/>
+                    </a:lnT>
+                    <a:lnB w="12700" cap="flat" cmpd="sng" algn="ctr">
+                      <a:solidFill>
+                        <a:srgbClr val="2A3441"/>
+                      </a:solidFill>
+                      <a:prstDash val="solid"/>
+                      <a:round/>
+                      <a:headEnd type="none" w="med" len="med"/>
+                      <a:tailEnd type="none" w="med" len="med"/>
+                    </a:lnB>
+                    <a:solidFill>
+                      <a:srgbClr val="141B24"/>
+                    </a:solidFill>
+                  </a:tcPr>
+                </a:tc>
+                <a:tc>
+                  <a:txBody>
+                    <a:bodyPr/>
+                    <a:lstStyle/>
+                    <a:p>
+                      <a:pPr indent="0" marL="0">
+                        <a:buNone/>
+                      </a:pPr>
+                      <a:r>
+                        <a:rPr lang="en-US" sz="1300" dirty="0">
+                          <a:solidFill>
+                            <a:srgbClr val="E6EDF3"/>
+                          </a:solidFill>
+                          <a:latin typeface="Calibri" pitchFamily="34" charset="0"/>
+                          <a:ea typeface="Calibri" pitchFamily="34" charset="-122"/>
+                          <a:cs typeface="Calibri" pitchFamily="34" charset="-120"/>
+                        </a:rPr>
+                        <a:t>12.8</a:t>
+                      </a:r>
+                      <a:endParaRPr lang="en-US" sz="1300" dirty="0">
+                        <a:latin typeface="Calibri" charset="0"/>
+                        <a:ea typeface="Calibri" charset="0"/>
+                        <a:cs typeface="Calibri" charset="0"/>
+                      </a:endParaRPr>
+                    </a:p>
+                  </a:txBody>
+                  <a:tcPr marL="91440" marR="91440" marT="45720" marB="45720">
+                    <a:lnL w="12700" cap="flat" cmpd="sng" algn="ctr">
+                      <a:solidFill>
+                        <a:srgbClr val="2A3441"/>
+                      </a:solidFill>
+                      <a:prstDash val="solid"/>
+                      <a:round/>
+                      <a:headEnd type="none" w="med" len="med"/>
+                      <a:tailEnd type="none" w="med" len="med"/>
+                    </a:lnL>
+                    <a:lnR w="12700" cap="flat" cmpd="sng" algn="ctr">
+                      <a:solidFill>
+                        <a:srgbClr val="2A3441"/>
+                      </a:solidFill>
+                      <a:prstDash val="solid"/>
+                      <a:round/>
+                      <a:headEnd type="none" w="med" len="med"/>
+                      <a:tailEnd type="none" w="med" len="med"/>
+                    </a:lnR>
+                    <a:lnT w="12700" cap="flat" cmpd="sng" algn="ctr">
+                      <a:solidFill>
+                        <a:srgbClr val="2A3441"/>
+                      </a:solidFill>
+                      <a:prstDash val="solid"/>
+                      <a:round/>
+                      <a:headEnd type="none" w="med" len="med"/>
+                      <a:tailEnd type="none" w="med" len="med"/>
+                    </a:lnT>
+                    <a:lnB w="12700" cap="flat" cmpd="sng" algn="ctr">
+                      <a:solidFill>
+                        <a:srgbClr val="2A3441"/>
+                      </a:solidFill>
+                      <a:prstDash val="solid"/>
+                      <a:round/>
+                      <a:headEnd type="none" w="med" len="med"/>
+                      <a:tailEnd type="none" w="med" len="med"/>
+                    </a:lnB>
+                    <a:solidFill>
+                      <a:srgbClr val="141B24"/>
+                    </a:solidFill>
+                  </a:tcPr>
+                </a:tc>
+                <a:tc>
+                  <a:txBody>
+                    <a:bodyPr/>
+                    <a:lstStyle/>
+                    <a:p>
+                      <a:pPr indent="0" marL="0">
+                        <a:buNone/>
+                      </a:pPr>
+                      <a:r>
+                        <a:rPr lang="en-US" sz="1300" dirty="0">
+                          <a:solidFill>
+                            <a:srgbClr val="E6EDF3"/>
+                          </a:solidFill>
+                          <a:latin typeface="Calibri" pitchFamily="34" charset="0"/>
+                          <a:ea typeface="Calibri" pitchFamily="34" charset="-122"/>
+                          <a:cs typeface="Calibri" pitchFamily="34" charset="-120"/>
+                        </a:rPr>
+                        <a:t>21.4</a:t>
+                      </a:r>
+                      <a:endParaRPr lang="en-US" sz="1300" dirty="0">
+                        <a:latin typeface="Calibri" charset="0"/>
+                        <a:ea typeface="Calibri" charset="0"/>
+                        <a:cs typeface="Calibri" charset="0"/>
+                      </a:endParaRPr>
+                    </a:p>
+                  </a:txBody>
+                  <a:tcPr marL="91440" marR="91440" marT="45720" marB="45720">
+                    <a:lnL w="12700" cap="flat" cmpd="sng" algn="ctr">
+                      <a:solidFill>
+                        <a:srgbClr val="2A3441"/>
+                      </a:solidFill>
+                      <a:prstDash val="solid"/>
+                      <a:round/>
+                      <a:headEnd type="none" w="med" len="med"/>
+                      <a:tailEnd type="none" w="med" len="med"/>
+                    </a:lnL>
+                    <a:lnR w="12700" cap="flat" cmpd="sng" algn="ctr">
+                      <a:solidFill>
+                        <a:srgbClr val="2A3441"/>
+                      </a:solidFill>
+                      <a:prstDash val="solid"/>
+                      <a:round/>
+                      <a:headEnd type="none" w="med" len="med"/>
+                      <a:tailEnd type="none" w="med" len="med"/>
+                    </a:lnR>
+                    <a:lnT w="12700" cap="flat" cmpd="sng" algn="ctr">
+                      <a:solidFill>
+                        <a:srgbClr val="2A3441"/>
+                      </a:solidFill>
+                      <a:prstDash val="solid"/>
+                      <a:round/>
+                      <a:headEnd type="none" w="med" len="med"/>
+                      <a:tailEnd type="none" w="med" len="med"/>
+                    </a:lnT>
+                    <a:lnB w="12700" cap="flat" cmpd="sng" algn="ctr">
+                      <a:solidFill>
+                        <a:srgbClr val="2A3441"/>
+                      </a:solidFill>
+                      <a:prstDash val="solid"/>
+                      <a:round/>
+                      <a:headEnd type="none" w="med" len="med"/>
+                      <a:tailEnd type="none" w="med" len="med"/>
+                    </a:lnB>
+                    <a:solidFill>
+                      <a:srgbClr val="141B24"/>
+                    </a:solidFill>
+                  </a:tcPr>
+                </a:tc>
+                <a:tc>
+                  <a:txBody>
+                    <a:bodyPr/>
+                    <a:lstStyle/>
+                    <a:p>
+                      <a:pPr indent="0" marL="0">
+                        <a:buNone/>
+                      </a:pPr>
+                      <a:r>
+                        <a:rPr lang="en-US" sz="1300" dirty="0">
+                          <a:solidFill>
+                            <a:srgbClr val="E6EDF3"/>
+                          </a:solidFill>
+                          <a:latin typeface="Calibri" pitchFamily="34" charset="0"/>
+                          <a:ea typeface="Calibri" pitchFamily="34" charset="-122"/>
+                          <a:cs typeface="Calibri" pitchFamily="34" charset="-120"/>
+                        </a:rPr>
+                        <a:t>10.8</a:t>
+                      </a:r>
+                      <a:endParaRPr lang="en-US" sz="1300" dirty="0">
+                        <a:latin typeface="Calibri" charset="0"/>
+                        <a:ea typeface="Calibri" charset="0"/>
+                        <a:cs typeface="Calibri" charset="0"/>
+                      </a:endParaRPr>
+                    </a:p>
+                  </a:txBody>
+                  <a:tcPr marL="91440" marR="91440" marT="45720" marB="45720">
+                    <a:lnL w="12700" cap="flat" cmpd="sng" algn="ctr">
+                      <a:solidFill>
+                        <a:srgbClr val="2A3441"/>
+                      </a:solidFill>
+                      <a:prstDash val="solid"/>
+                      <a:round/>
+                      <a:headEnd type="none" w="med" len="med"/>
+                      <a:tailEnd type="none" w="med" len="med"/>
+                    </a:lnL>
+                    <a:lnR w="12700" cap="flat" cmpd="sng" algn="ctr">
+                      <a:solidFill>
+                        <a:srgbClr val="2A3441"/>
+                      </a:solidFill>
+                      <a:prstDash val="solid"/>
+                      <a:round/>
+                      <a:headEnd type="none" w="med" len="med"/>
+                      <a:tailEnd type="none" w="med" len="med"/>
+                    </a:lnR>
+                    <a:lnT w="12700" cap="flat" cmpd="sng" algn="ctr">
+                      <a:solidFill>
+                        <a:srgbClr val="2A3441"/>
+                      </a:solidFill>
+                      <a:prstDash val="solid"/>
+                      <a:round/>
+                      <a:headEnd type="none" w="med" len="med"/>
+                      <a:tailEnd type="none" w="med" len="med"/>
+                    </a:lnT>
+                    <a:lnB w="12700" cap="flat" cmpd="sng" algn="ctr">
+                      <a:solidFill>
+                        <a:srgbClr val="2A3441"/>
+                      </a:solidFill>
+                      <a:prstDash val="solid"/>
+                      <a:round/>
+                      <a:headEnd type="none" w="med" len="med"/>
+                      <a:tailEnd type="none" w="med" len="med"/>
+                    </a:lnB>
+                    <a:solidFill>
+                      <a:srgbClr val="141B24"/>
+                    </a:solidFill>
+                  </a:tcPr>
+                </a:tc>
+                <a:tc>
+                  <a:txBody>
+                    <a:bodyPr/>
+                    <a:lstStyle/>
+                    <a:p>
+                      <a:pPr indent="0" marL="0">
+                        <a:buNone/>
+                      </a:pPr>
+                      <a:r>
+                        <a:rPr lang="en-US" sz="1300" dirty="0">
+                          <a:solidFill>
+                            <a:srgbClr val="E6EDF3"/>
+                          </a:solidFill>
+                          <a:latin typeface="Calibri" pitchFamily="34" charset="0"/>
+                          <a:ea typeface="Calibri" pitchFamily="34" charset="-122"/>
+                          <a:cs typeface="Calibri" pitchFamily="34" charset="-120"/>
+                        </a:rPr>
+                        <a:t>8.2</a:t>
+                      </a:r>
+                      <a:endParaRPr lang="en-US" sz="1300" dirty="0">
+                        <a:latin typeface="Calibri" charset="0"/>
+                        <a:ea typeface="Calibri" charset="0"/>
+                        <a:cs typeface="Calibri" charset="0"/>
+                      </a:endParaRPr>
+                    </a:p>
+                  </a:txBody>
+                  <a:tcPr marL="91440" marR="91440" marT="45720" marB="45720">
+                    <a:lnL w="12700" cap="flat" cmpd="sng" algn="ctr">
+                      <a:solidFill>
+                        <a:srgbClr val="2A3441"/>
+                      </a:solidFill>
+                      <a:prstDash val="solid"/>
+                      <a:round/>
+                      <a:headEnd type="none" w="med" len="med"/>
+                      <a:tailEnd type="none" w="med" len="med"/>
+                    </a:lnL>
+                    <a:lnR w="12700" cap="flat" cmpd="sng" algn="ctr">
+                      <a:solidFill>
+                        <a:srgbClr val="2A3441"/>
+                      </a:solidFill>
+                      <a:prstDash val="solid"/>
+                      <a:round/>
+                      <a:headEnd type="none" w="med" len="med"/>
+                      <a:tailEnd type="none" w="med" len="med"/>
+                    </a:lnR>
+                    <a:lnT w="12700" cap="flat" cmpd="sng" algn="ctr">
+                      <a:solidFill>
+                        <a:srgbClr val="2A3441"/>
+                      </a:solidFill>
+                      <a:prstDash val="solid"/>
+                      <a:round/>
+                      <a:headEnd type="none" w="med" len="med"/>
+                      <a:tailEnd type="none" w="med" len="med"/>
+                    </a:lnT>
+                    <a:lnB w="12700" cap="flat" cmpd="sng" algn="ctr">
+                      <a:solidFill>
+                        <a:srgbClr val="2A3441"/>
+                      </a:solidFill>
+                      <a:prstDash val="solid"/>
+                      <a:round/>
+                      <a:headEnd type="none" w="med" len="med"/>
+                      <a:tailEnd type="none" w="med" len="med"/>
+                    </a:lnB>
+                    <a:solidFill>
+                      <a:srgbClr val="141B24"/>
+                    </a:solidFill>
+                  </a:tcPr>
+                </a:tc>
+              </a:tr>
+              <a:tr h="402336">
+                <a:tc>
+                  <a:txBody>
+                    <a:bodyPr/>
+                    <a:lstStyle/>
+                    <a:p>
+                      <a:pPr indent="0" marL="0">
+                        <a:buNone/>
+                      </a:pPr>
+                      <a:r>
+                        <a:rPr lang="en-US" sz="1300" dirty="0">
+                          <a:solidFill>
+                            <a:srgbClr val="E6EDF3"/>
+                          </a:solidFill>
+                          <a:latin typeface="Calibri" pitchFamily="34" charset="0"/>
+                          <a:ea typeface="Calibri" pitchFamily="34" charset="-122"/>
+                          <a:cs typeface="Calibri" pitchFamily="34" charset="-120"/>
+                        </a:rPr>
+                        <a:t>2% lossy path (3,000 pkts)</a:t>
+                      </a:r>
+                      <a:endParaRPr lang="en-US" sz="1300" dirty="0">
+                        <a:latin typeface="Calibri" charset="0"/>
+                        <a:ea typeface="Calibri" charset="0"/>
+                        <a:cs typeface="Calibri" charset="0"/>
+                      </a:endParaRPr>
+                    </a:p>
+                  </a:txBody>
+                  <a:tcPr marL="91440" marR="91440" marT="45720" marB="45720">
+                    <a:lnL w="12700" cap="flat" cmpd="sng" algn="ctr">
+                      <a:solidFill>
+                        <a:srgbClr val="2A3441"/>
+                      </a:solidFill>
+                      <a:prstDash val="solid"/>
+                      <a:round/>
+                      <a:headEnd type="none" w="med" len="med"/>
+                      <a:tailEnd type="none" w="med" len="med"/>
+                    </a:lnL>
+                    <a:lnR w="12700" cap="flat" cmpd="sng" algn="ctr">
+                      <a:solidFill>
+                        <a:srgbClr val="2A3441"/>
+                      </a:solidFill>
+                      <a:prstDash val="solid"/>
+                      <a:round/>
+                      <a:headEnd type="none" w="med" len="med"/>
+                      <a:tailEnd type="none" w="med" len="med"/>
+                    </a:lnR>
+                    <a:lnT w="12700" cap="flat" cmpd="sng" algn="ctr">
+                      <a:solidFill>
+                        <a:srgbClr val="2A3441"/>
+                      </a:solidFill>
+                      <a:prstDash val="solid"/>
+                      <a:round/>
+                      <a:headEnd type="none" w="med" len="med"/>
+                      <a:tailEnd type="none" w="med" len="med"/>
+                    </a:lnT>
+                    <a:lnB w="12700" cap="flat" cmpd="sng" algn="ctr">
+                      <a:solidFill>
+                        <a:srgbClr val="2A3441"/>
+                      </a:solidFill>
+                      <a:prstDash val="solid"/>
+                      <a:round/>
+                      <a:headEnd type="none" w="med" len="med"/>
+                      <a:tailEnd type="none" w="med" len="med"/>
+                    </a:lnB>
+                    <a:solidFill>
+                      <a:srgbClr val="141B24"/>
+                    </a:solidFill>
+                  </a:tcPr>
+                </a:tc>
+                <a:tc>
+                  <a:txBody>
+                    <a:bodyPr/>
+                    <a:lstStyle/>
+                    <a:p>
+                      <a:pPr indent="0" marL="0">
+                        <a:buNone/>
+                      </a:pPr>
+                      <a:r>
+                        <a:rPr lang="en-US" sz="1300" dirty="0">
+                          <a:solidFill>
+                            <a:srgbClr val="E6EDF3"/>
+                          </a:solidFill>
+                          <a:latin typeface="Calibri" pitchFamily="34" charset="0"/>
+                          <a:ea typeface="Calibri" pitchFamily="34" charset="-122"/>
+                          <a:cs typeface="Calibri" pitchFamily="34" charset="-120"/>
+                        </a:rPr>
+                        <a:t>19.8</a:t>
+                      </a:r>
+                      <a:endParaRPr lang="en-US" sz="1300" dirty="0">
+                        <a:latin typeface="Calibri" charset="0"/>
+                        <a:ea typeface="Calibri" charset="0"/>
+                        <a:cs typeface="Calibri" charset="0"/>
+                      </a:endParaRPr>
+                    </a:p>
+                  </a:txBody>
+                  <a:tcPr marL="91440" marR="91440" marT="45720" marB="45720">
+                    <a:lnL w="12700" cap="flat" cmpd="sng" algn="ctr">
+                      <a:solidFill>
+                        <a:srgbClr val="2A3441"/>
+                      </a:solidFill>
+                      <a:prstDash val="solid"/>
+                      <a:round/>
+                      <a:headEnd type="none" w="med" len="med"/>
+                      <a:tailEnd type="none" w="med" len="med"/>
+                    </a:lnL>
+                    <a:lnR w="12700" cap="flat" cmpd="sng" algn="ctr">
+                      <a:solidFill>
+                        <a:srgbClr val="2A3441"/>
+                      </a:solidFill>
+                      <a:prstDash val="solid"/>
+                      <a:round/>
+                      <a:headEnd type="none" w="med" len="med"/>
+                      <a:tailEnd type="none" w="med" len="med"/>
+                    </a:lnR>
+                    <a:lnT w="12700" cap="flat" cmpd="sng" algn="ctr">
+                      <a:solidFill>
+                        <a:srgbClr val="2A3441"/>
+                      </a:solidFill>
+                      <a:prstDash val="solid"/>
+                      <a:round/>
+                      <a:headEnd type="none" w="med" len="med"/>
+                      <a:tailEnd type="none" w="med" len="med"/>
+                    </a:lnT>
+                    <a:lnB w="12700" cap="flat" cmpd="sng" algn="ctr">
+                      <a:solidFill>
+                        <a:srgbClr val="2A3441"/>
+                      </a:solidFill>
+                      <a:prstDash val="solid"/>
+                      <a:round/>
+                      <a:headEnd type="none" w="med" len="med"/>
+                      <a:tailEnd type="none" w="med" len="med"/>
+                    </a:lnB>
+                    <a:solidFill>
+                      <a:srgbClr val="141B24"/>
+                    </a:solidFill>
+                  </a:tcPr>
+                </a:tc>
+                <a:tc>
+                  <a:txBody>
+                    <a:bodyPr/>
+                    <a:lstStyle/>
+                    <a:p>
+                      <a:pPr indent="0" marL="0">
+                        <a:buNone/>
+                      </a:pPr>
+                      <a:r>
+                        <a:rPr lang="en-US" sz="1300" dirty="0">
+                          <a:solidFill>
+                            <a:srgbClr val="E6EDF3"/>
+                          </a:solidFill>
+                          <a:latin typeface="Calibri" pitchFamily="34" charset="0"/>
+                          <a:ea typeface="Calibri" pitchFamily="34" charset="-122"/>
+                          <a:cs typeface="Calibri" pitchFamily="34" charset="-120"/>
+                        </a:rPr>
+                        <a:t>53.3</a:t>
+                      </a:r>
+                      <a:endParaRPr lang="en-US" sz="1300" dirty="0">
+                        <a:latin typeface="Calibri" charset="0"/>
+                        <a:ea typeface="Calibri" charset="0"/>
+                        <a:cs typeface="Calibri" charset="0"/>
+                      </a:endParaRPr>
+                    </a:p>
+                  </a:txBody>
+                  <a:tcPr marL="91440" marR="91440" marT="45720" marB="45720">
+                    <a:lnL w="12700" cap="flat" cmpd="sng" algn="ctr">
+                      <a:solidFill>
+                        <a:srgbClr val="2A3441"/>
+                      </a:solidFill>
+                      <a:prstDash val="solid"/>
+                      <a:round/>
+                      <a:headEnd type="none" w="med" len="med"/>
+                      <a:tailEnd type="none" w="med" len="med"/>
+                    </a:lnL>
+                    <a:lnR w="12700" cap="flat" cmpd="sng" algn="ctr">
+                      <a:solidFill>
+                        <a:srgbClr val="2A3441"/>
+                      </a:solidFill>
+                      <a:prstDash val="solid"/>
+                      <a:round/>
+                      <a:headEnd type="none" w="med" len="med"/>
+                      <a:tailEnd type="none" w="med" len="med"/>
+                    </a:lnR>
+                    <a:lnT w="12700" cap="flat" cmpd="sng" algn="ctr">
+                      <a:solidFill>
+                        <a:srgbClr val="2A3441"/>
+                      </a:solidFill>
+                      <a:prstDash val="solid"/>
+                      <a:round/>
+                      <a:headEnd type="none" w="med" len="med"/>
+                      <a:tailEnd type="none" w="med" len="med"/>
+                    </a:lnT>
+                    <a:lnB w="12700" cap="flat" cmpd="sng" algn="ctr">
+                      <a:solidFill>
+                        <a:srgbClr val="2A3441"/>
+                      </a:solidFill>
+                      <a:prstDash val="solid"/>
+                      <a:round/>
+                      <a:headEnd type="none" w="med" len="med"/>
+                      <a:tailEnd type="none" w="med" len="med"/>
+                    </a:lnB>
+                    <a:solidFill>
+                      <a:srgbClr val="141B24"/>
+                    </a:solidFill>
+                  </a:tcPr>
+                </a:tc>
+                <a:tc>
+                  <a:txBody>
+                    <a:bodyPr/>
+                    <a:lstStyle/>
+                    <a:p>
+                      <a:pPr indent="0" marL="0">
+                        <a:buNone/>
+                      </a:pPr>
+                      <a:r>
+                        <a:rPr lang="en-US" sz="1300" dirty="0">
+                          <a:solidFill>
+                            <a:srgbClr val="E6EDF3"/>
+                          </a:solidFill>
+                          <a:latin typeface="Calibri" pitchFamily="34" charset="0"/>
+                          <a:ea typeface="Calibri" pitchFamily="34" charset="-122"/>
+                          <a:cs typeface="Calibri" pitchFamily="34" charset="-120"/>
+                        </a:rPr>
+                        <a:t>8.2</a:t>
+                      </a:r>
+                      <a:endParaRPr lang="en-US" sz="1300" dirty="0">
+                        <a:latin typeface="Calibri" charset="0"/>
+                        <a:ea typeface="Calibri" charset="0"/>
+                        <a:cs typeface="Calibri" charset="0"/>
+                      </a:endParaRPr>
+                    </a:p>
+                  </a:txBody>
+                  <a:tcPr marL="91440" marR="91440" marT="45720" marB="45720">
+                    <a:lnL w="12700" cap="flat" cmpd="sng" algn="ctr">
+                      <a:solidFill>
+                        <a:srgbClr val="2A3441"/>
+                      </a:solidFill>
+                      <a:prstDash val="solid"/>
+                      <a:round/>
+                      <a:headEnd type="none" w="med" len="med"/>
+                      <a:tailEnd type="none" w="med" len="med"/>
+                    </a:lnL>
+                    <a:lnR w="12700" cap="flat" cmpd="sng" algn="ctr">
+                      <a:solidFill>
+                        <a:srgbClr val="2A3441"/>
+                      </a:solidFill>
+                      <a:prstDash val="solid"/>
+                      <a:round/>
+                      <a:headEnd type="none" w="med" len="med"/>
+                      <a:tailEnd type="none" w="med" len="med"/>
+                    </a:lnR>
+                    <a:lnT w="12700" cap="flat" cmpd="sng" algn="ctr">
+                      <a:solidFill>
+                        <a:srgbClr val="2A3441"/>
+                      </a:solidFill>
+                      <a:prstDash val="solid"/>
+                      <a:round/>
+                      <a:headEnd type="none" w="med" len="med"/>
+                      <a:tailEnd type="none" w="med" len="med"/>
+                    </a:lnT>
+                    <a:lnB w="12700" cap="flat" cmpd="sng" algn="ctr">
+                      <a:solidFill>
+                        <a:srgbClr val="2A3441"/>
+                      </a:solidFill>
+                      <a:prstDash val="solid"/>
+                      <a:round/>
+                      <a:headEnd type="none" w="med" len="med"/>
+                      <a:tailEnd type="none" w="med" len="med"/>
+                    </a:lnB>
+                    <a:solidFill>
+                      <a:srgbClr val="141B24"/>
+                    </a:solidFill>
+                  </a:tcPr>
+                </a:tc>
+                <a:tc>
+                  <a:txBody>
+                    <a:bodyPr/>
+                    <a:lstStyle/>
+                    <a:p>
+                      <a:pPr indent="0" marL="0">
+                        <a:buNone/>
+                      </a:pPr>
+                      <a:r>
+                        <a:rPr lang="en-US" sz="1300" dirty="0">
+                          <a:solidFill>
+                            <a:srgbClr val="E6EDF3"/>
+                          </a:solidFill>
+                          <a:latin typeface="Calibri" pitchFamily="34" charset="0"/>
+                          <a:ea typeface="Calibri" pitchFamily="34" charset="-122"/>
+                          <a:cs typeface="Calibri" pitchFamily="34" charset="-120"/>
+                        </a:rPr>
+                        <a:t>9.8</a:t>
+                      </a:r>
+                      <a:endParaRPr lang="en-US" sz="1300" dirty="0">
+                        <a:latin typeface="Calibri" charset="0"/>
+                        <a:ea typeface="Calibri" charset="0"/>
+                        <a:cs typeface="Calibri" charset="0"/>
+                      </a:endParaRPr>
+                    </a:p>
+                  </a:txBody>
+                  <a:tcPr marL="91440" marR="91440" marT="45720" marB="45720">
+                    <a:lnL w="12700" cap="flat" cmpd="sng" algn="ctr">
+                      <a:solidFill>
+                        <a:srgbClr val="2A3441"/>
+                      </a:solidFill>
+                      <a:prstDash val="solid"/>
+                      <a:round/>
+                      <a:headEnd type="none" w="med" len="med"/>
+                      <a:tailEnd type="none" w="med" len="med"/>
+                    </a:lnL>
+                    <a:lnR w="12700" cap="flat" cmpd="sng" algn="ctr">
+                      <a:solidFill>
+                        <a:srgbClr val="2A3441"/>
+                      </a:solidFill>
+                      <a:prstDash val="solid"/>
+                      <a:round/>
+                      <a:headEnd type="none" w="med" len="med"/>
+                      <a:tailEnd type="none" w="med" len="med"/>
+                    </a:lnR>
+                    <a:lnT w="12700" cap="flat" cmpd="sng" algn="ctr">
+                      <a:solidFill>
+                        <a:srgbClr val="2A3441"/>
+                      </a:solidFill>
+                      <a:prstDash val="solid"/>
+                      <a:round/>
+                      <a:headEnd type="none" w="med" len="med"/>
+                      <a:tailEnd type="none" w="med" len="med"/>
+                    </a:lnT>
+                    <a:lnB w="12700" cap="flat" cmpd="sng" algn="ctr">
+                      <a:solidFill>
+                        <a:srgbClr val="2A3441"/>
+                      </a:solidFill>
+                      <a:prstDash val="solid"/>
+                      <a:round/>
+                      <a:headEnd type="none" w="med" len="med"/>
+                      <a:tailEnd type="none" w="med" len="med"/>
+                    </a:lnB>
+                    <a:solidFill>
+                      <a:srgbClr val="141B24"/>
+                    </a:solidFill>
+                  </a:tcPr>
+                </a:tc>
+              </a:tr>
+              <a:tr h="402336">
+                <a:tc>
+                  <a:txBody>
+                    <a:bodyPr/>
+                    <a:lstStyle/>
+                    <a:p>
+                      <a:pPr indent="0" marL="0">
+                        <a:buNone/>
+                      </a:pPr>
+                      <a:r>
+                        <a:rPr lang="en-US" sz="1300" dirty="0">
+                          <a:solidFill>
+                            <a:srgbClr val="E6EDF3"/>
+                          </a:solidFill>
+                          <a:latin typeface="Calibri" pitchFamily="34" charset="0"/>
+                          <a:ea typeface="Calibri" pitchFamily="34" charset="-122"/>
+                          <a:cs typeface="Calibri" pitchFamily="34" charset="-120"/>
+                        </a:rPr>
+                        <a:t>Satellite-like path</a:t>
+                      </a:r>
+                      <a:endParaRPr lang="en-US" sz="1300" dirty="0">
+                        <a:latin typeface="Calibri" charset="0"/>
+                        <a:ea typeface="Calibri" charset="0"/>
+                        <a:cs typeface="Calibri" charset="0"/>
+                      </a:endParaRPr>
+                    </a:p>
+                  </a:txBody>
+                  <a:tcPr marL="91440" marR="91440" marT="45720" marB="45720">
+                    <a:lnL w="12700" cap="flat" cmpd="sng" algn="ctr">
+                      <a:solidFill>
+                        <a:srgbClr val="2A3441"/>
+                      </a:solidFill>
+                      <a:prstDash val="solid"/>
+                      <a:round/>
+                      <a:headEnd type="none" w="med" len="med"/>
+                      <a:tailEnd type="none" w="med" len="med"/>
+                    </a:lnL>
+                    <a:lnR w="12700" cap="flat" cmpd="sng" algn="ctr">
+                      <a:solidFill>
+                        <a:srgbClr val="2A3441"/>
+                      </a:solidFill>
+                      <a:prstDash val="solid"/>
+                      <a:round/>
+                      <a:headEnd type="none" w="med" len="med"/>
+                      <a:tailEnd type="none" w="med" len="med"/>
+                    </a:lnR>
+                    <a:lnT w="12700" cap="flat" cmpd="sng" algn="ctr">
+                      <a:solidFill>
+                        <a:srgbClr val="2A3441"/>
+                      </a:solidFill>
+                      <a:prstDash val="solid"/>
+                      <a:round/>
+                      <a:headEnd type="none" w="med" len="med"/>
+                      <a:tailEnd type="none" w="med" len="med"/>
+                    </a:lnT>
+                    <a:lnB w="12700" cap="flat" cmpd="sng" algn="ctr">
+                      <a:solidFill>
+                        <a:srgbClr val="2A3441"/>
+                      </a:solidFill>
+                      <a:prstDash val="solid"/>
+                      <a:round/>
+                      <a:headEnd type="none" w="med" len="med"/>
+                      <a:tailEnd type="none" w="med" len="med"/>
+                    </a:lnB>
+                    <a:solidFill>
+                      <a:srgbClr val="141B24"/>
+                    </a:solidFill>
+                  </a:tcPr>
+                </a:tc>
+                <a:tc>
+                  <a:txBody>
+                    <a:bodyPr/>
+                    <a:lstStyle/>
+                    <a:p>
+                      <a:pPr indent="0" marL="0">
+                        <a:buNone/>
+                      </a:pPr>
+                      <a:r>
+                        <a:rPr lang="en-US" sz="1300" dirty="0">
+                          <a:solidFill>
+                            <a:srgbClr val="E6EDF3"/>
+                          </a:solidFill>
+                          <a:latin typeface="Calibri" pitchFamily="34" charset="0"/>
+                          <a:ea typeface="Calibri" pitchFamily="34" charset="-122"/>
+                          <a:cs typeface="Calibri" pitchFamily="34" charset="-120"/>
+                        </a:rPr>
+                        <a:t>32.8</a:t>
+                      </a:r>
+                      <a:endParaRPr lang="en-US" sz="1300" dirty="0">
+                        <a:latin typeface="Calibri" charset="0"/>
+                        <a:ea typeface="Calibri" charset="0"/>
+                        <a:cs typeface="Calibri" charset="0"/>
+                      </a:endParaRPr>
+                    </a:p>
+                  </a:txBody>
+                  <a:tcPr marL="91440" marR="91440" marT="45720" marB="45720">
+                    <a:lnL w="12700" cap="flat" cmpd="sng" algn="ctr">
+                      <a:solidFill>
+                        <a:srgbClr val="2A3441"/>
+                      </a:solidFill>
+                      <a:prstDash val="solid"/>
+                      <a:round/>
+                      <a:headEnd type="none" w="med" len="med"/>
+                      <a:tailEnd type="none" w="med" len="med"/>
+                    </a:lnL>
+                    <a:lnR w="12700" cap="flat" cmpd="sng" algn="ctr">
+                      <a:solidFill>
+                        <a:srgbClr val="2A3441"/>
+                      </a:solidFill>
+                      <a:prstDash val="solid"/>
+                      <a:round/>
+                      <a:headEnd type="none" w="med" len="med"/>
+                      <a:tailEnd type="none" w="med" len="med"/>
+                    </a:lnR>
+                    <a:lnT w="12700" cap="flat" cmpd="sng" algn="ctr">
+                      <a:solidFill>
+                        <a:srgbClr val="2A3441"/>
+                      </a:solidFill>
+                      <a:prstDash val="solid"/>
+                      <a:round/>
+                      <a:headEnd type="none" w="med" len="med"/>
+                      <a:tailEnd type="none" w="med" len="med"/>
+                    </a:lnT>
+                    <a:lnB w="12700" cap="flat" cmpd="sng" algn="ctr">
+                      <a:solidFill>
+                        <a:srgbClr val="2A3441"/>
+                      </a:solidFill>
+                      <a:prstDash val="solid"/>
+                      <a:round/>
+                      <a:headEnd type="none" w="med" len="med"/>
+                      <a:tailEnd type="none" w="med" len="med"/>
+                    </a:lnB>
+                    <a:solidFill>
+                      <a:srgbClr val="141B24"/>
+                    </a:solidFill>
+                  </a:tcPr>
+                </a:tc>
+                <a:tc>
+                  <a:txBody>
+                    <a:bodyPr/>
+                    <a:lstStyle/>
+                    <a:p>
+                      <a:pPr indent="0" marL="0">
+                        <a:buNone/>
+                      </a:pPr>
+                      <a:r>
+                        <a:rPr lang="en-US" sz="1300" dirty="0">
+                          <a:solidFill>
+                            <a:srgbClr val="E6EDF3"/>
+                          </a:solidFill>
+                          <a:latin typeface="Calibri" pitchFamily="34" charset="0"/>
+                          <a:ea typeface="Calibri" pitchFamily="34" charset="-122"/>
+                          <a:cs typeface="Calibri" pitchFamily="34" charset="-120"/>
+                        </a:rPr>
+                        <a:t>26.6</a:t>
+                      </a:r>
+                      <a:endParaRPr lang="en-US" sz="1300" dirty="0">
+                        <a:latin typeface="Calibri" charset="0"/>
+                        <a:ea typeface="Calibri" charset="0"/>
+                        <a:cs typeface="Calibri" charset="0"/>
+                      </a:endParaRPr>
+                    </a:p>
+                  </a:txBody>
+                  <a:tcPr marL="91440" marR="91440" marT="45720" marB="45720">
+                    <a:lnL w="12700" cap="flat" cmpd="sng" algn="ctr">
+                      <a:solidFill>
+                        <a:srgbClr val="2A3441"/>
+                      </a:solidFill>
+                      <a:prstDash val="solid"/>
+                      <a:round/>
+                      <a:headEnd type="none" w="med" len="med"/>
+                      <a:tailEnd type="none" w="med" len="med"/>
+                    </a:lnL>
+                    <a:lnR w="12700" cap="flat" cmpd="sng" algn="ctr">
+                      <a:solidFill>
+                        <a:srgbClr val="2A3441"/>
+                      </a:solidFill>
+                      <a:prstDash val="solid"/>
+                      <a:round/>
+                      <a:headEnd type="none" w="med" len="med"/>
+                      <a:tailEnd type="none" w="med" len="med"/>
+                    </a:lnR>
+                    <a:lnT w="12700" cap="flat" cmpd="sng" algn="ctr">
+                      <a:solidFill>
+                        <a:srgbClr val="2A3441"/>
+                      </a:solidFill>
+                      <a:prstDash val="solid"/>
+                      <a:round/>
+                      <a:headEnd type="none" w="med" len="med"/>
+                      <a:tailEnd type="none" w="med" len="med"/>
+                    </a:lnT>
+                    <a:lnB w="12700" cap="flat" cmpd="sng" algn="ctr">
+                      <a:solidFill>
+                        <a:srgbClr val="2A3441"/>
+                      </a:solidFill>
+                      <a:prstDash val="solid"/>
+                      <a:round/>
+                      <a:headEnd type="none" w="med" len="med"/>
+                      <a:tailEnd type="none" w="med" len="med"/>
+                    </a:lnB>
+                    <a:solidFill>
+                      <a:srgbClr val="141B24"/>
+                    </a:solidFill>
+                  </a:tcPr>
+                </a:tc>
+                <a:tc>
+                  <a:txBody>
+                    <a:bodyPr/>
+                    <a:lstStyle/>
+                    <a:p>
+                      <a:pPr indent="0" marL="0">
+                        <a:buNone/>
+                      </a:pPr>
+                      <a:r>
+                        <a:rPr lang="en-US" sz="1300" dirty="0">
+                          <a:solidFill>
+                            <a:srgbClr val="E6EDF3"/>
+                          </a:solidFill>
+                          <a:latin typeface="Calibri" pitchFamily="34" charset="0"/>
+                          <a:ea typeface="Calibri" pitchFamily="34" charset="-122"/>
+                          <a:cs typeface="Calibri" pitchFamily="34" charset="-120"/>
+                        </a:rPr>
+                        <a:t>16.8</a:t>
+                      </a:r>
+                      <a:endParaRPr lang="en-US" sz="1300" dirty="0">
+                        <a:latin typeface="Calibri" charset="0"/>
+                        <a:ea typeface="Calibri" charset="0"/>
+                        <a:cs typeface="Calibri" charset="0"/>
+                      </a:endParaRPr>
+                    </a:p>
+                  </a:txBody>
+                  <a:tcPr marL="91440" marR="91440" marT="45720" marB="45720">
+                    <a:lnL w="12700" cap="flat" cmpd="sng" algn="ctr">
+                      <a:solidFill>
+                        <a:srgbClr val="2A3441"/>
+                      </a:solidFill>
+                      <a:prstDash val="solid"/>
+                      <a:round/>
+                      <a:headEnd type="none" w="med" len="med"/>
+                      <a:tailEnd type="none" w="med" len="med"/>
+                    </a:lnL>
+                    <a:lnR w="12700" cap="flat" cmpd="sng" algn="ctr">
+                      <a:solidFill>
+                        <a:srgbClr val="2A3441"/>
+                      </a:solidFill>
+                      <a:prstDash val="solid"/>
+                      <a:round/>
+                      <a:headEnd type="none" w="med" len="med"/>
+                      <a:tailEnd type="none" w="med" len="med"/>
+                    </a:lnR>
+                    <a:lnT w="12700" cap="flat" cmpd="sng" algn="ctr">
+                      <a:solidFill>
+                        <a:srgbClr val="2A3441"/>
+                      </a:solidFill>
+                      <a:prstDash val="solid"/>
+                      <a:round/>
+                      <a:headEnd type="none" w="med" len="med"/>
+                      <a:tailEnd type="none" w="med" len="med"/>
+                    </a:lnT>
+                    <a:lnB w="12700" cap="flat" cmpd="sng" algn="ctr">
+                      <a:solidFill>
+                        <a:srgbClr val="2A3441"/>
+                      </a:solidFill>
+                      <a:prstDash val="solid"/>
+                      <a:round/>
+                      <a:headEnd type="none" w="med" len="med"/>
+                      <a:tailEnd type="none" w="med" len="med"/>
+                    </a:lnB>
+                    <a:solidFill>
+                      <a:srgbClr val="141B24"/>
+                    </a:solidFill>
+                  </a:tcPr>
+                </a:tc>
+                <a:tc>
+                  <a:txBody>
+                    <a:bodyPr/>
+                    <a:lstStyle/>
+                    <a:p>
+                      <a:pPr indent="0" marL="0">
+                        <a:buNone/>
+                      </a:pPr>
+                      <a:r>
+                        <a:rPr lang="en-US" sz="1300" dirty="0">
+                          <a:solidFill>
+                            <a:srgbClr val="E6EDF3"/>
+                          </a:solidFill>
+                          <a:latin typeface="Calibri" pitchFamily="34" charset="0"/>
+                          <a:ea typeface="Calibri" pitchFamily="34" charset="-122"/>
+                          <a:cs typeface="Calibri" pitchFamily="34" charset="-120"/>
+                        </a:rPr>
+                        <a:t>11.2</a:t>
+                      </a:r>
+                      <a:endParaRPr lang="en-US" sz="1300" dirty="0">
+                        <a:latin typeface="Calibri" charset="0"/>
+                        <a:ea typeface="Calibri" charset="0"/>
+                        <a:cs typeface="Calibri" charset="0"/>
+                      </a:endParaRPr>
+                    </a:p>
+                  </a:txBody>
+                  <a:tcPr marL="91440" marR="91440" marT="45720" marB="45720">
+                    <a:lnL w="12700" cap="flat" cmpd="sng" algn="ctr">
+                      <a:solidFill>
+                        <a:srgbClr val="2A3441"/>
+                      </a:solidFill>
+                      <a:prstDash val="solid"/>
+                      <a:round/>
+                      <a:headEnd type="none" w="med" len="med"/>
+                      <a:tailEnd type="none" w="med" len="med"/>
+                    </a:lnL>
+                    <a:lnR w="12700" cap="flat" cmpd="sng" algn="ctr">
+                      <a:solidFill>
+                        <a:srgbClr val="2A3441"/>
+                      </a:solidFill>
+                      <a:prstDash val="solid"/>
+                      <a:round/>
+                      <a:headEnd type="none" w="med" len="med"/>
+                      <a:tailEnd type="none" w="med" len="med"/>
+                    </a:lnR>
+                    <a:lnT w="12700" cap="flat" cmpd="sng" algn="ctr">
+                      <a:solidFill>
+                        <a:srgbClr val="2A3441"/>
+                      </a:solidFill>
+                      <a:prstDash val="solid"/>
+                      <a:round/>
+                      <a:headEnd type="none" w="med" len="med"/>
+                      <a:tailEnd type="none" w="med" len="med"/>
+                    </a:lnT>
+                    <a:lnB w="12700" cap="flat" cmpd="sng" algn="ctr">
+                      <a:solidFill>
+                        <a:srgbClr val="2A3441"/>
+                      </a:solidFill>
+                      <a:prstDash val="solid"/>
+                      <a:round/>
+                      <a:headEnd type="none" w="med" len="med"/>
+                      <a:tailEnd type="none" w="med" len="med"/>
+                    </a:lnB>
+                    <a:solidFill>
+                      <a:srgbClr val="141B24"/>
+                    </a:solidFill>
+                  </a:tcPr>
+                </a:tc>
+              </a:tr>
+            </a:tbl>
+          </a:graphicData>
+        </a:graphic>
+      </p:graphicFrame>
       <p:sp>
         <p:nvSpPr>
-          <p:cNvPr id="4" name="Shape 2"/>
+          <p:cNvPr id="5" name="Text 2"/>
           <p:cNvSpPr/>
           <p:nvPr/>
         </p:nvSpPr>
         <p:spPr>
           <a:xfrm>
-            <a:off x="548640" y="1371600"/>
-            <a:ext cx="5394960" cy="4206240"/>
-          </a:xfrm>
-          <a:prstGeom prst="rect">
-            <a:avLst/>
-          </a:prstGeom>
-          <a:solidFill>
-            <a:srgbClr val="141B24"/>
-          </a:solidFill>
-          <a:ln w="12700">
-            <a:solidFill>
-              <a:srgbClr val="39FF88"/>
-            </a:solidFill>
-            <a:prstDash val="solid"/>
-          </a:ln>
-        </p:spPr>
-      </p:sp>
-      <p:sp>
-        <p:nvSpPr>
-          <p:cNvPr id="5" name="Text 3"/>
-          <p:cNvSpPr/>
-          <p:nvPr/>
-        </p:nvSpPr>
-        <p:spPr>
-          <a:xfrm>
-            <a:off x="731520" y="1508760"/>
-            <a:ext cx="5029200" cy="457200"/>
-          </a:xfrm>
-          <a:prstGeom prst="rect">
-            <a:avLst/>
-          </a:prstGeom>
-          <a:noFill/>
-          <a:ln/>
-        </p:spPr>
-        <p:txBody>
-          <a:bodyPr wrap="square" lIns="0" tIns="0" rIns="0" bIns="0" rtlCol="0" anchor="ctr"/>
-          <a:lstStyle/>
-          <a:p>
-            <a:pPr indent="0" marL="0">
-              <a:buNone/>
-            </a:pPr>
-            <a:r>
-              <a:rPr lang="en-US" sz="2000" b="1" dirty="0">
-                <a:solidFill>
-                  <a:srgbClr val="39FF88"/>
-                </a:solidFill>
-                <a:latin typeface="Courier New" pitchFamily="34" charset="0"/>
-                <a:ea typeface="Courier New" pitchFamily="34" charset="-122"/>
-                <a:cs typeface="Courier New" pitchFamily="34" charset="-120"/>
-              </a:rPr>
-              <a:t>Learned</a:t>
-            </a:r>
-            <a:endParaRPr lang="en-US" sz="2000" dirty="0"/>
-          </a:p>
-        </p:txBody>
-      </p:sp>
-      <p:sp>
-        <p:nvSpPr>
-          <p:cNvPr id="6" name="Text 4"/>
-          <p:cNvSpPr/>
-          <p:nvPr/>
-        </p:nvSpPr>
-        <p:spPr>
-          <a:xfrm>
-            <a:off x="731520" y="2011680"/>
-            <a:ext cx="5029200" cy="3429000"/>
+            <a:off x="548640" y="4114800"/>
+            <a:ext cx="11064240" cy="2194560"/>
           </a:xfrm>
           <a:prstGeom prst="rect">
             <a:avLst/>
@@ -28389,11 +30691,15 @@
           <a:bodyPr wrap="square" lIns="0" tIns="0" rIns="0" bIns="0" rtlCol="0" anchor="t"/>
           <a:lstStyle/>
           <a:p>
-            <a:pPr indent="0" marL="0">
-              <a:buNone/>
+            <a:pPr marL="342900" indent="-342900">
+              <a:spcAft>
+                <a:spcPts val="800"/>
+              </a:spcAft>
+              <a:buSzPct val="100000"/>
+              <a:buChar char="•"/>
             </a:pPr>
             <a:r>
-              <a:rPr lang="en-US" sz="2000" dirty="0">
+              <a:rPr lang="en-US" sz="1600" dirty="0">
                 <a:solidFill>
                   <a:srgbClr val="E6EDF3"/>
                 </a:solidFill>
@@ -28401,16 +30707,20 @@
                 <a:ea typeface="Calibri" pitchFamily="34" charset="-122"/>
                 <a:cs typeface="Calibri" pitchFamily="34" charset="-120"/>
               </a:rPr>
-              <a:t>Reliability is a set of simple rules working together.</a:t>
-            </a:r>
-            <a:endParaRPr lang="en-US" sz="2000" dirty="0"/>
-          </a:p>
-          <a:p>
-            <a:pPr indent="0" marL="0">
-              <a:buNone/>
+              <a:t>Paths that change mid-transfer: neural fastest in 4 of 4 cases, at the cost of 1% to 6% retransmissions</a:t>
+            </a:r>
+            <a:endParaRPr lang="en-US" sz="1600" dirty="0"/>
+          </a:p>
+          <a:p>
+            <a:pPr marL="342900" indent="-342900">
+              <a:spcAft>
+                <a:spcPts val="800"/>
+              </a:spcAft>
+              <a:buSzPct val="100000"/>
+              <a:buChar char="•"/>
             </a:pPr>
             <a:r>
-              <a:rPr lang="en-US" sz="2000" dirty="0">
+              <a:rPr lang="en-US" sz="1600" dirty="0">
                 <a:solidFill>
                   <a:srgbClr val="E6EDF3"/>
                 </a:solidFill>
@@ -28418,16 +30728,20 @@
                 <a:ea typeface="Calibri" pitchFamily="34" charset="-122"/>
                 <a:cs typeface="Calibri" pitchFamily="34" charset="-120"/>
               </a:rPr>
-              <a:t>Congestion control matters as much as retransmission.</a:t>
-            </a:r>
-            <a:endParaRPr lang="en-US" sz="2000" dirty="0"/>
-          </a:p>
-          <a:p>
-            <a:pPr indent="0" marL="0">
-              <a:buNone/>
+              <a:t>A simplified BBR beats tuned AIMD on 4 of 5 paths and is faster than the agent on the 2% lossy path</a:t>
+            </a:r>
+            <a:endParaRPr lang="en-US" sz="1600" dirty="0"/>
+          </a:p>
+          <a:p>
+            <a:pPr marL="342900" indent="-342900">
+              <a:spcAft>
+                <a:spcPts val="800"/>
+              </a:spcAft>
+              <a:buSzPct val="100000"/>
+              <a:buChar char="•"/>
             </a:pPr>
             <a:r>
-              <a:rPr lang="en-US" sz="2000" dirty="0">
+              <a:rPr lang="en-US" sz="1600" dirty="0">
                 <a:solidFill>
                   <a:srgbClr val="E6EDF3"/>
                 </a:solidFill>
@@ -28435,102 +30749,20 @@
                 <a:ea typeface="Calibri" pitchFamily="34" charset="-122"/>
                 <a:cs typeface="Calibri" pitchFamily="34" charset="-120"/>
               </a:rPr>
-              <a:t>Testing tools fail in surprising ways.</a:t>
-            </a:r>
-            <a:endParaRPr lang="en-US" sz="2000" dirty="0"/>
-          </a:p>
-        </p:txBody>
-      </p:sp>
-      <p:sp>
-        <p:nvSpPr>
-          <p:cNvPr id="7" name="Shape 5"/>
-          <p:cNvSpPr/>
-          <p:nvPr/>
-        </p:nvSpPr>
-        <p:spPr>
-          <a:xfrm>
-            <a:off x="6217920" y="1371600"/>
-            <a:ext cx="5394960" cy="4206240"/>
-          </a:xfrm>
-          <a:prstGeom prst="rect">
-            <a:avLst/>
-          </a:prstGeom>
-          <a:solidFill>
-            <a:srgbClr val="141B24"/>
-          </a:solidFill>
-          <a:ln w="12700">
-            <a:solidFill>
-              <a:srgbClr val="FFB000"/>
-            </a:solidFill>
-            <a:prstDash val="solid"/>
-          </a:ln>
-        </p:spPr>
-      </p:sp>
-      <p:sp>
-        <p:nvSpPr>
-          <p:cNvPr id="8" name="Text 6"/>
-          <p:cNvSpPr/>
-          <p:nvPr/>
-        </p:nvSpPr>
-        <p:spPr>
-          <a:xfrm>
-            <a:off x="6400800" y="1508760"/>
-            <a:ext cx="5029200" cy="457200"/>
-          </a:xfrm>
-          <a:prstGeom prst="rect">
-            <a:avLst/>
-          </a:prstGeom>
-          <a:noFill/>
-          <a:ln/>
-        </p:spPr>
-        <p:txBody>
-          <a:bodyPr wrap="square" lIns="0" tIns="0" rIns="0" bIns="0" rtlCol="0" anchor="ctr"/>
-          <a:lstStyle/>
-          <a:p>
-            <a:pPr indent="0" marL="0">
-              <a:buNone/>
+              <a:t>Two bugs in our own BBR (stall at 10% loss; 163 s after a delay jump) found by these tests and fixed</a:t>
+            </a:r>
+            <a:endParaRPr lang="en-US" sz="1600" dirty="0"/>
+          </a:p>
+          <a:p>
+            <a:pPr marL="342900" indent="-342900">
+              <a:spcAft>
+                <a:spcPts val="800"/>
+              </a:spcAft>
+              <a:buSzPct val="100000"/>
+              <a:buChar char="•"/>
             </a:pPr>
             <a:r>
-              <a:rPr lang="en-US" sz="2000" b="1" dirty="0">
-                <a:solidFill>
-                  <a:srgbClr val="FFB000"/>
-                </a:solidFill>
-                <a:latin typeface="Courier New" pitchFamily="34" charset="0"/>
-                <a:ea typeface="Courier New" pitchFamily="34" charset="-122"/>
-                <a:cs typeface="Courier New" pitchFamily="34" charset="-120"/>
-              </a:rPr>
-              <a:t>Next</a:t>
-            </a:r>
-            <a:endParaRPr lang="en-US" sz="2000" dirty="0"/>
-          </a:p>
-        </p:txBody>
-      </p:sp>
-      <p:sp>
-        <p:nvSpPr>
-          <p:cNvPr id="9" name="Text 7"/>
-          <p:cNvSpPr/>
-          <p:nvPr/>
-        </p:nvSpPr>
-        <p:spPr>
-          <a:xfrm>
-            <a:off x="6400800" y="2011680"/>
-            <a:ext cx="5029200" cy="3429000"/>
-          </a:xfrm>
-          <a:prstGeom prst="rect">
-            <a:avLst/>
-          </a:prstGeom>
-          <a:noFill/>
-          <a:ln/>
-        </p:spPr>
-        <p:txBody>
-          <a:bodyPr wrap="square" lIns="0" tIns="0" rIns="0" bIns="0" rtlCol="0" anchor="t"/>
-          <a:lstStyle/>
-          <a:p>
-            <a:pPr indent="0" marL="0">
-              <a:buNone/>
-            </a:pPr>
-            <a:r>
-              <a:rPr lang="en-US" sz="2000" dirty="0">
+              <a:rPr lang="en-US" sz="1600" dirty="0">
                 <a:solidFill>
                   <a:srgbClr val="E6EDF3"/>
                 </a:solidFill>
@@ -28538,82 +30770,9 @@
                 <a:ea typeface="Calibri" pitchFamily="34" charset="-122"/>
                 <a:cs typeface="Calibri" pitchFamily="34" charset="-120"/>
               </a:rPr>
-              <a:t>Fairness-aware training, TCP coexistence</a:t>
-            </a:r>
-            <a:endParaRPr lang="en-US" sz="2000" dirty="0"/>
-          </a:p>
-          <a:p>
-            <a:pPr indent="0" marL="0">
-              <a:buNone/>
-            </a:pPr>
-            <a:r>
-              <a:rPr lang="en-US" sz="2000" dirty="0">
-                <a:solidFill>
-                  <a:srgbClr val="E6EDF3"/>
-                </a:solidFill>
-                <a:latin typeface="Calibri" pitchFamily="34" charset="0"/>
-                <a:ea typeface="Calibri" pitchFamily="34" charset="-122"/>
-                <a:cs typeface="Calibri" pitchFamily="34" charset="-120"/>
-              </a:rPr>
-              <a:t>Train on real traces with cross traffic</a:t>
-            </a:r>
-            <a:endParaRPr lang="en-US" sz="2000" dirty="0"/>
-          </a:p>
-          <a:p>
-            <a:pPr indent="0" marL="0">
-              <a:buNone/>
-            </a:pPr>
-            <a:r>
-              <a:rPr lang="en-US" sz="2000" dirty="0">
-                <a:solidFill>
-                  <a:srgbClr val="E6EDF3"/>
-                </a:solidFill>
-                <a:latin typeface="Calibri" pitchFamily="34" charset="0"/>
-                <a:ea typeface="Calibri" pitchFamily="34" charset="-122"/>
-                <a:cs typeface="Calibri" pitchFamily="34" charset="-120"/>
-              </a:rPr>
-              <a:t>Close the gap to kernel TCP; real multi-machine tests</a:t>
-            </a:r>
-            <a:endParaRPr lang="en-US" sz="2000" dirty="0"/>
-          </a:p>
-        </p:txBody>
-      </p:sp>
-      <p:sp>
-        <p:nvSpPr>
-          <p:cNvPr id="10" name="Text 8"/>
-          <p:cNvSpPr/>
-          <p:nvPr/>
-        </p:nvSpPr>
-        <p:spPr>
-          <a:xfrm>
-            <a:off x="548640" y="5852160"/>
-            <a:ext cx="10972800" cy="365760"/>
-          </a:xfrm>
-          <a:prstGeom prst="rect">
-            <a:avLst/>
-          </a:prstGeom>
-          <a:noFill/>
-          <a:ln/>
-        </p:spPr>
-        <p:txBody>
-          <a:bodyPr wrap="square" lIns="0" tIns="0" rIns="0" bIns="0" rtlCol="0" anchor="ctr"/>
-          <a:lstStyle/>
-          <a:p>
-            <a:pPr indent="0" marL="0">
-              <a:buNone/>
-            </a:pPr>
-            <a:r>
-              <a:rPr lang="en-US" sz="1400" dirty="0">
-                <a:solidFill>
-                  <a:srgbClr val="8B98A5"/>
-                </a:solidFill>
-                <a:latin typeface="Calibri" pitchFamily="34" charset="0"/>
-                <a:ea typeface="Calibri" pitchFamily="34" charset="-122"/>
-                <a:cs typeface="Calibri" pitchFamily="34" charset="-120"/>
-              </a:rPr>
-              <a:t>Limits: kernel TCP is 1.5x to 3.2x faster; no multi-machine test; polite mode is a hand-made rule that costs speed; level with CUBIC under bursty cross traffic; no gain at 10% random loss.</a:t>
-            </a:r>
-            <a:endParaRPr lang="en-US" sz="1400" dirty="0"/>
+              <a:t>Virtual time, 20 paired seeds; not the Linux BBR</a:t>
+            </a:r>
+            <a:endParaRPr lang="en-US" sz="1600" dirty="0"/>
           </a:p>
         </p:txBody>
       </p:sp>
@@ -28657,8 +30816,8 @@
         </p:nvSpPr>
         <p:spPr>
           <a:xfrm>
-            <a:off x="731520" y="2103120"/>
-            <a:ext cx="10058400" cy="1097280"/>
+            <a:off x="548640" y="320040"/>
+            <a:ext cx="11064240" cy="731520"/>
           </a:xfrm>
           <a:prstGeom prst="rect">
             <a:avLst/>
@@ -28674,7 +30833,7 @@
               <a:buNone/>
             </a:pPr>
             <a:r>
-              <a:rPr lang="en-US" sz="6400" b="1" dirty="0">
+              <a:rPr lang="en-US" sz="3000" b="1" dirty="0">
                 <a:solidFill>
                   <a:srgbClr val="39FF88"/>
                 </a:solidFill>
@@ -28682,9 +30841,9 @@
                 <a:ea typeface="Courier New" pitchFamily="34" charset="-122"/>
                 <a:cs typeface="Courier New" pitchFamily="34" charset="-120"/>
               </a:rPr>
-              <a:t>Thank you</a:t>
-            </a:r>
-            <a:endParaRPr lang="en-US" sz="6400" dirty="0"/>
+              <a:t>Research gaps: fairness and trust</a:t>
+            </a:r>
+            <a:endParaRPr lang="en-US" sz="3000" dirty="0"/>
           </a:p>
         </p:txBody>
       </p:sp>
@@ -28696,8 +30855,8 @@
         </p:nvSpPr>
         <p:spPr>
           <a:xfrm>
-            <a:off x="731520" y="3474720"/>
-            <a:ext cx="10058400" cy="548640"/>
+            <a:off x="9418320" y="6446520"/>
+            <a:ext cx="2377440" cy="274320"/>
           </a:xfrm>
           <a:prstGeom prst="rect">
             <a:avLst/>
@@ -28709,34 +30868,888 @@
           <a:bodyPr wrap="square" lIns="0" tIns="0" rIns="0" bIns="0" rtlCol="0" anchor="ctr"/>
           <a:lstStyle/>
           <a:p>
-            <a:pPr indent="0" marL="0">
+            <a:pPr algn="r" indent="0" marL="0">
               <a:buNone/>
             </a:pPr>
             <a:r>
-              <a:rPr lang="en-US" sz="2600" dirty="0">
+              <a:rPr lang="en-US" sz="1000" dirty="0">
                 <a:solidFill>
-                  <a:srgbClr val="E6EDF3"/>
+                  <a:srgbClr val="8B98A5"/>
                 </a:solidFill>
                 <a:latin typeface="Courier New" pitchFamily="34" charset="0"/>
                 <a:ea typeface="Courier New" pitchFamily="34" charset="-122"/>
                 <a:cs typeface="Courier New" pitchFamily="34" charset="-120"/>
               </a:rPr>
-              <a:t>github.com/Capsturrrr/rudp</a:t>
-            </a:r>
-            <a:endParaRPr lang="en-US" sz="2600" dirty="0"/>
+              <a:t>34 / 37   Smart-RUDP</a:t>
+            </a:r>
+            <a:endParaRPr lang="en-US" sz="1000" dirty="0"/>
           </a:p>
         </p:txBody>
       </p:sp>
+      <p:graphicFrame>
+        <p:nvGraphicFramePr>
+          <p:cNvPr id="35" name="Table 0"/>
+          <p:cNvGraphicFramePr>
+            <a:graphicFrameLocks noGrp="1"/>
+          </p:cNvGraphicFramePr>
+          <p:nvPr>
+            <p:extLst>
+              <p:ext uri="{D42A27DB-BD31-4B8C-83A1-F6EECF244321}">
+                <p14:modId xmlns:p14="http://schemas.microsoft.com/office/powerpoint/2010/main" val="1579011935"/>
+              </p:ext>
+            </p:extLst>
+          </p:nvPr>
+        </p:nvGraphicFramePr>
+        <p:xfrm>
+          <a:off x="548640" y="1188720"/>
+          <a:ext cx="6400800" cy="914400"/>
+        </p:xfrm>
+        <a:graphic>
+          <a:graphicData uri="http://schemas.openxmlformats.org/drawingml/2006/table">
+            <a:tbl>
+              <a:tblPr/>
+              <a:tblGrid>
+                <a:gridCol w="2377440"/>
+                <a:gridCol w="1188720"/>
+                <a:gridCol w="1645920"/>
+                <a:gridCol w="1188720"/>
+              </a:tblGrid>
+              <a:tr h="402336">
+                <a:tc>
+                  <a:txBody>
+                    <a:bodyPr/>
+                    <a:lstStyle/>
+                    <a:p>
+                      <a:pPr indent="0" marL="0">
+                        <a:buNone/>
+                      </a:pPr>
+                      <a:r>
+                        <a:rPr lang="en-US" sz="1300" b="1" dirty="0">
+                          <a:solidFill>
+                            <a:srgbClr val="0B0F14"/>
+                          </a:solidFill>
+                          <a:latin typeface="Courier New" pitchFamily="34" charset="0"/>
+                          <a:ea typeface="Courier New" pitchFamily="34" charset="-122"/>
+                          <a:cs typeface="Courier New" pitchFamily="34" charset="-120"/>
+                        </a:rPr>
+                        <a:t>Two identical flows</a:t>
+                      </a:r>
+                      <a:endParaRPr lang="en-US" sz="1300" dirty="0">
+                        <a:latin typeface="Courier New" charset="0"/>
+                        <a:ea typeface="Courier New" charset="0"/>
+                        <a:cs typeface="Courier New" charset="0"/>
+                      </a:endParaRPr>
+                    </a:p>
+                  </a:txBody>
+                  <a:tcPr marL="91440" marR="91440" marT="45720" marB="45720">
+                    <a:lnL w="12700" cap="flat" cmpd="sng" algn="ctr">
+                      <a:solidFill>
+                        <a:srgbClr val="2A3441"/>
+                      </a:solidFill>
+                      <a:prstDash val="solid"/>
+                      <a:round/>
+                      <a:headEnd type="none" w="med" len="med"/>
+                      <a:tailEnd type="none" w="med" len="med"/>
+                    </a:lnL>
+                    <a:lnR w="12700" cap="flat" cmpd="sng" algn="ctr">
+                      <a:solidFill>
+                        <a:srgbClr val="2A3441"/>
+                      </a:solidFill>
+                      <a:prstDash val="solid"/>
+                      <a:round/>
+                      <a:headEnd type="none" w="med" len="med"/>
+                      <a:tailEnd type="none" w="med" len="med"/>
+                    </a:lnR>
+                    <a:lnT w="12700" cap="flat" cmpd="sng" algn="ctr">
+                      <a:solidFill>
+                        <a:srgbClr val="2A3441"/>
+                      </a:solidFill>
+                      <a:prstDash val="solid"/>
+                      <a:round/>
+                      <a:headEnd type="none" w="med" len="med"/>
+                      <a:tailEnd type="none" w="med" len="med"/>
+                    </a:lnT>
+                    <a:lnB w="12700" cap="flat" cmpd="sng" algn="ctr">
+                      <a:solidFill>
+                        <a:srgbClr val="2A3441"/>
+                      </a:solidFill>
+                      <a:prstDash val="solid"/>
+                      <a:round/>
+                      <a:headEnd type="none" w="med" len="med"/>
+                      <a:tailEnd type="none" w="med" len="med"/>
+                    </a:lnB>
+                    <a:solidFill>
+                      <a:srgbClr val="39FF88"/>
+                    </a:solidFill>
+                  </a:tcPr>
+                </a:tc>
+                <a:tc>
+                  <a:txBody>
+                    <a:bodyPr/>
+                    <a:lstStyle/>
+                    <a:p>
+                      <a:pPr indent="0" marL="0">
+                        <a:buNone/>
+                      </a:pPr>
+                      <a:r>
+                        <a:rPr lang="en-US" sz="1300" b="1" dirty="0">
+                          <a:solidFill>
+                            <a:srgbClr val="0B0F14"/>
+                          </a:solidFill>
+                          <a:latin typeface="Courier New" pitchFamily="34" charset="0"/>
+                          <a:ea typeface="Courier New" pitchFamily="34" charset="-122"/>
+                          <a:cs typeface="Courier New" pitchFamily="34" charset="-120"/>
+                        </a:rPr>
+                        <a:t>Extra RTT</a:t>
+                      </a:r>
+                      <a:endParaRPr lang="en-US" sz="1300" dirty="0">
+                        <a:latin typeface="Courier New" charset="0"/>
+                        <a:ea typeface="Courier New" charset="0"/>
+                        <a:cs typeface="Courier New" charset="0"/>
+                      </a:endParaRPr>
+                    </a:p>
+                  </a:txBody>
+                  <a:tcPr marL="91440" marR="91440" marT="45720" marB="45720">
+                    <a:lnL w="12700" cap="flat" cmpd="sng" algn="ctr">
+                      <a:solidFill>
+                        <a:srgbClr val="2A3441"/>
+                      </a:solidFill>
+                      <a:prstDash val="solid"/>
+                      <a:round/>
+                      <a:headEnd type="none" w="med" len="med"/>
+                      <a:tailEnd type="none" w="med" len="med"/>
+                    </a:lnL>
+                    <a:lnR w="12700" cap="flat" cmpd="sng" algn="ctr">
+                      <a:solidFill>
+                        <a:srgbClr val="2A3441"/>
+                      </a:solidFill>
+                      <a:prstDash val="solid"/>
+                      <a:round/>
+                      <a:headEnd type="none" w="med" len="med"/>
+                      <a:tailEnd type="none" w="med" len="med"/>
+                    </a:lnR>
+                    <a:lnT w="12700" cap="flat" cmpd="sng" algn="ctr">
+                      <a:solidFill>
+                        <a:srgbClr val="2A3441"/>
+                      </a:solidFill>
+                      <a:prstDash val="solid"/>
+                      <a:round/>
+                      <a:headEnd type="none" w="med" len="med"/>
+                      <a:tailEnd type="none" w="med" len="med"/>
+                    </a:lnT>
+                    <a:lnB w="12700" cap="flat" cmpd="sng" algn="ctr">
+                      <a:solidFill>
+                        <a:srgbClr val="2A3441"/>
+                      </a:solidFill>
+                      <a:prstDash val="solid"/>
+                      <a:round/>
+                      <a:headEnd type="none" w="med" len="med"/>
+                      <a:tailEnd type="none" w="med" len="med"/>
+                    </a:lnB>
+                    <a:solidFill>
+                      <a:srgbClr val="39FF88"/>
+                    </a:solidFill>
+                  </a:tcPr>
+                </a:tc>
+                <a:tc>
+                  <a:txBody>
+                    <a:bodyPr/>
+                    <a:lstStyle/>
+                    <a:p>
+                      <a:pPr indent="0" marL="0">
+                        <a:buNone/>
+                      </a:pPr>
+                      <a:r>
+                        <a:rPr lang="en-US" sz="1300" b="1" dirty="0">
+                          <a:solidFill>
+                            <a:srgbClr val="0B0F14"/>
+                          </a:solidFill>
+                          <a:latin typeface="Courier New" pitchFamily="34" charset="0"/>
+                          <a:ea typeface="Courier New" pitchFamily="34" charset="-122"/>
+                          <a:cs typeface="Courier New" pitchFamily="34" charset="-120"/>
+                        </a:rPr>
+                        <a:t>Share short-RTT</a:t>
+                      </a:r>
+                      <a:endParaRPr lang="en-US" sz="1300" dirty="0">
+                        <a:latin typeface="Courier New" charset="0"/>
+                        <a:ea typeface="Courier New" charset="0"/>
+                        <a:cs typeface="Courier New" charset="0"/>
+                      </a:endParaRPr>
+                    </a:p>
+                  </a:txBody>
+                  <a:tcPr marL="91440" marR="91440" marT="45720" marB="45720">
+                    <a:lnL w="12700" cap="flat" cmpd="sng" algn="ctr">
+                      <a:solidFill>
+                        <a:srgbClr val="2A3441"/>
+                      </a:solidFill>
+                      <a:prstDash val="solid"/>
+                      <a:round/>
+                      <a:headEnd type="none" w="med" len="med"/>
+                      <a:tailEnd type="none" w="med" len="med"/>
+                    </a:lnL>
+                    <a:lnR w="12700" cap="flat" cmpd="sng" algn="ctr">
+                      <a:solidFill>
+                        <a:srgbClr val="2A3441"/>
+                      </a:solidFill>
+                      <a:prstDash val="solid"/>
+                      <a:round/>
+                      <a:headEnd type="none" w="med" len="med"/>
+                      <a:tailEnd type="none" w="med" len="med"/>
+                    </a:lnR>
+                    <a:lnT w="12700" cap="flat" cmpd="sng" algn="ctr">
+                      <a:solidFill>
+                        <a:srgbClr val="2A3441"/>
+                      </a:solidFill>
+                      <a:prstDash val="solid"/>
+                      <a:round/>
+                      <a:headEnd type="none" w="med" len="med"/>
+                      <a:tailEnd type="none" w="med" len="med"/>
+                    </a:lnT>
+                    <a:lnB w="12700" cap="flat" cmpd="sng" algn="ctr">
+                      <a:solidFill>
+                        <a:srgbClr val="2A3441"/>
+                      </a:solidFill>
+                      <a:prstDash val="solid"/>
+                      <a:round/>
+                      <a:headEnd type="none" w="med" len="med"/>
+                      <a:tailEnd type="none" w="med" len="med"/>
+                    </a:lnB>
+                    <a:solidFill>
+                      <a:srgbClr val="39FF88"/>
+                    </a:solidFill>
+                  </a:tcPr>
+                </a:tc>
+                <a:tc>
+                  <a:txBody>
+                    <a:bodyPr/>
+                    <a:lstStyle/>
+                    <a:p>
+                      <a:pPr indent="0" marL="0">
+                        <a:buNone/>
+                      </a:pPr>
+                      <a:r>
+                        <a:rPr lang="en-US" sz="1300" b="1" dirty="0">
+                          <a:solidFill>
+                            <a:srgbClr val="0B0F14"/>
+                          </a:solidFill>
+                          <a:latin typeface="Courier New" pitchFamily="34" charset="0"/>
+                          <a:ea typeface="Courier New" pitchFamily="34" charset="-122"/>
+                          <a:cs typeface="Courier New" pitchFamily="34" charset="-120"/>
+                        </a:rPr>
+                        <a:t>Jain</a:t>
+                      </a:r>
+                      <a:endParaRPr lang="en-US" sz="1300" dirty="0">
+                        <a:latin typeface="Courier New" charset="0"/>
+                        <a:ea typeface="Courier New" charset="0"/>
+                        <a:cs typeface="Courier New" charset="0"/>
+                      </a:endParaRPr>
+                    </a:p>
+                  </a:txBody>
+                  <a:tcPr marL="91440" marR="91440" marT="45720" marB="45720">
+                    <a:lnL w="12700" cap="flat" cmpd="sng" algn="ctr">
+                      <a:solidFill>
+                        <a:srgbClr val="2A3441"/>
+                      </a:solidFill>
+                      <a:prstDash val="solid"/>
+                      <a:round/>
+                      <a:headEnd type="none" w="med" len="med"/>
+                      <a:tailEnd type="none" w="med" len="med"/>
+                    </a:lnL>
+                    <a:lnR w="12700" cap="flat" cmpd="sng" algn="ctr">
+                      <a:solidFill>
+                        <a:srgbClr val="2A3441"/>
+                      </a:solidFill>
+                      <a:prstDash val="solid"/>
+                      <a:round/>
+                      <a:headEnd type="none" w="med" len="med"/>
+                      <a:tailEnd type="none" w="med" len="med"/>
+                    </a:lnR>
+                    <a:lnT w="12700" cap="flat" cmpd="sng" algn="ctr">
+                      <a:solidFill>
+                        <a:srgbClr val="2A3441"/>
+                      </a:solidFill>
+                      <a:prstDash val="solid"/>
+                      <a:round/>
+                      <a:headEnd type="none" w="med" len="med"/>
+                      <a:tailEnd type="none" w="med" len="med"/>
+                    </a:lnT>
+                    <a:lnB w="12700" cap="flat" cmpd="sng" algn="ctr">
+                      <a:solidFill>
+                        <a:srgbClr val="2A3441"/>
+                      </a:solidFill>
+                      <a:prstDash val="solid"/>
+                      <a:round/>
+                      <a:headEnd type="none" w="med" len="med"/>
+                      <a:tailEnd type="none" w="med" len="med"/>
+                    </a:lnB>
+                    <a:solidFill>
+                      <a:srgbClr val="39FF88"/>
+                    </a:solidFill>
+                  </a:tcPr>
+                </a:tc>
+              </a:tr>
+              <a:tr h="402336">
+                <a:tc>
+                  <a:txBody>
+                    <a:bodyPr/>
+                    <a:lstStyle/>
+                    <a:p>
+                      <a:pPr indent="0" marL="0">
+                        <a:buNone/>
+                      </a:pPr>
+                      <a:r>
+                        <a:rPr lang="en-US" sz="1300" dirty="0">
+                          <a:solidFill>
+                            <a:srgbClr val="E6EDF3"/>
+                          </a:solidFill>
+                          <a:latin typeface="Calibri" pitchFamily="34" charset="0"/>
+                          <a:ea typeface="Calibri" pitchFamily="34" charset="-122"/>
+                          <a:cs typeface="Calibri" pitchFamily="34" charset="-120"/>
+                        </a:rPr>
+                        <a:t>AIMD / AIMD</a:t>
+                      </a:r>
+                      <a:endParaRPr lang="en-US" sz="1300" dirty="0">
+                        <a:latin typeface="Calibri" charset="0"/>
+                        <a:ea typeface="Calibri" charset="0"/>
+                        <a:cs typeface="Calibri" charset="0"/>
+                      </a:endParaRPr>
+                    </a:p>
+                  </a:txBody>
+                  <a:tcPr marL="91440" marR="91440" marT="45720" marB="45720">
+                    <a:lnL w="12700" cap="flat" cmpd="sng" algn="ctr">
+                      <a:solidFill>
+                        <a:srgbClr val="2A3441"/>
+                      </a:solidFill>
+                      <a:prstDash val="solid"/>
+                      <a:round/>
+                      <a:headEnd type="none" w="med" len="med"/>
+                      <a:tailEnd type="none" w="med" len="med"/>
+                    </a:lnL>
+                    <a:lnR w="12700" cap="flat" cmpd="sng" algn="ctr">
+                      <a:solidFill>
+                        <a:srgbClr val="2A3441"/>
+                      </a:solidFill>
+                      <a:prstDash val="solid"/>
+                      <a:round/>
+                      <a:headEnd type="none" w="med" len="med"/>
+                      <a:tailEnd type="none" w="med" len="med"/>
+                    </a:lnR>
+                    <a:lnT w="12700" cap="flat" cmpd="sng" algn="ctr">
+                      <a:solidFill>
+                        <a:srgbClr val="2A3441"/>
+                      </a:solidFill>
+                      <a:prstDash val="solid"/>
+                      <a:round/>
+                      <a:headEnd type="none" w="med" len="med"/>
+                      <a:tailEnd type="none" w="med" len="med"/>
+                    </a:lnT>
+                    <a:lnB w="12700" cap="flat" cmpd="sng" algn="ctr">
+                      <a:solidFill>
+                        <a:srgbClr val="2A3441"/>
+                      </a:solidFill>
+                      <a:prstDash val="solid"/>
+                      <a:round/>
+                      <a:headEnd type="none" w="med" len="med"/>
+                      <a:tailEnd type="none" w="med" len="med"/>
+                    </a:lnB>
+                    <a:solidFill>
+                      <a:srgbClr val="141B24"/>
+                    </a:solidFill>
+                  </a:tcPr>
+                </a:tc>
+                <a:tc>
+                  <a:txBody>
+                    <a:bodyPr/>
+                    <a:lstStyle/>
+                    <a:p>
+                      <a:pPr indent="0" marL="0">
+                        <a:buNone/>
+                      </a:pPr>
+                      <a:r>
+                        <a:rPr lang="en-US" sz="1300" dirty="0">
+                          <a:solidFill>
+                            <a:srgbClr val="E6EDF3"/>
+                          </a:solidFill>
+                          <a:latin typeface="Calibri" pitchFamily="34" charset="0"/>
+                          <a:ea typeface="Calibri" pitchFamily="34" charset="-122"/>
+                          <a:cs typeface="Calibri" pitchFamily="34" charset="-120"/>
+                        </a:rPr>
+                        <a:t>150 ms</a:t>
+                      </a:r>
+                      <a:endParaRPr lang="en-US" sz="1300" dirty="0">
+                        <a:latin typeface="Calibri" charset="0"/>
+                        <a:ea typeface="Calibri" charset="0"/>
+                        <a:cs typeface="Calibri" charset="0"/>
+                      </a:endParaRPr>
+                    </a:p>
+                  </a:txBody>
+                  <a:tcPr marL="91440" marR="91440" marT="45720" marB="45720">
+                    <a:lnL w="12700" cap="flat" cmpd="sng" algn="ctr">
+                      <a:solidFill>
+                        <a:srgbClr val="2A3441"/>
+                      </a:solidFill>
+                      <a:prstDash val="solid"/>
+                      <a:round/>
+                      <a:headEnd type="none" w="med" len="med"/>
+                      <a:tailEnd type="none" w="med" len="med"/>
+                    </a:lnL>
+                    <a:lnR w="12700" cap="flat" cmpd="sng" algn="ctr">
+                      <a:solidFill>
+                        <a:srgbClr val="2A3441"/>
+                      </a:solidFill>
+                      <a:prstDash val="solid"/>
+                      <a:round/>
+                      <a:headEnd type="none" w="med" len="med"/>
+                      <a:tailEnd type="none" w="med" len="med"/>
+                    </a:lnR>
+                    <a:lnT w="12700" cap="flat" cmpd="sng" algn="ctr">
+                      <a:solidFill>
+                        <a:srgbClr val="2A3441"/>
+                      </a:solidFill>
+                      <a:prstDash val="solid"/>
+                      <a:round/>
+                      <a:headEnd type="none" w="med" len="med"/>
+                      <a:tailEnd type="none" w="med" len="med"/>
+                    </a:lnT>
+                    <a:lnB w="12700" cap="flat" cmpd="sng" algn="ctr">
+                      <a:solidFill>
+                        <a:srgbClr val="2A3441"/>
+                      </a:solidFill>
+                      <a:prstDash val="solid"/>
+                      <a:round/>
+                      <a:headEnd type="none" w="med" len="med"/>
+                      <a:tailEnd type="none" w="med" len="med"/>
+                    </a:lnB>
+                    <a:solidFill>
+                      <a:srgbClr val="141B24"/>
+                    </a:solidFill>
+                  </a:tcPr>
+                </a:tc>
+                <a:tc>
+                  <a:txBody>
+                    <a:bodyPr/>
+                    <a:lstStyle/>
+                    <a:p>
+                      <a:pPr indent="0" marL="0">
+                        <a:buNone/>
+                      </a:pPr>
+                      <a:r>
+                        <a:rPr lang="en-US" sz="1300" dirty="0">
+                          <a:solidFill>
+                            <a:srgbClr val="E6EDF3"/>
+                          </a:solidFill>
+                          <a:latin typeface="Calibri" pitchFamily="34" charset="0"/>
+                          <a:ea typeface="Calibri" pitchFamily="34" charset="-122"/>
+                          <a:cs typeface="Calibri" pitchFamily="34" charset="-120"/>
+                        </a:rPr>
+                        <a:t>88%</a:t>
+                      </a:r>
+                      <a:endParaRPr lang="en-US" sz="1300" dirty="0">
+                        <a:latin typeface="Calibri" charset="0"/>
+                        <a:ea typeface="Calibri" charset="0"/>
+                        <a:cs typeface="Calibri" charset="0"/>
+                      </a:endParaRPr>
+                    </a:p>
+                  </a:txBody>
+                  <a:tcPr marL="91440" marR="91440" marT="45720" marB="45720">
+                    <a:lnL w="12700" cap="flat" cmpd="sng" algn="ctr">
+                      <a:solidFill>
+                        <a:srgbClr val="2A3441"/>
+                      </a:solidFill>
+                      <a:prstDash val="solid"/>
+                      <a:round/>
+                      <a:headEnd type="none" w="med" len="med"/>
+                      <a:tailEnd type="none" w="med" len="med"/>
+                    </a:lnL>
+                    <a:lnR w="12700" cap="flat" cmpd="sng" algn="ctr">
+                      <a:solidFill>
+                        <a:srgbClr val="2A3441"/>
+                      </a:solidFill>
+                      <a:prstDash val="solid"/>
+                      <a:round/>
+                      <a:headEnd type="none" w="med" len="med"/>
+                      <a:tailEnd type="none" w="med" len="med"/>
+                    </a:lnR>
+                    <a:lnT w="12700" cap="flat" cmpd="sng" algn="ctr">
+                      <a:solidFill>
+                        <a:srgbClr val="2A3441"/>
+                      </a:solidFill>
+                      <a:prstDash val="solid"/>
+                      <a:round/>
+                      <a:headEnd type="none" w="med" len="med"/>
+                      <a:tailEnd type="none" w="med" len="med"/>
+                    </a:lnT>
+                    <a:lnB w="12700" cap="flat" cmpd="sng" algn="ctr">
+                      <a:solidFill>
+                        <a:srgbClr val="2A3441"/>
+                      </a:solidFill>
+                      <a:prstDash val="solid"/>
+                      <a:round/>
+                      <a:headEnd type="none" w="med" len="med"/>
+                      <a:tailEnd type="none" w="med" len="med"/>
+                    </a:lnB>
+                    <a:solidFill>
+                      <a:srgbClr val="141B24"/>
+                    </a:solidFill>
+                  </a:tcPr>
+                </a:tc>
+                <a:tc>
+                  <a:txBody>
+                    <a:bodyPr/>
+                    <a:lstStyle/>
+                    <a:p>
+                      <a:pPr indent="0" marL="0">
+                        <a:buNone/>
+                      </a:pPr>
+                      <a:r>
+                        <a:rPr lang="en-US" sz="1300" dirty="0">
+                          <a:solidFill>
+                            <a:srgbClr val="E6EDF3"/>
+                          </a:solidFill>
+                          <a:latin typeface="Calibri" pitchFamily="34" charset="0"/>
+                          <a:ea typeface="Calibri" pitchFamily="34" charset="-122"/>
+                          <a:cs typeface="Calibri" pitchFamily="34" charset="-120"/>
+                        </a:rPr>
+                        <a:t>0.64</a:t>
+                      </a:r>
+                      <a:endParaRPr lang="en-US" sz="1300" dirty="0">
+                        <a:latin typeface="Calibri" charset="0"/>
+                        <a:ea typeface="Calibri" charset="0"/>
+                        <a:cs typeface="Calibri" charset="0"/>
+                      </a:endParaRPr>
+                    </a:p>
+                  </a:txBody>
+                  <a:tcPr marL="91440" marR="91440" marT="45720" marB="45720">
+                    <a:lnL w="12700" cap="flat" cmpd="sng" algn="ctr">
+                      <a:solidFill>
+                        <a:srgbClr val="2A3441"/>
+                      </a:solidFill>
+                      <a:prstDash val="solid"/>
+                      <a:round/>
+                      <a:headEnd type="none" w="med" len="med"/>
+                      <a:tailEnd type="none" w="med" len="med"/>
+                    </a:lnL>
+                    <a:lnR w="12700" cap="flat" cmpd="sng" algn="ctr">
+                      <a:solidFill>
+                        <a:srgbClr val="2A3441"/>
+                      </a:solidFill>
+                      <a:prstDash val="solid"/>
+                      <a:round/>
+                      <a:headEnd type="none" w="med" len="med"/>
+                      <a:tailEnd type="none" w="med" len="med"/>
+                    </a:lnR>
+                    <a:lnT w="12700" cap="flat" cmpd="sng" algn="ctr">
+                      <a:solidFill>
+                        <a:srgbClr val="2A3441"/>
+                      </a:solidFill>
+                      <a:prstDash val="solid"/>
+                      <a:round/>
+                      <a:headEnd type="none" w="med" len="med"/>
+                      <a:tailEnd type="none" w="med" len="med"/>
+                    </a:lnT>
+                    <a:lnB w="12700" cap="flat" cmpd="sng" algn="ctr">
+                      <a:solidFill>
+                        <a:srgbClr val="2A3441"/>
+                      </a:solidFill>
+                      <a:prstDash val="solid"/>
+                      <a:round/>
+                      <a:headEnd type="none" w="med" len="med"/>
+                      <a:tailEnd type="none" w="med" len="med"/>
+                    </a:lnB>
+                    <a:solidFill>
+                      <a:srgbClr val="141B24"/>
+                    </a:solidFill>
+                  </a:tcPr>
+                </a:tc>
+              </a:tr>
+              <a:tr h="402336">
+                <a:tc>
+                  <a:txBody>
+                    <a:bodyPr/>
+                    <a:lstStyle/>
+                    <a:p>
+                      <a:pPr indent="0" marL="0">
+                        <a:buNone/>
+                      </a:pPr>
+                      <a:r>
+                        <a:rPr lang="en-US" sz="1300" dirty="0">
+                          <a:solidFill>
+                            <a:srgbClr val="E6EDF3"/>
+                          </a:solidFill>
+                          <a:latin typeface="Calibri" pitchFamily="34" charset="0"/>
+                          <a:ea typeface="Calibri" pitchFamily="34" charset="-122"/>
+                          <a:cs typeface="Calibri" pitchFamily="34" charset="-120"/>
+                        </a:rPr>
+                        <a:t>Neural / neural</a:t>
+                      </a:r>
+                      <a:endParaRPr lang="en-US" sz="1300" dirty="0">
+                        <a:latin typeface="Calibri" charset="0"/>
+                        <a:ea typeface="Calibri" charset="0"/>
+                        <a:cs typeface="Calibri" charset="0"/>
+                      </a:endParaRPr>
+                    </a:p>
+                  </a:txBody>
+                  <a:tcPr marL="91440" marR="91440" marT="45720" marB="45720">
+                    <a:lnL w="12700" cap="flat" cmpd="sng" algn="ctr">
+                      <a:solidFill>
+                        <a:srgbClr val="2A3441"/>
+                      </a:solidFill>
+                      <a:prstDash val="solid"/>
+                      <a:round/>
+                      <a:headEnd type="none" w="med" len="med"/>
+                      <a:tailEnd type="none" w="med" len="med"/>
+                    </a:lnL>
+                    <a:lnR w="12700" cap="flat" cmpd="sng" algn="ctr">
+                      <a:solidFill>
+                        <a:srgbClr val="2A3441"/>
+                      </a:solidFill>
+                      <a:prstDash val="solid"/>
+                      <a:round/>
+                      <a:headEnd type="none" w="med" len="med"/>
+                      <a:tailEnd type="none" w="med" len="med"/>
+                    </a:lnR>
+                    <a:lnT w="12700" cap="flat" cmpd="sng" algn="ctr">
+                      <a:solidFill>
+                        <a:srgbClr val="2A3441"/>
+                      </a:solidFill>
+                      <a:prstDash val="solid"/>
+                      <a:round/>
+                      <a:headEnd type="none" w="med" len="med"/>
+                      <a:tailEnd type="none" w="med" len="med"/>
+                    </a:lnT>
+                    <a:lnB w="12700" cap="flat" cmpd="sng" algn="ctr">
+                      <a:solidFill>
+                        <a:srgbClr val="2A3441"/>
+                      </a:solidFill>
+                      <a:prstDash val="solid"/>
+                      <a:round/>
+                      <a:headEnd type="none" w="med" len="med"/>
+                      <a:tailEnd type="none" w="med" len="med"/>
+                    </a:lnB>
+                    <a:solidFill>
+                      <a:srgbClr val="141B24"/>
+                    </a:solidFill>
+                  </a:tcPr>
+                </a:tc>
+                <a:tc>
+                  <a:txBody>
+                    <a:bodyPr/>
+                    <a:lstStyle/>
+                    <a:p>
+                      <a:pPr indent="0" marL="0">
+                        <a:buNone/>
+                      </a:pPr>
+                      <a:r>
+                        <a:rPr lang="en-US" sz="1300" dirty="0">
+                          <a:solidFill>
+                            <a:srgbClr val="E6EDF3"/>
+                          </a:solidFill>
+                          <a:latin typeface="Calibri" pitchFamily="34" charset="0"/>
+                          <a:ea typeface="Calibri" pitchFamily="34" charset="-122"/>
+                          <a:cs typeface="Calibri" pitchFamily="34" charset="-120"/>
+                        </a:rPr>
+                        <a:t>150 ms</a:t>
+                      </a:r>
+                      <a:endParaRPr lang="en-US" sz="1300" dirty="0">
+                        <a:latin typeface="Calibri" charset="0"/>
+                        <a:ea typeface="Calibri" charset="0"/>
+                        <a:cs typeface="Calibri" charset="0"/>
+                      </a:endParaRPr>
+                    </a:p>
+                  </a:txBody>
+                  <a:tcPr marL="91440" marR="91440" marT="45720" marB="45720">
+                    <a:lnL w="12700" cap="flat" cmpd="sng" algn="ctr">
+                      <a:solidFill>
+                        <a:srgbClr val="2A3441"/>
+                      </a:solidFill>
+                      <a:prstDash val="solid"/>
+                      <a:round/>
+                      <a:headEnd type="none" w="med" len="med"/>
+                      <a:tailEnd type="none" w="med" len="med"/>
+                    </a:lnL>
+                    <a:lnR w="12700" cap="flat" cmpd="sng" algn="ctr">
+                      <a:solidFill>
+                        <a:srgbClr val="2A3441"/>
+                      </a:solidFill>
+                      <a:prstDash val="solid"/>
+                      <a:round/>
+                      <a:headEnd type="none" w="med" len="med"/>
+                      <a:tailEnd type="none" w="med" len="med"/>
+                    </a:lnR>
+                    <a:lnT w="12700" cap="flat" cmpd="sng" algn="ctr">
+                      <a:solidFill>
+                        <a:srgbClr val="2A3441"/>
+                      </a:solidFill>
+                      <a:prstDash val="solid"/>
+                      <a:round/>
+                      <a:headEnd type="none" w="med" len="med"/>
+                      <a:tailEnd type="none" w="med" len="med"/>
+                    </a:lnT>
+                    <a:lnB w="12700" cap="flat" cmpd="sng" algn="ctr">
+                      <a:solidFill>
+                        <a:srgbClr val="2A3441"/>
+                      </a:solidFill>
+                      <a:prstDash val="solid"/>
+                      <a:round/>
+                      <a:headEnd type="none" w="med" len="med"/>
+                      <a:tailEnd type="none" w="med" len="med"/>
+                    </a:lnB>
+                    <a:solidFill>
+                      <a:srgbClr val="141B24"/>
+                    </a:solidFill>
+                  </a:tcPr>
+                </a:tc>
+                <a:tc>
+                  <a:txBody>
+                    <a:bodyPr/>
+                    <a:lstStyle/>
+                    <a:p>
+                      <a:pPr indent="0" marL="0">
+                        <a:buNone/>
+                      </a:pPr>
+                      <a:r>
+                        <a:rPr lang="en-US" sz="1300" dirty="0">
+                          <a:solidFill>
+                            <a:srgbClr val="E6EDF3"/>
+                          </a:solidFill>
+                          <a:latin typeface="Calibri" pitchFamily="34" charset="0"/>
+                          <a:ea typeface="Calibri" pitchFamily="34" charset="-122"/>
+                          <a:cs typeface="Calibri" pitchFamily="34" charset="-120"/>
+                        </a:rPr>
+                        <a:t>71%</a:t>
+                      </a:r>
+                      <a:endParaRPr lang="en-US" sz="1300" dirty="0">
+                        <a:latin typeface="Calibri" charset="0"/>
+                        <a:ea typeface="Calibri" charset="0"/>
+                        <a:cs typeface="Calibri" charset="0"/>
+                      </a:endParaRPr>
+                    </a:p>
+                  </a:txBody>
+                  <a:tcPr marL="91440" marR="91440" marT="45720" marB="45720">
+                    <a:lnL w="12700" cap="flat" cmpd="sng" algn="ctr">
+                      <a:solidFill>
+                        <a:srgbClr val="2A3441"/>
+                      </a:solidFill>
+                      <a:prstDash val="solid"/>
+                      <a:round/>
+                      <a:headEnd type="none" w="med" len="med"/>
+                      <a:tailEnd type="none" w="med" len="med"/>
+                    </a:lnL>
+                    <a:lnR w="12700" cap="flat" cmpd="sng" algn="ctr">
+                      <a:solidFill>
+                        <a:srgbClr val="2A3441"/>
+                      </a:solidFill>
+                      <a:prstDash val="solid"/>
+                      <a:round/>
+                      <a:headEnd type="none" w="med" len="med"/>
+                      <a:tailEnd type="none" w="med" len="med"/>
+                    </a:lnR>
+                    <a:lnT w="12700" cap="flat" cmpd="sng" algn="ctr">
+                      <a:solidFill>
+                        <a:srgbClr val="2A3441"/>
+                      </a:solidFill>
+                      <a:prstDash val="solid"/>
+                      <a:round/>
+                      <a:headEnd type="none" w="med" len="med"/>
+                      <a:tailEnd type="none" w="med" len="med"/>
+                    </a:lnT>
+                    <a:lnB w="12700" cap="flat" cmpd="sng" algn="ctr">
+                      <a:solidFill>
+                        <a:srgbClr val="2A3441"/>
+                      </a:solidFill>
+                      <a:prstDash val="solid"/>
+                      <a:round/>
+                      <a:headEnd type="none" w="med" len="med"/>
+                      <a:tailEnd type="none" w="med" len="med"/>
+                    </a:lnB>
+                    <a:solidFill>
+                      <a:srgbClr val="141B24"/>
+                    </a:solidFill>
+                  </a:tcPr>
+                </a:tc>
+                <a:tc>
+                  <a:txBody>
+                    <a:bodyPr/>
+                    <a:lstStyle/>
+                    <a:p>
+                      <a:pPr indent="0" marL="0">
+                        <a:buNone/>
+                      </a:pPr>
+                      <a:r>
+                        <a:rPr lang="en-US" sz="1300" dirty="0">
+                          <a:solidFill>
+                            <a:srgbClr val="E6EDF3"/>
+                          </a:solidFill>
+                          <a:latin typeface="Calibri" pitchFamily="34" charset="0"/>
+                          <a:ea typeface="Calibri" pitchFamily="34" charset="-122"/>
+                          <a:cs typeface="Calibri" pitchFamily="34" charset="-120"/>
+                        </a:rPr>
+                        <a:t>0.84</a:t>
+                      </a:r>
+                      <a:endParaRPr lang="en-US" sz="1300" dirty="0">
+                        <a:latin typeface="Calibri" charset="0"/>
+                        <a:ea typeface="Calibri" charset="0"/>
+                        <a:cs typeface="Calibri" charset="0"/>
+                      </a:endParaRPr>
+                    </a:p>
+                  </a:txBody>
+                  <a:tcPr marL="91440" marR="91440" marT="45720" marB="45720">
+                    <a:lnL w="12700" cap="flat" cmpd="sng" algn="ctr">
+                      <a:solidFill>
+                        <a:srgbClr val="2A3441"/>
+                      </a:solidFill>
+                      <a:prstDash val="solid"/>
+                      <a:round/>
+                      <a:headEnd type="none" w="med" len="med"/>
+                      <a:tailEnd type="none" w="med" len="med"/>
+                    </a:lnL>
+                    <a:lnR w="12700" cap="flat" cmpd="sng" algn="ctr">
+                      <a:solidFill>
+                        <a:srgbClr val="2A3441"/>
+                      </a:solidFill>
+                      <a:prstDash val="solid"/>
+                      <a:round/>
+                      <a:headEnd type="none" w="med" len="med"/>
+                      <a:tailEnd type="none" w="med" len="med"/>
+                    </a:lnR>
+                    <a:lnT w="12700" cap="flat" cmpd="sng" algn="ctr">
+                      <a:solidFill>
+                        <a:srgbClr val="2A3441"/>
+                      </a:solidFill>
+                      <a:prstDash val="solid"/>
+                      <a:round/>
+                      <a:headEnd type="none" w="med" len="med"/>
+                      <a:tailEnd type="none" w="med" len="med"/>
+                    </a:lnT>
+                    <a:lnB w="12700" cap="flat" cmpd="sng" algn="ctr">
+                      <a:solidFill>
+                        <a:srgbClr val="2A3441"/>
+                      </a:solidFill>
+                      <a:prstDash val="solid"/>
+                      <a:round/>
+                      <a:headEnd type="none" w="med" len="med"/>
+                      <a:tailEnd type="none" w="med" len="med"/>
+                    </a:lnB>
+                    <a:solidFill>
+                      <a:srgbClr val="141B24"/>
+                    </a:solidFill>
+                  </a:tcPr>
+                </a:tc>
+              </a:tr>
+            </a:tbl>
+          </a:graphicData>
+        </a:graphic>
+      </p:graphicFrame>
       <p:sp>
         <p:nvSpPr>
-          <p:cNvPr id="4" name="Text 2"/>
+          <p:cNvPr id="5" name="Text 2"/>
           <p:cNvSpPr/>
           <p:nvPr/>
         </p:nvSpPr>
         <p:spPr>
           <a:xfrm>
-            <a:off x="731520" y="4206240"/>
-            <a:ext cx="10058400" cy="457200"/>
+            <a:off x="548640" y="2743200"/>
+            <a:ext cx="11064240" cy="3474720"/>
           </a:xfrm>
           <a:prstGeom prst="rect">
             <a:avLst/>
@@ -28745,24 +31758,112 @@
           <a:ln/>
         </p:spPr>
         <p:txBody>
-          <a:bodyPr wrap="square" lIns="0" tIns="0" rIns="0" bIns="0" rtlCol="0" anchor="ctr"/>
+          <a:bodyPr wrap="square" lIns="0" tIns="0" rIns="0" bIns="0" rtlCol="0" anchor="t"/>
           <a:lstStyle/>
           <a:p>
-            <a:pPr indent="0" marL="0">
-              <a:buNone/>
+            <a:pPr marL="342900" indent="-342900">
+              <a:spcAft>
+                <a:spcPts val="800"/>
+              </a:spcAft>
+              <a:buSzPct val="100000"/>
+              <a:buChar char="•"/>
             </a:pPr>
             <a:r>
-              <a:rPr lang="en-US" sz="1800" dirty="0">
+              <a:rPr lang="en-US" sz="1600" dirty="0">
                 <a:solidFill>
-                  <a:srgbClr val="8B98A5"/>
+                  <a:srgbClr val="E6EDF3"/>
                 </a:solidFill>
                 <a:latin typeface="Calibri" pitchFamily="34" charset="0"/>
                 <a:ea typeface="Calibri" pitchFamily="34" charset="-122"/>
                 <a:cs typeface="Calibri" pitchFamily="34" charset="-120"/>
               </a:rPr>
-              <a:t>Harshavardhan Mallela   Rohit Arya   Shloak Sinha</a:t>
-            </a:r>
-            <a:endParaRPr lang="en-US" sz="1800" dirty="0"/>
+              <a:t>Neural flows are fairer than AIMD under unequal RTTs, but still favour the short-RTT flow (6 pairs per cell)</a:t>
+            </a:r>
+            <a:endParaRPr lang="en-US" sz="1600" dirty="0"/>
+          </a:p>
+          <a:p>
+            <a:pPr marL="342900" indent="-342900">
+              <a:spcAft>
+                <a:spcPts val="800"/>
+              </a:spcAft>
+              <a:buSzPct val="100000"/>
+              <a:buChar char="•"/>
+            </a:pPr>
+            <a:r>
+              <a:rPr lang="en-US" sz="1600" dirty="0">
+                <a:solidFill>
+                  <a:srgbClr val="E6EDF3"/>
+                </a:solidFill>
+                <a:latin typeface="Calibri" pitchFamily="34" charset="0"/>
+                <a:ea typeface="Calibri" pitchFamily="34" charset="-122"/>
+                <a:cs typeface="Calibri" pitchFamily="34" charset="-120"/>
+              </a:rPr>
+              <a:t>A depth-5 decision tree matches the network on only 79% of decisions, yet gives the same transfer time on 4 of 5 paths</a:t>
+            </a:r>
+            <a:endParaRPr lang="en-US" sz="1600" dirty="0"/>
+          </a:p>
+          <a:p>
+            <a:pPr marL="342900" indent="-342900">
+              <a:spcAft>
+                <a:spcPts val="800"/>
+              </a:spcAft>
+              <a:buSzPct val="100000"/>
+              <a:buChar char="•"/>
+            </a:pPr>
+            <a:r>
+              <a:rPr lang="en-US" sz="1600" dirty="0">
+                <a:solidFill>
+                  <a:srgbClr val="E6EDF3"/>
+                </a:solidFill>
+                <a:latin typeface="Calibri" pitchFamily="34" charset="0"/>
+                <a:ea typeface="Calibri" pitchFamily="34" charset="-122"/>
+                <a:cs typeface="Calibri" pitchFamily="34" charset="-120"/>
+              </a:rPr>
+              <a:t>Noise of 0.2 on the inputs costs at most 12%</a:t>
+            </a:r>
+            <a:endParaRPr lang="en-US" sz="1600" dirty="0"/>
+          </a:p>
+          <a:p>
+            <a:pPr marL="342900" indent="-342900">
+              <a:spcAft>
+                <a:spcPts val="800"/>
+              </a:spcAft>
+              <a:buSzPct val="100000"/>
+              <a:buChar char="•"/>
+            </a:pPr>
+            <a:r>
+              <a:rPr lang="en-US" sz="1600" dirty="0">
+                <a:solidFill>
+                  <a:srgbClr val="E6EDF3"/>
+                </a:solidFill>
+                <a:latin typeface="Calibri" pitchFamily="34" charset="0"/>
+                <a:ea typeface="Calibri" pitchFamily="34" charset="-122"/>
+                <a:cs typeface="Calibri" pitchFamily="34" charset="-120"/>
+              </a:rPr>
+              <a:t>Formal interval-bound certification: 43% of decisions at +-0.001, none at +-0.03. It is robust in practice but not proven</a:t>
+            </a:r>
+            <a:endParaRPr lang="en-US" sz="1600" dirty="0"/>
+          </a:p>
+          <a:p>
+            <a:pPr marL="342900" indent="-342900">
+              <a:spcAft>
+                <a:spcPts val="800"/>
+              </a:spcAft>
+              <a:buSzPct val="100000"/>
+              <a:buChar char="•"/>
+            </a:pPr>
+            <a:r>
+              <a:rPr lang="en-US" sz="1600" dirty="0">
+                <a:solidFill>
+                  <a:srgbClr val="E6EDF3"/>
+                </a:solidFill>
+                <a:latin typeface="Calibri" pitchFamily="34" charset="0"/>
+                <a:ea typeface="Calibri" pitchFamily="34" charset="-122"/>
+                <a:cs typeface="Calibri" pitchFamily="34" charset="-120"/>
+              </a:rPr>
+              <a:t>Coexistence with kernel TCP: script written (netem_coexist.sh), measurement still to run</a:t>
+            </a:r>
+            <a:endParaRPr lang="en-US" sz="1600" dirty="0"/>
           </a:p>
         </p:txBody>
       </p:sp>
@@ -28831,6 +31932,578 @@
                 <a:ea typeface="Courier New" pitchFamily="34" charset="-122"/>
                 <a:cs typeface="Courier New" pitchFamily="34" charset="-120"/>
               </a:rPr>
+              <a:t>Learnings and future work</a:t>
+            </a:r>
+            <a:endParaRPr lang="en-US" sz="3000" dirty="0"/>
+          </a:p>
+        </p:txBody>
+      </p:sp>
+      <p:sp>
+        <p:nvSpPr>
+          <p:cNvPr id="3" name="Text 1"/>
+          <p:cNvSpPr/>
+          <p:nvPr/>
+        </p:nvSpPr>
+        <p:spPr>
+          <a:xfrm>
+            <a:off x="9418320" y="6446520"/>
+            <a:ext cx="2377440" cy="274320"/>
+          </a:xfrm>
+          <a:prstGeom prst="rect">
+            <a:avLst/>
+          </a:prstGeom>
+          <a:noFill/>
+          <a:ln/>
+        </p:spPr>
+        <p:txBody>
+          <a:bodyPr wrap="square" lIns="0" tIns="0" rIns="0" bIns="0" rtlCol="0" anchor="ctr"/>
+          <a:lstStyle/>
+          <a:p>
+            <a:pPr algn="r" indent="0" marL="0">
+              <a:buNone/>
+            </a:pPr>
+            <a:r>
+              <a:rPr lang="en-US" sz="1000" dirty="0">
+                <a:solidFill>
+                  <a:srgbClr val="8B98A5"/>
+                </a:solidFill>
+                <a:latin typeface="Courier New" pitchFamily="34" charset="0"/>
+                <a:ea typeface="Courier New" pitchFamily="34" charset="-122"/>
+                <a:cs typeface="Courier New" pitchFamily="34" charset="-120"/>
+              </a:rPr>
+              <a:t>35 / 37   Smart-RUDP</a:t>
+            </a:r>
+            <a:endParaRPr lang="en-US" sz="1000" dirty="0"/>
+          </a:p>
+        </p:txBody>
+      </p:sp>
+      <p:sp>
+        <p:nvSpPr>
+          <p:cNvPr id="4" name="Shape 2"/>
+          <p:cNvSpPr/>
+          <p:nvPr/>
+        </p:nvSpPr>
+        <p:spPr>
+          <a:xfrm>
+            <a:off x="548640" y="1371600"/>
+            <a:ext cx="5394960" cy="4206240"/>
+          </a:xfrm>
+          <a:prstGeom prst="rect">
+            <a:avLst/>
+          </a:prstGeom>
+          <a:solidFill>
+            <a:srgbClr val="141B24"/>
+          </a:solidFill>
+          <a:ln w="12700">
+            <a:solidFill>
+              <a:srgbClr val="39FF88"/>
+            </a:solidFill>
+            <a:prstDash val="solid"/>
+          </a:ln>
+        </p:spPr>
+      </p:sp>
+      <p:sp>
+        <p:nvSpPr>
+          <p:cNvPr id="5" name="Text 3"/>
+          <p:cNvSpPr/>
+          <p:nvPr/>
+        </p:nvSpPr>
+        <p:spPr>
+          <a:xfrm>
+            <a:off x="731520" y="1508760"/>
+            <a:ext cx="5029200" cy="457200"/>
+          </a:xfrm>
+          <a:prstGeom prst="rect">
+            <a:avLst/>
+          </a:prstGeom>
+          <a:noFill/>
+          <a:ln/>
+        </p:spPr>
+        <p:txBody>
+          <a:bodyPr wrap="square" lIns="0" tIns="0" rIns="0" bIns="0" rtlCol="0" anchor="ctr"/>
+          <a:lstStyle/>
+          <a:p>
+            <a:pPr indent="0" marL="0">
+              <a:buNone/>
+            </a:pPr>
+            <a:r>
+              <a:rPr lang="en-US" sz="2000" b="1" dirty="0">
+                <a:solidFill>
+                  <a:srgbClr val="39FF88"/>
+                </a:solidFill>
+                <a:latin typeface="Courier New" pitchFamily="34" charset="0"/>
+                <a:ea typeface="Courier New" pitchFamily="34" charset="-122"/>
+                <a:cs typeface="Courier New" pitchFamily="34" charset="-120"/>
+              </a:rPr>
+              <a:t>Learned</a:t>
+            </a:r>
+            <a:endParaRPr lang="en-US" sz="2000" dirty="0"/>
+          </a:p>
+        </p:txBody>
+      </p:sp>
+      <p:sp>
+        <p:nvSpPr>
+          <p:cNvPr id="6" name="Text 4"/>
+          <p:cNvSpPr/>
+          <p:nvPr/>
+        </p:nvSpPr>
+        <p:spPr>
+          <a:xfrm>
+            <a:off x="731520" y="2011680"/>
+            <a:ext cx="5029200" cy="3429000"/>
+          </a:xfrm>
+          <a:prstGeom prst="rect">
+            <a:avLst/>
+          </a:prstGeom>
+          <a:noFill/>
+          <a:ln/>
+        </p:spPr>
+        <p:txBody>
+          <a:bodyPr wrap="square" lIns="0" tIns="0" rIns="0" bIns="0" rtlCol="0" anchor="t"/>
+          <a:lstStyle/>
+          <a:p>
+            <a:pPr indent="0" marL="0">
+              <a:buNone/>
+            </a:pPr>
+            <a:r>
+              <a:rPr lang="en-US" sz="2000" dirty="0">
+                <a:solidFill>
+                  <a:srgbClr val="E6EDF3"/>
+                </a:solidFill>
+                <a:latin typeface="Calibri" pitchFamily="34" charset="0"/>
+                <a:ea typeface="Calibri" pitchFamily="34" charset="-122"/>
+                <a:cs typeface="Calibri" pitchFamily="34" charset="-120"/>
+              </a:rPr>
+              <a:t>Reliability is a set of simple rules working together.</a:t>
+            </a:r>
+            <a:endParaRPr lang="en-US" sz="2000" dirty="0"/>
+          </a:p>
+          <a:p>
+            <a:pPr indent="0" marL="0">
+              <a:buNone/>
+            </a:pPr>
+            <a:r>
+              <a:rPr lang="en-US" sz="2000" dirty="0">
+                <a:solidFill>
+                  <a:srgbClr val="E6EDF3"/>
+                </a:solidFill>
+                <a:latin typeface="Calibri" pitchFamily="34" charset="0"/>
+                <a:ea typeface="Calibri" pitchFamily="34" charset="-122"/>
+                <a:cs typeface="Calibri" pitchFamily="34" charset="-120"/>
+              </a:rPr>
+              <a:t>Congestion control matters as much as retransmission.</a:t>
+            </a:r>
+            <a:endParaRPr lang="en-US" sz="2000" dirty="0"/>
+          </a:p>
+          <a:p>
+            <a:pPr indent="0" marL="0">
+              <a:buNone/>
+            </a:pPr>
+            <a:r>
+              <a:rPr lang="en-US" sz="2000" dirty="0">
+                <a:solidFill>
+                  <a:srgbClr val="E6EDF3"/>
+                </a:solidFill>
+                <a:latin typeface="Calibri" pitchFamily="34" charset="0"/>
+                <a:ea typeface="Calibri" pitchFamily="34" charset="-122"/>
+                <a:cs typeface="Calibri" pitchFamily="34" charset="-120"/>
+              </a:rPr>
+              <a:t>Testing tools fail in surprising ways.</a:t>
+            </a:r>
+            <a:endParaRPr lang="en-US" sz="2000" dirty="0"/>
+          </a:p>
+        </p:txBody>
+      </p:sp>
+      <p:sp>
+        <p:nvSpPr>
+          <p:cNvPr id="7" name="Shape 5"/>
+          <p:cNvSpPr/>
+          <p:nvPr/>
+        </p:nvSpPr>
+        <p:spPr>
+          <a:xfrm>
+            <a:off x="6217920" y="1371600"/>
+            <a:ext cx="5394960" cy="4206240"/>
+          </a:xfrm>
+          <a:prstGeom prst="rect">
+            <a:avLst/>
+          </a:prstGeom>
+          <a:solidFill>
+            <a:srgbClr val="141B24"/>
+          </a:solidFill>
+          <a:ln w="12700">
+            <a:solidFill>
+              <a:srgbClr val="FFB000"/>
+            </a:solidFill>
+            <a:prstDash val="solid"/>
+          </a:ln>
+        </p:spPr>
+      </p:sp>
+      <p:sp>
+        <p:nvSpPr>
+          <p:cNvPr id="8" name="Text 6"/>
+          <p:cNvSpPr/>
+          <p:nvPr/>
+        </p:nvSpPr>
+        <p:spPr>
+          <a:xfrm>
+            <a:off x="6400800" y="1508760"/>
+            <a:ext cx="5029200" cy="457200"/>
+          </a:xfrm>
+          <a:prstGeom prst="rect">
+            <a:avLst/>
+          </a:prstGeom>
+          <a:noFill/>
+          <a:ln/>
+        </p:spPr>
+        <p:txBody>
+          <a:bodyPr wrap="square" lIns="0" tIns="0" rIns="0" bIns="0" rtlCol="0" anchor="ctr"/>
+          <a:lstStyle/>
+          <a:p>
+            <a:pPr indent="0" marL="0">
+              <a:buNone/>
+            </a:pPr>
+            <a:r>
+              <a:rPr lang="en-US" sz="2000" b="1" dirty="0">
+                <a:solidFill>
+                  <a:srgbClr val="FFB000"/>
+                </a:solidFill>
+                <a:latin typeface="Courier New" pitchFamily="34" charset="0"/>
+                <a:ea typeface="Courier New" pitchFamily="34" charset="-122"/>
+                <a:cs typeface="Courier New" pitchFamily="34" charset="-120"/>
+              </a:rPr>
+              <a:t>Next</a:t>
+            </a:r>
+            <a:endParaRPr lang="en-US" sz="2000" dirty="0"/>
+          </a:p>
+        </p:txBody>
+      </p:sp>
+      <p:sp>
+        <p:nvSpPr>
+          <p:cNvPr id="9" name="Text 7"/>
+          <p:cNvSpPr/>
+          <p:nvPr/>
+        </p:nvSpPr>
+        <p:spPr>
+          <a:xfrm>
+            <a:off x="6400800" y="2011680"/>
+            <a:ext cx="5029200" cy="3429000"/>
+          </a:xfrm>
+          <a:prstGeom prst="rect">
+            <a:avLst/>
+          </a:prstGeom>
+          <a:noFill/>
+          <a:ln/>
+        </p:spPr>
+        <p:txBody>
+          <a:bodyPr wrap="square" lIns="0" tIns="0" rIns="0" bIns="0" rtlCol="0" anchor="t"/>
+          <a:lstStyle/>
+          <a:p>
+            <a:pPr indent="0" marL="0">
+              <a:buNone/>
+            </a:pPr>
+            <a:r>
+              <a:rPr lang="en-US" sz="2000" dirty="0">
+                <a:solidFill>
+                  <a:srgbClr val="E6EDF3"/>
+                </a:solidFill>
+                <a:latin typeface="Calibri" pitchFamily="34" charset="0"/>
+                <a:ea typeface="Calibri" pitchFamily="34" charset="-122"/>
+                <a:cs typeface="Calibri" pitchFamily="34" charset="-120"/>
+              </a:rPr>
+              <a:t>Fairness-aware training, TCP coexistence</a:t>
+            </a:r>
+            <a:endParaRPr lang="en-US" sz="2000" dirty="0"/>
+          </a:p>
+          <a:p>
+            <a:pPr indent="0" marL="0">
+              <a:buNone/>
+            </a:pPr>
+            <a:r>
+              <a:rPr lang="en-US" sz="2000" dirty="0">
+                <a:solidFill>
+                  <a:srgbClr val="E6EDF3"/>
+                </a:solidFill>
+                <a:latin typeface="Calibri" pitchFamily="34" charset="0"/>
+                <a:ea typeface="Calibri" pitchFamily="34" charset="-122"/>
+                <a:cs typeface="Calibri" pitchFamily="34" charset="-120"/>
+              </a:rPr>
+              <a:t>Train on real traces with cross traffic</a:t>
+            </a:r>
+            <a:endParaRPr lang="en-US" sz="2000" dirty="0"/>
+          </a:p>
+          <a:p>
+            <a:pPr indent="0" marL="0">
+              <a:buNone/>
+            </a:pPr>
+            <a:r>
+              <a:rPr lang="en-US" sz="2000" dirty="0">
+                <a:solidFill>
+                  <a:srgbClr val="E6EDF3"/>
+                </a:solidFill>
+                <a:latin typeface="Calibri" pitchFamily="34" charset="0"/>
+                <a:ea typeface="Calibri" pitchFamily="34" charset="-122"/>
+                <a:cs typeface="Calibri" pitchFamily="34" charset="-120"/>
+              </a:rPr>
+              <a:t>Close the gap to kernel TCP; real multi-machine tests</a:t>
+            </a:r>
+            <a:endParaRPr lang="en-US" sz="2000" dirty="0"/>
+          </a:p>
+        </p:txBody>
+      </p:sp>
+      <p:sp>
+        <p:nvSpPr>
+          <p:cNvPr id="10" name="Text 8"/>
+          <p:cNvSpPr/>
+          <p:nvPr/>
+        </p:nvSpPr>
+        <p:spPr>
+          <a:xfrm>
+            <a:off x="548640" y="5852160"/>
+            <a:ext cx="10972800" cy="365760"/>
+          </a:xfrm>
+          <a:prstGeom prst="rect">
+            <a:avLst/>
+          </a:prstGeom>
+          <a:noFill/>
+          <a:ln/>
+        </p:spPr>
+        <p:txBody>
+          <a:bodyPr wrap="square" lIns="0" tIns="0" rIns="0" bIns="0" rtlCol="0" anchor="ctr"/>
+          <a:lstStyle/>
+          <a:p>
+            <a:pPr indent="0" marL="0">
+              <a:buNone/>
+            </a:pPr>
+            <a:r>
+              <a:rPr lang="en-US" sz="1400" dirty="0">
+                <a:solidFill>
+                  <a:srgbClr val="8B98A5"/>
+                </a:solidFill>
+                <a:latin typeface="Calibri" pitchFamily="34" charset="0"/>
+                <a:ea typeface="Calibri" pitchFamily="34" charset="-122"/>
+                <a:cs typeface="Calibri" pitchFamily="34" charset="-120"/>
+              </a:rPr>
+              <a:t>Limits: kernel TCP is 1.5x to 3.2x faster; no multi-machine test; polite mode is a hand-made rule that costs speed; level with CUBIC under bursty cross traffic; no gain at 10% random loss; BBR-style baseline is faster on the 2% lossy path; coexistence with kernel TCP not yet measured.</a:t>
+            </a:r>
+            <a:endParaRPr lang="en-US" sz="1400" dirty="0"/>
+          </a:p>
+        </p:txBody>
+      </p:sp>
+    </p:spTree>
+  </p:cSld>
+  <p:clrMapOvr>
+    <a:masterClrMapping/>
+  </p:clrMapOvr>
+</p:sld>
+</file>
+
+<file path=ppt/slides/slide36.xml><?xml version="1.0" encoding="utf-8"?>
+<p:sld xmlns:a="http://schemas.openxmlformats.org/drawingml/2006/main" xmlns:r="http://schemas.openxmlformats.org/officeDocument/2006/relationships" xmlns:p="http://schemas.openxmlformats.org/presentationml/2006/main">
+  <p:cSld name="Slide 36">
+    <p:bg>
+      <p:bgPr>
+        <a:solidFill>
+          <a:srgbClr val="0B0F14"/>
+        </a:solidFill>
+      </p:bgPr>
+    </p:bg>
+    <p:spTree>
+      <p:nvGrpSpPr>
+        <p:cNvPr id="1" name=""/>
+        <p:cNvGrpSpPr/>
+        <p:nvPr/>
+      </p:nvGrpSpPr>
+      <p:grpSpPr>
+        <a:xfrm>
+          <a:off x="0" y="0"/>
+          <a:ext cx="0" cy="0"/>
+          <a:chOff x="0" y="0"/>
+          <a:chExt cx="0" cy="0"/>
+        </a:xfrm>
+      </p:grpSpPr>
+      <p:sp>
+        <p:nvSpPr>
+          <p:cNvPr id="2" name="Text 0"/>
+          <p:cNvSpPr/>
+          <p:nvPr/>
+        </p:nvSpPr>
+        <p:spPr>
+          <a:xfrm>
+            <a:off x="731520" y="2103120"/>
+            <a:ext cx="10058400" cy="1097280"/>
+          </a:xfrm>
+          <a:prstGeom prst="rect">
+            <a:avLst/>
+          </a:prstGeom>
+          <a:noFill/>
+          <a:ln/>
+        </p:spPr>
+        <p:txBody>
+          <a:bodyPr wrap="square" lIns="0" tIns="0" rIns="0" bIns="0" rtlCol="0" anchor="ctr"/>
+          <a:lstStyle/>
+          <a:p>
+            <a:pPr indent="0" marL="0">
+              <a:buNone/>
+            </a:pPr>
+            <a:r>
+              <a:rPr lang="en-US" sz="6400" b="1" dirty="0">
+                <a:solidFill>
+                  <a:srgbClr val="39FF88"/>
+                </a:solidFill>
+                <a:latin typeface="Courier New" pitchFamily="34" charset="0"/>
+                <a:ea typeface="Courier New" pitchFamily="34" charset="-122"/>
+                <a:cs typeface="Courier New" pitchFamily="34" charset="-120"/>
+              </a:rPr>
+              <a:t>Thank you</a:t>
+            </a:r>
+            <a:endParaRPr lang="en-US" sz="6400" dirty="0"/>
+          </a:p>
+        </p:txBody>
+      </p:sp>
+      <p:sp>
+        <p:nvSpPr>
+          <p:cNvPr id="3" name="Text 1"/>
+          <p:cNvSpPr/>
+          <p:nvPr/>
+        </p:nvSpPr>
+        <p:spPr>
+          <a:xfrm>
+            <a:off x="731520" y="3474720"/>
+            <a:ext cx="10058400" cy="548640"/>
+          </a:xfrm>
+          <a:prstGeom prst="rect">
+            <a:avLst/>
+          </a:prstGeom>
+          <a:noFill/>
+          <a:ln/>
+        </p:spPr>
+        <p:txBody>
+          <a:bodyPr wrap="square" lIns="0" tIns="0" rIns="0" bIns="0" rtlCol="0" anchor="ctr"/>
+          <a:lstStyle/>
+          <a:p>
+            <a:pPr indent="0" marL="0">
+              <a:buNone/>
+            </a:pPr>
+            <a:r>
+              <a:rPr lang="en-US" sz="2600" dirty="0">
+                <a:solidFill>
+                  <a:srgbClr val="E6EDF3"/>
+                </a:solidFill>
+                <a:latin typeface="Courier New" pitchFamily="34" charset="0"/>
+                <a:ea typeface="Courier New" pitchFamily="34" charset="-122"/>
+                <a:cs typeface="Courier New" pitchFamily="34" charset="-120"/>
+              </a:rPr>
+              <a:t>github.com/Capsturrrr/rudp</a:t>
+            </a:r>
+            <a:endParaRPr lang="en-US" sz="2600" dirty="0"/>
+          </a:p>
+        </p:txBody>
+      </p:sp>
+      <p:sp>
+        <p:nvSpPr>
+          <p:cNvPr id="4" name="Text 2"/>
+          <p:cNvSpPr/>
+          <p:nvPr/>
+        </p:nvSpPr>
+        <p:spPr>
+          <a:xfrm>
+            <a:off x="731520" y="4206240"/>
+            <a:ext cx="10058400" cy="457200"/>
+          </a:xfrm>
+          <a:prstGeom prst="rect">
+            <a:avLst/>
+          </a:prstGeom>
+          <a:noFill/>
+          <a:ln/>
+        </p:spPr>
+        <p:txBody>
+          <a:bodyPr wrap="square" lIns="0" tIns="0" rIns="0" bIns="0" rtlCol="0" anchor="ctr"/>
+          <a:lstStyle/>
+          <a:p>
+            <a:pPr indent="0" marL="0">
+              <a:buNone/>
+            </a:pPr>
+            <a:r>
+              <a:rPr lang="en-US" sz="1800" dirty="0">
+                <a:solidFill>
+                  <a:srgbClr val="8B98A5"/>
+                </a:solidFill>
+                <a:latin typeface="Calibri" pitchFamily="34" charset="0"/>
+                <a:ea typeface="Calibri" pitchFamily="34" charset="-122"/>
+                <a:cs typeface="Calibri" pitchFamily="34" charset="-120"/>
+              </a:rPr>
+              <a:t>Harshavardhan Mallela   Rohit Arya   Shloak Sinha</a:t>
+            </a:r>
+            <a:endParaRPr lang="en-US" sz="1800" dirty="0"/>
+          </a:p>
+        </p:txBody>
+      </p:sp>
+    </p:spTree>
+  </p:cSld>
+  <p:clrMapOvr>
+    <a:masterClrMapping/>
+  </p:clrMapOvr>
+</p:sld>
+</file>
+
+<file path=ppt/slides/slide37.xml><?xml version="1.0" encoding="utf-8"?>
+<p:sld xmlns:a="http://schemas.openxmlformats.org/drawingml/2006/main" xmlns:r="http://schemas.openxmlformats.org/officeDocument/2006/relationships" xmlns:p="http://schemas.openxmlformats.org/presentationml/2006/main">
+  <p:cSld name="Slide 37">
+    <p:bg>
+      <p:bgPr>
+        <a:solidFill>
+          <a:srgbClr val="0B0F14"/>
+        </a:solidFill>
+      </p:bgPr>
+    </p:bg>
+    <p:spTree>
+      <p:nvGrpSpPr>
+        <p:cNvPr id="1" name=""/>
+        <p:cNvGrpSpPr/>
+        <p:nvPr/>
+      </p:nvGrpSpPr>
+      <p:grpSpPr>
+        <a:xfrm>
+          <a:off x="0" y="0"/>
+          <a:ext cx="0" cy="0"/>
+          <a:chOff x="0" y="0"/>
+          <a:chExt cx="0" cy="0"/>
+        </a:xfrm>
+      </p:grpSpPr>
+      <p:sp>
+        <p:nvSpPr>
+          <p:cNvPr id="2" name="Text 0"/>
+          <p:cNvSpPr/>
+          <p:nvPr/>
+        </p:nvSpPr>
+        <p:spPr>
+          <a:xfrm>
+            <a:off x="548640" y="320040"/>
+            <a:ext cx="11064240" cy="731520"/>
+          </a:xfrm>
+          <a:prstGeom prst="rect">
+            <a:avLst/>
+          </a:prstGeom>
+          <a:noFill/>
+          <a:ln/>
+        </p:spPr>
+        <p:txBody>
+          <a:bodyPr wrap="square" lIns="0" tIns="0" rIns="0" bIns="0" rtlCol="0" anchor="ctr"/>
+          <a:lstStyle/>
+          <a:p>
+            <a:pPr indent="0" marL="0">
+              <a:buNone/>
+            </a:pPr>
+            <a:r>
+              <a:rPr lang="en-US" sz="3000" b="1" dirty="0">
+                <a:solidFill>
+                  <a:srgbClr val="39FF88"/>
+                </a:solidFill>
+                <a:latin typeface="Courier New" pitchFamily="34" charset="0"/>
+                <a:ea typeface="Courier New" pitchFamily="34" charset="-122"/>
+                <a:cs typeface="Courier New" pitchFamily="34" charset="-120"/>
+              </a:rPr>
               <a:t>Appendix: slow start and congestion avoidance</a:t>
             </a:r>
             <a:endParaRPr lang="en-US" sz="3000" dirty="0"/>
@@ -29110,7 +32783,7 @@
                 <a:ea typeface="Courier New" pitchFamily="34" charset="-122"/>
                 <a:cs typeface="Courier New" pitchFamily="34" charset="-120"/>
               </a:rPr>
-              <a:t>4 / 35   Smart-RUDP</a:t>
+              <a:t>4 / 37   Smart-RUDP</a:t>
             </a:r>
             <a:endParaRPr lang="en-US" sz="1000" dirty="0"/>
           </a:p>
@@ -29671,7 +33344,7 @@
                 <a:ea typeface="Courier New" pitchFamily="34" charset="-122"/>
                 <a:cs typeface="Courier New" pitchFamily="34" charset="-120"/>
               </a:rPr>
-              <a:t>5 / 35   Smart-RUDP</a:t>
+              <a:t>5 / 37   Smart-RUDP</a:t>
             </a:r>
             <a:endParaRPr lang="en-US" sz="1000" dirty="0"/>
           </a:p>
@@ -31110,7 +34783,7 @@
                 <a:ea typeface="Courier New" pitchFamily="34" charset="-122"/>
                 <a:cs typeface="Courier New" pitchFamily="34" charset="-120"/>
               </a:rPr>
-              <a:t>6 / 35   Smart-RUDP</a:t>
+              <a:t>6 / 37   Smart-RUDP</a:t>
             </a:r>
             <a:endParaRPr lang="en-US" sz="1000" dirty="0"/>
           </a:p>
@@ -32345,7 +36018,7 @@
                 <a:ea typeface="Courier New" pitchFamily="34" charset="-122"/>
                 <a:cs typeface="Courier New" pitchFamily="34" charset="-120"/>
               </a:rPr>
-              <a:t>7 / 35   Smart-RUDP</a:t>
+              <a:t>7 / 37   Smart-RUDP</a:t>
             </a:r>
             <a:endParaRPr lang="en-US" sz="1000" dirty="0"/>
           </a:p>
@@ -32788,7 +36461,7 @@
                 <a:ea typeface="Courier New" pitchFamily="34" charset="-122"/>
                 <a:cs typeface="Courier New" pitchFamily="34" charset="-120"/>
               </a:rPr>
-              <a:t>8 / 35   Smart-RUDP</a:t>
+              <a:t>8 / 37   Smart-RUDP</a:t>
             </a:r>
             <a:endParaRPr lang="en-US" sz="1000" dirty="0"/>
           </a:p>
@@ -33088,7 +36761,7 @@
                 <a:ea typeface="Courier New" pitchFamily="34" charset="-122"/>
                 <a:cs typeface="Courier New" pitchFamily="34" charset="-120"/>
               </a:rPr>
-              <a:t>9 / 35   Smart-RUDP</a:t>
+              <a:t>9 / 37   Smart-RUDP</a:t>
             </a:r>
             <a:endParaRPr lang="en-US" sz="1000" dirty="0"/>
           </a:p>

--- a/docs/RUDP_Presentation_with_notes.pptx
+++ b/docs/RUDP_Presentation_with_notes.pptx
@@ -3293,17 +3293,22 @@
           </a:p>
           <a:p>
             <a:r>
-              <a:t>Against tuned AIMD the neural agent is 61 percent faster on the lossy path, 70 percent on the 5G-like path and 83 percent on the satellite path. All three are highly significant. On the reordering path it is 33 percent faster but that is not significant.</a:t>
-            </a:r>
-          </a:p>
-          <a:p>
-            <a:r>
-              <a:t>Kernel TCP is still faster than our agent on every path, between one and a half and three times. We are not claiming to beat TCP.</a:t>
-            </a:r>
-          </a:p>
-          <a:p>
-            <a:r>
-              <a:t>Our first three runs were wrong: the netem queue limit counted packets in flight, our baseline was untuned, and TCP sent bigger payloads. We found that, fixed it and re-ran everything.</a:t>
+              <a:t>Against tuned AIMD the neural agent is 71 percent faster on the lossy path, 65 percent on the 5G-like path and 83 percent on the satellite path, all significant. On the reordering path it is 60 percent faster but that is not significant.</a:t>
+            </a:r>
+          </a:p>
+          <a:p>
+            <a:r>
+              <a:t>Kernel TCP is still faster than our agent on every path, by one and a half to one and seven tenths. We are not claiming to beat TCP.</a:t>
+            </a:r>
+          </a:p>
+          <a:p>
+            <a:r>
+              <a:t>We also put a kernel TCP flow and one RUDP flow on the same link. The neural agent takes 24 to 34 percent of it, so it does not starve TCP; tuned AIMD gets only 5 to 17 percent.</a:t>
+            </a:r>
+          </a:p>
+          <a:p>
+            <a:r>
+              <a:t>Our first runs were wrong four times: the netem queue limit counted packets in flight, the baseline was untuned, the payload sizes differed, and finally RUDP was sending 40-byte synthetic packets. We found each one, fixed it, re-ran everything and documented it.</a:t>
             </a:r>
           </a:p>
         </p:txBody>
@@ -3525,7 +3530,7 @@
           </a:p>
           <a:p>
             <a:r>
-              <a:t>The kernel TCP coexistence measurement is written but not yet run.</a:t>
+              <a:t>Kernel TCP coexistence is measured: the neural agent takes 24 to 34 percent of a shared link, so it does not starve TCP, with only three runs per cell.</a:t>
             </a:r>
           </a:p>
         </p:txBody>
@@ -26741,7 +26746,7 @@
                           <a:ea typeface="Calibri" pitchFamily="34" charset="-122"/>
                           <a:cs typeface="Calibri" pitchFamily="34" charset="-120"/>
                         </a:rPr>
-                        <a:t>0.58 s</a:t>
+                        <a:t>0.88 s</a:t>
                       </a:r>
                       <a:endParaRPr lang="en-US" sz="1300" dirty="0">
                         <a:latin typeface="Calibri" charset="0"/>
@@ -26809,7 +26814,7 @@
                           <a:ea typeface="Calibri" pitchFamily="34" charset="-122"/>
                           <a:cs typeface="Calibri" pitchFamily="34" charset="-120"/>
                         </a:rPr>
-                        <a:t>4.68 s</a:t>
+                        <a:t>4.75 s</a:t>
                       </a:r>
                       <a:endParaRPr lang="en-US" sz="1300" dirty="0">
                         <a:latin typeface="Calibri" charset="0"/>
@@ -26877,7 +26882,7 @@
                           <a:ea typeface="Calibri" pitchFamily="34" charset="-122"/>
                           <a:cs typeface="Calibri" pitchFamily="34" charset="-120"/>
                         </a:rPr>
-                        <a:t>1.85 s</a:t>
+                        <a:t>1.35 s</a:t>
                       </a:r>
                       <a:endParaRPr lang="en-US" sz="1300" dirty="0">
                         <a:latin typeface="Calibri" charset="0"/>
@@ -26945,7 +26950,7 @@
                           <a:ea typeface="Calibri" pitchFamily="34" charset="-122"/>
                           <a:cs typeface="Calibri" pitchFamily="34" charset="-120"/>
                         </a:rPr>
-                        <a:t>-61%</a:t>
+                        <a:t>-71%</a:t>
                       </a:r>
                       <a:endParaRPr lang="en-US" sz="1300" dirty="0">
                         <a:latin typeface="Calibri" charset="0"/>
@@ -27083,7 +27088,7 @@
                           <a:ea typeface="Calibri" pitchFamily="34" charset="-122"/>
                           <a:cs typeface="Calibri" pitchFamily="34" charset="-120"/>
                         </a:rPr>
-                        <a:t>0.23 s</a:t>
+                        <a:t>0.28 s</a:t>
                       </a:r>
                       <a:endParaRPr lang="en-US" sz="1300" dirty="0">
                         <a:latin typeface="Calibri" charset="0"/>
@@ -27151,7 +27156,7 @@
                           <a:ea typeface="Calibri" pitchFamily="34" charset="-122"/>
                           <a:cs typeface="Calibri" pitchFamily="34" charset="-120"/>
                         </a:rPr>
-                        <a:t>1.26 s</a:t>
+                        <a:t>1.23 s</a:t>
                       </a:r>
                       <a:endParaRPr lang="en-US" sz="1300" dirty="0">
                         <a:latin typeface="Calibri" charset="0"/>
@@ -27219,7 +27224,7 @@
                           <a:ea typeface="Calibri" pitchFamily="34" charset="-122"/>
                           <a:cs typeface="Calibri" pitchFamily="34" charset="-120"/>
                         </a:rPr>
-                        <a:t>0.38 s</a:t>
+                        <a:t>0.43 s</a:t>
                       </a:r>
                       <a:endParaRPr lang="en-US" sz="1300" dirty="0">
                         <a:latin typeface="Calibri" charset="0"/>
@@ -27287,7 +27292,7 @@
                           <a:ea typeface="Calibri" pitchFamily="34" charset="-122"/>
                           <a:cs typeface="Calibri" pitchFamily="34" charset="-120"/>
                         </a:rPr>
-                        <a:t>-70%</a:t>
+                        <a:t>-65%</a:t>
                       </a:r>
                       <a:endParaRPr lang="en-US" sz="1300" dirty="0">
                         <a:latin typeface="Calibri" charset="0"/>
@@ -27357,7 +27362,7 @@
                           <a:ea typeface="Calibri" pitchFamily="34" charset="-122"/>
                           <a:cs typeface="Calibri" pitchFamily="34" charset="-120"/>
                         </a:rPr>
-                        <a:t>Satellite, 150 ms</a:t>
+                        <a:t>Satellite, 150 ms (3 runs)</a:t>
                       </a:r>
                       <a:endParaRPr lang="en-US" sz="1300" dirty="0">
                         <a:latin typeface="Calibri" charset="0"/>
@@ -27425,7 +27430,7 @@
                           <a:ea typeface="Calibri" pitchFamily="34" charset="-122"/>
                           <a:cs typeface="Calibri" pitchFamily="34" charset="-120"/>
                         </a:rPr>
-                        <a:t>2.10 s</a:t>
+                        <a:t>1.91 s</a:t>
                       </a:r>
                       <a:endParaRPr lang="en-US" sz="1300" dirty="0">
                         <a:latin typeface="Calibri" charset="0"/>
@@ -27493,7 +27498,7 @@
                           <a:ea typeface="Calibri" pitchFamily="34" charset="-122"/>
                           <a:cs typeface="Calibri" pitchFamily="34" charset="-120"/>
                         </a:rPr>
-                        <a:t>18.9 s</a:t>
+                        <a:t>16.7 s</a:t>
                       </a:r>
                       <a:endParaRPr lang="en-US" sz="1300" dirty="0">
                         <a:latin typeface="Calibri" charset="0"/>
@@ -27561,7 +27566,7 @@
                           <a:ea typeface="Calibri" pitchFamily="34" charset="-122"/>
                           <a:cs typeface="Calibri" pitchFamily="34" charset="-120"/>
                         </a:rPr>
-                        <a:t>3.16 s</a:t>
+                        <a:t>2.92 s</a:t>
                       </a:r>
                       <a:endParaRPr lang="en-US" sz="1300" dirty="0">
                         <a:latin typeface="Calibri" charset="0"/>
@@ -27767,7 +27772,7 @@
                           <a:ea typeface="Calibri" pitchFamily="34" charset="-122"/>
                           <a:cs typeface="Calibri" pitchFamily="34" charset="-120"/>
                         </a:rPr>
-                        <a:t>1.03 s</a:t>
+                        <a:t>0.94 s</a:t>
                       </a:r>
                       <a:endParaRPr lang="en-US" sz="1300" dirty="0">
                         <a:latin typeface="Calibri" charset="0"/>
@@ -27835,7 +27840,7 @@
                           <a:ea typeface="Calibri" pitchFamily="34" charset="-122"/>
                           <a:cs typeface="Calibri" pitchFamily="34" charset="-120"/>
                         </a:rPr>
-                        <a:t>2.68 s</a:t>
+                        <a:t>4.06 s</a:t>
                       </a:r>
                       <a:endParaRPr lang="en-US" sz="1300" dirty="0">
                         <a:latin typeface="Calibri" charset="0"/>
@@ -27903,7 +27908,7 @@
                           <a:ea typeface="Calibri" pitchFamily="34" charset="-122"/>
                           <a:cs typeface="Calibri" pitchFamily="34" charset="-120"/>
                         </a:rPr>
-                        <a:t>1.78 s</a:t>
+                        <a:t>1.64 s</a:t>
                       </a:r>
                       <a:endParaRPr lang="en-US" sz="1300" dirty="0">
                         <a:latin typeface="Calibri" charset="0"/>
@@ -27971,7 +27976,7 @@
                           <a:ea typeface="Calibri" pitchFamily="34" charset="-122"/>
                           <a:cs typeface="Calibri" pitchFamily="34" charset="-120"/>
                         </a:rPr>
-                        <a:t>-33% (n.s.)</a:t>
+                        <a:t>-60% (n.s.)</a:t>
                       </a:r>
                       <a:endParaRPr lang="en-US" sz="1300" dirty="0">
                         <a:latin typeface="Calibri" charset="0"/>
@@ -28064,7 +28069,7 @@
                 <a:ea typeface="Calibri" pitchFamily="34" charset="-122"/>
                 <a:cs typeface="Calibri" pitchFamily="34" charset="-120"/>
               </a:rPr>
-              <a:t>Kernel tc/netem on loopback, 5 runs per cell, same 512-byte payloads for TCP, UDP and RUDP</a:t>
+              <a:t>Kernel tc/netem on loopback, 5 runs per cell, 512-byte payloads for TCP, UDP and RUDP</a:t>
             </a:r>
             <a:endParaRPr lang="en-US" sz="1600" dirty="0"/>
           </a:p>
@@ -28085,7 +28090,7 @@
                 <a:ea typeface="Calibri" pitchFamily="34" charset="-122"/>
                 <a:cs typeface="Calibri" pitchFamily="34" charset="-120"/>
               </a:rPr>
-              <a:t>Neural beats tuned AIMD on a real kernel path: 61% to 83% faster, highly significant on three paths</a:t>
+              <a:t>Neural beats tuned AIMD on a real kernel path: 65% to 83% faster, significant on three paths</a:t>
             </a:r>
             <a:endParaRPr lang="en-US" sz="1600" dirty="0"/>
           </a:p>
@@ -28106,7 +28111,7 @@
                 <a:ea typeface="Calibri" pitchFamily="34" charset="-122"/>
                 <a:cs typeface="Calibri" pitchFamily="34" charset="-120"/>
               </a:rPr>
-              <a:t>Kernel TCP is still faster than us everywhere: 1.5x (satellite) to 3.2x (lossy)</a:t>
+              <a:t>Kernel TCP is still faster than us everywhere: 1.5x to 1.7x</a:t>
             </a:r>
             <a:endParaRPr lang="en-US" sz="1600" dirty="0"/>
           </a:p>
@@ -28127,7 +28132,28 @@
                 <a:ea typeface="Calibri" pitchFamily="34" charset="-122"/>
                 <a:cs typeface="Calibri" pitchFamily="34" charset="-120"/>
               </a:rPr>
-              <a:t>Our first three runs were wrong (netem limit counted packets in flight; untuned baseline; unequal payloads). Found, fixed, re-run, documented</a:t>
+              <a:t>Sharing a link with kernel TCP: the neural agent takes only 24% to 34% (AIMD 5% to 17%); it does not starve TCP</a:t>
+            </a:r>
+            <a:endParaRPr lang="en-US" sz="1600" dirty="0"/>
+          </a:p>
+          <a:p>
+            <a:pPr marL="342900" indent="-342900">
+              <a:spcAft>
+                <a:spcPts val="800"/>
+              </a:spcAft>
+              <a:buSzPct val="100000"/>
+              <a:buChar char="•"/>
+            </a:pPr>
+            <a:r>
+              <a:rPr lang="en-US" sz="1600" dirty="0">
+                <a:solidFill>
+                  <a:srgbClr val="E6EDF3"/>
+                </a:solidFill>
+                <a:latin typeface="Calibri" pitchFamily="34" charset="0"/>
+                <a:ea typeface="Calibri" pitchFamily="34" charset="-122"/>
+                <a:cs typeface="Calibri" pitchFamily="34" charset="-120"/>
+              </a:rPr>
+              <a:t>Our first runs were wrong four times (netem limit; untuned baseline; unequal payloads; synthetic 40-byte packets). Found, fixed, re-run, documented</a:t>
             </a:r>
             <a:endParaRPr lang="en-US" sz="1600" dirty="0"/>
           </a:p>
@@ -31861,7 +31887,7 @@
                 <a:ea typeface="Calibri" pitchFamily="34" charset="-122"/>
                 <a:cs typeface="Calibri" pitchFamily="34" charset="-120"/>
               </a:rPr>
-              <a:t>Coexistence with kernel TCP: script written (netem_coexist.sh), measurement still to run</a:t>
+              <a:t>Coexistence with kernel TCP: neural takes 24% to 34% of a shared link, so it does not starve TCP (3 runs per cell)</a:t>
             </a:r>
             <a:endParaRPr lang="en-US" sz="1600" dirty="0"/>
           </a:p>
@@ -32284,7 +32310,7 @@
                 <a:ea typeface="Calibri" pitchFamily="34" charset="-122"/>
                 <a:cs typeface="Calibri" pitchFamily="34" charset="-120"/>
               </a:rPr>
-              <a:t>Limits: kernel TCP is 1.5x to 3.2x faster; no multi-machine test; polite mode is a hand-made rule that costs speed; level with CUBIC under bursty cross traffic; no gain at 10% random loss; BBR-style baseline is faster on the 2% lossy path; coexistence with kernel TCP not yet measured.</a:t>
+              <a:t>Limits: kernel TCP is 1.5x to 1.7x faster; no multi-machine test; polite mode is a hand-made rule that costs speed; level with CUBIC under bursty cross traffic; no gain at 10% random loss; BBR-style baseline is faster on the 2% lossy path; coexistence with kernel TCP measured with only 3 runs per cell.</a:t>
             </a:r>
             <a:endParaRPr lang="en-US" sz="1400" dirty="0"/>
           </a:p>
